--- a/Projects/ARK_RWS/images/Plaatjes_RWS_ARK.pptx
+++ b/Projects/ARK_RWS/images/Plaatjes_RWS_ARK.pptx
@@ -4,9 +4,17 @@
   <p:sldMasterIdLst>
     <p:sldMasterId id="2147483660" r:id="rId1"/>
   </p:sldMasterIdLst>
+  <p:notesMasterIdLst>
+    <p:notesMasterId r:id="rId9"/>
+  </p:notesMasterIdLst>
   <p:sldIdLst>
     <p:sldId id="256" r:id="rId2"/>
     <p:sldId id="257" r:id="rId3"/>
+    <p:sldId id="258" r:id="rId4"/>
+    <p:sldId id="259" r:id="rId5"/>
+    <p:sldId id="260" r:id="rId6"/>
+    <p:sldId id="261" r:id="rId7"/>
+    <p:sldId id="262" r:id="rId8"/>
   </p:sldIdLst>
   <p:sldSz cx="9144000" cy="6858000" type="screen4x3"/>
   <p:notesSz cx="6858000" cy="9144000"/>
@@ -122,6 +130,871 @@
     </p:ext>
   </p:extLst>
 </p:presentation>
+</file>
+
+<file path=ppt/notesMasters/notesMaster1.xml><?xml version="1.0" encoding="utf-8"?>
+<p:notesMaster xmlns:a="http://schemas.openxmlformats.org/drawingml/2006/main" xmlns:r="http://schemas.openxmlformats.org/officeDocument/2006/relationships" xmlns:p="http://schemas.openxmlformats.org/presentationml/2006/main">
+  <p:cSld>
+    <p:bg>
+      <p:bgRef idx="1001">
+        <a:schemeClr val="bg1"/>
+      </p:bgRef>
+    </p:bg>
+    <p:spTree>
+      <p:nvGrpSpPr>
+        <p:cNvPr id="1" name=""/>
+        <p:cNvGrpSpPr/>
+        <p:nvPr/>
+      </p:nvGrpSpPr>
+      <p:grpSpPr>
+        <a:xfrm>
+          <a:off x="0" y="0"/>
+          <a:ext cx="0" cy="0"/>
+          <a:chOff x="0" y="0"/>
+          <a:chExt cx="0" cy="0"/>
+        </a:xfrm>
+      </p:grpSpPr>
+      <p:sp>
+        <p:nvSpPr>
+          <p:cNvPr id="2" name="Header Placeholder 1"/>
+          <p:cNvSpPr>
+            <a:spLocks noGrp="1"/>
+          </p:cNvSpPr>
+          <p:nvPr>
+            <p:ph type="hdr" sz="quarter"/>
+          </p:nvPr>
+        </p:nvSpPr>
+        <p:spPr>
+          <a:xfrm>
+            <a:off x="0" y="0"/>
+            <a:ext cx="2971800" cy="458788"/>
+          </a:xfrm>
+          <a:prstGeom prst="rect">
+            <a:avLst/>
+          </a:prstGeom>
+        </p:spPr>
+        <p:txBody>
+          <a:bodyPr vert="horz" lIns="91440" tIns="45720" rIns="91440" bIns="45720" rtlCol="0"/>
+          <a:lstStyle>
+            <a:lvl1pPr algn="l">
+              <a:defRPr sz="1200"/>
+            </a:lvl1pPr>
+          </a:lstStyle>
+          <a:p>
+            <a:endParaRPr lang="en-US"/>
+          </a:p>
+        </p:txBody>
+      </p:sp>
+      <p:sp>
+        <p:nvSpPr>
+          <p:cNvPr id="3" name="Date Placeholder 2"/>
+          <p:cNvSpPr>
+            <a:spLocks noGrp="1"/>
+          </p:cNvSpPr>
+          <p:nvPr>
+            <p:ph type="dt" idx="1"/>
+          </p:nvPr>
+        </p:nvSpPr>
+        <p:spPr>
+          <a:xfrm>
+            <a:off x="3884613" y="0"/>
+            <a:ext cx="2971800" cy="458788"/>
+          </a:xfrm>
+          <a:prstGeom prst="rect">
+            <a:avLst/>
+          </a:prstGeom>
+        </p:spPr>
+        <p:txBody>
+          <a:bodyPr vert="horz" lIns="91440" tIns="45720" rIns="91440" bIns="45720" rtlCol="0"/>
+          <a:lstStyle>
+            <a:lvl1pPr algn="r">
+              <a:defRPr sz="1200"/>
+            </a:lvl1pPr>
+          </a:lstStyle>
+          <a:p>
+            <a:fld id="{2088E2FE-21FC-6D40-83CF-D5B3B52CADA7}" type="datetimeFigureOut">
+              <a:rPr lang="en-US" smtClean="0"/>
+              <a:t>4/26/26</a:t>
+            </a:fld>
+            <a:endParaRPr lang="en-US"/>
+          </a:p>
+        </p:txBody>
+      </p:sp>
+      <p:sp>
+        <p:nvSpPr>
+          <p:cNvPr id="4" name="Slide Image Placeholder 3"/>
+          <p:cNvSpPr>
+            <a:spLocks noGrp="1" noRot="1" noChangeAspect="1"/>
+          </p:cNvSpPr>
+          <p:nvPr>
+            <p:ph type="sldImg" idx="2"/>
+          </p:nvPr>
+        </p:nvSpPr>
+        <p:spPr>
+          <a:xfrm>
+            <a:off x="1371600" y="1143000"/>
+            <a:ext cx="4114800" cy="3086100"/>
+          </a:xfrm>
+          <a:prstGeom prst="rect">
+            <a:avLst/>
+          </a:prstGeom>
+          <a:noFill/>
+          <a:ln w="12700">
+            <a:solidFill>
+              <a:prstClr val="black"/>
+            </a:solidFill>
+          </a:ln>
+        </p:spPr>
+        <p:txBody>
+          <a:bodyPr vert="horz" lIns="91440" tIns="45720" rIns="91440" bIns="45720" rtlCol="0" anchor="ctr"/>
+          <a:lstStyle/>
+          <a:p>
+            <a:endParaRPr lang="en-US"/>
+          </a:p>
+        </p:txBody>
+      </p:sp>
+      <p:sp>
+        <p:nvSpPr>
+          <p:cNvPr id="5" name="Notes Placeholder 4"/>
+          <p:cNvSpPr>
+            <a:spLocks noGrp="1"/>
+          </p:cNvSpPr>
+          <p:nvPr>
+            <p:ph type="body" sz="quarter" idx="3"/>
+          </p:nvPr>
+        </p:nvSpPr>
+        <p:spPr>
+          <a:xfrm>
+            <a:off x="685800" y="4400550"/>
+            <a:ext cx="5486400" cy="3600450"/>
+          </a:xfrm>
+          <a:prstGeom prst="rect">
+            <a:avLst/>
+          </a:prstGeom>
+        </p:spPr>
+        <p:txBody>
+          <a:bodyPr vert="horz" lIns="91440" tIns="45720" rIns="91440" bIns="45720" rtlCol="0"/>
+          <a:lstStyle/>
+          <a:p>
+            <a:pPr lvl="0"/>
+            <a:r>
+              <a:rPr lang="en-US"/>
+              <a:t>Click to edit Master text styles</a:t>
+            </a:r>
+          </a:p>
+          <a:p>
+            <a:pPr lvl="1"/>
+            <a:r>
+              <a:rPr lang="en-US"/>
+              <a:t>Second level</a:t>
+            </a:r>
+          </a:p>
+          <a:p>
+            <a:pPr lvl="2"/>
+            <a:r>
+              <a:rPr lang="en-US"/>
+              <a:t>Third level</a:t>
+            </a:r>
+          </a:p>
+          <a:p>
+            <a:pPr lvl="3"/>
+            <a:r>
+              <a:rPr lang="en-US"/>
+              <a:t>Fourth level</a:t>
+            </a:r>
+          </a:p>
+          <a:p>
+            <a:pPr lvl="4"/>
+            <a:r>
+              <a:rPr lang="en-US"/>
+              <a:t>Fifth level</a:t>
+            </a:r>
+          </a:p>
+        </p:txBody>
+      </p:sp>
+      <p:sp>
+        <p:nvSpPr>
+          <p:cNvPr id="6" name="Footer Placeholder 5"/>
+          <p:cNvSpPr>
+            <a:spLocks noGrp="1"/>
+          </p:cNvSpPr>
+          <p:nvPr>
+            <p:ph type="ftr" sz="quarter" idx="4"/>
+          </p:nvPr>
+        </p:nvSpPr>
+        <p:spPr>
+          <a:xfrm>
+            <a:off x="0" y="8685213"/>
+            <a:ext cx="2971800" cy="458787"/>
+          </a:xfrm>
+          <a:prstGeom prst="rect">
+            <a:avLst/>
+          </a:prstGeom>
+        </p:spPr>
+        <p:txBody>
+          <a:bodyPr vert="horz" lIns="91440" tIns="45720" rIns="91440" bIns="45720" rtlCol="0" anchor="b"/>
+          <a:lstStyle>
+            <a:lvl1pPr algn="l">
+              <a:defRPr sz="1200"/>
+            </a:lvl1pPr>
+          </a:lstStyle>
+          <a:p>
+            <a:endParaRPr lang="en-US"/>
+          </a:p>
+        </p:txBody>
+      </p:sp>
+      <p:sp>
+        <p:nvSpPr>
+          <p:cNvPr id="7" name="Slide Number Placeholder 6"/>
+          <p:cNvSpPr>
+            <a:spLocks noGrp="1"/>
+          </p:cNvSpPr>
+          <p:nvPr>
+            <p:ph type="sldNum" sz="quarter" idx="5"/>
+          </p:nvPr>
+        </p:nvSpPr>
+        <p:spPr>
+          <a:xfrm>
+            <a:off x="3884613" y="8685213"/>
+            <a:ext cx="2971800" cy="458787"/>
+          </a:xfrm>
+          <a:prstGeom prst="rect">
+            <a:avLst/>
+          </a:prstGeom>
+        </p:spPr>
+        <p:txBody>
+          <a:bodyPr vert="horz" lIns="91440" tIns="45720" rIns="91440" bIns="45720" rtlCol="0" anchor="b"/>
+          <a:lstStyle>
+            <a:lvl1pPr algn="r">
+              <a:defRPr sz="1200"/>
+            </a:lvl1pPr>
+          </a:lstStyle>
+          <a:p>
+            <a:fld id="{5DFF6948-008A-8C42-9496-ED1ACA90CE0D}" type="slidenum">
+              <a:rPr lang="en-US" smtClean="0"/>
+              <a:t>‹#›</a:t>
+            </a:fld>
+            <a:endParaRPr lang="en-US"/>
+          </a:p>
+        </p:txBody>
+      </p:sp>
+    </p:spTree>
+    <p:extLst>
+      <p:ext uri="{BB962C8B-B14F-4D97-AF65-F5344CB8AC3E}">
+        <p14:creationId xmlns:p14="http://schemas.microsoft.com/office/powerpoint/2010/main" val="3097059854"/>
+      </p:ext>
+    </p:extLst>
+  </p:cSld>
+  <p:clrMap bg1="lt1" tx1="dk1" bg2="lt2" tx2="dk2" accent1="accent1" accent2="accent2" accent3="accent3" accent4="accent4" accent5="accent5" accent6="accent6" hlink="hlink" folHlink="folHlink"/>
+  <p:notesStyle>
+    <a:lvl1pPr marL="0" algn="l" defTabSz="914400" rtl="0" eaLnBrk="1" latinLnBrk="0" hangingPunct="1">
+      <a:defRPr sz="1200" kern="1200">
+        <a:solidFill>
+          <a:schemeClr val="tx1"/>
+        </a:solidFill>
+        <a:latin typeface="+mn-lt"/>
+        <a:ea typeface="+mn-ea"/>
+        <a:cs typeface="+mn-cs"/>
+      </a:defRPr>
+    </a:lvl1pPr>
+    <a:lvl2pPr marL="457200" algn="l" defTabSz="914400" rtl="0" eaLnBrk="1" latinLnBrk="0" hangingPunct="1">
+      <a:defRPr sz="1200" kern="1200">
+        <a:solidFill>
+          <a:schemeClr val="tx1"/>
+        </a:solidFill>
+        <a:latin typeface="+mn-lt"/>
+        <a:ea typeface="+mn-ea"/>
+        <a:cs typeface="+mn-cs"/>
+      </a:defRPr>
+    </a:lvl2pPr>
+    <a:lvl3pPr marL="914400" algn="l" defTabSz="914400" rtl="0" eaLnBrk="1" latinLnBrk="0" hangingPunct="1">
+      <a:defRPr sz="1200" kern="1200">
+        <a:solidFill>
+          <a:schemeClr val="tx1"/>
+        </a:solidFill>
+        <a:latin typeface="+mn-lt"/>
+        <a:ea typeface="+mn-ea"/>
+        <a:cs typeface="+mn-cs"/>
+      </a:defRPr>
+    </a:lvl3pPr>
+    <a:lvl4pPr marL="1371600" algn="l" defTabSz="914400" rtl="0" eaLnBrk="1" latinLnBrk="0" hangingPunct="1">
+      <a:defRPr sz="1200" kern="1200">
+        <a:solidFill>
+          <a:schemeClr val="tx1"/>
+        </a:solidFill>
+        <a:latin typeface="+mn-lt"/>
+        <a:ea typeface="+mn-ea"/>
+        <a:cs typeface="+mn-cs"/>
+      </a:defRPr>
+    </a:lvl4pPr>
+    <a:lvl5pPr marL="1828800" algn="l" defTabSz="914400" rtl="0" eaLnBrk="1" latinLnBrk="0" hangingPunct="1">
+      <a:defRPr sz="1200" kern="1200">
+        <a:solidFill>
+          <a:schemeClr val="tx1"/>
+        </a:solidFill>
+        <a:latin typeface="+mn-lt"/>
+        <a:ea typeface="+mn-ea"/>
+        <a:cs typeface="+mn-cs"/>
+      </a:defRPr>
+    </a:lvl5pPr>
+    <a:lvl6pPr marL="2286000" algn="l" defTabSz="914400" rtl="0" eaLnBrk="1" latinLnBrk="0" hangingPunct="1">
+      <a:defRPr sz="1200" kern="1200">
+        <a:solidFill>
+          <a:schemeClr val="tx1"/>
+        </a:solidFill>
+        <a:latin typeface="+mn-lt"/>
+        <a:ea typeface="+mn-ea"/>
+        <a:cs typeface="+mn-cs"/>
+      </a:defRPr>
+    </a:lvl6pPr>
+    <a:lvl7pPr marL="2743200" algn="l" defTabSz="914400" rtl="0" eaLnBrk="1" latinLnBrk="0" hangingPunct="1">
+      <a:defRPr sz="1200" kern="1200">
+        <a:solidFill>
+          <a:schemeClr val="tx1"/>
+        </a:solidFill>
+        <a:latin typeface="+mn-lt"/>
+        <a:ea typeface="+mn-ea"/>
+        <a:cs typeface="+mn-cs"/>
+      </a:defRPr>
+    </a:lvl7pPr>
+    <a:lvl8pPr marL="3200400" algn="l" defTabSz="914400" rtl="0" eaLnBrk="1" latinLnBrk="0" hangingPunct="1">
+      <a:defRPr sz="1200" kern="1200">
+        <a:solidFill>
+          <a:schemeClr val="tx1"/>
+        </a:solidFill>
+        <a:latin typeface="+mn-lt"/>
+        <a:ea typeface="+mn-ea"/>
+        <a:cs typeface="+mn-cs"/>
+      </a:defRPr>
+    </a:lvl8pPr>
+    <a:lvl9pPr marL="3657600" algn="l" defTabSz="914400" rtl="0" eaLnBrk="1" latinLnBrk="0" hangingPunct="1">
+      <a:defRPr sz="1200" kern="1200">
+        <a:solidFill>
+          <a:schemeClr val="tx1"/>
+        </a:solidFill>
+        <a:latin typeface="+mn-lt"/>
+        <a:ea typeface="+mn-ea"/>
+        <a:cs typeface="+mn-cs"/>
+      </a:defRPr>
+    </a:lvl9pPr>
+  </p:notesStyle>
+</p:notesMaster>
+</file>
+
+<file path=ppt/notesSlides/notesSlide1.xml><?xml version="1.0" encoding="utf-8"?>
+<p:notes xmlns:a="http://schemas.openxmlformats.org/drawingml/2006/main" xmlns:r="http://schemas.openxmlformats.org/officeDocument/2006/relationships" xmlns:p="http://schemas.openxmlformats.org/presentationml/2006/main">
+  <p:cSld>
+    <p:spTree>
+      <p:nvGrpSpPr>
+        <p:cNvPr id="1" name=""/>
+        <p:cNvGrpSpPr/>
+        <p:nvPr/>
+      </p:nvGrpSpPr>
+      <p:grpSpPr>
+        <a:xfrm>
+          <a:off x="0" y="0"/>
+          <a:ext cx="0" cy="0"/>
+          <a:chOff x="0" y="0"/>
+          <a:chExt cx="0" cy="0"/>
+        </a:xfrm>
+      </p:grpSpPr>
+      <p:sp>
+        <p:nvSpPr>
+          <p:cNvPr id="2" name="Slide Image Placeholder 1"/>
+          <p:cNvSpPr>
+            <a:spLocks noGrp="1" noRot="1" noChangeAspect="1"/>
+          </p:cNvSpPr>
+          <p:nvPr>
+            <p:ph type="sldImg"/>
+          </p:nvPr>
+        </p:nvSpPr>
+        <p:spPr/>
+      </p:sp>
+      <p:sp>
+        <p:nvSpPr>
+          <p:cNvPr id="3" name="Notes Placeholder 2"/>
+          <p:cNvSpPr>
+            <a:spLocks noGrp="1"/>
+          </p:cNvSpPr>
+          <p:nvPr>
+            <p:ph type="body" idx="1"/>
+          </p:nvPr>
+        </p:nvSpPr>
+        <p:spPr/>
+        <p:txBody>
+          <a:bodyPr/>
+          <a:lstStyle/>
+          <a:p>
+            <a:endParaRPr lang="en-US" dirty="0"/>
+          </a:p>
+        </p:txBody>
+      </p:sp>
+      <p:sp>
+        <p:nvSpPr>
+          <p:cNvPr id="4" name="Slide Number Placeholder 3"/>
+          <p:cNvSpPr>
+            <a:spLocks noGrp="1"/>
+          </p:cNvSpPr>
+          <p:nvPr>
+            <p:ph type="sldNum" sz="quarter" idx="5"/>
+          </p:nvPr>
+        </p:nvSpPr>
+        <p:spPr/>
+        <p:txBody>
+          <a:bodyPr/>
+          <a:lstStyle/>
+          <a:p>
+            <a:fld id="{5DFF6948-008A-8C42-9496-ED1ACA90CE0D}" type="slidenum">
+              <a:rPr lang="en-US" smtClean="0"/>
+              <a:t>3</a:t>
+            </a:fld>
+            <a:endParaRPr lang="en-US"/>
+          </a:p>
+        </p:txBody>
+      </p:sp>
+    </p:spTree>
+    <p:extLst>
+      <p:ext uri="{BB962C8B-B14F-4D97-AF65-F5344CB8AC3E}">
+        <p14:creationId xmlns:p14="http://schemas.microsoft.com/office/powerpoint/2010/main" val="3507830111"/>
+      </p:ext>
+    </p:extLst>
+  </p:cSld>
+  <p:clrMapOvr>
+    <a:masterClrMapping/>
+  </p:clrMapOvr>
+</p:notes>
+</file>
+
+<file path=ppt/notesSlides/notesSlide2.xml><?xml version="1.0" encoding="utf-8"?>
+<p:notes xmlns:a="http://schemas.openxmlformats.org/drawingml/2006/main" xmlns:r="http://schemas.openxmlformats.org/officeDocument/2006/relationships" xmlns:p="http://schemas.openxmlformats.org/presentationml/2006/main">
+  <p:cSld>
+    <p:spTree>
+      <p:nvGrpSpPr>
+        <p:cNvPr id="1" name="">
+          <a:extLst>
+            <a:ext uri="{FF2B5EF4-FFF2-40B4-BE49-F238E27FC236}">
+              <a16:creationId xmlns:a16="http://schemas.microsoft.com/office/drawing/2014/main" id="{BB242A95-B408-9E2D-C774-8B25EA812792}"/>
+            </a:ext>
+          </a:extLst>
+        </p:cNvPr>
+        <p:cNvGrpSpPr/>
+        <p:nvPr/>
+      </p:nvGrpSpPr>
+      <p:grpSpPr>
+        <a:xfrm>
+          <a:off x="0" y="0"/>
+          <a:ext cx="0" cy="0"/>
+          <a:chOff x="0" y="0"/>
+          <a:chExt cx="0" cy="0"/>
+        </a:xfrm>
+      </p:grpSpPr>
+      <p:sp>
+        <p:nvSpPr>
+          <p:cNvPr id="2" name="Slide Image Placeholder 1">
+            <a:extLst>
+              <a:ext uri="{FF2B5EF4-FFF2-40B4-BE49-F238E27FC236}">
+                <a16:creationId xmlns:a16="http://schemas.microsoft.com/office/drawing/2014/main" id="{93EE172B-2953-AE92-9BE5-EC79A2298709}"/>
+              </a:ext>
+            </a:extLst>
+          </p:cNvPr>
+          <p:cNvSpPr>
+            <a:spLocks noGrp="1" noRot="1" noChangeAspect="1"/>
+          </p:cNvSpPr>
+          <p:nvPr>
+            <p:ph type="sldImg"/>
+          </p:nvPr>
+        </p:nvSpPr>
+        <p:spPr/>
+      </p:sp>
+      <p:sp>
+        <p:nvSpPr>
+          <p:cNvPr id="3" name="Notes Placeholder 2">
+            <a:extLst>
+              <a:ext uri="{FF2B5EF4-FFF2-40B4-BE49-F238E27FC236}">
+                <a16:creationId xmlns:a16="http://schemas.microsoft.com/office/drawing/2014/main" id="{6D3A55B8-97AB-D575-472C-4C0E9AAE0F99}"/>
+              </a:ext>
+            </a:extLst>
+          </p:cNvPr>
+          <p:cNvSpPr>
+            <a:spLocks noGrp="1"/>
+          </p:cNvSpPr>
+          <p:nvPr>
+            <p:ph type="body" idx="1"/>
+          </p:nvPr>
+        </p:nvSpPr>
+        <p:spPr/>
+        <p:txBody>
+          <a:bodyPr/>
+          <a:lstStyle/>
+          <a:p>
+            <a:endParaRPr lang="en-US" dirty="0"/>
+          </a:p>
+        </p:txBody>
+      </p:sp>
+      <p:sp>
+        <p:nvSpPr>
+          <p:cNvPr id="4" name="Slide Number Placeholder 3">
+            <a:extLst>
+              <a:ext uri="{FF2B5EF4-FFF2-40B4-BE49-F238E27FC236}">
+                <a16:creationId xmlns:a16="http://schemas.microsoft.com/office/drawing/2014/main" id="{253590CB-A363-031E-D367-7A1C062CF3B6}"/>
+              </a:ext>
+            </a:extLst>
+          </p:cNvPr>
+          <p:cNvSpPr>
+            <a:spLocks noGrp="1"/>
+          </p:cNvSpPr>
+          <p:nvPr>
+            <p:ph type="sldNum" sz="quarter" idx="5"/>
+          </p:nvPr>
+        </p:nvSpPr>
+        <p:spPr/>
+        <p:txBody>
+          <a:bodyPr/>
+          <a:lstStyle/>
+          <a:p>
+            <a:fld id="{5DFF6948-008A-8C42-9496-ED1ACA90CE0D}" type="slidenum">
+              <a:rPr lang="en-US" smtClean="0"/>
+              <a:t>4</a:t>
+            </a:fld>
+            <a:endParaRPr lang="en-US"/>
+          </a:p>
+        </p:txBody>
+      </p:sp>
+    </p:spTree>
+    <p:extLst>
+      <p:ext uri="{BB962C8B-B14F-4D97-AF65-F5344CB8AC3E}">
+        <p14:creationId xmlns:p14="http://schemas.microsoft.com/office/powerpoint/2010/main" val="1570945413"/>
+      </p:ext>
+    </p:extLst>
+  </p:cSld>
+  <p:clrMapOvr>
+    <a:masterClrMapping/>
+  </p:clrMapOvr>
+</p:notes>
+</file>
+
+<file path=ppt/notesSlides/notesSlide3.xml><?xml version="1.0" encoding="utf-8"?>
+<p:notes xmlns:a="http://schemas.openxmlformats.org/drawingml/2006/main" xmlns:r="http://schemas.openxmlformats.org/officeDocument/2006/relationships" xmlns:p="http://schemas.openxmlformats.org/presentationml/2006/main">
+  <p:cSld>
+    <p:spTree>
+      <p:nvGrpSpPr>
+        <p:cNvPr id="1" name="">
+          <a:extLst>
+            <a:ext uri="{FF2B5EF4-FFF2-40B4-BE49-F238E27FC236}">
+              <a16:creationId xmlns:a16="http://schemas.microsoft.com/office/drawing/2014/main" id="{66A9D988-02FC-C60A-DD09-9ABD40CDCB5F}"/>
+            </a:ext>
+          </a:extLst>
+        </p:cNvPr>
+        <p:cNvGrpSpPr/>
+        <p:nvPr/>
+      </p:nvGrpSpPr>
+      <p:grpSpPr>
+        <a:xfrm>
+          <a:off x="0" y="0"/>
+          <a:ext cx="0" cy="0"/>
+          <a:chOff x="0" y="0"/>
+          <a:chExt cx="0" cy="0"/>
+        </a:xfrm>
+      </p:grpSpPr>
+      <p:sp>
+        <p:nvSpPr>
+          <p:cNvPr id="2" name="Slide Image Placeholder 1">
+            <a:extLst>
+              <a:ext uri="{FF2B5EF4-FFF2-40B4-BE49-F238E27FC236}">
+                <a16:creationId xmlns:a16="http://schemas.microsoft.com/office/drawing/2014/main" id="{0B1C85ED-1BBD-6E33-1A2C-348E60023A87}"/>
+              </a:ext>
+            </a:extLst>
+          </p:cNvPr>
+          <p:cNvSpPr>
+            <a:spLocks noGrp="1" noRot="1" noChangeAspect="1"/>
+          </p:cNvSpPr>
+          <p:nvPr>
+            <p:ph type="sldImg"/>
+          </p:nvPr>
+        </p:nvSpPr>
+        <p:spPr/>
+      </p:sp>
+      <p:sp>
+        <p:nvSpPr>
+          <p:cNvPr id="3" name="Notes Placeholder 2">
+            <a:extLst>
+              <a:ext uri="{FF2B5EF4-FFF2-40B4-BE49-F238E27FC236}">
+                <a16:creationId xmlns:a16="http://schemas.microsoft.com/office/drawing/2014/main" id="{E350B601-75EC-ADDA-2FC5-D24BA1038878}"/>
+              </a:ext>
+            </a:extLst>
+          </p:cNvPr>
+          <p:cNvSpPr>
+            <a:spLocks noGrp="1"/>
+          </p:cNvSpPr>
+          <p:nvPr>
+            <p:ph type="body" idx="1"/>
+          </p:nvPr>
+        </p:nvSpPr>
+        <p:spPr/>
+        <p:txBody>
+          <a:bodyPr/>
+          <a:lstStyle/>
+          <a:p>
+            <a:endParaRPr lang="en-US" dirty="0"/>
+          </a:p>
+        </p:txBody>
+      </p:sp>
+      <p:sp>
+        <p:nvSpPr>
+          <p:cNvPr id="4" name="Slide Number Placeholder 3">
+            <a:extLst>
+              <a:ext uri="{FF2B5EF4-FFF2-40B4-BE49-F238E27FC236}">
+                <a16:creationId xmlns:a16="http://schemas.microsoft.com/office/drawing/2014/main" id="{AF526285-D60C-E486-E031-8AA7EF7B1F93}"/>
+              </a:ext>
+            </a:extLst>
+          </p:cNvPr>
+          <p:cNvSpPr>
+            <a:spLocks noGrp="1"/>
+          </p:cNvSpPr>
+          <p:nvPr>
+            <p:ph type="sldNum" sz="quarter" idx="5"/>
+          </p:nvPr>
+        </p:nvSpPr>
+        <p:spPr/>
+        <p:txBody>
+          <a:bodyPr/>
+          <a:lstStyle/>
+          <a:p>
+            <a:fld id="{5DFF6948-008A-8C42-9496-ED1ACA90CE0D}" type="slidenum">
+              <a:rPr lang="en-US" smtClean="0"/>
+              <a:t>5</a:t>
+            </a:fld>
+            <a:endParaRPr lang="en-US"/>
+          </a:p>
+        </p:txBody>
+      </p:sp>
+    </p:spTree>
+    <p:extLst>
+      <p:ext uri="{BB962C8B-B14F-4D97-AF65-F5344CB8AC3E}">
+        <p14:creationId xmlns:p14="http://schemas.microsoft.com/office/powerpoint/2010/main" val="3780325508"/>
+      </p:ext>
+    </p:extLst>
+  </p:cSld>
+  <p:clrMapOvr>
+    <a:masterClrMapping/>
+  </p:clrMapOvr>
+</p:notes>
+</file>
+
+<file path=ppt/notesSlides/notesSlide4.xml><?xml version="1.0" encoding="utf-8"?>
+<p:notes xmlns:a="http://schemas.openxmlformats.org/drawingml/2006/main" xmlns:r="http://schemas.openxmlformats.org/officeDocument/2006/relationships" xmlns:p="http://schemas.openxmlformats.org/presentationml/2006/main">
+  <p:cSld>
+    <p:spTree>
+      <p:nvGrpSpPr>
+        <p:cNvPr id="1" name="">
+          <a:extLst>
+            <a:ext uri="{FF2B5EF4-FFF2-40B4-BE49-F238E27FC236}">
+              <a16:creationId xmlns:a16="http://schemas.microsoft.com/office/drawing/2014/main" id="{FAF66146-9CC3-FD1F-D053-674626A89DEA}"/>
+            </a:ext>
+          </a:extLst>
+        </p:cNvPr>
+        <p:cNvGrpSpPr/>
+        <p:nvPr/>
+      </p:nvGrpSpPr>
+      <p:grpSpPr>
+        <a:xfrm>
+          <a:off x="0" y="0"/>
+          <a:ext cx="0" cy="0"/>
+          <a:chOff x="0" y="0"/>
+          <a:chExt cx="0" cy="0"/>
+        </a:xfrm>
+      </p:grpSpPr>
+      <p:sp>
+        <p:nvSpPr>
+          <p:cNvPr id="2" name="Slide Image Placeholder 1">
+            <a:extLst>
+              <a:ext uri="{FF2B5EF4-FFF2-40B4-BE49-F238E27FC236}">
+                <a16:creationId xmlns:a16="http://schemas.microsoft.com/office/drawing/2014/main" id="{6C47AB55-1A03-088B-1F51-4774E40BCAA2}"/>
+              </a:ext>
+            </a:extLst>
+          </p:cNvPr>
+          <p:cNvSpPr>
+            <a:spLocks noGrp="1" noRot="1" noChangeAspect="1"/>
+          </p:cNvSpPr>
+          <p:nvPr>
+            <p:ph type="sldImg"/>
+          </p:nvPr>
+        </p:nvSpPr>
+        <p:spPr/>
+      </p:sp>
+      <p:sp>
+        <p:nvSpPr>
+          <p:cNvPr id="3" name="Notes Placeholder 2">
+            <a:extLst>
+              <a:ext uri="{FF2B5EF4-FFF2-40B4-BE49-F238E27FC236}">
+                <a16:creationId xmlns:a16="http://schemas.microsoft.com/office/drawing/2014/main" id="{64E3304B-D4A4-DD71-5266-9654A8D881F7}"/>
+              </a:ext>
+            </a:extLst>
+          </p:cNvPr>
+          <p:cNvSpPr>
+            <a:spLocks noGrp="1"/>
+          </p:cNvSpPr>
+          <p:nvPr>
+            <p:ph type="body" idx="1"/>
+          </p:nvPr>
+        </p:nvSpPr>
+        <p:spPr/>
+        <p:txBody>
+          <a:bodyPr/>
+          <a:lstStyle/>
+          <a:p>
+            <a:endParaRPr lang="en-US" dirty="0"/>
+          </a:p>
+        </p:txBody>
+      </p:sp>
+      <p:sp>
+        <p:nvSpPr>
+          <p:cNvPr id="4" name="Slide Number Placeholder 3">
+            <a:extLst>
+              <a:ext uri="{FF2B5EF4-FFF2-40B4-BE49-F238E27FC236}">
+                <a16:creationId xmlns:a16="http://schemas.microsoft.com/office/drawing/2014/main" id="{996064F6-1D08-EEDB-89FB-5EE2811EA0D7}"/>
+              </a:ext>
+            </a:extLst>
+          </p:cNvPr>
+          <p:cNvSpPr>
+            <a:spLocks noGrp="1"/>
+          </p:cNvSpPr>
+          <p:nvPr>
+            <p:ph type="sldNum" sz="quarter" idx="5"/>
+          </p:nvPr>
+        </p:nvSpPr>
+        <p:spPr/>
+        <p:txBody>
+          <a:bodyPr/>
+          <a:lstStyle/>
+          <a:p>
+            <a:fld id="{5DFF6948-008A-8C42-9496-ED1ACA90CE0D}" type="slidenum">
+              <a:rPr lang="en-US" smtClean="0"/>
+              <a:t>6</a:t>
+            </a:fld>
+            <a:endParaRPr lang="en-US"/>
+          </a:p>
+        </p:txBody>
+      </p:sp>
+    </p:spTree>
+    <p:extLst>
+      <p:ext uri="{BB962C8B-B14F-4D97-AF65-F5344CB8AC3E}">
+        <p14:creationId xmlns:p14="http://schemas.microsoft.com/office/powerpoint/2010/main" val="461127878"/>
+      </p:ext>
+    </p:extLst>
+  </p:cSld>
+  <p:clrMapOvr>
+    <a:masterClrMapping/>
+  </p:clrMapOvr>
+</p:notes>
+</file>
+
+<file path=ppt/notesSlides/notesSlide5.xml><?xml version="1.0" encoding="utf-8"?>
+<p:notes xmlns:a="http://schemas.openxmlformats.org/drawingml/2006/main" xmlns:r="http://schemas.openxmlformats.org/officeDocument/2006/relationships" xmlns:p="http://schemas.openxmlformats.org/presentationml/2006/main">
+  <p:cSld>
+    <p:spTree>
+      <p:nvGrpSpPr>
+        <p:cNvPr id="1" name="">
+          <a:extLst>
+            <a:ext uri="{FF2B5EF4-FFF2-40B4-BE49-F238E27FC236}">
+              <a16:creationId xmlns:a16="http://schemas.microsoft.com/office/drawing/2014/main" id="{34B6593E-F302-30A3-833D-B67803FEBD73}"/>
+            </a:ext>
+          </a:extLst>
+        </p:cNvPr>
+        <p:cNvGrpSpPr/>
+        <p:nvPr/>
+      </p:nvGrpSpPr>
+      <p:grpSpPr>
+        <a:xfrm>
+          <a:off x="0" y="0"/>
+          <a:ext cx="0" cy="0"/>
+          <a:chOff x="0" y="0"/>
+          <a:chExt cx="0" cy="0"/>
+        </a:xfrm>
+      </p:grpSpPr>
+      <p:sp>
+        <p:nvSpPr>
+          <p:cNvPr id="2" name="Slide Image Placeholder 1">
+            <a:extLst>
+              <a:ext uri="{FF2B5EF4-FFF2-40B4-BE49-F238E27FC236}">
+                <a16:creationId xmlns:a16="http://schemas.microsoft.com/office/drawing/2014/main" id="{F19202D6-4D02-064B-89C8-905BE7B82375}"/>
+              </a:ext>
+            </a:extLst>
+          </p:cNvPr>
+          <p:cNvSpPr>
+            <a:spLocks noGrp="1" noRot="1" noChangeAspect="1"/>
+          </p:cNvSpPr>
+          <p:nvPr>
+            <p:ph type="sldImg"/>
+          </p:nvPr>
+        </p:nvSpPr>
+        <p:spPr/>
+      </p:sp>
+      <p:sp>
+        <p:nvSpPr>
+          <p:cNvPr id="3" name="Notes Placeholder 2">
+            <a:extLst>
+              <a:ext uri="{FF2B5EF4-FFF2-40B4-BE49-F238E27FC236}">
+                <a16:creationId xmlns:a16="http://schemas.microsoft.com/office/drawing/2014/main" id="{CD969B18-9FDC-694D-DBD6-9696968C2984}"/>
+              </a:ext>
+            </a:extLst>
+          </p:cNvPr>
+          <p:cNvSpPr>
+            <a:spLocks noGrp="1"/>
+          </p:cNvSpPr>
+          <p:nvPr>
+            <p:ph type="body" idx="1"/>
+          </p:nvPr>
+        </p:nvSpPr>
+        <p:spPr/>
+        <p:txBody>
+          <a:bodyPr/>
+          <a:lstStyle/>
+          <a:p>
+            <a:endParaRPr lang="en-US" dirty="0"/>
+          </a:p>
+        </p:txBody>
+      </p:sp>
+      <p:sp>
+        <p:nvSpPr>
+          <p:cNvPr id="4" name="Slide Number Placeholder 3">
+            <a:extLst>
+              <a:ext uri="{FF2B5EF4-FFF2-40B4-BE49-F238E27FC236}">
+                <a16:creationId xmlns:a16="http://schemas.microsoft.com/office/drawing/2014/main" id="{91208747-1B1F-4134-45A9-2F0C59EC68CF}"/>
+              </a:ext>
+            </a:extLst>
+          </p:cNvPr>
+          <p:cNvSpPr>
+            <a:spLocks noGrp="1"/>
+          </p:cNvSpPr>
+          <p:nvPr>
+            <p:ph type="sldNum" sz="quarter" idx="5"/>
+          </p:nvPr>
+        </p:nvSpPr>
+        <p:spPr/>
+        <p:txBody>
+          <a:bodyPr/>
+          <a:lstStyle/>
+          <a:p>
+            <a:fld id="{5DFF6948-008A-8C42-9496-ED1ACA90CE0D}" type="slidenum">
+              <a:rPr lang="en-US" smtClean="0"/>
+              <a:t>7</a:t>
+            </a:fld>
+            <a:endParaRPr lang="en-US"/>
+          </a:p>
+        </p:txBody>
+      </p:sp>
+    </p:spTree>
+    <p:extLst>
+      <p:ext uri="{BB962C8B-B14F-4D97-AF65-F5344CB8AC3E}">
+        <p14:creationId xmlns:p14="http://schemas.microsoft.com/office/powerpoint/2010/main" val="3616245349"/>
+      </p:ext>
+    </p:extLst>
+  </p:cSld>
+  <p:clrMapOvr>
+    <a:masterClrMapping/>
+  </p:clrMapOvr>
+</p:notes>
 </file>
 
 <file path=ppt/slideLayouts/slideLayout1.xml><?xml version="1.0" encoding="utf-8"?>
@@ -255,7 +1128,7 @@
           <a:p>
             <a:fld id="{A6AF225C-868F-9540-9455-9F5B5C0F2A40}" type="datetimeFigureOut">
               <a:rPr lang="en-US" smtClean="0"/>
-              <a:t>4/18/26</a:t>
+              <a:t>4/26/26</a:t>
             </a:fld>
             <a:endParaRPr lang="en-US"/>
           </a:p>
@@ -425,7 +1298,7 @@
           <a:p>
             <a:fld id="{A6AF225C-868F-9540-9455-9F5B5C0F2A40}" type="datetimeFigureOut">
               <a:rPr lang="en-US" smtClean="0"/>
-              <a:t>4/18/26</a:t>
+              <a:t>4/26/26</a:t>
             </a:fld>
             <a:endParaRPr lang="en-US"/>
           </a:p>
@@ -605,7 +1478,7 @@
           <a:p>
             <a:fld id="{A6AF225C-868F-9540-9455-9F5B5C0F2A40}" type="datetimeFigureOut">
               <a:rPr lang="en-US" smtClean="0"/>
-              <a:t>4/18/26</a:t>
+              <a:t>4/26/26</a:t>
             </a:fld>
             <a:endParaRPr lang="en-US"/>
           </a:p>
@@ -775,7 +1648,7 @@
           <a:p>
             <a:fld id="{A6AF225C-868F-9540-9455-9F5B5C0F2A40}" type="datetimeFigureOut">
               <a:rPr lang="en-US" smtClean="0"/>
-              <a:t>4/18/26</a:t>
+              <a:t>4/26/26</a:t>
             </a:fld>
             <a:endParaRPr lang="en-US"/>
           </a:p>
@@ -1021,7 +1894,7 @@
           <a:p>
             <a:fld id="{A6AF225C-868F-9540-9455-9F5B5C0F2A40}" type="datetimeFigureOut">
               <a:rPr lang="en-US" smtClean="0"/>
-              <a:t>4/18/26</a:t>
+              <a:t>4/26/26</a:t>
             </a:fld>
             <a:endParaRPr lang="en-US"/>
           </a:p>
@@ -1253,7 +2126,7 @@
           <a:p>
             <a:fld id="{A6AF225C-868F-9540-9455-9F5B5C0F2A40}" type="datetimeFigureOut">
               <a:rPr lang="en-US" smtClean="0"/>
-              <a:t>4/18/26</a:t>
+              <a:t>4/26/26</a:t>
             </a:fld>
             <a:endParaRPr lang="en-US"/>
           </a:p>
@@ -1620,7 +2493,7 @@
           <a:p>
             <a:fld id="{A6AF225C-868F-9540-9455-9F5B5C0F2A40}" type="datetimeFigureOut">
               <a:rPr lang="en-US" smtClean="0"/>
-              <a:t>4/18/26</a:t>
+              <a:t>4/26/26</a:t>
             </a:fld>
             <a:endParaRPr lang="en-US"/>
           </a:p>
@@ -1738,7 +2611,7 @@
           <a:p>
             <a:fld id="{A6AF225C-868F-9540-9455-9F5B5C0F2A40}" type="datetimeFigureOut">
               <a:rPr lang="en-US" smtClean="0"/>
-              <a:t>4/18/26</a:t>
+              <a:t>4/26/26</a:t>
             </a:fld>
             <a:endParaRPr lang="en-US"/>
           </a:p>
@@ -1833,7 +2706,7 @@
           <a:p>
             <a:fld id="{A6AF225C-868F-9540-9455-9F5B5C0F2A40}" type="datetimeFigureOut">
               <a:rPr lang="en-US" smtClean="0"/>
-              <a:t>4/18/26</a:t>
+              <a:t>4/26/26</a:t>
             </a:fld>
             <a:endParaRPr lang="en-US"/>
           </a:p>
@@ -2110,7 +2983,7 @@
           <a:p>
             <a:fld id="{A6AF225C-868F-9540-9455-9F5B5C0F2A40}" type="datetimeFigureOut">
               <a:rPr lang="en-US" smtClean="0"/>
-              <a:t>4/18/26</a:t>
+              <a:t>4/26/26</a:t>
             </a:fld>
             <a:endParaRPr lang="en-US"/>
           </a:p>
@@ -2367,7 +3240,7 @@
           <a:p>
             <a:fld id="{A6AF225C-868F-9540-9455-9F5B5C0F2A40}" type="datetimeFigureOut">
               <a:rPr lang="en-US" smtClean="0"/>
-              <a:t>4/18/26</a:t>
+              <a:t>4/26/26</a:t>
             </a:fld>
             <a:endParaRPr lang="en-US"/>
           </a:p>
@@ -2580,7 +3453,7 @@
           <a:p>
             <a:fld id="{A6AF225C-868F-9540-9455-9F5B5C0F2A40}" type="datetimeFigureOut">
               <a:rPr lang="en-US" smtClean="0"/>
-              <a:t>4/18/26</a:t>
+              <a:t>4/26/26</a:t>
             </a:fld>
             <a:endParaRPr lang="en-US"/>
           </a:p>
@@ -4138,6 +5011,8580 @@
 </p:sld>
 </file>
 
+<file path=ppt/slides/slide3.xml><?xml version="1.0" encoding="utf-8"?>
+<p:sld xmlns:a="http://schemas.openxmlformats.org/drawingml/2006/main" xmlns:r="http://schemas.openxmlformats.org/officeDocument/2006/relationships" xmlns:p="http://schemas.openxmlformats.org/presentationml/2006/main">
+  <p:cSld>
+    <p:spTree>
+      <p:nvGrpSpPr>
+        <p:cNvPr id="1" name="">
+          <a:extLst>
+            <a:ext uri="{FF2B5EF4-FFF2-40B4-BE49-F238E27FC236}">
+              <a16:creationId xmlns:a16="http://schemas.microsoft.com/office/drawing/2014/main" id="{F2533603-5314-77F8-CC63-907FB3E47CF6}"/>
+            </a:ext>
+          </a:extLst>
+        </p:cNvPr>
+        <p:cNvGrpSpPr/>
+        <p:nvPr/>
+      </p:nvGrpSpPr>
+      <p:grpSpPr>
+        <a:xfrm>
+          <a:off x="0" y="0"/>
+          <a:ext cx="0" cy="0"/>
+          <a:chOff x="0" y="0"/>
+          <a:chExt cx="0" cy="0"/>
+        </a:xfrm>
+      </p:grpSpPr>
+      <p:grpSp>
+        <p:nvGrpSpPr>
+          <p:cNvPr id="89" name="Group 88">
+            <a:extLst>
+              <a:ext uri="{FF2B5EF4-FFF2-40B4-BE49-F238E27FC236}">
+                <a16:creationId xmlns:a16="http://schemas.microsoft.com/office/drawing/2014/main" id="{4266F492-56AF-F14B-033F-B85DE09543A4}"/>
+              </a:ext>
+            </a:extLst>
+          </p:cNvPr>
+          <p:cNvGrpSpPr/>
+          <p:nvPr/>
+        </p:nvGrpSpPr>
+        <p:grpSpPr>
+          <a:xfrm>
+            <a:off x="-3" y="616688"/>
+            <a:ext cx="7825564" cy="6294475"/>
+            <a:chOff x="-3" y="616688"/>
+            <a:chExt cx="7825564" cy="6294475"/>
+          </a:xfrm>
+        </p:grpSpPr>
+        <p:sp>
+          <p:nvSpPr>
+            <p:cNvPr id="7" name="Rectangle 6">
+              <a:extLst>
+                <a:ext uri="{FF2B5EF4-FFF2-40B4-BE49-F238E27FC236}">
+                  <a16:creationId xmlns:a16="http://schemas.microsoft.com/office/drawing/2014/main" id="{40033B05-02B6-6B44-6047-6FA6EECD9D41}"/>
+                </a:ext>
+              </a:extLst>
+            </p:cNvPr>
+            <p:cNvSpPr/>
+            <p:nvPr/>
+          </p:nvSpPr>
+          <p:spPr>
+            <a:xfrm>
+              <a:off x="-2" y="4869726"/>
+              <a:ext cx="7825563" cy="1998277"/>
+            </a:xfrm>
+            <a:prstGeom prst="rect">
+              <a:avLst/>
+            </a:prstGeom>
+            <a:solidFill>
+              <a:srgbClr val="FFFF00"/>
+            </a:solidFill>
+            <a:ln>
+              <a:noFill/>
+            </a:ln>
+          </p:spPr>
+          <p:style>
+            <a:lnRef idx="2">
+              <a:schemeClr val="accent1">
+                <a:shade val="15000"/>
+              </a:schemeClr>
+            </a:lnRef>
+            <a:fillRef idx="1">
+              <a:schemeClr val="accent1"/>
+            </a:fillRef>
+            <a:effectRef idx="0">
+              <a:schemeClr val="accent1"/>
+            </a:effectRef>
+            <a:fontRef idx="minor">
+              <a:schemeClr val="lt1"/>
+            </a:fontRef>
+          </p:style>
+          <p:txBody>
+            <a:bodyPr rtlCol="0" anchor="ctr"/>
+            <a:lstStyle/>
+            <a:p>
+              <a:pPr algn="ctr"/>
+              <a:endParaRPr lang="en-US" b="1" dirty="0"/>
+            </a:p>
+          </p:txBody>
+        </p:sp>
+        <p:sp>
+          <p:nvSpPr>
+            <p:cNvPr id="6" name="Rectangle 5">
+              <a:extLst>
+                <a:ext uri="{FF2B5EF4-FFF2-40B4-BE49-F238E27FC236}">
+                  <a16:creationId xmlns:a16="http://schemas.microsoft.com/office/drawing/2014/main" id="{6384A50E-A9E8-414A-8B3E-687BE1C537AE}"/>
+                </a:ext>
+              </a:extLst>
+            </p:cNvPr>
+            <p:cNvSpPr/>
+            <p:nvPr/>
+          </p:nvSpPr>
+          <p:spPr>
+            <a:xfrm>
+              <a:off x="-3" y="3121662"/>
+              <a:ext cx="7825563" cy="1756917"/>
+            </a:xfrm>
+            <a:prstGeom prst="rect">
+              <a:avLst/>
+            </a:prstGeom>
+            <a:solidFill>
+              <a:srgbClr val="941100">
+                <a:alpha val="15000"/>
+              </a:srgbClr>
+            </a:solidFill>
+            <a:ln>
+              <a:noFill/>
+            </a:ln>
+          </p:spPr>
+          <p:style>
+            <a:lnRef idx="2">
+              <a:schemeClr val="accent1">
+                <a:shade val="15000"/>
+              </a:schemeClr>
+            </a:lnRef>
+            <a:fillRef idx="1">
+              <a:schemeClr val="accent1"/>
+            </a:fillRef>
+            <a:effectRef idx="0">
+              <a:schemeClr val="accent1"/>
+            </a:effectRef>
+            <a:fontRef idx="minor">
+              <a:schemeClr val="lt1"/>
+            </a:fontRef>
+          </p:style>
+          <p:txBody>
+            <a:bodyPr rtlCol="0" anchor="ctr"/>
+            <a:lstStyle/>
+            <a:p>
+              <a:pPr algn="ctr"/>
+              <a:endParaRPr lang="en-US" dirty="0"/>
+            </a:p>
+          </p:txBody>
+        </p:sp>
+        <p:sp>
+          <p:nvSpPr>
+            <p:cNvPr id="71" name="Freeform 70">
+              <a:extLst>
+                <a:ext uri="{FF2B5EF4-FFF2-40B4-BE49-F238E27FC236}">
+                  <a16:creationId xmlns:a16="http://schemas.microsoft.com/office/drawing/2014/main" id="{2DF78836-2FC6-D2C1-829A-F6C1C2172768}"/>
+                </a:ext>
+              </a:extLst>
+            </p:cNvPr>
+            <p:cNvSpPr/>
+            <p:nvPr/>
+          </p:nvSpPr>
+          <p:spPr>
+            <a:xfrm>
+              <a:off x="691117" y="3136604"/>
+              <a:ext cx="4104168" cy="2647507"/>
+            </a:xfrm>
+            <a:custGeom>
+              <a:avLst/>
+              <a:gdLst>
+                <a:gd name="csX0" fmla="*/ 0 w 3710763"/>
+                <a:gd name="csY0" fmla="*/ 0 h 2264734"/>
+                <a:gd name="csX1" fmla="*/ 1084521 w 3710763"/>
+                <a:gd name="csY1" fmla="*/ 1084520 h 2264734"/>
+                <a:gd name="csX2" fmla="*/ 3710763 w 3710763"/>
+                <a:gd name="csY2" fmla="*/ 2264734 h 2264734"/>
+                <a:gd name="csX3" fmla="*/ 3115340 w 3710763"/>
+                <a:gd name="csY3" fmla="*/ 1669311 h 2264734"/>
+                <a:gd name="csX4" fmla="*/ 0 w 3710763"/>
+                <a:gd name="csY4" fmla="*/ 0 h 2264734"/>
+                <a:gd name="csX0" fmla="*/ 0 w 3710763"/>
+                <a:gd name="csY0" fmla="*/ 0 h 2264734"/>
+                <a:gd name="csX1" fmla="*/ 1605516 w 3710763"/>
+                <a:gd name="csY1" fmla="*/ 1648046 h 2264734"/>
+                <a:gd name="csX2" fmla="*/ 3710763 w 3710763"/>
+                <a:gd name="csY2" fmla="*/ 2264734 h 2264734"/>
+                <a:gd name="csX3" fmla="*/ 3115340 w 3710763"/>
+                <a:gd name="csY3" fmla="*/ 1669311 h 2264734"/>
+                <a:gd name="csX4" fmla="*/ 0 w 3710763"/>
+                <a:gd name="csY4" fmla="*/ 0 h 2264734"/>
+                <a:gd name="csX0" fmla="*/ 0 w 4008475"/>
+                <a:gd name="csY0" fmla="*/ 0 h 2573079"/>
+                <a:gd name="csX1" fmla="*/ 1605516 w 4008475"/>
+                <a:gd name="csY1" fmla="*/ 1648046 h 2573079"/>
+                <a:gd name="csX2" fmla="*/ 4008475 w 4008475"/>
+                <a:gd name="csY2" fmla="*/ 2573079 h 2573079"/>
+                <a:gd name="csX3" fmla="*/ 3115340 w 4008475"/>
+                <a:gd name="csY3" fmla="*/ 1669311 h 2573079"/>
+                <a:gd name="csX4" fmla="*/ 0 w 4008475"/>
+                <a:gd name="csY4" fmla="*/ 0 h 2573079"/>
+                <a:gd name="csX0" fmla="*/ 0 w 4125433"/>
+                <a:gd name="csY0" fmla="*/ 0 h 2636874"/>
+                <a:gd name="csX1" fmla="*/ 1722474 w 4125433"/>
+                <a:gd name="csY1" fmla="*/ 1711841 h 2636874"/>
+                <a:gd name="csX2" fmla="*/ 4125433 w 4125433"/>
+                <a:gd name="csY2" fmla="*/ 2636874 h 2636874"/>
+                <a:gd name="csX3" fmla="*/ 3232298 w 4125433"/>
+                <a:gd name="csY3" fmla="*/ 1733106 h 2636874"/>
+                <a:gd name="csX4" fmla="*/ 0 w 4125433"/>
+                <a:gd name="csY4" fmla="*/ 0 h 2636874"/>
+                <a:gd name="csX0" fmla="*/ 0 w 4104168"/>
+                <a:gd name="csY0" fmla="*/ 0 h 2647507"/>
+                <a:gd name="csX1" fmla="*/ 1701209 w 4104168"/>
+                <a:gd name="csY1" fmla="*/ 1722474 h 2647507"/>
+                <a:gd name="csX2" fmla="*/ 4104168 w 4104168"/>
+                <a:gd name="csY2" fmla="*/ 2647507 h 2647507"/>
+                <a:gd name="csX3" fmla="*/ 3211033 w 4104168"/>
+                <a:gd name="csY3" fmla="*/ 1743739 h 2647507"/>
+                <a:gd name="csX4" fmla="*/ 0 w 4104168"/>
+                <a:gd name="csY4" fmla="*/ 0 h 2647507"/>
+              </a:gdLst>
+              <a:ahLst/>
+              <a:cxnLst>
+                <a:cxn ang="0">
+                  <a:pos x="csX0" y="csY0"/>
+                </a:cxn>
+                <a:cxn ang="0">
+                  <a:pos x="csX1" y="csY1"/>
+                </a:cxn>
+                <a:cxn ang="0">
+                  <a:pos x="csX2" y="csY2"/>
+                </a:cxn>
+                <a:cxn ang="0">
+                  <a:pos x="csX3" y="csY3"/>
+                </a:cxn>
+                <a:cxn ang="0">
+                  <a:pos x="csX4" y="csY4"/>
+                </a:cxn>
+              </a:cxnLst>
+              <a:rect l="l" t="t" r="r" b="b"/>
+              <a:pathLst>
+                <a:path w="4104168" h="2647507">
+                  <a:moveTo>
+                    <a:pt x="0" y="0"/>
+                  </a:moveTo>
+                  <a:lnTo>
+                    <a:pt x="1701209" y="1722474"/>
+                  </a:lnTo>
+                  <a:lnTo>
+                    <a:pt x="4104168" y="2647507"/>
+                  </a:lnTo>
+                  <a:lnTo>
+                    <a:pt x="3211033" y="1743739"/>
+                  </a:lnTo>
+                  <a:lnTo>
+                    <a:pt x="0" y="0"/>
+                  </a:lnTo>
+                  <a:close/>
+                </a:path>
+              </a:pathLst>
+            </a:custGeom>
+            <a:solidFill>
+              <a:schemeClr val="accent1">
+                <a:lumMod val="20000"/>
+                <a:lumOff val="80000"/>
+              </a:schemeClr>
+            </a:solidFill>
+          </p:spPr>
+          <p:style>
+            <a:lnRef idx="2">
+              <a:schemeClr val="accent1">
+                <a:shade val="15000"/>
+              </a:schemeClr>
+            </a:lnRef>
+            <a:fillRef idx="1">
+              <a:schemeClr val="accent1"/>
+            </a:fillRef>
+            <a:effectRef idx="0">
+              <a:schemeClr val="accent1"/>
+            </a:effectRef>
+            <a:fontRef idx="minor">
+              <a:schemeClr val="lt1"/>
+            </a:fontRef>
+          </p:style>
+          <p:txBody>
+            <a:bodyPr rtlCol="0" anchor="ctr"/>
+            <a:lstStyle/>
+            <a:p>
+              <a:pPr algn="ctr"/>
+              <a:endParaRPr lang="en-US" dirty="0"/>
+            </a:p>
+          </p:txBody>
+        </p:sp>
+        <p:cxnSp>
+          <p:nvCxnSpPr>
+            <p:cNvPr id="42" name="Straight Connector 41">
+              <a:extLst>
+                <a:ext uri="{FF2B5EF4-FFF2-40B4-BE49-F238E27FC236}">
+                  <a16:creationId xmlns:a16="http://schemas.microsoft.com/office/drawing/2014/main" id="{0A66B9F9-0944-A750-44BC-C293A2AC4011}"/>
+                </a:ext>
+              </a:extLst>
+            </p:cNvPr>
+            <p:cNvCxnSpPr>
+              <a:cxnSpLocks/>
+            </p:cNvCxnSpPr>
+            <p:nvPr/>
+          </p:nvCxnSpPr>
+          <p:spPr>
+            <a:xfrm>
+              <a:off x="-1" y="3121660"/>
+              <a:ext cx="7825557" cy="4336"/>
+            </a:xfrm>
+            <a:prstGeom prst="line">
+              <a:avLst/>
+            </a:prstGeom>
+          </p:spPr>
+          <p:style>
+            <a:lnRef idx="2">
+              <a:schemeClr val="accent1"/>
+            </a:lnRef>
+            <a:fillRef idx="0">
+              <a:schemeClr val="accent1"/>
+            </a:fillRef>
+            <a:effectRef idx="1">
+              <a:schemeClr val="accent1"/>
+            </a:effectRef>
+            <a:fontRef idx="minor">
+              <a:schemeClr val="tx1"/>
+            </a:fontRef>
+          </p:style>
+        </p:cxnSp>
+        <p:cxnSp>
+          <p:nvCxnSpPr>
+            <p:cNvPr id="34" name="Straight Arrow Connector 33">
+              <a:extLst>
+                <a:ext uri="{FF2B5EF4-FFF2-40B4-BE49-F238E27FC236}">
+                  <a16:creationId xmlns:a16="http://schemas.microsoft.com/office/drawing/2014/main" id="{D7DC5211-4FC9-0013-A044-6679B12B55E1}"/>
+                </a:ext>
+              </a:extLst>
+            </p:cNvPr>
+            <p:cNvCxnSpPr>
+              <a:cxnSpLocks/>
+            </p:cNvCxnSpPr>
+            <p:nvPr/>
+          </p:nvCxnSpPr>
+          <p:spPr>
+            <a:xfrm>
+              <a:off x="304773" y="6267466"/>
+              <a:ext cx="4968976" cy="0"/>
+            </a:xfrm>
+            <a:prstGeom prst="straightConnector1">
+              <a:avLst/>
+            </a:prstGeom>
+            <a:ln w="34925">
+              <a:solidFill>
+                <a:srgbClr val="0070C0"/>
+              </a:solidFill>
+              <a:tailEnd type="triangle" w="lg" len="lg"/>
+            </a:ln>
+          </p:spPr>
+          <p:style>
+            <a:lnRef idx="2">
+              <a:schemeClr val="accent1"/>
+            </a:lnRef>
+            <a:fillRef idx="0">
+              <a:schemeClr val="accent1"/>
+            </a:fillRef>
+            <a:effectRef idx="1">
+              <a:schemeClr val="accent1"/>
+            </a:effectRef>
+            <a:fontRef idx="minor">
+              <a:schemeClr val="tx1"/>
+            </a:fontRef>
+          </p:style>
+        </p:cxnSp>
+        <p:cxnSp>
+          <p:nvCxnSpPr>
+            <p:cNvPr id="36" name="Straight Arrow Connector 35">
+              <a:extLst>
+                <a:ext uri="{FF2B5EF4-FFF2-40B4-BE49-F238E27FC236}">
+                  <a16:creationId xmlns:a16="http://schemas.microsoft.com/office/drawing/2014/main" id="{28005AA3-525E-68EB-1D7D-7547AE313408}"/>
+                </a:ext>
+              </a:extLst>
+            </p:cNvPr>
+            <p:cNvCxnSpPr>
+              <a:cxnSpLocks/>
+            </p:cNvCxnSpPr>
+            <p:nvPr/>
+          </p:nvCxnSpPr>
+          <p:spPr>
+            <a:xfrm>
+              <a:off x="304773" y="6581339"/>
+              <a:ext cx="6585125" cy="0"/>
+            </a:xfrm>
+            <a:prstGeom prst="straightConnector1">
+              <a:avLst/>
+            </a:prstGeom>
+            <a:ln w="34925">
+              <a:solidFill>
+                <a:srgbClr val="FF0000"/>
+              </a:solidFill>
+              <a:tailEnd type="triangle" w="lg" len="lg"/>
+            </a:ln>
+          </p:spPr>
+          <p:style>
+            <a:lnRef idx="2">
+              <a:schemeClr val="accent1"/>
+            </a:lnRef>
+            <a:fillRef idx="0">
+              <a:schemeClr val="accent1"/>
+            </a:fillRef>
+            <a:effectRef idx="1">
+              <a:schemeClr val="accent1"/>
+            </a:effectRef>
+            <a:fontRef idx="minor">
+              <a:schemeClr val="tx1"/>
+            </a:fontRef>
+          </p:style>
+        </p:cxnSp>
+        <p:pic>
+          <p:nvPicPr>
+            <p:cNvPr id="38" name="Picture 37">
+              <a:extLst>
+                <a:ext uri="{FF2B5EF4-FFF2-40B4-BE49-F238E27FC236}">
+                  <a16:creationId xmlns:a16="http://schemas.microsoft.com/office/drawing/2014/main" id="{353686B8-2A8F-7F38-68C4-247E261CAD42}"/>
+                </a:ext>
+              </a:extLst>
+            </p:cNvPr>
+            <p:cNvPicPr>
+              <a:picLocks noChangeAspect="1"/>
+            </p:cNvPicPr>
+            <p:nvPr/>
+          </p:nvPicPr>
+          <p:blipFill>
+            <a:blip r:embed="rId3"/>
+            <a:stretch>
+              <a:fillRect/>
+            </a:stretch>
+          </p:blipFill>
+          <p:spPr>
+            <a:xfrm>
+              <a:off x="1230384" y="6053091"/>
+              <a:ext cx="271956" cy="145691"/>
+            </a:xfrm>
+            <a:prstGeom prst="rect">
+              <a:avLst/>
+            </a:prstGeom>
+          </p:spPr>
+        </p:pic>
+        <p:pic>
+          <p:nvPicPr>
+            <p:cNvPr id="39" name="Picture 38">
+              <a:extLst>
+                <a:ext uri="{FF2B5EF4-FFF2-40B4-BE49-F238E27FC236}">
+                  <a16:creationId xmlns:a16="http://schemas.microsoft.com/office/drawing/2014/main" id="{F62641DD-DD6E-65ED-E184-80F041C993B2}"/>
+                </a:ext>
+              </a:extLst>
+            </p:cNvPr>
+            <p:cNvPicPr>
+              <a:picLocks noChangeAspect="1"/>
+            </p:cNvPicPr>
+            <p:nvPr/>
+          </p:nvPicPr>
+          <p:blipFill>
+            <a:blip r:embed="rId4"/>
+            <a:stretch>
+              <a:fillRect/>
+            </a:stretch>
+          </p:blipFill>
+          <p:spPr>
+            <a:xfrm>
+              <a:off x="1641789" y="6393116"/>
+              <a:ext cx="203967" cy="145691"/>
+            </a:xfrm>
+            <a:prstGeom prst="rect">
+              <a:avLst/>
+            </a:prstGeom>
+          </p:spPr>
+        </p:pic>
+        <p:pic>
+          <p:nvPicPr>
+            <p:cNvPr id="46" name="Picture 45">
+              <a:extLst>
+                <a:ext uri="{FF2B5EF4-FFF2-40B4-BE49-F238E27FC236}">
+                  <a16:creationId xmlns:a16="http://schemas.microsoft.com/office/drawing/2014/main" id="{61972957-2BAA-4A59-ACB8-9FD7C03E582D}"/>
+                </a:ext>
+              </a:extLst>
+            </p:cNvPr>
+            <p:cNvPicPr>
+              <a:picLocks noChangeAspect="1"/>
+            </p:cNvPicPr>
+            <p:nvPr/>
+          </p:nvPicPr>
+          <p:blipFill>
+            <a:blip r:embed="rId5"/>
+            <a:stretch>
+              <a:fillRect/>
+            </a:stretch>
+          </p:blipFill>
+          <p:spPr>
+            <a:xfrm>
+              <a:off x="5503811" y="3615187"/>
+              <a:ext cx="2185364" cy="223393"/>
+            </a:xfrm>
+            <a:prstGeom prst="rect">
+              <a:avLst/>
+            </a:prstGeom>
+          </p:spPr>
+        </p:pic>
+        <p:pic>
+          <p:nvPicPr>
+            <p:cNvPr id="47" name="Picture 46">
+              <a:extLst>
+                <a:ext uri="{FF2B5EF4-FFF2-40B4-BE49-F238E27FC236}">
+                  <a16:creationId xmlns:a16="http://schemas.microsoft.com/office/drawing/2014/main" id="{94F88415-D611-9F5D-6BF3-E1EC60085D69}"/>
+                </a:ext>
+              </a:extLst>
+            </p:cNvPr>
+            <p:cNvPicPr>
+              <a:picLocks noChangeAspect="1"/>
+            </p:cNvPicPr>
+            <p:nvPr/>
+          </p:nvPicPr>
+          <p:blipFill>
+            <a:blip r:embed="rId6"/>
+            <a:stretch>
+              <a:fillRect/>
+            </a:stretch>
+          </p:blipFill>
+          <p:spPr>
+            <a:xfrm>
+              <a:off x="7192434" y="4993572"/>
+              <a:ext cx="495349" cy="174829"/>
+            </a:xfrm>
+            <a:prstGeom prst="rect">
+              <a:avLst/>
+            </a:prstGeom>
+          </p:spPr>
+        </p:pic>
+        <p:pic>
+          <p:nvPicPr>
+            <p:cNvPr id="48" name="Picture 47">
+              <a:extLst>
+                <a:ext uri="{FF2B5EF4-FFF2-40B4-BE49-F238E27FC236}">
+                  <a16:creationId xmlns:a16="http://schemas.microsoft.com/office/drawing/2014/main" id="{CB7F1690-5D56-6EA8-5EA0-D7F797C9DB38}"/>
+                </a:ext>
+              </a:extLst>
+            </p:cNvPr>
+            <p:cNvPicPr>
+              <a:picLocks noChangeAspect="1"/>
+            </p:cNvPicPr>
+            <p:nvPr/>
+          </p:nvPicPr>
+          <p:blipFill>
+            <a:blip r:embed="rId7"/>
+            <a:stretch>
+              <a:fillRect/>
+            </a:stretch>
+          </p:blipFill>
+          <p:spPr>
+            <a:xfrm>
+              <a:off x="5207020" y="4235733"/>
+              <a:ext cx="2544735" cy="174829"/>
+            </a:xfrm>
+            <a:prstGeom prst="rect">
+              <a:avLst/>
+            </a:prstGeom>
+            <a:solidFill>
+              <a:schemeClr val="bg1"/>
+            </a:solidFill>
+          </p:spPr>
+        </p:pic>
+        <p:sp>
+          <p:nvSpPr>
+            <p:cNvPr id="2" name="Rectangle 1">
+              <a:extLst>
+                <a:ext uri="{FF2B5EF4-FFF2-40B4-BE49-F238E27FC236}">
+                  <a16:creationId xmlns:a16="http://schemas.microsoft.com/office/drawing/2014/main" id="{9E4D949D-389B-8F57-2303-799FD8E1CB32}"/>
+                </a:ext>
+              </a:extLst>
+            </p:cNvPr>
+            <p:cNvSpPr/>
+            <p:nvPr/>
+          </p:nvSpPr>
+          <p:spPr>
+            <a:xfrm>
+              <a:off x="6" y="2750108"/>
+              <a:ext cx="7825550" cy="367217"/>
+            </a:xfrm>
+            <a:prstGeom prst="rect">
+              <a:avLst/>
+            </a:prstGeom>
+            <a:solidFill>
+              <a:srgbClr val="00B0F0">
+                <a:alpha val="15000"/>
+              </a:srgbClr>
+            </a:solidFill>
+            <a:ln>
+              <a:noFill/>
+            </a:ln>
+          </p:spPr>
+          <p:style>
+            <a:lnRef idx="2">
+              <a:schemeClr val="accent1">
+                <a:shade val="15000"/>
+              </a:schemeClr>
+            </a:lnRef>
+            <a:fillRef idx="1">
+              <a:schemeClr val="accent1"/>
+            </a:fillRef>
+            <a:effectRef idx="0">
+              <a:schemeClr val="accent1"/>
+            </a:effectRef>
+            <a:fontRef idx="minor">
+              <a:schemeClr val="lt1"/>
+            </a:fontRef>
+          </p:style>
+          <p:txBody>
+            <a:bodyPr rtlCol="0" anchor="ctr"/>
+            <a:lstStyle/>
+            <a:p>
+              <a:pPr algn="ctr"/>
+              <a:endParaRPr lang="en-US" b="1" dirty="0"/>
+            </a:p>
+          </p:txBody>
+        </p:sp>
+        <p:sp>
+          <p:nvSpPr>
+            <p:cNvPr id="5" name="Freeform 4">
+              <a:extLst>
+                <a:ext uri="{FF2B5EF4-FFF2-40B4-BE49-F238E27FC236}">
+                  <a16:creationId xmlns:a16="http://schemas.microsoft.com/office/drawing/2014/main" id="{69E39C2C-5373-9D24-D764-F3E5C734E5BE}"/>
+                </a:ext>
+              </a:extLst>
+            </p:cNvPr>
+            <p:cNvSpPr/>
+            <p:nvPr/>
+          </p:nvSpPr>
+          <p:spPr>
+            <a:xfrm>
+              <a:off x="308999" y="2761550"/>
+              <a:ext cx="4130847" cy="4138979"/>
+            </a:xfrm>
+            <a:custGeom>
+              <a:avLst/>
+              <a:gdLst>
+                <a:gd name="csX0" fmla="*/ 0 w 5401340"/>
+                <a:gd name="csY0" fmla="*/ 0 h 5411972"/>
+                <a:gd name="csX1" fmla="*/ 5401340 w 5401340"/>
+                <a:gd name="csY1" fmla="*/ 5411972 h 5411972"/>
+              </a:gdLst>
+              <a:ahLst/>
+              <a:cxnLst>
+                <a:cxn ang="0">
+                  <a:pos x="csX0" y="csY0"/>
+                </a:cxn>
+                <a:cxn ang="0">
+                  <a:pos x="csX1" y="csY1"/>
+                </a:cxn>
+              </a:cxnLst>
+              <a:rect l="l" t="t" r="r" b="b"/>
+              <a:pathLst>
+                <a:path w="5401340" h="5411972">
+                  <a:moveTo>
+                    <a:pt x="0" y="0"/>
+                  </a:moveTo>
+                  <a:lnTo>
+                    <a:pt x="5401340" y="5411972"/>
+                  </a:lnTo>
+                </a:path>
+              </a:pathLst>
+            </a:custGeom>
+          </p:spPr>
+          <p:style>
+            <a:lnRef idx="1">
+              <a:schemeClr val="dk1"/>
+            </a:lnRef>
+            <a:fillRef idx="0">
+              <a:schemeClr val="dk1"/>
+            </a:fillRef>
+            <a:effectRef idx="0">
+              <a:schemeClr val="dk1"/>
+            </a:effectRef>
+            <a:fontRef idx="minor">
+              <a:schemeClr val="tx1"/>
+            </a:fontRef>
+          </p:style>
+          <p:txBody>
+            <a:bodyPr rtlCol="0" anchor="ctr"/>
+            <a:lstStyle/>
+            <a:p>
+              <a:pPr algn="ctr"/>
+              <a:endParaRPr lang="en-US"/>
+            </a:p>
+          </p:txBody>
+        </p:sp>
+        <p:sp>
+          <p:nvSpPr>
+            <p:cNvPr id="24" name="Freeform 23">
+              <a:extLst>
+                <a:ext uri="{FF2B5EF4-FFF2-40B4-BE49-F238E27FC236}">
+                  <a16:creationId xmlns:a16="http://schemas.microsoft.com/office/drawing/2014/main" id="{D38FA731-65E9-836F-804D-0EA0147529E7}"/>
+                </a:ext>
+              </a:extLst>
+            </p:cNvPr>
+            <p:cNvSpPr/>
+            <p:nvPr/>
+          </p:nvSpPr>
+          <p:spPr>
+            <a:xfrm>
+              <a:off x="261738" y="1233389"/>
+              <a:ext cx="5638316" cy="5649416"/>
+            </a:xfrm>
+            <a:custGeom>
+              <a:avLst/>
+              <a:gdLst>
+                <a:gd name="csX0" fmla="*/ 0 w 5401340"/>
+                <a:gd name="csY0" fmla="*/ 0 h 5411972"/>
+                <a:gd name="csX1" fmla="*/ 5401340 w 5401340"/>
+                <a:gd name="csY1" fmla="*/ 5411972 h 5411972"/>
+              </a:gdLst>
+              <a:ahLst/>
+              <a:cxnLst>
+                <a:cxn ang="0">
+                  <a:pos x="csX0" y="csY0"/>
+                </a:cxn>
+                <a:cxn ang="0">
+                  <a:pos x="csX1" y="csY1"/>
+                </a:cxn>
+              </a:cxnLst>
+              <a:rect l="l" t="t" r="r" b="b"/>
+              <a:pathLst>
+                <a:path w="5401340" h="5411972">
+                  <a:moveTo>
+                    <a:pt x="0" y="0"/>
+                  </a:moveTo>
+                  <a:lnTo>
+                    <a:pt x="5401340" y="5411972"/>
+                  </a:lnTo>
+                </a:path>
+              </a:pathLst>
+            </a:custGeom>
+          </p:spPr>
+          <p:style>
+            <a:lnRef idx="1">
+              <a:schemeClr val="dk1"/>
+            </a:lnRef>
+            <a:fillRef idx="0">
+              <a:schemeClr val="dk1"/>
+            </a:fillRef>
+            <a:effectRef idx="0">
+              <a:schemeClr val="dk1"/>
+            </a:effectRef>
+            <a:fontRef idx="minor">
+              <a:schemeClr val="tx1"/>
+            </a:fontRef>
+          </p:style>
+          <p:txBody>
+            <a:bodyPr rtlCol="0" anchor="ctr"/>
+            <a:lstStyle/>
+            <a:p>
+              <a:pPr algn="ctr"/>
+              <a:endParaRPr lang="en-US"/>
+            </a:p>
+          </p:txBody>
+        </p:sp>
+        <p:cxnSp>
+          <p:nvCxnSpPr>
+            <p:cNvPr id="27" name="Straight Connector 26">
+              <a:extLst>
+                <a:ext uri="{FF2B5EF4-FFF2-40B4-BE49-F238E27FC236}">
+                  <a16:creationId xmlns:a16="http://schemas.microsoft.com/office/drawing/2014/main" id="{441FBD40-1B7C-8485-A701-8DE8B7D73EAA}"/>
+                </a:ext>
+              </a:extLst>
+            </p:cNvPr>
+            <p:cNvCxnSpPr>
+              <a:cxnSpLocks/>
+            </p:cNvCxnSpPr>
+            <p:nvPr/>
+          </p:nvCxnSpPr>
+          <p:spPr>
+            <a:xfrm>
+              <a:off x="261738" y="616688"/>
+              <a:ext cx="0" cy="6266117"/>
+            </a:xfrm>
+            <a:prstGeom prst="line">
+              <a:avLst/>
+            </a:prstGeom>
+          </p:spPr>
+          <p:style>
+            <a:lnRef idx="2">
+              <a:schemeClr val="accent1"/>
+            </a:lnRef>
+            <a:fillRef idx="0">
+              <a:schemeClr val="accent1"/>
+            </a:fillRef>
+            <a:effectRef idx="1">
+              <a:schemeClr val="accent1"/>
+            </a:effectRef>
+            <a:fontRef idx="minor">
+              <a:schemeClr val="tx1"/>
+            </a:fontRef>
+          </p:style>
+        </p:cxnSp>
+        <p:cxnSp>
+          <p:nvCxnSpPr>
+            <p:cNvPr id="53" name="Straight Connector 52">
+              <a:extLst>
+                <a:ext uri="{FF2B5EF4-FFF2-40B4-BE49-F238E27FC236}">
+                  <a16:creationId xmlns:a16="http://schemas.microsoft.com/office/drawing/2014/main" id="{7D812F49-E34E-C98D-0A76-50F1039BEB86}"/>
+                </a:ext>
+              </a:extLst>
+            </p:cNvPr>
+            <p:cNvCxnSpPr>
+              <a:cxnSpLocks/>
+              <a:stCxn id="24" idx="0"/>
+            </p:cNvCxnSpPr>
+            <p:nvPr/>
+          </p:nvCxnSpPr>
+          <p:spPr>
+            <a:xfrm>
+              <a:off x="261738" y="1233389"/>
+              <a:ext cx="2294450" cy="0"/>
+            </a:xfrm>
+            <a:prstGeom prst="line">
+              <a:avLst/>
+            </a:prstGeom>
+            <a:ln w="6350"/>
+          </p:spPr>
+          <p:style>
+            <a:lnRef idx="2">
+              <a:schemeClr val="accent1"/>
+            </a:lnRef>
+            <a:fillRef idx="0">
+              <a:schemeClr val="accent1"/>
+            </a:fillRef>
+            <a:effectRef idx="1">
+              <a:schemeClr val="accent1"/>
+            </a:effectRef>
+            <a:fontRef idx="minor">
+              <a:schemeClr val="tx1"/>
+            </a:fontRef>
+          </p:style>
+        </p:cxnSp>
+        <p:pic>
+          <p:nvPicPr>
+            <p:cNvPr id="58" name="Picture 57">
+              <a:extLst>
+                <a:ext uri="{FF2B5EF4-FFF2-40B4-BE49-F238E27FC236}">
+                  <a16:creationId xmlns:a16="http://schemas.microsoft.com/office/drawing/2014/main" id="{C7E21A70-2434-BDCB-C25A-041147D63731}"/>
+                </a:ext>
+              </a:extLst>
+            </p:cNvPr>
+            <p:cNvPicPr>
+              <a:picLocks noChangeAspect="1"/>
+            </p:cNvPicPr>
+            <p:nvPr/>
+          </p:nvPicPr>
+          <p:blipFill>
+            <a:blip r:embed="rId8"/>
+            <a:stretch>
+              <a:fillRect/>
+            </a:stretch>
+          </p:blipFill>
+          <p:spPr>
+            <a:xfrm>
+              <a:off x="591578" y="879986"/>
+              <a:ext cx="177800" cy="292100"/>
+            </a:xfrm>
+            <a:prstGeom prst="rect">
+              <a:avLst/>
+            </a:prstGeom>
+          </p:spPr>
+        </p:pic>
+        <p:pic>
+          <p:nvPicPr>
+            <p:cNvPr id="66" name="Picture 65">
+              <a:extLst>
+                <a:ext uri="{FF2B5EF4-FFF2-40B4-BE49-F238E27FC236}">
+                  <a16:creationId xmlns:a16="http://schemas.microsoft.com/office/drawing/2014/main" id="{6FCF569A-BE74-6E71-F2CB-704870881DA2}"/>
+                </a:ext>
+              </a:extLst>
+            </p:cNvPr>
+            <p:cNvPicPr>
+              <a:picLocks noChangeAspect="1"/>
+            </p:cNvPicPr>
+            <p:nvPr/>
+          </p:nvPicPr>
+          <p:blipFill>
+            <a:blip r:embed="rId9"/>
+            <a:stretch>
+              <a:fillRect/>
+            </a:stretch>
+          </p:blipFill>
+          <p:spPr>
+            <a:xfrm>
+              <a:off x="5718552" y="2836229"/>
+              <a:ext cx="1981200" cy="228600"/>
+            </a:xfrm>
+            <a:prstGeom prst="rect">
+              <a:avLst/>
+            </a:prstGeom>
+          </p:spPr>
+        </p:pic>
+        <p:sp>
+          <p:nvSpPr>
+            <p:cNvPr id="70" name="Right Brace 69">
+              <a:extLst>
+                <a:ext uri="{FF2B5EF4-FFF2-40B4-BE49-F238E27FC236}">
+                  <a16:creationId xmlns:a16="http://schemas.microsoft.com/office/drawing/2014/main" id="{8FD35FA4-7C22-E8F3-4653-9353A317A1C6}"/>
+                </a:ext>
+              </a:extLst>
+            </p:cNvPr>
+            <p:cNvSpPr/>
+            <p:nvPr/>
+          </p:nvSpPr>
+          <p:spPr>
+            <a:xfrm>
+              <a:off x="4873391" y="3127935"/>
+              <a:ext cx="443600" cy="2685702"/>
+            </a:xfrm>
+            <a:prstGeom prst="rightBrace">
+              <a:avLst>
+                <a:gd name="adj1" fmla="val 0"/>
+                <a:gd name="adj2" fmla="val 50000"/>
+              </a:avLst>
+            </a:prstGeom>
+            <a:ln>
+              <a:solidFill>
+                <a:schemeClr val="accent6">
+                  <a:lumMod val="50000"/>
+                </a:schemeClr>
+              </a:solidFill>
+            </a:ln>
+          </p:spPr>
+          <p:style>
+            <a:lnRef idx="2">
+              <a:schemeClr val="accent1"/>
+            </a:lnRef>
+            <a:fillRef idx="0">
+              <a:schemeClr val="accent1"/>
+            </a:fillRef>
+            <a:effectRef idx="1">
+              <a:schemeClr val="accent1"/>
+            </a:effectRef>
+            <a:fontRef idx="minor">
+              <a:schemeClr val="tx1"/>
+            </a:fontRef>
+          </p:style>
+          <p:txBody>
+            <a:bodyPr rtlCol="0" anchor="ctr"/>
+            <a:lstStyle/>
+            <a:p>
+              <a:pPr algn="ctr"/>
+              <a:endParaRPr lang="en-US"/>
+            </a:p>
+          </p:txBody>
+        </p:sp>
+        <p:sp>
+          <p:nvSpPr>
+            <p:cNvPr id="3" name="Freeform 2">
+              <a:extLst>
+                <a:ext uri="{FF2B5EF4-FFF2-40B4-BE49-F238E27FC236}">
+                  <a16:creationId xmlns:a16="http://schemas.microsoft.com/office/drawing/2014/main" id="{E9A9B9B3-65F4-8F48-F150-6157B27A537C}"/>
+                </a:ext>
+              </a:extLst>
+            </p:cNvPr>
+            <p:cNvSpPr/>
+            <p:nvPr/>
+          </p:nvSpPr>
+          <p:spPr>
+            <a:xfrm>
+              <a:off x="296258" y="2746587"/>
+              <a:ext cx="7253923" cy="4128347"/>
+            </a:xfrm>
+            <a:custGeom>
+              <a:avLst/>
+              <a:gdLst>
+                <a:gd name="csX0" fmla="*/ 0 w 5092995"/>
+                <a:gd name="csY0" fmla="*/ 0 h 4912242"/>
+                <a:gd name="csX1" fmla="*/ 1456661 w 5092995"/>
+                <a:gd name="csY1" fmla="*/ 1499191 h 4912242"/>
+                <a:gd name="csX2" fmla="*/ 5092995 w 5092995"/>
+                <a:gd name="csY2" fmla="*/ 4912242 h 4912242"/>
+                <a:gd name="csX0" fmla="*/ 0 w 5092995"/>
+                <a:gd name="csY0" fmla="*/ 0 h 4912242"/>
+                <a:gd name="csX1" fmla="*/ 1998922 w 5092995"/>
+                <a:gd name="csY1" fmla="*/ 1977656 h 4912242"/>
+                <a:gd name="csX2" fmla="*/ 5092995 w 5092995"/>
+                <a:gd name="csY2" fmla="*/ 4912242 h 4912242"/>
+                <a:gd name="csX0" fmla="*/ 0 w 6602818"/>
+                <a:gd name="csY0" fmla="*/ 0 h 4401879"/>
+                <a:gd name="csX1" fmla="*/ 1998922 w 6602818"/>
+                <a:gd name="csY1" fmla="*/ 1977656 h 4401879"/>
+                <a:gd name="csX2" fmla="*/ 6602818 w 6602818"/>
+                <a:gd name="csY2" fmla="*/ 4401879 h 4401879"/>
+                <a:gd name="csX0" fmla="*/ 0 w 8442251"/>
+                <a:gd name="csY0" fmla="*/ 0 h 5411972"/>
+                <a:gd name="csX1" fmla="*/ 1998922 w 8442251"/>
+                <a:gd name="csY1" fmla="*/ 1977656 h 5411972"/>
+                <a:gd name="csX2" fmla="*/ 8442251 w 8442251"/>
+                <a:gd name="csY2" fmla="*/ 5411972 h 5411972"/>
+                <a:gd name="csX0" fmla="*/ 0 w 9484956"/>
+                <a:gd name="csY0" fmla="*/ 0 h 5398070"/>
+                <a:gd name="csX1" fmla="*/ 1998922 w 9484956"/>
+                <a:gd name="csY1" fmla="*/ 1977656 h 5398070"/>
+                <a:gd name="csX2" fmla="*/ 9484956 w 9484956"/>
+                <a:gd name="csY2" fmla="*/ 5398070 h 5398070"/>
+                <a:gd name="csX0" fmla="*/ 0 w 9484956"/>
+                <a:gd name="csY0" fmla="*/ 0 h 5398070"/>
+                <a:gd name="csX1" fmla="*/ 2763571 w 9484956"/>
+                <a:gd name="csY1" fmla="*/ 2770112 h 5398070"/>
+                <a:gd name="csX2" fmla="*/ 9484956 w 9484956"/>
+                <a:gd name="csY2" fmla="*/ 5398070 h 5398070"/>
+              </a:gdLst>
+              <a:ahLst/>
+              <a:cxnLst>
+                <a:cxn ang="0">
+                  <a:pos x="csX0" y="csY0"/>
+                </a:cxn>
+                <a:cxn ang="0">
+                  <a:pos x="csX1" y="csY1"/>
+                </a:cxn>
+                <a:cxn ang="0">
+                  <a:pos x="csX2" y="csY2"/>
+                </a:cxn>
+              </a:cxnLst>
+              <a:rect l="l" t="t" r="r" b="b"/>
+              <a:pathLst>
+                <a:path w="9484956" h="5398070">
+                  <a:moveTo>
+                    <a:pt x="0" y="0"/>
+                  </a:moveTo>
+                  <a:lnTo>
+                    <a:pt x="2763571" y="2770112"/>
+                  </a:lnTo>
+                  <a:lnTo>
+                    <a:pt x="9484956" y="5398070"/>
+                  </a:lnTo>
+                </a:path>
+              </a:pathLst>
+            </a:custGeom>
+            <a:noFill/>
+            <a:ln w="31750">
+              <a:solidFill>
+                <a:srgbClr val="FF0000"/>
+              </a:solidFill>
+            </a:ln>
+          </p:spPr>
+          <p:style>
+            <a:lnRef idx="2">
+              <a:schemeClr val="accent1">
+                <a:shade val="15000"/>
+              </a:schemeClr>
+            </a:lnRef>
+            <a:fillRef idx="1">
+              <a:schemeClr val="accent1"/>
+            </a:fillRef>
+            <a:effectRef idx="0">
+              <a:schemeClr val="accent1"/>
+            </a:effectRef>
+            <a:fontRef idx="minor">
+              <a:schemeClr val="lt1"/>
+            </a:fontRef>
+          </p:style>
+          <p:txBody>
+            <a:bodyPr rtlCol="0" anchor="ctr"/>
+            <a:lstStyle/>
+            <a:p>
+              <a:pPr algn="ctr"/>
+              <a:endParaRPr lang="en-US" dirty="0"/>
+            </a:p>
+          </p:txBody>
+        </p:sp>
+        <p:cxnSp>
+          <p:nvCxnSpPr>
+            <p:cNvPr id="72" name="Straight Arrow Connector 71">
+              <a:extLst>
+                <a:ext uri="{FF2B5EF4-FFF2-40B4-BE49-F238E27FC236}">
+                  <a16:creationId xmlns:a16="http://schemas.microsoft.com/office/drawing/2014/main" id="{EC7C51C4-679C-2510-CF66-184473F1BBBC}"/>
+                </a:ext>
+              </a:extLst>
+            </p:cNvPr>
+            <p:cNvCxnSpPr>
+              <a:cxnSpLocks/>
+              <a:stCxn id="3" idx="1"/>
+            </p:cNvCxnSpPr>
+            <p:nvPr/>
+          </p:nvCxnSpPr>
+          <p:spPr>
+            <a:xfrm>
+              <a:off x="2409787" y="4865119"/>
+              <a:ext cx="1492360" cy="13278"/>
+            </a:xfrm>
+            <a:prstGeom prst="straightConnector1">
+              <a:avLst/>
+            </a:prstGeom>
+            <a:ln w="34925">
+              <a:solidFill>
+                <a:srgbClr val="FF0000"/>
+              </a:solidFill>
+              <a:tailEnd type="triangle" w="lg" len="lg"/>
+            </a:ln>
+          </p:spPr>
+          <p:style>
+            <a:lnRef idx="2">
+              <a:schemeClr val="accent1"/>
+            </a:lnRef>
+            <a:fillRef idx="0">
+              <a:schemeClr val="accent1"/>
+            </a:fillRef>
+            <a:effectRef idx="1">
+              <a:schemeClr val="accent1"/>
+            </a:effectRef>
+            <a:fontRef idx="minor">
+              <a:schemeClr val="tx1"/>
+            </a:fontRef>
+          </p:style>
+        </p:cxnSp>
+        <p:pic>
+          <p:nvPicPr>
+            <p:cNvPr id="76" name="Picture 75">
+              <a:extLst>
+                <a:ext uri="{FF2B5EF4-FFF2-40B4-BE49-F238E27FC236}">
+                  <a16:creationId xmlns:a16="http://schemas.microsoft.com/office/drawing/2014/main" id="{B4B70F7C-FF39-B5EE-478C-96EDA5CB98E4}"/>
+                </a:ext>
+              </a:extLst>
+            </p:cNvPr>
+            <p:cNvPicPr>
+              <a:picLocks noChangeAspect="1"/>
+            </p:cNvPicPr>
+            <p:nvPr/>
+          </p:nvPicPr>
+          <p:blipFill>
+            <a:blip r:embed="rId10"/>
+            <a:stretch>
+              <a:fillRect/>
+            </a:stretch>
+          </p:blipFill>
+          <p:spPr>
+            <a:xfrm rot="2733373">
+              <a:off x="572209" y="1997888"/>
+              <a:ext cx="1473200" cy="228600"/>
+            </a:xfrm>
+            <a:prstGeom prst="rect">
+              <a:avLst/>
+            </a:prstGeom>
+          </p:spPr>
+        </p:pic>
+        <p:pic>
+          <p:nvPicPr>
+            <p:cNvPr id="78" name="Picture 77">
+              <a:extLst>
+                <a:ext uri="{FF2B5EF4-FFF2-40B4-BE49-F238E27FC236}">
+                  <a16:creationId xmlns:a16="http://schemas.microsoft.com/office/drawing/2014/main" id="{ADA2D3CD-A678-DECE-1869-2D463F683504}"/>
+                </a:ext>
+              </a:extLst>
+            </p:cNvPr>
+            <p:cNvPicPr>
+              <a:picLocks noChangeAspect="1"/>
+            </p:cNvPicPr>
+            <p:nvPr/>
+          </p:nvPicPr>
+          <p:blipFill>
+            <a:blip r:embed="rId11"/>
+            <a:stretch>
+              <a:fillRect/>
+            </a:stretch>
+          </p:blipFill>
+          <p:spPr>
+            <a:xfrm>
+              <a:off x="336388" y="2493775"/>
+              <a:ext cx="177800" cy="190500"/>
+            </a:xfrm>
+            <a:prstGeom prst="rect">
+              <a:avLst/>
+            </a:prstGeom>
+          </p:spPr>
+        </p:pic>
+        <p:pic>
+          <p:nvPicPr>
+            <p:cNvPr id="79" name="Picture 78">
+              <a:extLst>
+                <a:ext uri="{FF2B5EF4-FFF2-40B4-BE49-F238E27FC236}">
+                  <a16:creationId xmlns:a16="http://schemas.microsoft.com/office/drawing/2014/main" id="{A7AE3845-96C5-ABF3-7FA3-129CEE1D43E5}"/>
+                </a:ext>
+              </a:extLst>
+            </p:cNvPr>
+            <p:cNvPicPr>
+              <a:picLocks noChangeAspect="1"/>
+            </p:cNvPicPr>
+            <p:nvPr/>
+          </p:nvPicPr>
+          <p:blipFill>
+            <a:blip r:embed="rId12"/>
+            <a:stretch>
+              <a:fillRect/>
+            </a:stretch>
+          </p:blipFill>
+          <p:spPr>
+            <a:xfrm>
+              <a:off x="2137584" y="4903091"/>
+              <a:ext cx="190500" cy="177800"/>
+            </a:xfrm>
+            <a:prstGeom prst="rect">
+              <a:avLst/>
+            </a:prstGeom>
+          </p:spPr>
+        </p:pic>
+        <p:pic>
+          <p:nvPicPr>
+            <p:cNvPr id="80" name="Picture 79">
+              <a:extLst>
+                <a:ext uri="{FF2B5EF4-FFF2-40B4-BE49-F238E27FC236}">
+                  <a16:creationId xmlns:a16="http://schemas.microsoft.com/office/drawing/2014/main" id="{AA971547-A42C-750D-9EE5-22BB4F43977F}"/>
+                </a:ext>
+              </a:extLst>
+            </p:cNvPr>
+            <p:cNvPicPr>
+              <a:picLocks noChangeAspect="1"/>
+            </p:cNvPicPr>
+            <p:nvPr/>
+          </p:nvPicPr>
+          <p:blipFill>
+            <a:blip r:embed="rId13"/>
+            <a:stretch>
+              <a:fillRect/>
+            </a:stretch>
+          </p:blipFill>
+          <p:spPr>
+            <a:xfrm>
+              <a:off x="7453877" y="6587322"/>
+              <a:ext cx="190500" cy="190500"/>
+            </a:xfrm>
+            <a:prstGeom prst="rect">
+              <a:avLst/>
+            </a:prstGeom>
+          </p:spPr>
+        </p:pic>
+        <p:pic>
+          <p:nvPicPr>
+            <p:cNvPr id="81" name="Picture 80">
+              <a:extLst>
+                <a:ext uri="{FF2B5EF4-FFF2-40B4-BE49-F238E27FC236}">
+                  <a16:creationId xmlns:a16="http://schemas.microsoft.com/office/drawing/2014/main" id="{79EF422E-2792-DE25-3EEF-1874B428C983}"/>
+                </a:ext>
+              </a:extLst>
+            </p:cNvPr>
+            <p:cNvPicPr>
+              <a:picLocks noChangeAspect="1"/>
+            </p:cNvPicPr>
+            <p:nvPr/>
+          </p:nvPicPr>
+          <p:blipFill>
+            <a:blip r:embed="rId14"/>
+            <a:stretch>
+              <a:fillRect/>
+            </a:stretch>
+          </p:blipFill>
+          <p:spPr>
+            <a:xfrm>
+              <a:off x="674567" y="2882893"/>
+              <a:ext cx="203200" cy="177800"/>
+            </a:xfrm>
+            <a:prstGeom prst="rect">
+              <a:avLst/>
+            </a:prstGeom>
+          </p:spPr>
+        </p:pic>
+        <p:pic>
+          <p:nvPicPr>
+            <p:cNvPr id="82" name="Picture 81">
+              <a:extLst>
+                <a:ext uri="{FF2B5EF4-FFF2-40B4-BE49-F238E27FC236}">
+                  <a16:creationId xmlns:a16="http://schemas.microsoft.com/office/drawing/2014/main" id="{D12611B9-C17C-C1C4-44E4-1778662FC05A}"/>
+                </a:ext>
+              </a:extLst>
+            </p:cNvPr>
+            <p:cNvPicPr>
+              <a:picLocks noChangeAspect="1"/>
+            </p:cNvPicPr>
+            <p:nvPr/>
+          </p:nvPicPr>
+          <p:blipFill>
+            <a:blip r:embed="rId15"/>
+            <a:stretch>
+              <a:fillRect/>
+            </a:stretch>
+          </p:blipFill>
+          <p:spPr>
+            <a:xfrm>
+              <a:off x="4051444" y="4796764"/>
+              <a:ext cx="190500" cy="177800"/>
+            </a:xfrm>
+            <a:prstGeom prst="rect">
+              <a:avLst/>
+            </a:prstGeom>
+          </p:spPr>
+        </p:pic>
+        <p:pic>
+          <p:nvPicPr>
+            <p:cNvPr id="83" name="Picture 82">
+              <a:extLst>
+                <a:ext uri="{FF2B5EF4-FFF2-40B4-BE49-F238E27FC236}">
+                  <a16:creationId xmlns:a16="http://schemas.microsoft.com/office/drawing/2014/main" id="{501CD41C-F66D-AEF2-910D-CF77961EA4E3}"/>
+                </a:ext>
+              </a:extLst>
+            </p:cNvPr>
+            <p:cNvPicPr>
+              <a:picLocks noChangeAspect="1"/>
+            </p:cNvPicPr>
+            <p:nvPr/>
+          </p:nvPicPr>
+          <p:blipFill>
+            <a:blip r:embed="rId16"/>
+            <a:stretch>
+              <a:fillRect/>
+            </a:stretch>
+          </p:blipFill>
+          <p:spPr>
+            <a:xfrm>
+              <a:off x="4774460" y="5541040"/>
+              <a:ext cx="190500" cy="177800"/>
+            </a:xfrm>
+            <a:prstGeom prst="rect">
+              <a:avLst/>
+            </a:prstGeom>
+          </p:spPr>
+        </p:pic>
+        <p:cxnSp>
+          <p:nvCxnSpPr>
+            <p:cNvPr id="84" name="Straight Arrow Connector 83">
+              <a:extLst>
+                <a:ext uri="{FF2B5EF4-FFF2-40B4-BE49-F238E27FC236}">
+                  <a16:creationId xmlns:a16="http://schemas.microsoft.com/office/drawing/2014/main" id="{8EF47854-16F2-A426-C232-CD1A96BD1CDC}"/>
+                </a:ext>
+              </a:extLst>
+            </p:cNvPr>
+            <p:cNvCxnSpPr>
+              <a:cxnSpLocks/>
+            </p:cNvCxnSpPr>
+            <p:nvPr/>
+          </p:nvCxnSpPr>
+          <p:spPr>
+            <a:xfrm>
+              <a:off x="244517" y="4016904"/>
+              <a:ext cx="2083567" cy="0"/>
+            </a:xfrm>
+            <a:prstGeom prst="straightConnector1">
+              <a:avLst/>
+            </a:prstGeom>
+            <a:ln w="34925">
+              <a:solidFill>
+                <a:srgbClr val="0070C0"/>
+              </a:solidFill>
+              <a:tailEnd type="triangle" w="lg" len="lg"/>
+            </a:ln>
+          </p:spPr>
+          <p:style>
+            <a:lnRef idx="2">
+              <a:schemeClr val="accent1"/>
+            </a:lnRef>
+            <a:fillRef idx="0">
+              <a:schemeClr val="accent1"/>
+            </a:fillRef>
+            <a:effectRef idx="1">
+              <a:schemeClr val="accent1"/>
+            </a:effectRef>
+            <a:fontRef idx="minor">
+              <a:schemeClr val="tx1"/>
+            </a:fontRef>
+          </p:style>
+        </p:cxnSp>
+        <p:pic>
+          <p:nvPicPr>
+            <p:cNvPr id="85" name="Picture 84">
+              <a:extLst>
+                <a:ext uri="{FF2B5EF4-FFF2-40B4-BE49-F238E27FC236}">
+                  <a16:creationId xmlns:a16="http://schemas.microsoft.com/office/drawing/2014/main" id="{E5A0D6FA-B40D-9323-A426-F14AD910765B}"/>
+                </a:ext>
+              </a:extLst>
+            </p:cNvPr>
+            <p:cNvPicPr>
+              <a:picLocks noChangeAspect="1"/>
+            </p:cNvPicPr>
+            <p:nvPr/>
+          </p:nvPicPr>
+          <p:blipFill>
+            <a:blip r:embed="rId3"/>
+            <a:stretch>
+              <a:fillRect/>
+            </a:stretch>
+          </p:blipFill>
+          <p:spPr>
+            <a:xfrm>
+              <a:off x="936208" y="3802529"/>
+              <a:ext cx="271956" cy="145691"/>
+            </a:xfrm>
+            <a:prstGeom prst="rect">
+              <a:avLst/>
+            </a:prstGeom>
+          </p:spPr>
+        </p:pic>
+        <p:pic>
+          <p:nvPicPr>
+            <p:cNvPr id="87" name="Picture 86">
+              <a:extLst>
+                <a:ext uri="{FF2B5EF4-FFF2-40B4-BE49-F238E27FC236}">
+                  <a16:creationId xmlns:a16="http://schemas.microsoft.com/office/drawing/2014/main" id="{AA622491-9BB8-7D95-9488-42AFD47C15B4}"/>
+                </a:ext>
+              </a:extLst>
+            </p:cNvPr>
+            <p:cNvPicPr>
+              <a:picLocks noChangeAspect="1"/>
+            </p:cNvPicPr>
+            <p:nvPr/>
+          </p:nvPicPr>
+          <p:blipFill>
+            <a:blip r:embed="rId10"/>
+            <a:stretch>
+              <a:fillRect/>
+            </a:stretch>
+          </p:blipFill>
+          <p:spPr>
+            <a:xfrm rot="2733373">
+              <a:off x="2627838" y="5552718"/>
+              <a:ext cx="1473200" cy="228600"/>
+            </a:xfrm>
+            <a:prstGeom prst="rect">
+              <a:avLst/>
+            </a:prstGeom>
+          </p:spPr>
+        </p:pic>
+        <p:sp>
+          <p:nvSpPr>
+            <p:cNvPr id="88" name="Freeform 87">
+              <a:extLst>
+                <a:ext uri="{FF2B5EF4-FFF2-40B4-BE49-F238E27FC236}">
+                  <a16:creationId xmlns:a16="http://schemas.microsoft.com/office/drawing/2014/main" id="{26950C82-954B-E46B-36F1-60C59FA979C4}"/>
+                </a:ext>
+              </a:extLst>
+            </p:cNvPr>
+            <p:cNvSpPr/>
+            <p:nvPr/>
+          </p:nvSpPr>
+          <p:spPr>
+            <a:xfrm>
+              <a:off x="691116" y="3136605"/>
+              <a:ext cx="5231219" cy="3774558"/>
+            </a:xfrm>
+            <a:custGeom>
+              <a:avLst/>
+              <a:gdLst>
+                <a:gd name="csX0" fmla="*/ 0 w 5231219"/>
+                <a:gd name="csY0" fmla="*/ 0 h 3774558"/>
+                <a:gd name="csX1" fmla="*/ 3221665 w 5231219"/>
+                <a:gd name="csY1" fmla="*/ 1743739 h 3774558"/>
+                <a:gd name="csX2" fmla="*/ 5231219 w 5231219"/>
+                <a:gd name="csY2" fmla="*/ 3774558 h 3774558"/>
+              </a:gdLst>
+              <a:ahLst/>
+              <a:cxnLst>
+                <a:cxn ang="0">
+                  <a:pos x="csX0" y="csY0"/>
+                </a:cxn>
+                <a:cxn ang="0">
+                  <a:pos x="csX1" y="csY1"/>
+                </a:cxn>
+                <a:cxn ang="0">
+                  <a:pos x="csX2" y="csY2"/>
+                </a:cxn>
+              </a:cxnLst>
+              <a:rect l="l" t="t" r="r" b="b"/>
+              <a:pathLst>
+                <a:path w="5231219" h="3774558">
+                  <a:moveTo>
+                    <a:pt x="0" y="0"/>
+                  </a:moveTo>
+                  <a:lnTo>
+                    <a:pt x="3221665" y="1743739"/>
+                  </a:lnTo>
+                  <a:lnTo>
+                    <a:pt x="5231219" y="3774558"/>
+                  </a:lnTo>
+                </a:path>
+              </a:pathLst>
+            </a:custGeom>
+            <a:noFill/>
+            <a:ln w="25400">
+              <a:solidFill>
+                <a:srgbClr val="0070C0"/>
+              </a:solidFill>
+            </a:ln>
+          </p:spPr>
+          <p:style>
+            <a:lnRef idx="2">
+              <a:schemeClr val="accent1">
+                <a:shade val="15000"/>
+              </a:schemeClr>
+            </a:lnRef>
+            <a:fillRef idx="1">
+              <a:schemeClr val="accent1"/>
+            </a:fillRef>
+            <a:effectRef idx="0">
+              <a:schemeClr val="accent1"/>
+            </a:effectRef>
+            <a:fontRef idx="minor">
+              <a:schemeClr val="lt1"/>
+            </a:fontRef>
+          </p:style>
+          <p:txBody>
+            <a:bodyPr rtlCol="0" anchor="ctr"/>
+            <a:lstStyle/>
+            <a:p>
+              <a:pPr algn="ctr"/>
+              <a:endParaRPr lang="en-US"/>
+            </a:p>
+          </p:txBody>
+        </p:sp>
+        <p:pic>
+          <p:nvPicPr>
+            <p:cNvPr id="75" name="Picture 74">
+              <a:extLst>
+                <a:ext uri="{FF2B5EF4-FFF2-40B4-BE49-F238E27FC236}">
+                  <a16:creationId xmlns:a16="http://schemas.microsoft.com/office/drawing/2014/main" id="{0A0E7FA0-FEB9-7848-F038-27210814EF57}"/>
+                </a:ext>
+              </a:extLst>
+            </p:cNvPr>
+            <p:cNvPicPr>
+              <a:picLocks noChangeAspect="1"/>
+            </p:cNvPicPr>
+            <p:nvPr/>
+          </p:nvPicPr>
+          <p:blipFill>
+            <a:blip r:embed="rId17"/>
+            <a:stretch>
+              <a:fillRect/>
+            </a:stretch>
+          </p:blipFill>
+          <p:spPr>
+            <a:xfrm>
+              <a:off x="1916965" y="4545866"/>
+              <a:ext cx="2247900" cy="190500"/>
+            </a:xfrm>
+            <a:prstGeom prst="rect">
+              <a:avLst/>
+            </a:prstGeom>
+            <a:solidFill>
+              <a:schemeClr val="bg1"/>
+            </a:solidFill>
+          </p:spPr>
+        </p:pic>
+      </p:grpSp>
+    </p:spTree>
+    <p:extLst>
+      <p:ext uri="{BB962C8B-B14F-4D97-AF65-F5344CB8AC3E}">
+        <p14:creationId xmlns:p14="http://schemas.microsoft.com/office/powerpoint/2010/main" val="33092601"/>
+      </p:ext>
+    </p:extLst>
+  </p:cSld>
+  <p:clrMapOvr>
+    <a:masterClrMapping/>
+  </p:clrMapOvr>
+</p:sld>
+</file>
+
+<file path=ppt/slides/slide4.xml><?xml version="1.0" encoding="utf-8"?>
+<p:sld xmlns:a="http://schemas.openxmlformats.org/drawingml/2006/main" xmlns:r="http://schemas.openxmlformats.org/officeDocument/2006/relationships" xmlns:p="http://schemas.openxmlformats.org/presentationml/2006/main">
+  <p:cSld>
+    <p:spTree>
+      <p:nvGrpSpPr>
+        <p:cNvPr id="1" name="">
+          <a:extLst>
+            <a:ext uri="{FF2B5EF4-FFF2-40B4-BE49-F238E27FC236}">
+              <a16:creationId xmlns:a16="http://schemas.microsoft.com/office/drawing/2014/main" id="{4FD04416-F391-082E-5D82-5989AACCACCA}"/>
+            </a:ext>
+          </a:extLst>
+        </p:cNvPr>
+        <p:cNvGrpSpPr/>
+        <p:nvPr/>
+      </p:nvGrpSpPr>
+      <p:grpSpPr>
+        <a:xfrm>
+          <a:off x="0" y="0"/>
+          <a:ext cx="0" cy="0"/>
+          <a:chOff x="0" y="0"/>
+          <a:chExt cx="0" cy="0"/>
+        </a:xfrm>
+      </p:grpSpPr>
+      <p:grpSp>
+        <p:nvGrpSpPr>
+          <p:cNvPr id="19" name="Group 18">
+            <a:extLst>
+              <a:ext uri="{FF2B5EF4-FFF2-40B4-BE49-F238E27FC236}">
+                <a16:creationId xmlns:a16="http://schemas.microsoft.com/office/drawing/2014/main" id="{1F496F00-5674-F67D-8BE9-CBEEF6CB192C}"/>
+              </a:ext>
+            </a:extLst>
+          </p:cNvPr>
+          <p:cNvGrpSpPr/>
+          <p:nvPr/>
+        </p:nvGrpSpPr>
+        <p:grpSpPr>
+          <a:xfrm>
+            <a:off x="680484" y="616688"/>
+            <a:ext cx="7857458" cy="6283842"/>
+            <a:chOff x="680484" y="616688"/>
+            <a:chExt cx="7857458" cy="6283842"/>
+          </a:xfrm>
+        </p:grpSpPr>
+        <p:sp>
+          <p:nvSpPr>
+            <p:cNvPr id="7" name="Rectangle 6">
+              <a:extLst>
+                <a:ext uri="{FF2B5EF4-FFF2-40B4-BE49-F238E27FC236}">
+                  <a16:creationId xmlns:a16="http://schemas.microsoft.com/office/drawing/2014/main" id="{6A8FFE7B-279A-967D-858E-02F48046941A}"/>
+                </a:ext>
+              </a:extLst>
+            </p:cNvPr>
+            <p:cNvSpPr/>
+            <p:nvPr/>
+          </p:nvSpPr>
+          <p:spPr>
+            <a:xfrm>
+              <a:off x="712379" y="4869726"/>
+              <a:ext cx="7825563" cy="1998277"/>
+            </a:xfrm>
+            <a:prstGeom prst="rect">
+              <a:avLst/>
+            </a:prstGeom>
+            <a:solidFill>
+              <a:srgbClr val="FFFF00"/>
+            </a:solidFill>
+            <a:ln>
+              <a:noFill/>
+            </a:ln>
+          </p:spPr>
+          <p:style>
+            <a:lnRef idx="2">
+              <a:schemeClr val="accent1">
+                <a:shade val="15000"/>
+              </a:schemeClr>
+            </a:lnRef>
+            <a:fillRef idx="1">
+              <a:schemeClr val="accent1"/>
+            </a:fillRef>
+            <a:effectRef idx="0">
+              <a:schemeClr val="accent1"/>
+            </a:effectRef>
+            <a:fontRef idx="minor">
+              <a:schemeClr val="lt1"/>
+            </a:fontRef>
+          </p:style>
+          <p:txBody>
+            <a:bodyPr rtlCol="0" anchor="ctr"/>
+            <a:lstStyle/>
+            <a:p>
+              <a:pPr algn="ctr"/>
+              <a:endParaRPr lang="en-US" b="1" dirty="0"/>
+            </a:p>
+          </p:txBody>
+        </p:sp>
+        <p:sp>
+          <p:nvSpPr>
+            <p:cNvPr id="6" name="Rectangle 5">
+              <a:extLst>
+                <a:ext uri="{FF2B5EF4-FFF2-40B4-BE49-F238E27FC236}">
+                  <a16:creationId xmlns:a16="http://schemas.microsoft.com/office/drawing/2014/main" id="{AED69746-09BE-47B5-ABFC-B86ADC33F804}"/>
+                </a:ext>
+              </a:extLst>
+            </p:cNvPr>
+            <p:cNvSpPr/>
+            <p:nvPr/>
+          </p:nvSpPr>
+          <p:spPr>
+            <a:xfrm>
+              <a:off x="712378" y="3121662"/>
+              <a:ext cx="7825563" cy="1756917"/>
+            </a:xfrm>
+            <a:prstGeom prst="rect">
+              <a:avLst/>
+            </a:prstGeom>
+            <a:solidFill>
+              <a:srgbClr val="941100">
+                <a:alpha val="15000"/>
+              </a:srgbClr>
+            </a:solidFill>
+            <a:ln>
+              <a:noFill/>
+            </a:ln>
+          </p:spPr>
+          <p:style>
+            <a:lnRef idx="2">
+              <a:schemeClr val="accent1">
+                <a:shade val="15000"/>
+              </a:schemeClr>
+            </a:lnRef>
+            <a:fillRef idx="1">
+              <a:schemeClr val="accent1"/>
+            </a:fillRef>
+            <a:effectRef idx="0">
+              <a:schemeClr val="accent1"/>
+            </a:effectRef>
+            <a:fontRef idx="minor">
+              <a:schemeClr val="lt1"/>
+            </a:fontRef>
+          </p:style>
+          <p:txBody>
+            <a:bodyPr rtlCol="0" anchor="ctr"/>
+            <a:lstStyle/>
+            <a:p>
+              <a:pPr algn="ctr"/>
+              <a:endParaRPr lang="en-US" dirty="0"/>
+            </a:p>
+          </p:txBody>
+        </p:sp>
+        <p:sp>
+          <p:nvSpPr>
+            <p:cNvPr id="10" name="Freeform 9">
+              <a:extLst>
+                <a:ext uri="{FF2B5EF4-FFF2-40B4-BE49-F238E27FC236}">
+                  <a16:creationId xmlns:a16="http://schemas.microsoft.com/office/drawing/2014/main" id="{CAFA469E-510A-99F0-B261-2DBA9891E83C}"/>
+                </a:ext>
+              </a:extLst>
+            </p:cNvPr>
+            <p:cNvSpPr/>
+            <p:nvPr/>
+          </p:nvSpPr>
+          <p:spPr>
+            <a:xfrm>
+              <a:off x="1358917" y="3128165"/>
+              <a:ext cx="4159374" cy="2698463"/>
+            </a:xfrm>
+            <a:custGeom>
+              <a:avLst/>
+              <a:gdLst>
+                <a:gd name="csX0" fmla="*/ 0 w 3710763"/>
+                <a:gd name="csY0" fmla="*/ 0 h 2264734"/>
+                <a:gd name="csX1" fmla="*/ 1084521 w 3710763"/>
+                <a:gd name="csY1" fmla="*/ 1084520 h 2264734"/>
+                <a:gd name="csX2" fmla="*/ 3710763 w 3710763"/>
+                <a:gd name="csY2" fmla="*/ 2264734 h 2264734"/>
+                <a:gd name="csX3" fmla="*/ 3115340 w 3710763"/>
+                <a:gd name="csY3" fmla="*/ 1669311 h 2264734"/>
+                <a:gd name="csX4" fmla="*/ 0 w 3710763"/>
+                <a:gd name="csY4" fmla="*/ 0 h 2264734"/>
+                <a:gd name="csX0" fmla="*/ 0 w 3710763"/>
+                <a:gd name="csY0" fmla="*/ 0 h 2264734"/>
+                <a:gd name="csX1" fmla="*/ 1605516 w 3710763"/>
+                <a:gd name="csY1" fmla="*/ 1648046 h 2264734"/>
+                <a:gd name="csX2" fmla="*/ 3710763 w 3710763"/>
+                <a:gd name="csY2" fmla="*/ 2264734 h 2264734"/>
+                <a:gd name="csX3" fmla="*/ 3115340 w 3710763"/>
+                <a:gd name="csY3" fmla="*/ 1669311 h 2264734"/>
+                <a:gd name="csX4" fmla="*/ 0 w 3710763"/>
+                <a:gd name="csY4" fmla="*/ 0 h 2264734"/>
+                <a:gd name="csX0" fmla="*/ 0 w 4008475"/>
+                <a:gd name="csY0" fmla="*/ 0 h 2573079"/>
+                <a:gd name="csX1" fmla="*/ 1605516 w 4008475"/>
+                <a:gd name="csY1" fmla="*/ 1648046 h 2573079"/>
+                <a:gd name="csX2" fmla="*/ 4008475 w 4008475"/>
+                <a:gd name="csY2" fmla="*/ 2573079 h 2573079"/>
+                <a:gd name="csX3" fmla="*/ 3115340 w 4008475"/>
+                <a:gd name="csY3" fmla="*/ 1669311 h 2573079"/>
+                <a:gd name="csX4" fmla="*/ 0 w 4008475"/>
+                <a:gd name="csY4" fmla="*/ 0 h 2573079"/>
+                <a:gd name="csX0" fmla="*/ 0 w 4125433"/>
+                <a:gd name="csY0" fmla="*/ 0 h 2636874"/>
+                <a:gd name="csX1" fmla="*/ 1722474 w 4125433"/>
+                <a:gd name="csY1" fmla="*/ 1711841 h 2636874"/>
+                <a:gd name="csX2" fmla="*/ 4125433 w 4125433"/>
+                <a:gd name="csY2" fmla="*/ 2636874 h 2636874"/>
+                <a:gd name="csX3" fmla="*/ 3232298 w 4125433"/>
+                <a:gd name="csY3" fmla="*/ 1733106 h 2636874"/>
+                <a:gd name="csX4" fmla="*/ 0 w 4125433"/>
+                <a:gd name="csY4" fmla="*/ 0 h 2636874"/>
+                <a:gd name="csX0" fmla="*/ 0 w 4104168"/>
+                <a:gd name="csY0" fmla="*/ 0 h 2647507"/>
+                <a:gd name="csX1" fmla="*/ 1701209 w 4104168"/>
+                <a:gd name="csY1" fmla="*/ 1722474 h 2647507"/>
+                <a:gd name="csX2" fmla="*/ 4104168 w 4104168"/>
+                <a:gd name="csY2" fmla="*/ 2647507 h 2647507"/>
+                <a:gd name="csX3" fmla="*/ 3211033 w 4104168"/>
+                <a:gd name="csY3" fmla="*/ 1743739 h 2647507"/>
+                <a:gd name="csX4" fmla="*/ 0 w 4104168"/>
+                <a:gd name="csY4" fmla="*/ 0 h 2647507"/>
+                <a:gd name="csX0" fmla="*/ 0 w 4104168"/>
+                <a:gd name="csY0" fmla="*/ 0 h 2647507"/>
+                <a:gd name="csX1" fmla="*/ 1701209 w 4104168"/>
+                <a:gd name="csY1" fmla="*/ 1722474 h 2647507"/>
+                <a:gd name="csX2" fmla="*/ 4104168 w 4104168"/>
+                <a:gd name="csY2" fmla="*/ 2647507 h 2647507"/>
+                <a:gd name="csX3" fmla="*/ 2562447 w 4104168"/>
+                <a:gd name="csY3" fmla="*/ 1116418 h 2647507"/>
+                <a:gd name="csX4" fmla="*/ 0 w 4104168"/>
+                <a:gd name="csY4" fmla="*/ 0 h 2647507"/>
+                <a:gd name="csX0" fmla="*/ 0 w 4104168"/>
+                <a:gd name="csY0" fmla="*/ 0 h 2647507"/>
+                <a:gd name="csX1" fmla="*/ 1701209 w 4104168"/>
+                <a:gd name="csY1" fmla="*/ 1722474 h 2647507"/>
+                <a:gd name="csX2" fmla="*/ 4104168 w 4104168"/>
+                <a:gd name="csY2" fmla="*/ 2647507 h 2647507"/>
+                <a:gd name="csX3" fmla="*/ 2006401 w 4104168"/>
+                <a:gd name="csY3" fmla="*/ 542671 h 2647507"/>
+                <a:gd name="csX4" fmla="*/ 0 w 4104168"/>
+                <a:gd name="csY4" fmla="*/ 0 h 2647507"/>
+                <a:gd name="csX0" fmla="*/ 0 w 4104168"/>
+                <a:gd name="csY0" fmla="*/ 0 h 2647507"/>
+                <a:gd name="csX1" fmla="*/ 1701209 w 4104168"/>
+                <a:gd name="csY1" fmla="*/ 1722474 h 2647507"/>
+                <a:gd name="csX2" fmla="*/ 4104168 w 4104168"/>
+                <a:gd name="csY2" fmla="*/ 2647507 h 2647507"/>
+                <a:gd name="csX3" fmla="*/ 1681167 w 4104168"/>
+                <a:gd name="csY3" fmla="*/ 229718 h 2647507"/>
+                <a:gd name="csX4" fmla="*/ 0 w 4104168"/>
+                <a:gd name="csY4" fmla="*/ 0 h 2647507"/>
+              </a:gdLst>
+              <a:ahLst/>
+              <a:cxnLst>
+                <a:cxn ang="0">
+                  <a:pos x="csX0" y="csY0"/>
+                </a:cxn>
+                <a:cxn ang="0">
+                  <a:pos x="csX1" y="csY1"/>
+                </a:cxn>
+                <a:cxn ang="0">
+                  <a:pos x="csX2" y="csY2"/>
+                </a:cxn>
+                <a:cxn ang="0">
+                  <a:pos x="csX3" y="csY3"/>
+                </a:cxn>
+                <a:cxn ang="0">
+                  <a:pos x="csX4" y="csY4"/>
+                </a:cxn>
+              </a:cxnLst>
+              <a:rect l="l" t="t" r="r" b="b"/>
+              <a:pathLst>
+                <a:path w="4104168" h="2647507">
+                  <a:moveTo>
+                    <a:pt x="0" y="0"/>
+                  </a:moveTo>
+                  <a:lnTo>
+                    <a:pt x="1701209" y="1722474"/>
+                  </a:lnTo>
+                  <a:lnTo>
+                    <a:pt x="4104168" y="2647507"/>
+                  </a:lnTo>
+                  <a:lnTo>
+                    <a:pt x="1681167" y="229718"/>
+                  </a:lnTo>
+                  <a:lnTo>
+                    <a:pt x="0" y="0"/>
+                  </a:lnTo>
+                  <a:close/>
+                </a:path>
+              </a:pathLst>
+            </a:custGeom>
+            <a:solidFill>
+              <a:schemeClr val="accent1">
+                <a:lumMod val="20000"/>
+                <a:lumOff val="80000"/>
+                <a:alpha val="55000"/>
+              </a:schemeClr>
+            </a:solidFill>
+          </p:spPr>
+          <p:style>
+            <a:lnRef idx="2">
+              <a:schemeClr val="accent1">
+                <a:shade val="15000"/>
+              </a:schemeClr>
+            </a:lnRef>
+            <a:fillRef idx="1">
+              <a:schemeClr val="accent1"/>
+            </a:fillRef>
+            <a:effectRef idx="0">
+              <a:schemeClr val="accent1"/>
+            </a:effectRef>
+            <a:fontRef idx="minor">
+              <a:schemeClr val="lt1"/>
+            </a:fontRef>
+          </p:style>
+          <p:txBody>
+            <a:bodyPr rtlCol="0" anchor="ctr"/>
+            <a:lstStyle/>
+            <a:p>
+              <a:pPr algn="ctr"/>
+              <a:endParaRPr lang="en-US" dirty="0"/>
+            </a:p>
+          </p:txBody>
+        </p:sp>
+        <p:sp>
+          <p:nvSpPr>
+            <p:cNvPr id="8" name="Freeform 7">
+              <a:extLst>
+                <a:ext uri="{FF2B5EF4-FFF2-40B4-BE49-F238E27FC236}">
+                  <a16:creationId xmlns:a16="http://schemas.microsoft.com/office/drawing/2014/main" id="{EC8EB886-A6D5-3B94-6C6A-71588B7F13B4}"/>
+                </a:ext>
+              </a:extLst>
+            </p:cNvPr>
+            <p:cNvSpPr/>
+            <p:nvPr/>
+          </p:nvSpPr>
+          <p:spPr>
+            <a:xfrm>
+              <a:off x="1344742" y="3113990"/>
+              <a:ext cx="4159374" cy="2698463"/>
+            </a:xfrm>
+            <a:custGeom>
+              <a:avLst/>
+              <a:gdLst>
+                <a:gd name="csX0" fmla="*/ 0 w 3710763"/>
+                <a:gd name="csY0" fmla="*/ 0 h 2264734"/>
+                <a:gd name="csX1" fmla="*/ 1084521 w 3710763"/>
+                <a:gd name="csY1" fmla="*/ 1084520 h 2264734"/>
+                <a:gd name="csX2" fmla="*/ 3710763 w 3710763"/>
+                <a:gd name="csY2" fmla="*/ 2264734 h 2264734"/>
+                <a:gd name="csX3" fmla="*/ 3115340 w 3710763"/>
+                <a:gd name="csY3" fmla="*/ 1669311 h 2264734"/>
+                <a:gd name="csX4" fmla="*/ 0 w 3710763"/>
+                <a:gd name="csY4" fmla="*/ 0 h 2264734"/>
+                <a:gd name="csX0" fmla="*/ 0 w 3710763"/>
+                <a:gd name="csY0" fmla="*/ 0 h 2264734"/>
+                <a:gd name="csX1" fmla="*/ 1605516 w 3710763"/>
+                <a:gd name="csY1" fmla="*/ 1648046 h 2264734"/>
+                <a:gd name="csX2" fmla="*/ 3710763 w 3710763"/>
+                <a:gd name="csY2" fmla="*/ 2264734 h 2264734"/>
+                <a:gd name="csX3" fmla="*/ 3115340 w 3710763"/>
+                <a:gd name="csY3" fmla="*/ 1669311 h 2264734"/>
+                <a:gd name="csX4" fmla="*/ 0 w 3710763"/>
+                <a:gd name="csY4" fmla="*/ 0 h 2264734"/>
+                <a:gd name="csX0" fmla="*/ 0 w 4008475"/>
+                <a:gd name="csY0" fmla="*/ 0 h 2573079"/>
+                <a:gd name="csX1" fmla="*/ 1605516 w 4008475"/>
+                <a:gd name="csY1" fmla="*/ 1648046 h 2573079"/>
+                <a:gd name="csX2" fmla="*/ 4008475 w 4008475"/>
+                <a:gd name="csY2" fmla="*/ 2573079 h 2573079"/>
+                <a:gd name="csX3" fmla="*/ 3115340 w 4008475"/>
+                <a:gd name="csY3" fmla="*/ 1669311 h 2573079"/>
+                <a:gd name="csX4" fmla="*/ 0 w 4008475"/>
+                <a:gd name="csY4" fmla="*/ 0 h 2573079"/>
+                <a:gd name="csX0" fmla="*/ 0 w 4125433"/>
+                <a:gd name="csY0" fmla="*/ 0 h 2636874"/>
+                <a:gd name="csX1" fmla="*/ 1722474 w 4125433"/>
+                <a:gd name="csY1" fmla="*/ 1711841 h 2636874"/>
+                <a:gd name="csX2" fmla="*/ 4125433 w 4125433"/>
+                <a:gd name="csY2" fmla="*/ 2636874 h 2636874"/>
+                <a:gd name="csX3" fmla="*/ 3232298 w 4125433"/>
+                <a:gd name="csY3" fmla="*/ 1733106 h 2636874"/>
+                <a:gd name="csX4" fmla="*/ 0 w 4125433"/>
+                <a:gd name="csY4" fmla="*/ 0 h 2636874"/>
+                <a:gd name="csX0" fmla="*/ 0 w 4104168"/>
+                <a:gd name="csY0" fmla="*/ 0 h 2647507"/>
+                <a:gd name="csX1" fmla="*/ 1701209 w 4104168"/>
+                <a:gd name="csY1" fmla="*/ 1722474 h 2647507"/>
+                <a:gd name="csX2" fmla="*/ 4104168 w 4104168"/>
+                <a:gd name="csY2" fmla="*/ 2647507 h 2647507"/>
+                <a:gd name="csX3" fmla="*/ 3211033 w 4104168"/>
+                <a:gd name="csY3" fmla="*/ 1743739 h 2647507"/>
+                <a:gd name="csX4" fmla="*/ 0 w 4104168"/>
+                <a:gd name="csY4" fmla="*/ 0 h 2647507"/>
+                <a:gd name="csX0" fmla="*/ 0 w 4104168"/>
+                <a:gd name="csY0" fmla="*/ 0 h 2647507"/>
+                <a:gd name="csX1" fmla="*/ 1701209 w 4104168"/>
+                <a:gd name="csY1" fmla="*/ 1722474 h 2647507"/>
+                <a:gd name="csX2" fmla="*/ 4104168 w 4104168"/>
+                <a:gd name="csY2" fmla="*/ 2647507 h 2647507"/>
+                <a:gd name="csX3" fmla="*/ 2562447 w 4104168"/>
+                <a:gd name="csY3" fmla="*/ 1116418 h 2647507"/>
+                <a:gd name="csX4" fmla="*/ 0 w 4104168"/>
+                <a:gd name="csY4" fmla="*/ 0 h 2647507"/>
+                <a:gd name="csX0" fmla="*/ 0 w 4104168"/>
+                <a:gd name="csY0" fmla="*/ 0 h 2647507"/>
+                <a:gd name="csX1" fmla="*/ 1701209 w 4104168"/>
+                <a:gd name="csY1" fmla="*/ 1722474 h 2647507"/>
+                <a:gd name="csX2" fmla="*/ 4104168 w 4104168"/>
+                <a:gd name="csY2" fmla="*/ 2647507 h 2647507"/>
+                <a:gd name="csX3" fmla="*/ 2006401 w 4104168"/>
+                <a:gd name="csY3" fmla="*/ 542671 h 2647507"/>
+                <a:gd name="csX4" fmla="*/ 0 w 4104168"/>
+                <a:gd name="csY4" fmla="*/ 0 h 2647507"/>
+              </a:gdLst>
+              <a:ahLst/>
+              <a:cxnLst>
+                <a:cxn ang="0">
+                  <a:pos x="csX0" y="csY0"/>
+                </a:cxn>
+                <a:cxn ang="0">
+                  <a:pos x="csX1" y="csY1"/>
+                </a:cxn>
+                <a:cxn ang="0">
+                  <a:pos x="csX2" y="csY2"/>
+                </a:cxn>
+                <a:cxn ang="0">
+                  <a:pos x="csX3" y="csY3"/>
+                </a:cxn>
+                <a:cxn ang="0">
+                  <a:pos x="csX4" y="csY4"/>
+                </a:cxn>
+              </a:cxnLst>
+              <a:rect l="l" t="t" r="r" b="b"/>
+              <a:pathLst>
+                <a:path w="4104168" h="2647507">
+                  <a:moveTo>
+                    <a:pt x="0" y="0"/>
+                  </a:moveTo>
+                  <a:lnTo>
+                    <a:pt x="1701209" y="1722474"/>
+                  </a:lnTo>
+                  <a:lnTo>
+                    <a:pt x="4104168" y="2647507"/>
+                  </a:lnTo>
+                  <a:lnTo>
+                    <a:pt x="2006401" y="542671"/>
+                  </a:lnTo>
+                  <a:lnTo>
+                    <a:pt x="0" y="0"/>
+                  </a:lnTo>
+                  <a:close/>
+                </a:path>
+              </a:pathLst>
+            </a:custGeom>
+            <a:solidFill>
+              <a:schemeClr val="accent1">
+                <a:lumMod val="20000"/>
+                <a:lumOff val="80000"/>
+                <a:alpha val="55000"/>
+              </a:schemeClr>
+            </a:solidFill>
+          </p:spPr>
+          <p:style>
+            <a:lnRef idx="2">
+              <a:schemeClr val="accent1">
+                <a:shade val="15000"/>
+              </a:schemeClr>
+            </a:lnRef>
+            <a:fillRef idx="1">
+              <a:schemeClr val="accent1"/>
+            </a:fillRef>
+            <a:effectRef idx="0">
+              <a:schemeClr val="accent1"/>
+            </a:effectRef>
+            <a:fontRef idx="minor">
+              <a:schemeClr val="lt1"/>
+            </a:fontRef>
+          </p:style>
+          <p:txBody>
+            <a:bodyPr rtlCol="0" anchor="ctr"/>
+            <a:lstStyle/>
+            <a:p>
+              <a:pPr algn="ctr"/>
+              <a:endParaRPr lang="en-US" dirty="0"/>
+            </a:p>
+          </p:txBody>
+        </p:sp>
+        <p:sp>
+          <p:nvSpPr>
+            <p:cNvPr id="71" name="Freeform 70">
+              <a:extLst>
+                <a:ext uri="{FF2B5EF4-FFF2-40B4-BE49-F238E27FC236}">
+                  <a16:creationId xmlns:a16="http://schemas.microsoft.com/office/drawing/2014/main" id="{726B6DD1-8AEE-B3AA-0FB2-531935034683}"/>
+                </a:ext>
+              </a:extLst>
+            </p:cNvPr>
+            <p:cNvSpPr/>
+            <p:nvPr/>
+          </p:nvSpPr>
+          <p:spPr>
+            <a:xfrm>
+              <a:off x="1371602" y="3136604"/>
+              <a:ext cx="4104168" cy="2647507"/>
+            </a:xfrm>
+            <a:custGeom>
+              <a:avLst/>
+              <a:gdLst>
+                <a:gd name="csX0" fmla="*/ 0 w 3710763"/>
+                <a:gd name="csY0" fmla="*/ 0 h 2264734"/>
+                <a:gd name="csX1" fmla="*/ 1084521 w 3710763"/>
+                <a:gd name="csY1" fmla="*/ 1084520 h 2264734"/>
+                <a:gd name="csX2" fmla="*/ 3710763 w 3710763"/>
+                <a:gd name="csY2" fmla="*/ 2264734 h 2264734"/>
+                <a:gd name="csX3" fmla="*/ 3115340 w 3710763"/>
+                <a:gd name="csY3" fmla="*/ 1669311 h 2264734"/>
+                <a:gd name="csX4" fmla="*/ 0 w 3710763"/>
+                <a:gd name="csY4" fmla="*/ 0 h 2264734"/>
+                <a:gd name="csX0" fmla="*/ 0 w 3710763"/>
+                <a:gd name="csY0" fmla="*/ 0 h 2264734"/>
+                <a:gd name="csX1" fmla="*/ 1605516 w 3710763"/>
+                <a:gd name="csY1" fmla="*/ 1648046 h 2264734"/>
+                <a:gd name="csX2" fmla="*/ 3710763 w 3710763"/>
+                <a:gd name="csY2" fmla="*/ 2264734 h 2264734"/>
+                <a:gd name="csX3" fmla="*/ 3115340 w 3710763"/>
+                <a:gd name="csY3" fmla="*/ 1669311 h 2264734"/>
+                <a:gd name="csX4" fmla="*/ 0 w 3710763"/>
+                <a:gd name="csY4" fmla="*/ 0 h 2264734"/>
+                <a:gd name="csX0" fmla="*/ 0 w 4008475"/>
+                <a:gd name="csY0" fmla="*/ 0 h 2573079"/>
+                <a:gd name="csX1" fmla="*/ 1605516 w 4008475"/>
+                <a:gd name="csY1" fmla="*/ 1648046 h 2573079"/>
+                <a:gd name="csX2" fmla="*/ 4008475 w 4008475"/>
+                <a:gd name="csY2" fmla="*/ 2573079 h 2573079"/>
+                <a:gd name="csX3" fmla="*/ 3115340 w 4008475"/>
+                <a:gd name="csY3" fmla="*/ 1669311 h 2573079"/>
+                <a:gd name="csX4" fmla="*/ 0 w 4008475"/>
+                <a:gd name="csY4" fmla="*/ 0 h 2573079"/>
+                <a:gd name="csX0" fmla="*/ 0 w 4125433"/>
+                <a:gd name="csY0" fmla="*/ 0 h 2636874"/>
+                <a:gd name="csX1" fmla="*/ 1722474 w 4125433"/>
+                <a:gd name="csY1" fmla="*/ 1711841 h 2636874"/>
+                <a:gd name="csX2" fmla="*/ 4125433 w 4125433"/>
+                <a:gd name="csY2" fmla="*/ 2636874 h 2636874"/>
+                <a:gd name="csX3" fmla="*/ 3232298 w 4125433"/>
+                <a:gd name="csY3" fmla="*/ 1733106 h 2636874"/>
+                <a:gd name="csX4" fmla="*/ 0 w 4125433"/>
+                <a:gd name="csY4" fmla="*/ 0 h 2636874"/>
+                <a:gd name="csX0" fmla="*/ 0 w 4104168"/>
+                <a:gd name="csY0" fmla="*/ 0 h 2647507"/>
+                <a:gd name="csX1" fmla="*/ 1701209 w 4104168"/>
+                <a:gd name="csY1" fmla="*/ 1722474 h 2647507"/>
+                <a:gd name="csX2" fmla="*/ 4104168 w 4104168"/>
+                <a:gd name="csY2" fmla="*/ 2647507 h 2647507"/>
+                <a:gd name="csX3" fmla="*/ 3211033 w 4104168"/>
+                <a:gd name="csY3" fmla="*/ 1743739 h 2647507"/>
+                <a:gd name="csX4" fmla="*/ 0 w 4104168"/>
+                <a:gd name="csY4" fmla="*/ 0 h 2647507"/>
+              </a:gdLst>
+              <a:ahLst/>
+              <a:cxnLst>
+                <a:cxn ang="0">
+                  <a:pos x="csX0" y="csY0"/>
+                </a:cxn>
+                <a:cxn ang="0">
+                  <a:pos x="csX1" y="csY1"/>
+                </a:cxn>
+                <a:cxn ang="0">
+                  <a:pos x="csX2" y="csY2"/>
+                </a:cxn>
+                <a:cxn ang="0">
+                  <a:pos x="csX3" y="csY3"/>
+                </a:cxn>
+                <a:cxn ang="0">
+                  <a:pos x="csX4" y="csY4"/>
+                </a:cxn>
+              </a:cxnLst>
+              <a:rect l="l" t="t" r="r" b="b"/>
+              <a:pathLst>
+                <a:path w="4104168" h="2647507">
+                  <a:moveTo>
+                    <a:pt x="0" y="0"/>
+                  </a:moveTo>
+                  <a:lnTo>
+                    <a:pt x="1701209" y="1722474"/>
+                  </a:lnTo>
+                  <a:lnTo>
+                    <a:pt x="4104168" y="2647507"/>
+                  </a:lnTo>
+                  <a:lnTo>
+                    <a:pt x="3211033" y="1743739"/>
+                  </a:lnTo>
+                  <a:lnTo>
+                    <a:pt x="0" y="0"/>
+                  </a:lnTo>
+                  <a:close/>
+                </a:path>
+              </a:pathLst>
+            </a:custGeom>
+            <a:solidFill>
+              <a:schemeClr val="accent1">
+                <a:lumMod val="20000"/>
+                <a:lumOff val="80000"/>
+              </a:schemeClr>
+            </a:solidFill>
+          </p:spPr>
+          <p:style>
+            <a:lnRef idx="2">
+              <a:schemeClr val="accent1">
+                <a:shade val="15000"/>
+              </a:schemeClr>
+            </a:lnRef>
+            <a:fillRef idx="1">
+              <a:schemeClr val="accent1"/>
+            </a:fillRef>
+            <a:effectRef idx="0">
+              <a:schemeClr val="accent1"/>
+            </a:effectRef>
+            <a:fontRef idx="minor">
+              <a:schemeClr val="lt1"/>
+            </a:fontRef>
+          </p:style>
+          <p:txBody>
+            <a:bodyPr rtlCol="0" anchor="ctr"/>
+            <a:lstStyle/>
+            <a:p>
+              <a:pPr algn="ctr"/>
+              <a:endParaRPr lang="en-US" dirty="0"/>
+            </a:p>
+          </p:txBody>
+        </p:sp>
+        <p:sp>
+          <p:nvSpPr>
+            <p:cNvPr id="4" name="Freeform 3">
+              <a:extLst>
+                <a:ext uri="{FF2B5EF4-FFF2-40B4-BE49-F238E27FC236}">
+                  <a16:creationId xmlns:a16="http://schemas.microsoft.com/office/drawing/2014/main" id="{68204B85-3C9D-DAFF-8452-4BCC57A27249}"/>
+                </a:ext>
+              </a:extLst>
+            </p:cNvPr>
+            <p:cNvSpPr/>
+            <p:nvPr/>
+          </p:nvSpPr>
+          <p:spPr>
+            <a:xfrm>
+              <a:off x="1333786" y="3115364"/>
+              <a:ext cx="4177421" cy="2682918"/>
+            </a:xfrm>
+            <a:custGeom>
+              <a:avLst/>
+              <a:gdLst>
+                <a:gd name="csX0" fmla="*/ 0 w 3710763"/>
+                <a:gd name="csY0" fmla="*/ 0 h 2264734"/>
+                <a:gd name="csX1" fmla="*/ 1084521 w 3710763"/>
+                <a:gd name="csY1" fmla="*/ 1084520 h 2264734"/>
+                <a:gd name="csX2" fmla="*/ 3710763 w 3710763"/>
+                <a:gd name="csY2" fmla="*/ 2264734 h 2264734"/>
+                <a:gd name="csX3" fmla="*/ 3115340 w 3710763"/>
+                <a:gd name="csY3" fmla="*/ 1669311 h 2264734"/>
+                <a:gd name="csX4" fmla="*/ 0 w 3710763"/>
+                <a:gd name="csY4" fmla="*/ 0 h 2264734"/>
+                <a:gd name="csX0" fmla="*/ 0 w 3710763"/>
+                <a:gd name="csY0" fmla="*/ 0 h 2264734"/>
+                <a:gd name="csX1" fmla="*/ 1605516 w 3710763"/>
+                <a:gd name="csY1" fmla="*/ 1648046 h 2264734"/>
+                <a:gd name="csX2" fmla="*/ 3710763 w 3710763"/>
+                <a:gd name="csY2" fmla="*/ 2264734 h 2264734"/>
+                <a:gd name="csX3" fmla="*/ 3115340 w 3710763"/>
+                <a:gd name="csY3" fmla="*/ 1669311 h 2264734"/>
+                <a:gd name="csX4" fmla="*/ 0 w 3710763"/>
+                <a:gd name="csY4" fmla="*/ 0 h 2264734"/>
+                <a:gd name="csX0" fmla="*/ 0 w 4008475"/>
+                <a:gd name="csY0" fmla="*/ 0 h 2573079"/>
+                <a:gd name="csX1" fmla="*/ 1605516 w 4008475"/>
+                <a:gd name="csY1" fmla="*/ 1648046 h 2573079"/>
+                <a:gd name="csX2" fmla="*/ 4008475 w 4008475"/>
+                <a:gd name="csY2" fmla="*/ 2573079 h 2573079"/>
+                <a:gd name="csX3" fmla="*/ 3115340 w 4008475"/>
+                <a:gd name="csY3" fmla="*/ 1669311 h 2573079"/>
+                <a:gd name="csX4" fmla="*/ 0 w 4008475"/>
+                <a:gd name="csY4" fmla="*/ 0 h 2573079"/>
+                <a:gd name="csX0" fmla="*/ 0 w 4125433"/>
+                <a:gd name="csY0" fmla="*/ 0 h 2636874"/>
+                <a:gd name="csX1" fmla="*/ 1722474 w 4125433"/>
+                <a:gd name="csY1" fmla="*/ 1711841 h 2636874"/>
+                <a:gd name="csX2" fmla="*/ 4125433 w 4125433"/>
+                <a:gd name="csY2" fmla="*/ 2636874 h 2636874"/>
+                <a:gd name="csX3" fmla="*/ 3232298 w 4125433"/>
+                <a:gd name="csY3" fmla="*/ 1733106 h 2636874"/>
+                <a:gd name="csX4" fmla="*/ 0 w 4125433"/>
+                <a:gd name="csY4" fmla="*/ 0 h 2636874"/>
+                <a:gd name="csX0" fmla="*/ 0 w 4104168"/>
+                <a:gd name="csY0" fmla="*/ 0 h 2647507"/>
+                <a:gd name="csX1" fmla="*/ 1701209 w 4104168"/>
+                <a:gd name="csY1" fmla="*/ 1722474 h 2647507"/>
+                <a:gd name="csX2" fmla="*/ 4104168 w 4104168"/>
+                <a:gd name="csY2" fmla="*/ 2647507 h 2647507"/>
+                <a:gd name="csX3" fmla="*/ 3211033 w 4104168"/>
+                <a:gd name="csY3" fmla="*/ 1743739 h 2647507"/>
+                <a:gd name="csX4" fmla="*/ 0 w 4104168"/>
+                <a:gd name="csY4" fmla="*/ 0 h 2647507"/>
+                <a:gd name="csX0" fmla="*/ 0 w 4104168"/>
+                <a:gd name="csY0" fmla="*/ 0 h 2647507"/>
+                <a:gd name="csX1" fmla="*/ 1701209 w 4104168"/>
+                <a:gd name="csY1" fmla="*/ 1722474 h 2647507"/>
+                <a:gd name="csX2" fmla="*/ 4104168 w 4104168"/>
+                <a:gd name="csY2" fmla="*/ 2647507 h 2647507"/>
+                <a:gd name="csX3" fmla="*/ 2562447 w 4104168"/>
+                <a:gd name="csY3" fmla="*/ 1116418 h 2647507"/>
+                <a:gd name="csX4" fmla="*/ 0 w 4104168"/>
+                <a:gd name="csY4" fmla="*/ 0 h 2647507"/>
+                <a:gd name="csX0" fmla="*/ 0 w 4104168"/>
+                <a:gd name="csY0" fmla="*/ 0 h 2647507"/>
+                <a:gd name="csX1" fmla="*/ 1701209 w 4104168"/>
+                <a:gd name="csY1" fmla="*/ 1722474 h 2647507"/>
+                <a:gd name="csX2" fmla="*/ 4104168 w 4104168"/>
+                <a:gd name="csY2" fmla="*/ 2647507 h 2647507"/>
+                <a:gd name="csX3" fmla="*/ 2371061 w 4104168"/>
+                <a:gd name="csY3" fmla="*/ 914400 h 2647507"/>
+                <a:gd name="csX4" fmla="*/ 0 w 4104168"/>
+                <a:gd name="csY4" fmla="*/ 0 h 2647507"/>
+                <a:gd name="csX0" fmla="*/ 0 w 4093748"/>
+                <a:gd name="csY0" fmla="*/ 0 h 2668659"/>
+                <a:gd name="csX1" fmla="*/ 1690789 w 4093748"/>
+                <a:gd name="csY1" fmla="*/ 1743626 h 2668659"/>
+                <a:gd name="csX2" fmla="*/ 4093748 w 4093748"/>
+                <a:gd name="csY2" fmla="*/ 2668659 h 2668659"/>
+                <a:gd name="csX3" fmla="*/ 2360641 w 4093748"/>
+                <a:gd name="csY3" fmla="*/ 935552 h 2668659"/>
+                <a:gd name="csX4" fmla="*/ 0 w 4093748"/>
+                <a:gd name="csY4" fmla="*/ 0 h 2668659"/>
+              </a:gdLst>
+              <a:ahLst/>
+              <a:cxnLst>
+                <a:cxn ang="0">
+                  <a:pos x="csX0" y="csY0"/>
+                </a:cxn>
+                <a:cxn ang="0">
+                  <a:pos x="csX1" y="csY1"/>
+                </a:cxn>
+                <a:cxn ang="0">
+                  <a:pos x="csX2" y="csY2"/>
+                </a:cxn>
+                <a:cxn ang="0">
+                  <a:pos x="csX3" y="csY3"/>
+                </a:cxn>
+                <a:cxn ang="0">
+                  <a:pos x="csX4" y="csY4"/>
+                </a:cxn>
+              </a:cxnLst>
+              <a:rect l="l" t="t" r="r" b="b"/>
+              <a:pathLst>
+                <a:path w="4093748" h="2668659">
+                  <a:moveTo>
+                    <a:pt x="0" y="0"/>
+                  </a:moveTo>
+                  <a:lnTo>
+                    <a:pt x="1690789" y="1743626"/>
+                  </a:lnTo>
+                  <a:lnTo>
+                    <a:pt x="4093748" y="2668659"/>
+                  </a:lnTo>
+                  <a:lnTo>
+                    <a:pt x="2360641" y="935552"/>
+                  </a:lnTo>
+                  <a:lnTo>
+                    <a:pt x="0" y="0"/>
+                  </a:lnTo>
+                  <a:close/>
+                </a:path>
+              </a:pathLst>
+            </a:custGeom>
+            <a:solidFill>
+              <a:schemeClr val="accent1">
+                <a:lumMod val="20000"/>
+                <a:lumOff val="80000"/>
+                <a:alpha val="55000"/>
+              </a:schemeClr>
+            </a:solidFill>
+          </p:spPr>
+          <p:style>
+            <a:lnRef idx="2">
+              <a:schemeClr val="accent1">
+                <a:shade val="15000"/>
+              </a:schemeClr>
+            </a:lnRef>
+            <a:fillRef idx="1">
+              <a:schemeClr val="accent1"/>
+            </a:fillRef>
+            <a:effectRef idx="0">
+              <a:schemeClr val="accent1"/>
+            </a:effectRef>
+            <a:fontRef idx="minor">
+              <a:schemeClr val="lt1"/>
+            </a:fontRef>
+          </p:style>
+          <p:txBody>
+            <a:bodyPr rtlCol="0" anchor="ctr"/>
+            <a:lstStyle/>
+            <a:p>
+              <a:pPr algn="ctr"/>
+              <a:endParaRPr lang="en-US" dirty="0"/>
+            </a:p>
+          </p:txBody>
+        </p:sp>
+        <p:cxnSp>
+          <p:nvCxnSpPr>
+            <p:cNvPr id="42" name="Straight Connector 41">
+              <a:extLst>
+                <a:ext uri="{FF2B5EF4-FFF2-40B4-BE49-F238E27FC236}">
+                  <a16:creationId xmlns:a16="http://schemas.microsoft.com/office/drawing/2014/main" id="{225C1897-2A06-02F6-9EB2-4ACA02DA107C}"/>
+                </a:ext>
+              </a:extLst>
+            </p:cNvPr>
+            <p:cNvCxnSpPr>
+              <a:cxnSpLocks/>
+            </p:cNvCxnSpPr>
+            <p:nvPr/>
+          </p:nvCxnSpPr>
+          <p:spPr>
+            <a:xfrm>
+              <a:off x="680484" y="3121660"/>
+              <a:ext cx="7825557" cy="4336"/>
+            </a:xfrm>
+            <a:prstGeom prst="line">
+              <a:avLst/>
+            </a:prstGeom>
+          </p:spPr>
+          <p:style>
+            <a:lnRef idx="2">
+              <a:schemeClr val="accent1"/>
+            </a:lnRef>
+            <a:fillRef idx="0">
+              <a:schemeClr val="accent1"/>
+            </a:fillRef>
+            <a:effectRef idx="1">
+              <a:schemeClr val="accent1"/>
+            </a:effectRef>
+            <a:fontRef idx="minor">
+              <a:schemeClr val="tx1"/>
+            </a:fontRef>
+          </p:style>
+        </p:cxnSp>
+        <p:cxnSp>
+          <p:nvCxnSpPr>
+            <p:cNvPr id="34" name="Straight Arrow Connector 33">
+              <a:extLst>
+                <a:ext uri="{FF2B5EF4-FFF2-40B4-BE49-F238E27FC236}">
+                  <a16:creationId xmlns:a16="http://schemas.microsoft.com/office/drawing/2014/main" id="{059BCD68-6111-7681-BA96-2D692781E441}"/>
+                </a:ext>
+              </a:extLst>
+            </p:cNvPr>
+            <p:cNvCxnSpPr>
+              <a:cxnSpLocks/>
+            </p:cNvCxnSpPr>
+            <p:nvPr/>
+          </p:nvCxnSpPr>
+          <p:spPr>
+            <a:xfrm>
+              <a:off x="985258" y="6267466"/>
+              <a:ext cx="4968976" cy="0"/>
+            </a:xfrm>
+            <a:prstGeom prst="straightConnector1">
+              <a:avLst/>
+            </a:prstGeom>
+            <a:ln w="34925">
+              <a:solidFill>
+                <a:srgbClr val="0070C0"/>
+              </a:solidFill>
+              <a:tailEnd type="triangle" w="lg" len="lg"/>
+            </a:ln>
+          </p:spPr>
+          <p:style>
+            <a:lnRef idx="2">
+              <a:schemeClr val="accent1"/>
+            </a:lnRef>
+            <a:fillRef idx="0">
+              <a:schemeClr val="accent1"/>
+            </a:fillRef>
+            <a:effectRef idx="1">
+              <a:schemeClr val="accent1"/>
+            </a:effectRef>
+            <a:fontRef idx="minor">
+              <a:schemeClr val="tx1"/>
+            </a:fontRef>
+          </p:style>
+        </p:cxnSp>
+        <p:cxnSp>
+          <p:nvCxnSpPr>
+            <p:cNvPr id="36" name="Straight Arrow Connector 35">
+              <a:extLst>
+                <a:ext uri="{FF2B5EF4-FFF2-40B4-BE49-F238E27FC236}">
+                  <a16:creationId xmlns:a16="http://schemas.microsoft.com/office/drawing/2014/main" id="{CA25DAA9-83F8-F72F-D220-4D02049CDA8F}"/>
+                </a:ext>
+              </a:extLst>
+            </p:cNvPr>
+            <p:cNvCxnSpPr>
+              <a:cxnSpLocks/>
+            </p:cNvCxnSpPr>
+            <p:nvPr/>
+          </p:nvCxnSpPr>
+          <p:spPr>
+            <a:xfrm>
+              <a:off x="985258" y="6581339"/>
+              <a:ext cx="6585125" cy="0"/>
+            </a:xfrm>
+            <a:prstGeom prst="straightConnector1">
+              <a:avLst/>
+            </a:prstGeom>
+            <a:ln w="34925">
+              <a:solidFill>
+                <a:srgbClr val="FF0000"/>
+              </a:solidFill>
+              <a:tailEnd type="triangle" w="lg" len="lg"/>
+            </a:ln>
+          </p:spPr>
+          <p:style>
+            <a:lnRef idx="2">
+              <a:schemeClr val="accent1"/>
+            </a:lnRef>
+            <a:fillRef idx="0">
+              <a:schemeClr val="accent1"/>
+            </a:fillRef>
+            <a:effectRef idx="1">
+              <a:schemeClr val="accent1"/>
+            </a:effectRef>
+            <a:fontRef idx="minor">
+              <a:schemeClr val="tx1"/>
+            </a:fontRef>
+          </p:style>
+        </p:cxnSp>
+        <p:pic>
+          <p:nvPicPr>
+            <p:cNvPr id="38" name="Picture 37">
+              <a:extLst>
+                <a:ext uri="{FF2B5EF4-FFF2-40B4-BE49-F238E27FC236}">
+                  <a16:creationId xmlns:a16="http://schemas.microsoft.com/office/drawing/2014/main" id="{73392789-352F-5F63-CA0E-4FB78B11E643}"/>
+                </a:ext>
+              </a:extLst>
+            </p:cNvPr>
+            <p:cNvPicPr>
+              <a:picLocks noChangeAspect="1"/>
+            </p:cNvPicPr>
+            <p:nvPr/>
+          </p:nvPicPr>
+          <p:blipFill>
+            <a:blip r:embed="rId3"/>
+            <a:stretch>
+              <a:fillRect/>
+            </a:stretch>
+          </p:blipFill>
+          <p:spPr>
+            <a:xfrm>
+              <a:off x="1910869" y="6053091"/>
+              <a:ext cx="271956" cy="145691"/>
+            </a:xfrm>
+            <a:prstGeom prst="rect">
+              <a:avLst/>
+            </a:prstGeom>
+          </p:spPr>
+        </p:pic>
+        <p:pic>
+          <p:nvPicPr>
+            <p:cNvPr id="39" name="Picture 38">
+              <a:extLst>
+                <a:ext uri="{FF2B5EF4-FFF2-40B4-BE49-F238E27FC236}">
+                  <a16:creationId xmlns:a16="http://schemas.microsoft.com/office/drawing/2014/main" id="{56698BEB-504B-601C-DB97-B0E2C73E245F}"/>
+                </a:ext>
+              </a:extLst>
+            </p:cNvPr>
+            <p:cNvPicPr>
+              <a:picLocks noChangeAspect="1"/>
+            </p:cNvPicPr>
+            <p:nvPr/>
+          </p:nvPicPr>
+          <p:blipFill>
+            <a:blip r:embed="rId4"/>
+            <a:stretch>
+              <a:fillRect/>
+            </a:stretch>
+          </p:blipFill>
+          <p:spPr>
+            <a:xfrm>
+              <a:off x="2322274" y="6393116"/>
+              <a:ext cx="203967" cy="145691"/>
+            </a:xfrm>
+            <a:prstGeom prst="rect">
+              <a:avLst/>
+            </a:prstGeom>
+          </p:spPr>
+        </p:pic>
+        <p:pic>
+          <p:nvPicPr>
+            <p:cNvPr id="46" name="Picture 45">
+              <a:extLst>
+                <a:ext uri="{FF2B5EF4-FFF2-40B4-BE49-F238E27FC236}">
+                  <a16:creationId xmlns:a16="http://schemas.microsoft.com/office/drawing/2014/main" id="{46B9FB2E-D9A4-E87E-0333-E070C92A4824}"/>
+                </a:ext>
+              </a:extLst>
+            </p:cNvPr>
+            <p:cNvPicPr>
+              <a:picLocks noChangeAspect="1"/>
+            </p:cNvPicPr>
+            <p:nvPr/>
+          </p:nvPicPr>
+          <p:blipFill>
+            <a:blip r:embed="rId5"/>
+            <a:stretch>
+              <a:fillRect/>
+            </a:stretch>
+          </p:blipFill>
+          <p:spPr>
+            <a:xfrm>
+              <a:off x="6184296" y="3615187"/>
+              <a:ext cx="2185364" cy="223393"/>
+            </a:xfrm>
+            <a:prstGeom prst="rect">
+              <a:avLst/>
+            </a:prstGeom>
+          </p:spPr>
+        </p:pic>
+        <p:pic>
+          <p:nvPicPr>
+            <p:cNvPr id="47" name="Picture 46">
+              <a:extLst>
+                <a:ext uri="{FF2B5EF4-FFF2-40B4-BE49-F238E27FC236}">
+                  <a16:creationId xmlns:a16="http://schemas.microsoft.com/office/drawing/2014/main" id="{4D12BEE8-2A3E-F34C-C6F8-4C689A468456}"/>
+                </a:ext>
+              </a:extLst>
+            </p:cNvPr>
+            <p:cNvPicPr>
+              <a:picLocks noChangeAspect="1"/>
+            </p:cNvPicPr>
+            <p:nvPr/>
+          </p:nvPicPr>
+          <p:blipFill>
+            <a:blip r:embed="rId6"/>
+            <a:stretch>
+              <a:fillRect/>
+            </a:stretch>
+          </p:blipFill>
+          <p:spPr>
+            <a:xfrm>
+              <a:off x="7872919" y="4993572"/>
+              <a:ext cx="495349" cy="174829"/>
+            </a:xfrm>
+            <a:prstGeom prst="rect">
+              <a:avLst/>
+            </a:prstGeom>
+          </p:spPr>
+        </p:pic>
+        <p:pic>
+          <p:nvPicPr>
+            <p:cNvPr id="48" name="Picture 47">
+              <a:extLst>
+                <a:ext uri="{FF2B5EF4-FFF2-40B4-BE49-F238E27FC236}">
+                  <a16:creationId xmlns:a16="http://schemas.microsoft.com/office/drawing/2014/main" id="{76EECA26-C499-7D8F-8E03-E40A35B87E88}"/>
+                </a:ext>
+              </a:extLst>
+            </p:cNvPr>
+            <p:cNvPicPr>
+              <a:picLocks noChangeAspect="1"/>
+            </p:cNvPicPr>
+            <p:nvPr/>
+          </p:nvPicPr>
+          <p:blipFill>
+            <a:blip r:embed="rId7"/>
+            <a:stretch>
+              <a:fillRect/>
+            </a:stretch>
+          </p:blipFill>
+          <p:spPr>
+            <a:xfrm>
+              <a:off x="5887505" y="4235733"/>
+              <a:ext cx="2544735" cy="174829"/>
+            </a:xfrm>
+            <a:prstGeom prst="rect">
+              <a:avLst/>
+            </a:prstGeom>
+            <a:solidFill>
+              <a:schemeClr val="bg1"/>
+            </a:solidFill>
+          </p:spPr>
+        </p:pic>
+        <p:sp>
+          <p:nvSpPr>
+            <p:cNvPr id="2" name="Rectangle 1">
+              <a:extLst>
+                <a:ext uri="{FF2B5EF4-FFF2-40B4-BE49-F238E27FC236}">
+                  <a16:creationId xmlns:a16="http://schemas.microsoft.com/office/drawing/2014/main" id="{0566CF8A-D280-49C2-97C1-367C89284E4F}"/>
+                </a:ext>
+              </a:extLst>
+            </p:cNvPr>
+            <p:cNvSpPr/>
+            <p:nvPr/>
+          </p:nvSpPr>
+          <p:spPr>
+            <a:xfrm>
+              <a:off x="712387" y="2750108"/>
+              <a:ext cx="7825550" cy="367217"/>
+            </a:xfrm>
+            <a:prstGeom prst="rect">
+              <a:avLst/>
+            </a:prstGeom>
+            <a:solidFill>
+              <a:srgbClr val="00B0F0">
+                <a:alpha val="15000"/>
+              </a:srgbClr>
+            </a:solidFill>
+            <a:ln>
+              <a:noFill/>
+            </a:ln>
+          </p:spPr>
+          <p:style>
+            <a:lnRef idx="2">
+              <a:schemeClr val="accent1">
+                <a:shade val="15000"/>
+              </a:schemeClr>
+            </a:lnRef>
+            <a:fillRef idx="1">
+              <a:schemeClr val="accent1"/>
+            </a:fillRef>
+            <a:effectRef idx="0">
+              <a:schemeClr val="accent1"/>
+            </a:effectRef>
+            <a:fontRef idx="minor">
+              <a:schemeClr val="lt1"/>
+            </a:fontRef>
+          </p:style>
+          <p:txBody>
+            <a:bodyPr rtlCol="0" anchor="ctr"/>
+            <a:lstStyle/>
+            <a:p>
+              <a:pPr algn="ctr"/>
+              <a:endParaRPr lang="en-US" b="1" dirty="0"/>
+            </a:p>
+          </p:txBody>
+        </p:sp>
+        <p:sp>
+          <p:nvSpPr>
+            <p:cNvPr id="5" name="Freeform 4">
+              <a:extLst>
+                <a:ext uri="{FF2B5EF4-FFF2-40B4-BE49-F238E27FC236}">
+                  <a16:creationId xmlns:a16="http://schemas.microsoft.com/office/drawing/2014/main" id="{2BAA9833-CD1C-8F31-5C49-E89D3CCFB151}"/>
+                </a:ext>
+              </a:extLst>
+            </p:cNvPr>
+            <p:cNvSpPr/>
+            <p:nvPr/>
+          </p:nvSpPr>
+          <p:spPr>
+            <a:xfrm>
+              <a:off x="989484" y="2761550"/>
+              <a:ext cx="4130847" cy="4138979"/>
+            </a:xfrm>
+            <a:custGeom>
+              <a:avLst/>
+              <a:gdLst>
+                <a:gd name="csX0" fmla="*/ 0 w 5401340"/>
+                <a:gd name="csY0" fmla="*/ 0 h 5411972"/>
+                <a:gd name="csX1" fmla="*/ 5401340 w 5401340"/>
+                <a:gd name="csY1" fmla="*/ 5411972 h 5411972"/>
+              </a:gdLst>
+              <a:ahLst/>
+              <a:cxnLst>
+                <a:cxn ang="0">
+                  <a:pos x="csX0" y="csY0"/>
+                </a:cxn>
+                <a:cxn ang="0">
+                  <a:pos x="csX1" y="csY1"/>
+                </a:cxn>
+              </a:cxnLst>
+              <a:rect l="l" t="t" r="r" b="b"/>
+              <a:pathLst>
+                <a:path w="5401340" h="5411972">
+                  <a:moveTo>
+                    <a:pt x="0" y="0"/>
+                  </a:moveTo>
+                  <a:lnTo>
+                    <a:pt x="5401340" y="5411972"/>
+                  </a:lnTo>
+                </a:path>
+              </a:pathLst>
+            </a:custGeom>
+          </p:spPr>
+          <p:style>
+            <a:lnRef idx="1">
+              <a:schemeClr val="dk1"/>
+            </a:lnRef>
+            <a:fillRef idx="0">
+              <a:schemeClr val="dk1"/>
+            </a:fillRef>
+            <a:effectRef idx="0">
+              <a:schemeClr val="dk1"/>
+            </a:effectRef>
+            <a:fontRef idx="minor">
+              <a:schemeClr val="tx1"/>
+            </a:fontRef>
+          </p:style>
+          <p:txBody>
+            <a:bodyPr rtlCol="0" anchor="ctr"/>
+            <a:lstStyle/>
+            <a:p>
+              <a:pPr algn="ctr"/>
+              <a:endParaRPr lang="en-US"/>
+            </a:p>
+          </p:txBody>
+        </p:sp>
+        <p:sp>
+          <p:nvSpPr>
+            <p:cNvPr id="24" name="Freeform 23">
+              <a:extLst>
+                <a:ext uri="{FF2B5EF4-FFF2-40B4-BE49-F238E27FC236}">
+                  <a16:creationId xmlns:a16="http://schemas.microsoft.com/office/drawing/2014/main" id="{1B9A2569-E19A-F71A-CA88-393EAB7E4187}"/>
+                </a:ext>
+              </a:extLst>
+            </p:cNvPr>
+            <p:cNvSpPr/>
+            <p:nvPr/>
+          </p:nvSpPr>
+          <p:spPr>
+            <a:xfrm>
+              <a:off x="942223" y="1233389"/>
+              <a:ext cx="5638316" cy="5649416"/>
+            </a:xfrm>
+            <a:custGeom>
+              <a:avLst/>
+              <a:gdLst>
+                <a:gd name="csX0" fmla="*/ 0 w 5401340"/>
+                <a:gd name="csY0" fmla="*/ 0 h 5411972"/>
+                <a:gd name="csX1" fmla="*/ 5401340 w 5401340"/>
+                <a:gd name="csY1" fmla="*/ 5411972 h 5411972"/>
+              </a:gdLst>
+              <a:ahLst/>
+              <a:cxnLst>
+                <a:cxn ang="0">
+                  <a:pos x="csX0" y="csY0"/>
+                </a:cxn>
+                <a:cxn ang="0">
+                  <a:pos x="csX1" y="csY1"/>
+                </a:cxn>
+              </a:cxnLst>
+              <a:rect l="l" t="t" r="r" b="b"/>
+              <a:pathLst>
+                <a:path w="5401340" h="5411972">
+                  <a:moveTo>
+                    <a:pt x="0" y="0"/>
+                  </a:moveTo>
+                  <a:lnTo>
+                    <a:pt x="5401340" y="5411972"/>
+                  </a:lnTo>
+                </a:path>
+              </a:pathLst>
+            </a:custGeom>
+          </p:spPr>
+          <p:style>
+            <a:lnRef idx="1">
+              <a:schemeClr val="dk1"/>
+            </a:lnRef>
+            <a:fillRef idx="0">
+              <a:schemeClr val="dk1"/>
+            </a:fillRef>
+            <a:effectRef idx="0">
+              <a:schemeClr val="dk1"/>
+            </a:effectRef>
+            <a:fontRef idx="minor">
+              <a:schemeClr val="tx1"/>
+            </a:fontRef>
+          </p:style>
+          <p:txBody>
+            <a:bodyPr rtlCol="0" anchor="ctr"/>
+            <a:lstStyle/>
+            <a:p>
+              <a:pPr algn="ctr"/>
+              <a:endParaRPr lang="en-US"/>
+            </a:p>
+          </p:txBody>
+        </p:sp>
+        <p:cxnSp>
+          <p:nvCxnSpPr>
+            <p:cNvPr id="27" name="Straight Connector 26">
+              <a:extLst>
+                <a:ext uri="{FF2B5EF4-FFF2-40B4-BE49-F238E27FC236}">
+                  <a16:creationId xmlns:a16="http://schemas.microsoft.com/office/drawing/2014/main" id="{D3E1B316-388E-5741-07B6-1C1A67592934}"/>
+                </a:ext>
+              </a:extLst>
+            </p:cNvPr>
+            <p:cNvCxnSpPr>
+              <a:cxnSpLocks/>
+            </p:cNvCxnSpPr>
+            <p:nvPr/>
+          </p:nvCxnSpPr>
+          <p:spPr>
+            <a:xfrm>
+              <a:off x="942223" y="616688"/>
+              <a:ext cx="0" cy="6266117"/>
+            </a:xfrm>
+            <a:prstGeom prst="line">
+              <a:avLst/>
+            </a:prstGeom>
+          </p:spPr>
+          <p:style>
+            <a:lnRef idx="2">
+              <a:schemeClr val="accent1"/>
+            </a:lnRef>
+            <a:fillRef idx="0">
+              <a:schemeClr val="accent1"/>
+            </a:fillRef>
+            <a:effectRef idx="1">
+              <a:schemeClr val="accent1"/>
+            </a:effectRef>
+            <a:fontRef idx="minor">
+              <a:schemeClr val="tx1"/>
+            </a:fontRef>
+          </p:style>
+        </p:cxnSp>
+        <p:cxnSp>
+          <p:nvCxnSpPr>
+            <p:cNvPr id="53" name="Straight Connector 52">
+              <a:extLst>
+                <a:ext uri="{FF2B5EF4-FFF2-40B4-BE49-F238E27FC236}">
+                  <a16:creationId xmlns:a16="http://schemas.microsoft.com/office/drawing/2014/main" id="{CF1C2852-EC8B-D62F-3FE5-23EE2627B7EB}"/>
+                </a:ext>
+              </a:extLst>
+            </p:cNvPr>
+            <p:cNvCxnSpPr>
+              <a:cxnSpLocks/>
+              <a:stCxn id="24" idx="0"/>
+            </p:cNvCxnSpPr>
+            <p:nvPr/>
+          </p:nvCxnSpPr>
+          <p:spPr>
+            <a:xfrm>
+              <a:off x="942223" y="1233389"/>
+              <a:ext cx="2294450" cy="0"/>
+            </a:xfrm>
+            <a:prstGeom prst="line">
+              <a:avLst/>
+            </a:prstGeom>
+            <a:ln w="6350"/>
+          </p:spPr>
+          <p:style>
+            <a:lnRef idx="2">
+              <a:schemeClr val="accent1"/>
+            </a:lnRef>
+            <a:fillRef idx="0">
+              <a:schemeClr val="accent1"/>
+            </a:fillRef>
+            <a:effectRef idx="1">
+              <a:schemeClr val="accent1"/>
+            </a:effectRef>
+            <a:fontRef idx="minor">
+              <a:schemeClr val="tx1"/>
+            </a:fontRef>
+          </p:style>
+        </p:cxnSp>
+        <p:pic>
+          <p:nvPicPr>
+            <p:cNvPr id="58" name="Picture 57">
+              <a:extLst>
+                <a:ext uri="{FF2B5EF4-FFF2-40B4-BE49-F238E27FC236}">
+                  <a16:creationId xmlns:a16="http://schemas.microsoft.com/office/drawing/2014/main" id="{CFE1FCF8-2B1F-3CE5-6F62-77696034AEB4}"/>
+                </a:ext>
+              </a:extLst>
+            </p:cNvPr>
+            <p:cNvPicPr>
+              <a:picLocks noChangeAspect="1"/>
+            </p:cNvPicPr>
+            <p:nvPr/>
+          </p:nvPicPr>
+          <p:blipFill>
+            <a:blip r:embed="rId8"/>
+            <a:stretch>
+              <a:fillRect/>
+            </a:stretch>
+          </p:blipFill>
+          <p:spPr>
+            <a:xfrm>
+              <a:off x="1272063" y="879986"/>
+              <a:ext cx="177800" cy="292100"/>
+            </a:xfrm>
+            <a:prstGeom prst="rect">
+              <a:avLst/>
+            </a:prstGeom>
+          </p:spPr>
+        </p:pic>
+        <p:pic>
+          <p:nvPicPr>
+            <p:cNvPr id="66" name="Picture 65">
+              <a:extLst>
+                <a:ext uri="{FF2B5EF4-FFF2-40B4-BE49-F238E27FC236}">
+                  <a16:creationId xmlns:a16="http://schemas.microsoft.com/office/drawing/2014/main" id="{93B4278B-C22D-4591-404E-E7D23696F4E2}"/>
+                </a:ext>
+              </a:extLst>
+            </p:cNvPr>
+            <p:cNvPicPr>
+              <a:picLocks noChangeAspect="1"/>
+            </p:cNvPicPr>
+            <p:nvPr/>
+          </p:nvPicPr>
+          <p:blipFill>
+            <a:blip r:embed="rId9"/>
+            <a:stretch>
+              <a:fillRect/>
+            </a:stretch>
+          </p:blipFill>
+          <p:spPr>
+            <a:xfrm>
+              <a:off x="6399037" y="2836229"/>
+              <a:ext cx="1981200" cy="228600"/>
+            </a:xfrm>
+            <a:prstGeom prst="rect">
+              <a:avLst/>
+            </a:prstGeom>
+          </p:spPr>
+        </p:pic>
+        <p:sp>
+          <p:nvSpPr>
+            <p:cNvPr id="70" name="Right Brace 69">
+              <a:extLst>
+                <a:ext uri="{FF2B5EF4-FFF2-40B4-BE49-F238E27FC236}">
+                  <a16:creationId xmlns:a16="http://schemas.microsoft.com/office/drawing/2014/main" id="{A6596FBA-E116-7348-9C1C-07BED06D4C0D}"/>
+                </a:ext>
+              </a:extLst>
+            </p:cNvPr>
+            <p:cNvSpPr/>
+            <p:nvPr/>
+          </p:nvSpPr>
+          <p:spPr>
+            <a:xfrm>
+              <a:off x="5553876" y="3127935"/>
+              <a:ext cx="443600" cy="2685702"/>
+            </a:xfrm>
+            <a:prstGeom prst="rightBrace">
+              <a:avLst>
+                <a:gd name="adj1" fmla="val 0"/>
+                <a:gd name="adj2" fmla="val 50000"/>
+              </a:avLst>
+            </a:prstGeom>
+            <a:ln>
+              <a:solidFill>
+                <a:schemeClr val="accent6">
+                  <a:lumMod val="50000"/>
+                </a:schemeClr>
+              </a:solidFill>
+            </a:ln>
+          </p:spPr>
+          <p:style>
+            <a:lnRef idx="2">
+              <a:schemeClr val="accent1"/>
+            </a:lnRef>
+            <a:fillRef idx="0">
+              <a:schemeClr val="accent1"/>
+            </a:fillRef>
+            <a:effectRef idx="1">
+              <a:schemeClr val="accent1"/>
+            </a:effectRef>
+            <a:fontRef idx="minor">
+              <a:schemeClr val="tx1"/>
+            </a:fontRef>
+          </p:style>
+          <p:txBody>
+            <a:bodyPr rtlCol="0" anchor="ctr"/>
+            <a:lstStyle/>
+            <a:p>
+              <a:pPr algn="ctr"/>
+              <a:endParaRPr lang="en-US"/>
+            </a:p>
+          </p:txBody>
+        </p:sp>
+        <p:sp>
+          <p:nvSpPr>
+            <p:cNvPr id="3" name="Freeform 2">
+              <a:extLst>
+                <a:ext uri="{FF2B5EF4-FFF2-40B4-BE49-F238E27FC236}">
+                  <a16:creationId xmlns:a16="http://schemas.microsoft.com/office/drawing/2014/main" id="{B36A09A2-5AB9-3447-946F-CE277E89FA87}"/>
+                </a:ext>
+              </a:extLst>
+            </p:cNvPr>
+            <p:cNvSpPr/>
+            <p:nvPr/>
+          </p:nvSpPr>
+          <p:spPr>
+            <a:xfrm>
+              <a:off x="976743" y="2746587"/>
+              <a:ext cx="7253923" cy="4128347"/>
+            </a:xfrm>
+            <a:custGeom>
+              <a:avLst/>
+              <a:gdLst>
+                <a:gd name="csX0" fmla="*/ 0 w 5092995"/>
+                <a:gd name="csY0" fmla="*/ 0 h 4912242"/>
+                <a:gd name="csX1" fmla="*/ 1456661 w 5092995"/>
+                <a:gd name="csY1" fmla="*/ 1499191 h 4912242"/>
+                <a:gd name="csX2" fmla="*/ 5092995 w 5092995"/>
+                <a:gd name="csY2" fmla="*/ 4912242 h 4912242"/>
+                <a:gd name="csX0" fmla="*/ 0 w 5092995"/>
+                <a:gd name="csY0" fmla="*/ 0 h 4912242"/>
+                <a:gd name="csX1" fmla="*/ 1998922 w 5092995"/>
+                <a:gd name="csY1" fmla="*/ 1977656 h 4912242"/>
+                <a:gd name="csX2" fmla="*/ 5092995 w 5092995"/>
+                <a:gd name="csY2" fmla="*/ 4912242 h 4912242"/>
+                <a:gd name="csX0" fmla="*/ 0 w 6602818"/>
+                <a:gd name="csY0" fmla="*/ 0 h 4401879"/>
+                <a:gd name="csX1" fmla="*/ 1998922 w 6602818"/>
+                <a:gd name="csY1" fmla="*/ 1977656 h 4401879"/>
+                <a:gd name="csX2" fmla="*/ 6602818 w 6602818"/>
+                <a:gd name="csY2" fmla="*/ 4401879 h 4401879"/>
+                <a:gd name="csX0" fmla="*/ 0 w 8442251"/>
+                <a:gd name="csY0" fmla="*/ 0 h 5411972"/>
+                <a:gd name="csX1" fmla="*/ 1998922 w 8442251"/>
+                <a:gd name="csY1" fmla="*/ 1977656 h 5411972"/>
+                <a:gd name="csX2" fmla="*/ 8442251 w 8442251"/>
+                <a:gd name="csY2" fmla="*/ 5411972 h 5411972"/>
+                <a:gd name="csX0" fmla="*/ 0 w 9484956"/>
+                <a:gd name="csY0" fmla="*/ 0 h 5398070"/>
+                <a:gd name="csX1" fmla="*/ 1998922 w 9484956"/>
+                <a:gd name="csY1" fmla="*/ 1977656 h 5398070"/>
+                <a:gd name="csX2" fmla="*/ 9484956 w 9484956"/>
+                <a:gd name="csY2" fmla="*/ 5398070 h 5398070"/>
+                <a:gd name="csX0" fmla="*/ 0 w 9484956"/>
+                <a:gd name="csY0" fmla="*/ 0 h 5398070"/>
+                <a:gd name="csX1" fmla="*/ 2763571 w 9484956"/>
+                <a:gd name="csY1" fmla="*/ 2770112 h 5398070"/>
+                <a:gd name="csX2" fmla="*/ 9484956 w 9484956"/>
+                <a:gd name="csY2" fmla="*/ 5398070 h 5398070"/>
+              </a:gdLst>
+              <a:ahLst/>
+              <a:cxnLst>
+                <a:cxn ang="0">
+                  <a:pos x="csX0" y="csY0"/>
+                </a:cxn>
+                <a:cxn ang="0">
+                  <a:pos x="csX1" y="csY1"/>
+                </a:cxn>
+                <a:cxn ang="0">
+                  <a:pos x="csX2" y="csY2"/>
+                </a:cxn>
+              </a:cxnLst>
+              <a:rect l="l" t="t" r="r" b="b"/>
+              <a:pathLst>
+                <a:path w="9484956" h="5398070">
+                  <a:moveTo>
+                    <a:pt x="0" y="0"/>
+                  </a:moveTo>
+                  <a:lnTo>
+                    <a:pt x="2763571" y="2770112"/>
+                  </a:lnTo>
+                  <a:lnTo>
+                    <a:pt x="9484956" y="5398070"/>
+                  </a:lnTo>
+                </a:path>
+              </a:pathLst>
+            </a:custGeom>
+            <a:noFill/>
+            <a:ln w="31750">
+              <a:solidFill>
+                <a:srgbClr val="FF0000"/>
+              </a:solidFill>
+            </a:ln>
+          </p:spPr>
+          <p:style>
+            <a:lnRef idx="2">
+              <a:schemeClr val="accent1">
+                <a:shade val="15000"/>
+              </a:schemeClr>
+            </a:lnRef>
+            <a:fillRef idx="1">
+              <a:schemeClr val="accent1"/>
+            </a:fillRef>
+            <a:effectRef idx="0">
+              <a:schemeClr val="accent1"/>
+            </a:effectRef>
+            <a:fontRef idx="minor">
+              <a:schemeClr val="lt1"/>
+            </a:fontRef>
+          </p:style>
+          <p:txBody>
+            <a:bodyPr rtlCol="0" anchor="ctr"/>
+            <a:lstStyle/>
+            <a:p>
+              <a:pPr algn="ctr"/>
+              <a:endParaRPr lang="en-US" dirty="0"/>
+            </a:p>
+          </p:txBody>
+        </p:sp>
+        <p:cxnSp>
+          <p:nvCxnSpPr>
+            <p:cNvPr id="72" name="Straight Arrow Connector 71">
+              <a:extLst>
+                <a:ext uri="{FF2B5EF4-FFF2-40B4-BE49-F238E27FC236}">
+                  <a16:creationId xmlns:a16="http://schemas.microsoft.com/office/drawing/2014/main" id="{697A289B-1C13-F1E2-898E-E8376E6E8C82}"/>
+                </a:ext>
+              </a:extLst>
+            </p:cNvPr>
+            <p:cNvCxnSpPr>
+              <a:cxnSpLocks/>
+              <a:stCxn id="3" idx="1"/>
+            </p:cNvCxnSpPr>
+            <p:nvPr/>
+          </p:nvCxnSpPr>
+          <p:spPr>
+            <a:xfrm>
+              <a:off x="3090272" y="4865119"/>
+              <a:ext cx="1492360" cy="13278"/>
+            </a:xfrm>
+            <a:prstGeom prst="straightConnector1">
+              <a:avLst/>
+            </a:prstGeom>
+            <a:ln w="34925">
+              <a:solidFill>
+                <a:srgbClr val="FF0000"/>
+              </a:solidFill>
+              <a:tailEnd type="triangle" w="lg" len="lg"/>
+            </a:ln>
+          </p:spPr>
+          <p:style>
+            <a:lnRef idx="2">
+              <a:schemeClr val="accent1"/>
+            </a:lnRef>
+            <a:fillRef idx="0">
+              <a:schemeClr val="accent1"/>
+            </a:fillRef>
+            <a:effectRef idx="1">
+              <a:schemeClr val="accent1"/>
+            </a:effectRef>
+            <a:fontRef idx="minor">
+              <a:schemeClr val="tx1"/>
+            </a:fontRef>
+          </p:style>
+        </p:cxnSp>
+        <p:pic>
+          <p:nvPicPr>
+            <p:cNvPr id="76" name="Picture 75">
+              <a:extLst>
+                <a:ext uri="{FF2B5EF4-FFF2-40B4-BE49-F238E27FC236}">
+                  <a16:creationId xmlns:a16="http://schemas.microsoft.com/office/drawing/2014/main" id="{912305B2-A2A3-428A-0635-7A86CC3DA660}"/>
+                </a:ext>
+              </a:extLst>
+            </p:cNvPr>
+            <p:cNvPicPr>
+              <a:picLocks noChangeAspect="1"/>
+            </p:cNvPicPr>
+            <p:nvPr/>
+          </p:nvPicPr>
+          <p:blipFill>
+            <a:blip r:embed="rId10"/>
+            <a:stretch>
+              <a:fillRect/>
+            </a:stretch>
+          </p:blipFill>
+          <p:spPr>
+            <a:xfrm rot="2733373">
+              <a:off x="1252694" y="1997888"/>
+              <a:ext cx="1473200" cy="228600"/>
+            </a:xfrm>
+            <a:prstGeom prst="rect">
+              <a:avLst/>
+            </a:prstGeom>
+          </p:spPr>
+        </p:pic>
+        <p:pic>
+          <p:nvPicPr>
+            <p:cNvPr id="78" name="Picture 77">
+              <a:extLst>
+                <a:ext uri="{FF2B5EF4-FFF2-40B4-BE49-F238E27FC236}">
+                  <a16:creationId xmlns:a16="http://schemas.microsoft.com/office/drawing/2014/main" id="{5B63AD44-16B8-4955-A718-45120EE7C810}"/>
+                </a:ext>
+              </a:extLst>
+            </p:cNvPr>
+            <p:cNvPicPr>
+              <a:picLocks noChangeAspect="1"/>
+            </p:cNvPicPr>
+            <p:nvPr/>
+          </p:nvPicPr>
+          <p:blipFill>
+            <a:blip r:embed="rId11"/>
+            <a:stretch>
+              <a:fillRect/>
+            </a:stretch>
+          </p:blipFill>
+          <p:spPr>
+            <a:xfrm>
+              <a:off x="1016873" y="2493775"/>
+              <a:ext cx="177800" cy="190500"/>
+            </a:xfrm>
+            <a:prstGeom prst="rect">
+              <a:avLst/>
+            </a:prstGeom>
+          </p:spPr>
+        </p:pic>
+        <p:pic>
+          <p:nvPicPr>
+            <p:cNvPr id="79" name="Picture 78">
+              <a:extLst>
+                <a:ext uri="{FF2B5EF4-FFF2-40B4-BE49-F238E27FC236}">
+                  <a16:creationId xmlns:a16="http://schemas.microsoft.com/office/drawing/2014/main" id="{FC5BE205-0B30-94FE-7AE4-E6FDA24C94BA}"/>
+                </a:ext>
+              </a:extLst>
+            </p:cNvPr>
+            <p:cNvPicPr>
+              <a:picLocks noChangeAspect="1"/>
+            </p:cNvPicPr>
+            <p:nvPr/>
+          </p:nvPicPr>
+          <p:blipFill>
+            <a:blip r:embed="rId12"/>
+            <a:stretch>
+              <a:fillRect/>
+            </a:stretch>
+          </p:blipFill>
+          <p:spPr>
+            <a:xfrm>
+              <a:off x="2818069" y="4903091"/>
+              <a:ext cx="190500" cy="177800"/>
+            </a:xfrm>
+            <a:prstGeom prst="rect">
+              <a:avLst/>
+            </a:prstGeom>
+          </p:spPr>
+        </p:pic>
+        <p:pic>
+          <p:nvPicPr>
+            <p:cNvPr id="80" name="Picture 79">
+              <a:extLst>
+                <a:ext uri="{FF2B5EF4-FFF2-40B4-BE49-F238E27FC236}">
+                  <a16:creationId xmlns:a16="http://schemas.microsoft.com/office/drawing/2014/main" id="{42544F12-936A-6BE0-A441-29BFF535B730}"/>
+                </a:ext>
+              </a:extLst>
+            </p:cNvPr>
+            <p:cNvPicPr>
+              <a:picLocks noChangeAspect="1"/>
+            </p:cNvPicPr>
+            <p:nvPr/>
+          </p:nvPicPr>
+          <p:blipFill>
+            <a:blip r:embed="rId13"/>
+            <a:stretch>
+              <a:fillRect/>
+            </a:stretch>
+          </p:blipFill>
+          <p:spPr>
+            <a:xfrm>
+              <a:off x="8134362" y="6587322"/>
+              <a:ext cx="190500" cy="190500"/>
+            </a:xfrm>
+            <a:prstGeom prst="rect">
+              <a:avLst/>
+            </a:prstGeom>
+          </p:spPr>
+        </p:pic>
+        <p:pic>
+          <p:nvPicPr>
+            <p:cNvPr id="81" name="Picture 80">
+              <a:extLst>
+                <a:ext uri="{FF2B5EF4-FFF2-40B4-BE49-F238E27FC236}">
+                  <a16:creationId xmlns:a16="http://schemas.microsoft.com/office/drawing/2014/main" id="{1BC2DF9E-A373-7814-2936-3C0211E9F56E}"/>
+                </a:ext>
+              </a:extLst>
+            </p:cNvPr>
+            <p:cNvPicPr>
+              <a:picLocks noChangeAspect="1"/>
+            </p:cNvPicPr>
+            <p:nvPr/>
+          </p:nvPicPr>
+          <p:blipFill>
+            <a:blip r:embed="rId14"/>
+            <a:stretch>
+              <a:fillRect/>
+            </a:stretch>
+          </p:blipFill>
+          <p:spPr>
+            <a:xfrm>
+              <a:off x="1355052" y="2882893"/>
+              <a:ext cx="203200" cy="177800"/>
+            </a:xfrm>
+            <a:prstGeom prst="rect">
+              <a:avLst/>
+            </a:prstGeom>
+          </p:spPr>
+        </p:pic>
+        <p:pic>
+          <p:nvPicPr>
+            <p:cNvPr id="82" name="Picture 81">
+              <a:extLst>
+                <a:ext uri="{FF2B5EF4-FFF2-40B4-BE49-F238E27FC236}">
+                  <a16:creationId xmlns:a16="http://schemas.microsoft.com/office/drawing/2014/main" id="{CBCCF6B7-5757-A115-419B-1A5670524DF0}"/>
+                </a:ext>
+              </a:extLst>
+            </p:cNvPr>
+            <p:cNvPicPr>
+              <a:picLocks noChangeAspect="1"/>
+            </p:cNvPicPr>
+            <p:nvPr/>
+          </p:nvPicPr>
+          <p:blipFill>
+            <a:blip r:embed="rId15"/>
+            <a:stretch>
+              <a:fillRect/>
+            </a:stretch>
+          </p:blipFill>
+          <p:spPr>
+            <a:xfrm>
+              <a:off x="4731929" y="4796764"/>
+              <a:ext cx="190500" cy="177800"/>
+            </a:xfrm>
+            <a:prstGeom prst="rect">
+              <a:avLst/>
+            </a:prstGeom>
+          </p:spPr>
+        </p:pic>
+        <p:pic>
+          <p:nvPicPr>
+            <p:cNvPr id="83" name="Picture 82">
+              <a:extLst>
+                <a:ext uri="{FF2B5EF4-FFF2-40B4-BE49-F238E27FC236}">
+                  <a16:creationId xmlns:a16="http://schemas.microsoft.com/office/drawing/2014/main" id="{34ADEE6E-EBA0-36C9-DCD6-5C77DA1B63C7}"/>
+                </a:ext>
+              </a:extLst>
+            </p:cNvPr>
+            <p:cNvPicPr>
+              <a:picLocks noChangeAspect="1"/>
+            </p:cNvPicPr>
+            <p:nvPr/>
+          </p:nvPicPr>
+          <p:blipFill>
+            <a:blip r:embed="rId16"/>
+            <a:stretch>
+              <a:fillRect/>
+            </a:stretch>
+          </p:blipFill>
+          <p:spPr>
+            <a:xfrm>
+              <a:off x="5454945" y="5541040"/>
+              <a:ext cx="190500" cy="177800"/>
+            </a:xfrm>
+            <a:prstGeom prst="rect">
+              <a:avLst/>
+            </a:prstGeom>
+          </p:spPr>
+        </p:pic>
+        <p:pic>
+          <p:nvPicPr>
+            <p:cNvPr id="85" name="Picture 84">
+              <a:extLst>
+                <a:ext uri="{FF2B5EF4-FFF2-40B4-BE49-F238E27FC236}">
+                  <a16:creationId xmlns:a16="http://schemas.microsoft.com/office/drawing/2014/main" id="{200CE289-EA33-83D8-58ED-31FD74D9E507}"/>
+                </a:ext>
+              </a:extLst>
+            </p:cNvPr>
+            <p:cNvPicPr>
+              <a:picLocks noChangeAspect="1"/>
+            </p:cNvPicPr>
+            <p:nvPr/>
+          </p:nvPicPr>
+          <p:blipFill>
+            <a:blip r:embed="rId3"/>
+            <a:stretch>
+              <a:fillRect/>
+            </a:stretch>
+          </p:blipFill>
+          <p:spPr>
+            <a:xfrm>
+              <a:off x="1616693" y="3802529"/>
+              <a:ext cx="271956" cy="145691"/>
+            </a:xfrm>
+            <a:prstGeom prst="rect">
+              <a:avLst/>
+            </a:prstGeom>
+          </p:spPr>
+        </p:pic>
+        <p:pic>
+          <p:nvPicPr>
+            <p:cNvPr id="87" name="Picture 86">
+              <a:extLst>
+                <a:ext uri="{FF2B5EF4-FFF2-40B4-BE49-F238E27FC236}">
+                  <a16:creationId xmlns:a16="http://schemas.microsoft.com/office/drawing/2014/main" id="{6D2C985F-DA0C-7A93-0D69-835ABB447F5F}"/>
+                </a:ext>
+              </a:extLst>
+            </p:cNvPr>
+            <p:cNvPicPr>
+              <a:picLocks noChangeAspect="1"/>
+            </p:cNvPicPr>
+            <p:nvPr/>
+          </p:nvPicPr>
+          <p:blipFill>
+            <a:blip r:embed="rId10"/>
+            <a:stretch>
+              <a:fillRect/>
+            </a:stretch>
+          </p:blipFill>
+          <p:spPr>
+            <a:xfrm rot="2733373">
+              <a:off x="3308323" y="5552718"/>
+              <a:ext cx="1473200" cy="228600"/>
+            </a:xfrm>
+            <a:prstGeom prst="rect">
+              <a:avLst/>
+            </a:prstGeom>
+          </p:spPr>
+        </p:pic>
+        <p:sp>
+          <p:nvSpPr>
+            <p:cNvPr id="88" name="Freeform 87">
+              <a:extLst>
+                <a:ext uri="{FF2B5EF4-FFF2-40B4-BE49-F238E27FC236}">
+                  <a16:creationId xmlns:a16="http://schemas.microsoft.com/office/drawing/2014/main" id="{02B1322E-1882-E820-E9B1-9AB203DFA6CC}"/>
+                </a:ext>
+              </a:extLst>
+            </p:cNvPr>
+            <p:cNvSpPr/>
+            <p:nvPr/>
+          </p:nvSpPr>
+          <p:spPr>
+            <a:xfrm>
+              <a:off x="1339702" y="3125972"/>
+              <a:ext cx="5231219" cy="3774558"/>
+            </a:xfrm>
+            <a:custGeom>
+              <a:avLst/>
+              <a:gdLst>
+                <a:gd name="csX0" fmla="*/ 0 w 5231219"/>
+                <a:gd name="csY0" fmla="*/ 0 h 3774558"/>
+                <a:gd name="csX1" fmla="*/ 3221665 w 5231219"/>
+                <a:gd name="csY1" fmla="*/ 1743739 h 3774558"/>
+                <a:gd name="csX2" fmla="*/ 5231219 w 5231219"/>
+                <a:gd name="csY2" fmla="*/ 3774558 h 3774558"/>
+              </a:gdLst>
+              <a:ahLst/>
+              <a:cxnLst>
+                <a:cxn ang="0">
+                  <a:pos x="csX0" y="csY0"/>
+                </a:cxn>
+                <a:cxn ang="0">
+                  <a:pos x="csX1" y="csY1"/>
+                </a:cxn>
+                <a:cxn ang="0">
+                  <a:pos x="csX2" y="csY2"/>
+                </a:cxn>
+              </a:cxnLst>
+              <a:rect l="l" t="t" r="r" b="b"/>
+              <a:pathLst>
+                <a:path w="5231219" h="3774558">
+                  <a:moveTo>
+                    <a:pt x="0" y="0"/>
+                  </a:moveTo>
+                  <a:lnTo>
+                    <a:pt x="3221665" y="1743739"/>
+                  </a:lnTo>
+                  <a:lnTo>
+                    <a:pt x="5231219" y="3774558"/>
+                  </a:lnTo>
+                </a:path>
+              </a:pathLst>
+            </a:custGeom>
+            <a:noFill/>
+            <a:ln w="25400">
+              <a:solidFill>
+                <a:srgbClr val="0070C0"/>
+              </a:solidFill>
+            </a:ln>
+          </p:spPr>
+          <p:style>
+            <a:lnRef idx="2">
+              <a:schemeClr val="accent1">
+                <a:shade val="15000"/>
+              </a:schemeClr>
+            </a:lnRef>
+            <a:fillRef idx="1">
+              <a:schemeClr val="accent1"/>
+            </a:fillRef>
+            <a:effectRef idx="0">
+              <a:schemeClr val="accent1"/>
+            </a:effectRef>
+            <a:fontRef idx="minor">
+              <a:schemeClr val="lt1"/>
+            </a:fontRef>
+          </p:style>
+          <p:txBody>
+            <a:bodyPr rtlCol="0" anchor="ctr"/>
+            <a:lstStyle/>
+            <a:p>
+              <a:pPr algn="ctr"/>
+              <a:endParaRPr lang="en-US"/>
+            </a:p>
+          </p:txBody>
+        </p:sp>
+        <p:cxnSp>
+          <p:nvCxnSpPr>
+            <p:cNvPr id="12" name="Straight Arrow Connector 11">
+              <a:extLst>
+                <a:ext uri="{FF2B5EF4-FFF2-40B4-BE49-F238E27FC236}">
+                  <a16:creationId xmlns:a16="http://schemas.microsoft.com/office/drawing/2014/main" id="{9CCF5AF0-79EE-10B8-E10A-D62DE04FBAAA}"/>
+                </a:ext>
+              </a:extLst>
+            </p:cNvPr>
+            <p:cNvCxnSpPr>
+              <a:cxnSpLocks/>
+            </p:cNvCxnSpPr>
+            <p:nvPr/>
+          </p:nvCxnSpPr>
+          <p:spPr>
+            <a:xfrm>
+              <a:off x="949808" y="4009815"/>
+              <a:ext cx="2643998" cy="0"/>
+            </a:xfrm>
+            <a:prstGeom prst="straightConnector1">
+              <a:avLst/>
+            </a:prstGeom>
+            <a:ln w="34925">
+              <a:solidFill>
+                <a:srgbClr val="0070C0"/>
+              </a:solidFill>
+              <a:tailEnd type="triangle" w="lg" len="lg"/>
+            </a:ln>
+          </p:spPr>
+          <p:style>
+            <a:lnRef idx="2">
+              <a:schemeClr val="accent1"/>
+            </a:lnRef>
+            <a:fillRef idx="0">
+              <a:schemeClr val="accent1"/>
+            </a:fillRef>
+            <a:effectRef idx="1">
+              <a:schemeClr val="accent1"/>
+            </a:effectRef>
+            <a:fontRef idx="minor">
+              <a:schemeClr val="tx1"/>
+            </a:fontRef>
+          </p:style>
+        </p:cxnSp>
+        <p:pic>
+          <p:nvPicPr>
+            <p:cNvPr id="14" name="Picture 13">
+              <a:extLst>
+                <a:ext uri="{FF2B5EF4-FFF2-40B4-BE49-F238E27FC236}">
+                  <a16:creationId xmlns:a16="http://schemas.microsoft.com/office/drawing/2014/main" id="{2FD0AC81-6B31-9EE2-137E-89208CF63D2D}"/>
+                </a:ext>
+              </a:extLst>
+            </p:cNvPr>
+            <p:cNvPicPr>
+              <a:picLocks noChangeAspect="1"/>
+            </p:cNvPicPr>
+            <p:nvPr/>
+          </p:nvPicPr>
+          <p:blipFill>
+            <a:blip r:embed="rId17"/>
+            <a:stretch>
+              <a:fillRect/>
+            </a:stretch>
+          </p:blipFill>
+          <p:spPr>
+            <a:xfrm>
+              <a:off x="3896386" y="3937740"/>
+              <a:ext cx="266700" cy="215900"/>
+            </a:xfrm>
+            <a:prstGeom prst="rect">
+              <a:avLst/>
+            </a:prstGeom>
+          </p:spPr>
+        </p:pic>
+        <p:pic>
+          <p:nvPicPr>
+            <p:cNvPr id="15" name="Picture 14">
+              <a:extLst>
+                <a:ext uri="{FF2B5EF4-FFF2-40B4-BE49-F238E27FC236}">
+                  <a16:creationId xmlns:a16="http://schemas.microsoft.com/office/drawing/2014/main" id="{57C92127-9BB8-76BB-4EA5-DAD001596B3C}"/>
+                </a:ext>
+              </a:extLst>
+            </p:cNvPr>
+            <p:cNvPicPr>
+              <a:picLocks noChangeAspect="1"/>
+            </p:cNvPicPr>
+            <p:nvPr/>
+          </p:nvPicPr>
+          <p:blipFill>
+            <a:blip r:embed="rId18"/>
+            <a:stretch>
+              <a:fillRect/>
+            </a:stretch>
+          </p:blipFill>
+          <p:spPr>
+            <a:xfrm>
+              <a:off x="3454101" y="3523069"/>
+              <a:ext cx="279400" cy="215900"/>
+            </a:xfrm>
+            <a:prstGeom prst="rect">
+              <a:avLst/>
+            </a:prstGeom>
+          </p:spPr>
+        </p:pic>
+        <p:pic>
+          <p:nvPicPr>
+            <p:cNvPr id="16" name="Picture 15">
+              <a:extLst>
+                <a:ext uri="{FF2B5EF4-FFF2-40B4-BE49-F238E27FC236}">
+                  <a16:creationId xmlns:a16="http://schemas.microsoft.com/office/drawing/2014/main" id="{B64714A3-6B1C-8539-5094-276C1739343C}"/>
+                </a:ext>
+              </a:extLst>
+            </p:cNvPr>
+            <p:cNvPicPr>
+              <a:picLocks noChangeAspect="1"/>
+            </p:cNvPicPr>
+            <p:nvPr/>
+          </p:nvPicPr>
+          <p:blipFill>
+            <a:blip r:embed="rId19"/>
+            <a:stretch>
+              <a:fillRect/>
+            </a:stretch>
+          </p:blipFill>
+          <p:spPr>
+            <a:xfrm>
+              <a:off x="3167024" y="3246619"/>
+              <a:ext cx="279400" cy="215900"/>
+            </a:xfrm>
+            <a:prstGeom prst="rect">
+              <a:avLst/>
+            </a:prstGeom>
+          </p:spPr>
+        </p:pic>
+        <p:sp>
+          <p:nvSpPr>
+            <p:cNvPr id="17" name="Freeform 16">
+              <a:extLst>
+                <a:ext uri="{FF2B5EF4-FFF2-40B4-BE49-F238E27FC236}">
+                  <a16:creationId xmlns:a16="http://schemas.microsoft.com/office/drawing/2014/main" id="{C43D7DF1-9A23-573B-891E-431B080C680F}"/>
+                </a:ext>
+              </a:extLst>
+            </p:cNvPr>
+            <p:cNvSpPr/>
+            <p:nvPr/>
+          </p:nvSpPr>
+          <p:spPr>
+            <a:xfrm>
+              <a:off x="839985" y="3366810"/>
+              <a:ext cx="149498" cy="1524167"/>
+            </a:xfrm>
+            <a:custGeom>
+              <a:avLst/>
+              <a:gdLst>
+                <a:gd name="csX0" fmla="*/ 0 w 138223"/>
+                <a:gd name="csY0" fmla="*/ 1765004 h 1775637"/>
+                <a:gd name="csX1" fmla="*/ 85061 w 138223"/>
+                <a:gd name="csY1" fmla="*/ 0 h 1775637"/>
+                <a:gd name="csX2" fmla="*/ 138223 w 138223"/>
+                <a:gd name="csY2" fmla="*/ 1775637 h 1775637"/>
+              </a:gdLst>
+              <a:ahLst/>
+              <a:cxnLst>
+                <a:cxn ang="0">
+                  <a:pos x="csX0" y="csY0"/>
+                </a:cxn>
+                <a:cxn ang="0">
+                  <a:pos x="csX1" y="csY1"/>
+                </a:cxn>
+                <a:cxn ang="0">
+                  <a:pos x="csX2" y="csY2"/>
+                </a:cxn>
+              </a:cxnLst>
+              <a:rect l="l" t="t" r="r" b="b"/>
+              <a:pathLst>
+                <a:path w="138223" h="1775637">
+                  <a:moveTo>
+                    <a:pt x="0" y="1765004"/>
+                  </a:moveTo>
+                  <a:lnTo>
+                    <a:pt x="85061" y="0"/>
+                  </a:lnTo>
+                  <a:lnTo>
+                    <a:pt x="138223" y="1775637"/>
+                  </a:lnTo>
+                </a:path>
+              </a:pathLst>
+            </a:custGeom>
+            <a:solidFill>
+              <a:srgbClr val="00B0F0"/>
+            </a:solidFill>
+          </p:spPr>
+          <p:style>
+            <a:lnRef idx="2">
+              <a:schemeClr val="accent1">
+                <a:shade val="15000"/>
+              </a:schemeClr>
+            </a:lnRef>
+            <a:fillRef idx="1">
+              <a:schemeClr val="accent1"/>
+            </a:fillRef>
+            <a:effectRef idx="0">
+              <a:schemeClr val="accent1"/>
+            </a:effectRef>
+            <a:fontRef idx="minor">
+              <a:schemeClr val="lt1"/>
+            </a:fontRef>
+          </p:style>
+          <p:txBody>
+            <a:bodyPr rtlCol="0" anchor="ctr"/>
+            <a:lstStyle/>
+            <a:p>
+              <a:pPr algn="ctr"/>
+              <a:endParaRPr lang="en-US"/>
+            </a:p>
+          </p:txBody>
+        </p:sp>
+        <p:sp>
+          <p:nvSpPr>
+            <p:cNvPr id="18" name="Freeform 17">
+              <a:extLst>
+                <a:ext uri="{FF2B5EF4-FFF2-40B4-BE49-F238E27FC236}">
+                  <a16:creationId xmlns:a16="http://schemas.microsoft.com/office/drawing/2014/main" id="{5770C9ED-F8D7-E160-1DF2-6E2908CA98F2}"/>
+                </a:ext>
+              </a:extLst>
+            </p:cNvPr>
+            <p:cNvSpPr/>
+            <p:nvPr/>
+          </p:nvSpPr>
+          <p:spPr>
+            <a:xfrm>
+              <a:off x="839975" y="4710225"/>
+              <a:ext cx="138223" cy="170121"/>
+            </a:xfrm>
+            <a:custGeom>
+              <a:avLst/>
+              <a:gdLst>
+                <a:gd name="csX0" fmla="*/ 0 w 138223"/>
+                <a:gd name="csY0" fmla="*/ 170121 h 170121"/>
+                <a:gd name="csX1" fmla="*/ 21265 w 138223"/>
+                <a:gd name="csY1" fmla="*/ 0 h 170121"/>
+                <a:gd name="csX2" fmla="*/ 116958 w 138223"/>
+                <a:gd name="csY2" fmla="*/ 0 h 170121"/>
+                <a:gd name="csX3" fmla="*/ 138223 w 138223"/>
+                <a:gd name="csY3" fmla="*/ 170121 h 170121"/>
+              </a:gdLst>
+              <a:ahLst/>
+              <a:cxnLst>
+                <a:cxn ang="0">
+                  <a:pos x="csX0" y="csY0"/>
+                </a:cxn>
+                <a:cxn ang="0">
+                  <a:pos x="csX1" y="csY1"/>
+                </a:cxn>
+                <a:cxn ang="0">
+                  <a:pos x="csX2" y="csY2"/>
+                </a:cxn>
+                <a:cxn ang="0">
+                  <a:pos x="csX3" y="csY3"/>
+                </a:cxn>
+              </a:cxnLst>
+              <a:rect l="l" t="t" r="r" b="b"/>
+              <a:pathLst>
+                <a:path w="138223" h="170121">
+                  <a:moveTo>
+                    <a:pt x="0" y="170121"/>
+                  </a:moveTo>
+                  <a:lnTo>
+                    <a:pt x="21265" y="0"/>
+                  </a:lnTo>
+                  <a:lnTo>
+                    <a:pt x="116958" y="0"/>
+                  </a:lnTo>
+                  <a:lnTo>
+                    <a:pt x="138223" y="170121"/>
+                  </a:lnTo>
+                </a:path>
+              </a:pathLst>
+            </a:custGeom>
+            <a:solidFill>
+              <a:srgbClr val="FFFF00"/>
+            </a:solidFill>
+            <a:ln>
+              <a:noFill/>
+            </a:ln>
+          </p:spPr>
+          <p:style>
+            <a:lnRef idx="2">
+              <a:schemeClr val="accent1">
+                <a:shade val="15000"/>
+              </a:schemeClr>
+            </a:lnRef>
+            <a:fillRef idx="1">
+              <a:schemeClr val="accent1"/>
+            </a:fillRef>
+            <a:effectRef idx="0">
+              <a:schemeClr val="accent1"/>
+            </a:effectRef>
+            <a:fontRef idx="minor">
+              <a:schemeClr val="lt1"/>
+            </a:fontRef>
+          </p:style>
+          <p:txBody>
+            <a:bodyPr rtlCol="0" anchor="ctr"/>
+            <a:lstStyle/>
+            <a:p>
+              <a:pPr algn="ctr"/>
+              <a:endParaRPr lang="en-US"/>
+            </a:p>
+          </p:txBody>
+        </p:sp>
+      </p:grpSp>
+    </p:spTree>
+    <p:extLst>
+      <p:ext uri="{BB962C8B-B14F-4D97-AF65-F5344CB8AC3E}">
+        <p14:creationId xmlns:p14="http://schemas.microsoft.com/office/powerpoint/2010/main" val="2833170197"/>
+      </p:ext>
+    </p:extLst>
+  </p:cSld>
+  <p:clrMapOvr>
+    <a:masterClrMapping/>
+  </p:clrMapOvr>
+</p:sld>
+</file>
+
+<file path=ppt/slides/slide5.xml><?xml version="1.0" encoding="utf-8"?>
+<p:sld xmlns:a="http://schemas.openxmlformats.org/drawingml/2006/main" xmlns:r="http://schemas.openxmlformats.org/officeDocument/2006/relationships" xmlns:p="http://schemas.openxmlformats.org/presentationml/2006/main">
+  <p:cSld>
+    <p:spTree>
+      <p:nvGrpSpPr>
+        <p:cNvPr id="1" name="">
+          <a:extLst>
+            <a:ext uri="{FF2B5EF4-FFF2-40B4-BE49-F238E27FC236}">
+              <a16:creationId xmlns:a16="http://schemas.microsoft.com/office/drawing/2014/main" id="{11B48CE3-7516-28CC-EDE3-62AC1FC6D377}"/>
+            </a:ext>
+          </a:extLst>
+        </p:cNvPr>
+        <p:cNvGrpSpPr/>
+        <p:nvPr/>
+      </p:nvGrpSpPr>
+      <p:grpSpPr>
+        <a:xfrm>
+          <a:off x="0" y="0"/>
+          <a:ext cx="0" cy="0"/>
+          <a:chOff x="0" y="0"/>
+          <a:chExt cx="0" cy="0"/>
+        </a:xfrm>
+      </p:grpSpPr>
+      <p:grpSp>
+        <p:nvGrpSpPr>
+          <p:cNvPr id="44" name="Group 43">
+            <a:extLst>
+              <a:ext uri="{FF2B5EF4-FFF2-40B4-BE49-F238E27FC236}">
+                <a16:creationId xmlns:a16="http://schemas.microsoft.com/office/drawing/2014/main" id="{41EF2EBC-DDE7-7D2C-7957-81C23A60979D}"/>
+              </a:ext>
+            </a:extLst>
+          </p:cNvPr>
+          <p:cNvGrpSpPr/>
+          <p:nvPr/>
+        </p:nvGrpSpPr>
+        <p:grpSpPr>
+          <a:xfrm>
+            <a:off x="680484" y="90681"/>
+            <a:ext cx="7889352" cy="6809848"/>
+            <a:chOff x="680484" y="90681"/>
+            <a:chExt cx="7889352" cy="6809848"/>
+          </a:xfrm>
+        </p:grpSpPr>
+        <p:sp>
+          <p:nvSpPr>
+            <p:cNvPr id="30" name="Rectangle 29">
+              <a:extLst>
+                <a:ext uri="{FF2B5EF4-FFF2-40B4-BE49-F238E27FC236}">
+                  <a16:creationId xmlns:a16="http://schemas.microsoft.com/office/drawing/2014/main" id="{098825B5-B8BF-6615-3298-40179D1F568E}"/>
+                </a:ext>
+              </a:extLst>
+            </p:cNvPr>
+            <p:cNvSpPr/>
+            <p:nvPr/>
+          </p:nvSpPr>
+          <p:spPr>
+            <a:xfrm>
+              <a:off x="712379" y="5555113"/>
+              <a:ext cx="7825563" cy="1302887"/>
+            </a:xfrm>
+            <a:prstGeom prst="rect">
+              <a:avLst/>
+            </a:prstGeom>
+            <a:solidFill>
+              <a:srgbClr val="FFC000"/>
+            </a:solidFill>
+            <a:ln>
+              <a:solidFill>
+                <a:srgbClr val="FFC000"/>
+              </a:solidFill>
+            </a:ln>
+          </p:spPr>
+          <p:style>
+            <a:lnRef idx="2">
+              <a:schemeClr val="accent1">
+                <a:shade val="15000"/>
+              </a:schemeClr>
+            </a:lnRef>
+            <a:fillRef idx="1">
+              <a:schemeClr val="accent1"/>
+            </a:fillRef>
+            <a:effectRef idx="0">
+              <a:schemeClr val="accent1"/>
+            </a:effectRef>
+            <a:fontRef idx="minor">
+              <a:schemeClr val="lt1"/>
+            </a:fontRef>
+          </p:style>
+          <p:txBody>
+            <a:bodyPr rtlCol="0" anchor="ctr"/>
+            <a:lstStyle/>
+            <a:p>
+              <a:pPr algn="ctr"/>
+              <a:endParaRPr lang="en-US" b="1" dirty="0"/>
+            </a:p>
+          </p:txBody>
+        </p:sp>
+        <p:sp>
+          <p:nvSpPr>
+            <p:cNvPr id="7" name="Rectangle 6">
+              <a:extLst>
+                <a:ext uri="{FF2B5EF4-FFF2-40B4-BE49-F238E27FC236}">
+                  <a16:creationId xmlns:a16="http://schemas.microsoft.com/office/drawing/2014/main" id="{1374DC7E-B145-63FD-4338-FBFF86AC6A1A}"/>
+                </a:ext>
+              </a:extLst>
+            </p:cNvPr>
+            <p:cNvSpPr/>
+            <p:nvPr/>
+          </p:nvSpPr>
+          <p:spPr>
+            <a:xfrm>
+              <a:off x="712379" y="3117326"/>
+              <a:ext cx="7825563" cy="2419377"/>
+            </a:xfrm>
+            <a:prstGeom prst="rect">
+              <a:avLst/>
+            </a:prstGeom>
+            <a:solidFill>
+              <a:srgbClr val="FFFF00"/>
+            </a:solidFill>
+            <a:ln>
+              <a:noFill/>
+            </a:ln>
+          </p:spPr>
+          <p:style>
+            <a:lnRef idx="2">
+              <a:schemeClr val="accent1">
+                <a:shade val="15000"/>
+              </a:schemeClr>
+            </a:lnRef>
+            <a:fillRef idx="1">
+              <a:schemeClr val="accent1"/>
+            </a:fillRef>
+            <a:effectRef idx="0">
+              <a:schemeClr val="accent1"/>
+            </a:effectRef>
+            <a:fontRef idx="minor">
+              <a:schemeClr val="lt1"/>
+            </a:fontRef>
+          </p:style>
+          <p:txBody>
+            <a:bodyPr rtlCol="0" anchor="ctr"/>
+            <a:lstStyle/>
+            <a:p>
+              <a:pPr algn="ctr"/>
+              <a:endParaRPr lang="en-US" b="1" dirty="0"/>
+            </a:p>
+          </p:txBody>
+        </p:sp>
+        <p:cxnSp>
+          <p:nvCxnSpPr>
+            <p:cNvPr id="42" name="Straight Connector 41">
+              <a:extLst>
+                <a:ext uri="{FF2B5EF4-FFF2-40B4-BE49-F238E27FC236}">
+                  <a16:creationId xmlns:a16="http://schemas.microsoft.com/office/drawing/2014/main" id="{14E66953-021F-ABCA-4EC0-BDD717AF9E8B}"/>
+                </a:ext>
+              </a:extLst>
+            </p:cNvPr>
+            <p:cNvCxnSpPr>
+              <a:cxnSpLocks/>
+            </p:cNvCxnSpPr>
+            <p:nvPr/>
+          </p:nvCxnSpPr>
+          <p:spPr>
+            <a:xfrm>
+              <a:off x="680484" y="3121660"/>
+              <a:ext cx="7825557" cy="4336"/>
+            </a:xfrm>
+            <a:prstGeom prst="line">
+              <a:avLst/>
+            </a:prstGeom>
+          </p:spPr>
+          <p:style>
+            <a:lnRef idx="2">
+              <a:schemeClr val="accent1"/>
+            </a:lnRef>
+            <a:fillRef idx="0">
+              <a:schemeClr val="accent1"/>
+            </a:fillRef>
+            <a:effectRef idx="1">
+              <a:schemeClr val="accent1"/>
+            </a:effectRef>
+            <a:fontRef idx="minor">
+              <a:schemeClr val="tx1"/>
+            </a:fontRef>
+          </p:style>
+        </p:cxnSp>
+        <p:cxnSp>
+          <p:nvCxnSpPr>
+            <p:cNvPr id="34" name="Straight Arrow Connector 33">
+              <a:extLst>
+                <a:ext uri="{FF2B5EF4-FFF2-40B4-BE49-F238E27FC236}">
+                  <a16:creationId xmlns:a16="http://schemas.microsoft.com/office/drawing/2014/main" id="{3240E6F9-BAD5-CA9F-8719-5B50379CE3B4}"/>
+                </a:ext>
+              </a:extLst>
+            </p:cNvPr>
+            <p:cNvCxnSpPr>
+              <a:cxnSpLocks/>
+            </p:cNvCxnSpPr>
+            <p:nvPr/>
+          </p:nvCxnSpPr>
+          <p:spPr>
+            <a:xfrm>
+              <a:off x="985258" y="6001644"/>
+              <a:ext cx="5298584" cy="0"/>
+            </a:xfrm>
+            <a:prstGeom prst="straightConnector1">
+              <a:avLst/>
+            </a:prstGeom>
+            <a:ln w="34925">
+              <a:solidFill>
+                <a:srgbClr val="0070C0"/>
+              </a:solidFill>
+              <a:tailEnd type="triangle" w="lg" len="lg"/>
+            </a:ln>
+          </p:spPr>
+          <p:style>
+            <a:lnRef idx="2">
+              <a:schemeClr val="accent1"/>
+            </a:lnRef>
+            <a:fillRef idx="0">
+              <a:schemeClr val="accent1"/>
+            </a:fillRef>
+            <a:effectRef idx="1">
+              <a:schemeClr val="accent1"/>
+            </a:effectRef>
+            <a:fontRef idx="minor">
+              <a:schemeClr val="tx1"/>
+            </a:fontRef>
+          </p:style>
+        </p:cxnSp>
+        <p:cxnSp>
+          <p:nvCxnSpPr>
+            <p:cNvPr id="36" name="Straight Arrow Connector 35">
+              <a:extLst>
+                <a:ext uri="{FF2B5EF4-FFF2-40B4-BE49-F238E27FC236}">
+                  <a16:creationId xmlns:a16="http://schemas.microsoft.com/office/drawing/2014/main" id="{01799877-521D-1A90-606D-C7B89F018A91}"/>
+                </a:ext>
+              </a:extLst>
+            </p:cNvPr>
+            <p:cNvCxnSpPr>
+              <a:cxnSpLocks/>
+            </p:cNvCxnSpPr>
+            <p:nvPr/>
+          </p:nvCxnSpPr>
+          <p:spPr>
+            <a:xfrm>
+              <a:off x="933369" y="6272939"/>
+              <a:ext cx="5465668" cy="0"/>
+            </a:xfrm>
+            <a:prstGeom prst="straightConnector1">
+              <a:avLst/>
+            </a:prstGeom>
+            <a:ln w="34925">
+              <a:solidFill>
+                <a:srgbClr val="FF0000"/>
+              </a:solidFill>
+              <a:tailEnd type="triangle" w="lg" len="lg"/>
+            </a:ln>
+          </p:spPr>
+          <p:style>
+            <a:lnRef idx="2">
+              <a:schemeClr val="accent1"/>
+            </a:lnRef>
+            <a:fillRef idx="0">
+              <a:schemeClr val="accent1"/>
+            </a:fillRef>
+            <a:effectRef idx="1">
+              <a:schemeClr val="accent1"/>
+            </a:effectRef>
+            <a:fontRef idx="minor">
+              <a:schemeClr val="tx1"/>
+            </a:fontRef>
+          </p:style>
+        </p:cxnSp>
+        <p:pic>
+          <p:nvPicPr>
+            <p:cNvPr id="38" name="Picture 37">
+              <a:extLst>
+                <a:ext uri="{FF2B5EF4-FFF2-40B4-BE49-F238E27FC236}">
+                  <a16:creationId xmlns:a16="http://schemas.microsoft.com/office/drawing/2014/main" id="{09E2FF76-AE06-6A1B-8083-122AEE1054C0}"/>
+                </a:ext>
+              </a:extLst>
+            </p:cNvPr>
+            <p:cNvPicPr>
+              <a:picLocks noChangeAspect="1"/>
+            </p:cNvPicPr>
+            <p:nvPr/>
+          </p:nvPicPr>
+          <p:blipFill>
+            <a:blip r:embed="rId3"/>
+            <a:stretch>
+              <a:fillRect/>
+            </a:stretch>
+          </p:blipFill>
+          <p:spPr>
+            <a:xfrm>
+              <a:off x="1910869" y="5766008"/>
+              <a:ext cx="271956" cy="145691"/>
+            </a:xfrm>
+            <a:prstGeom prst="rect">
+              <a:avLst/>
+            </a:prstGeom>
+          </p:spPr>
+        </p:pic>
+        <p:pic>
+          <p:nvPicPr>
+            <p:cNvPr id="39" name="Picture 38">
+              <a:extLst>
+                <a:ext uri="{FF2B5EF4-FFF2-40B4-BE49-F238E27FC236}">
+                  <a16:creationId xmlns:a16="http://schemas.microsoft.com/office/drawing/2014/main" id="{D5557C18-42A6-E1D7-DB91-D3E6E7F3E1DF}"/>
+                </a:ext>
+              </a:extLst>
+            </p:cNvPr>
+            <p:cNvPicPr>
+              <a:picLocks noChangeAspect="1"/>
+            </p:cNvPicPr>
+            <p:nvPr/>
+          </p:nvPicPr>
+          <p:blipFill>
+            <a:blip r:embed="rId4"/>
+            <a:stretch>
+              <a:fillRect/>
+            </a:stretch>
+          </p:blipFill>
+          <p:spPr>
+            <a:xfrm>
+              <a:off x="1928865" y="6084767"/>
+              <a:ext cx="203967" cy="145691"/>
+            </a:xfrm>
+            <a:prstGeom prst="rect">
+              <a:avLst/>
+            </a:prstGeom>
+          </p:spPr>
+        </p:pic>
+        <p:pic>
+          <p:nvPicPr>
+            <p:cNvPr id="47" name="Picture 46">
+              <a:extLst>
+                <a:ext uri="{FF2B5EF4-FFF2-40B4-BE49-F238E27FC236}">
+                  <a16:creationId xmlns:a16="http://schemas.microsoft.com/office/drawing/2014/main" id="{2FA984D2-B235-D0BE-C08E-0E49653B0B54}"/>
+                </a:ext>
+              </a:extLst>
+            </p:cNvPr>
+            <p:cNvPicPr>
+              <a:picLocks noChangeAspect="1"/>
+            </p:cNvPicPr>
+            <p:nvPr/>
+          </p:nvPicPr>
+          <p:blipFill>
+            <a:blip r:embed="rId5"/>
+            <a:stretch>
+              <a:fillRect/>
+            </a:stretch>
+          </p:blipFill>
+          <p:spPr>
+            <a:xfrm>
+              <a:off x="7872919" y="4185494"/>
+              <a:ext cx="495349" cy="174829"/>
+            </a:xfrm>
+            <a:prstGeom prst="rect">
+              <a:avLst/>
+            </a:prstGeom>
+          </p:spPr>
+        </p:pic>
+        <p:sp>
+          <p:nvSpPr>
+            <p:cNvPr id="2" name="Rectangle 1">
+              <a:extLst>
+                <a:ext uri="{FF2B5EF4-FFF2-40B4-BE49-F238E27FC236}">
+                  <a16:creationId xmlns:a16="http://schemas.microsoft.com/office/drawing/2014/main" id="{694741C9-E699-D582-E0DF-2637D7E3857F}"/>
+                </a:ext>
+              </a:extLst>
+            </p:cNvPr>
+            <p:cNvSpPr/>
+            <p:nvPr/>
+          </p:nvSpPr>
+          <p:spPr>
+            <a:xfrm>
+              <a:off x="744286" y="2750108"/>
+              <a:ext cx="7825550" cy="367217"/>
+            </a:xfrm>
+            <a:prstGeom prst="rect">
+              <a:avLst/>
+            </a:prstGeom>
+            <a:solidFill>
+              <a:srgbClr val="00B0F0">
+                <a:alpha val="15000"/>
+              </a:srgbClr>
+            </a:solidFill>
+            <a:ln>
+              <a:noFill/>
+            </a:ln>
+          </p:spPr>
+          <p:style>
+            <a:lnRef idx="2">
+              <a:schemeClr val="accent1">
+                <a:shade val="15000"/>
+              </a:schemeClr>
+            </a:lnRef>
+            <a:fillRef idx="1">
+              <a:schemeClr val="accent1"/>
+            </a:fillRef>
+            <a:effectRef idx="0">
+              <a:schemeClr val="accent1"/>
+            </a:effectRef>
+            <a:fontRef idx="minor">
+              <a:schemeClr val="lt1"/>
+            </a:fontRef>
+          </p:style>
+          <p:txBody>
+            <a:bodyPr rtlCol="0" anchor="ctr"/>
+            <a:lstStyle/>
+            <a:p>
+              <a:pPr algn="ctr"/>
+              <a:endParaRPr lang="en-US" b="1" dirty="0"/>
+            </a:p>
+          </p:txBody>
+        </p:sp>
+        <p:sp>
+          <p:nvSpPr>
+            <p:cNvPr id="5" name="Freeform 4">
+              <a:extLst>
+                <a:ext uri="{FF2B5EF4-FFF2-40B4-BE49-F238E27FC236}">
+                  <a16:creationId xmlns:a16="http://schemas.microsoft.com/office/drawing/2014/main" id="{AF57CDE6-2172-92ED-53FC-5568C21147F2}"/>
+                </a:ext>
+              </a:extLst>
+            </p:cNvPr>
+            <p:cNvSpPr/>
+            <p:nvPr/>
+          </p:nvSpPr>
+          <p:spPr>
+            <a:xfrm>
+              <a:off x="989484" y="2761550"/>
+              <a:ext cx="4130847" cy="4138979"/>
+            </a:xfrm>
+            <a:custGeom>
+              <a:avLst/>
+              <a:gdLst>
+                <a:gd name="csX0" fmla="*/ 0 w 5401340"/>
+                <a:gd name="csY0" fmla="*/ 0 h 5411972"/>
+                <a:gd name="csX1" fmla="*/ 5401340 w 5401340"/>
+                <a:gd name="csY1" fmla="*/ 5411972 h 5411972"/>
+              </a:gdLst>
+              <a:ahLst/>
+              <a:cxnLst>
+                <a:cxn ang="0">
+                  <a:pos x="csX0" y="csY0"/>
+                </a:cxn>
+                <a:cxn ang="0">
+                  <a:pos x="csX1" y="csY1"/>
+                </a:cxn>
+              </a:cxnLst>
+              <a:rect l="l" t="t" r="r" b="b"/>
+              <a:pathLst>
+                <a:path w="5401340" h="5411972">
+                  <a:moveTo>
+                    <a:pt x="0" y="0"/>
+                  </a:moveTo>
+                  <a:lnTo>
+                    <a:pt x="5401340" y="5411972"/>
+                  </a:lnTo>
+                </a:path>
+              </a:pathLst>
+            </a:custGeom>
+          </p:spPr>
+          <p:style>
+            <a:lnRef idx="1">
+              <a:schemeClr val="dk1"/>
+            </a:lnRef>
+            <a:fillRef idx="0">
+              <a:schemeClr val="dk1"/>
+            </a:fillRef>
+            <a:effectRef idx="0">
+              <a:schemeClr val="dk1"/>
+            </a:effectRef>
+            <a:fontRef idx="minor">
+              <a:schemeClr val="tx1"/>
+            </a:fontRef>
+          </p:style>
+          <p:txBody>
+            <a:bodyPr rtlCol="0" anchor="ctr"/>
+            <a:lstStyle/>
+            <a:p>
+              <a:pPr algn="ctr"/>
+              <a:endParaRPr lang="en-US"/>
+            </a:p>
+          </p:txBody>
+        </p:sp>
+        <p:sp>
+          <p:nvSpPr>
+            <p:cNvPr id="24" name="Freeform 23">
+              <a:extLst>
+                <a:ext uri="{FF2B5EF4-FFF2-40B4-BE49-F238E27FC236}">
+                  <a16:creationId xmlns:a16="http://schemas.microsoft.com/office/drawing/2014/main" id="{42C9D010-1C69-3156-E613-B99F74CADD18}"/>
+                </a:ext>
+              </a:extLst>
+            </p:cNvPr>
+            <p:cNvSpPr/>
+            <p:nvPr/>
+          </p:nvSpPr>
+          <p:spPr>
+            <a:xfrm>
+              <a:off x="951017" y="404047"/>
+              <a:ext cx="6171793" cy="6478758"/>
+            </a:xfrm>
+            <a:custGeom>
+              <a:avLst/>
+              <a:gdLst>
+                <a:gd name="csX0" fmla="*/ 0 w 5401340"/>
+                <a:gd name="csY0" fmla="*/ 0 h 5411972"/>
+                <a:gd name="csX1" fmla="*/ 5401340 w 5401340"/>
+                <a:gd name="csY1" fmla="*/ 5411972 h 5411972"/>
+              </a:gdLst>
+              <a:ahLst/>
+              <a:cxnLst>
+                <a:cxn ang="0">
+                  <a:pos x="csX0" y="csY0"/>
+                </a:cxn>
+                <a:cxn ang="0">
+                  <a:pos x="csX1" y="csY1"/>
+                </a:cxn>
+              </a:cxnLst>
+              <a:rect l="l" t="t" r="r" b="b"/>
+              <a:pathLst>
+                <a:path w="5401340" h="5411972">
+                  <a:moveTo>
+                    <a:pt x="0" y="0"/>
+                  </a:moveTo>
+                  <a:lnTo>
+                    <a:pt x="5401340" y="5411972"/>
+                  </a:lnTo>
+                </a:path>
+              </a:pathLst>
+            </a:custGeom>
+          </p:spPr>
+          <p:style>
+            <a:lnRef idx="1">
+              <a:schemeClr val="dk1"/>
+            </a:lnRef>
+            <a:fillRef idx="0">
+              <a:schemeClr val="dk1"/>
+            </a:fillRef>
+            <a:effectRef idx="0">
+              <a:schemeClr val="dk1"/>
+            </a:effectRef>
+            <a:fontRef idx="minor">
+              <a:schemeClr val="tx1"/>
+            </a:fontRef>
+          </p:style>
+          <p:txBody>
+            <a:bodyPr rtlCol="0" anchor="ctr"/>
+            <a:lstStyle/>
+            <a:p>
+              <a:pPr algn="ctr"/>
+              <a:r>
+                <a:rPr lang="en-US" dirty="0"/>
+                <a:t>`</a:t>
+              </a:r>
+            </a:p>
+          </p:txBody>
+        </p:sp>
+        <p:cxnSp>
+          <p:nvCxnSpPr>
+            <p:cNvPr id="27" name="Straight Connector 26">
+              <a:extLst>
+                <a:ext uri="{FF2B5EF4-FFF2-40B4-BE49-F238E27FC236}">
+                  <a16:creationId xmlns:a16="http://schemas.microsoft.com/office/drawing/2014/main" id="{49755443-C8FD-DE1E-BABF-E2D8398B016E}"/>
+                </a:ext>
+              </a:extLst>
+            </p:cNvPr>
+            <p:cNvCxnSpPr>
+              <a:cxnSpLocks/>
+            </p:cNvCxnSpPr>
+            <p:nvPr/>
+          </p:nvCxnSpPr>
+          <p:spPr>
+            <a:xfrm flipH="1">
+              <a:off x="942223" y="111947"/>
+              <a:ext cx="43035" cy="6770858"/>
+            </a:xfrm>
+            <a:prstGeom prst="line">
+              <a:avLst/>
+            </a:prstGeom>
+          </p:spPr>
+          <p:style>
+            <a:lnRef idx="2">
+              <a:schemeClr val="accent1"/>
+            </a:lnRef>
+            <a:fillRef idx="0">
+              <a:schemeClr val="accent1"/>
+            </a:fillRef>
+            <a:effectRef idx="1">
+              <a:schemeClr val="accent1"/>
+            </a:effectRef>
+            <a:fontRef idx="minor">
+              <a:schemeClr val="tx1"/>
+            </a:fontRef>
+          </p:style>
+        </p:cxnSp>
+        <p:pic>
+          <p:nvPicPr>
+            <p:cNvPr id="58" name="Picture 57">
+              <a:extLst>
+                <a:ext uri="{FF2B5EF4-FFF2-40B4-BE49-F238E27FC236}">
+                  <a16:creationId xmlns:a16="http://schemas.microsoft.com/office/drawing/2014/main" id="{49D76F8F-06B2-73D7-634B-90940D2051DB}"/>
+                </a:ext>
+              </a:extLst>
+            </p:cNvPr>
+            <p:cNvPicPr>
+              <a:picLocks noChangeAspect="1"/>
+            </p:cNvPicPr>
+            <p:nvPr/>
+          </p:nvPicPr>
+          <p:blipFill>
+            <a:blip r:embed="rId6"/>
+            <a:stretch>
+              <a:fillRect/>
+            </a:stretch>
+          </p:blipFill>
+          <p:spPr>
+            <a:xfrm>
+              <a:off x="1730269" y="90681"/>
+              <a:ext cx="177800" cy="292100"/>
+            </a:xfrm>
+            <a:prstGeom prst="rect">
+              <a:avLst/>
+            </a:prstGeom>
+          </p:spPr>
+        </p:pic>
+        <p:pic>
+          <p:nvPicPr>
+            <p:cNvPr id="66" name="Picture 65">
+              <a:extLst>
+                <a:ext uri="{FF2B5EF4-FFF2-40B4-BE49-F238E27FC236}">
+                  <a16:creationId xmlns:a16="http://schemas.microsoft.com/office/drawing/2014/main" id="{5D8F60D4-3C78-8679-6BE5-7575B940C085}"/>
+                </a:ext>
+              </a:extLst>
+            </p:cNvPr>
+            <p:cNvPicPr>
+              <a:picLocks noChangeAspect="1"/>
+            </p:cNvPicPr>
+            <p:nvPr/>
+          </p:nvPicPr>
+          <p:blipFill>
+            <a:blip r:embed="rId7"/>
+            <a:stretch>
+              <a:fillRect/>
+            </a:stretch>
+          </p:blipFill>
+          <p:spPr>
+            <a:xfrm>
+              <a:off x="6399037" y="2836229"/>
+              <a:ext cx="1981200" cy="228600"/>
+            </a:xfrm>
+            <a:prstGeom prst="rect">
+              <a:avLst/>
+            </a:prstGeom>
+          </p:spPr>
+        </p:pic>
+        <p:sp>
+          <p:nvSpPr>
+            <p:cNvPr id="3" name="Freeform 2">
+              <a:extLst>
+                <a:ext uri="{FF2B5EF4-FFF2-40B4-BE49-F238E27FC236}">
+                  <a16:creationId xmlns:a16="http://schemas.microsoft.com/office/drawing/2014/main" id="{63F1F572-7F2E-008C-8A57-F6FC03AA20B0}"/>
+                </a:ext>
+              </a:extLst>
+            </p:cNvPr>
+            <p:cNvSpPr/>
+            <p:nvPr/>
+          </p:nvSpPr>
+          <p:spPr>
+            <a:xfrm>
+              <a:off x="1357166" y="3121379"/>
+              <a:ext cx="6053728" cy="3772867"/>
+            </a:xfrm>
+            <a:custGeom>
+              <a:avLst/>
+              <a:gdLst>
+                <a:gd name="csX0" fmla="*/ 0 w 5092995"/>
+                <a:gd name="csY0" fmla="*/ 0 h 4912242"/>
+                <a:gd name="csX1" fmla="*/ 1456661 w 5092995"/>
+                <a:gd name="csY1" fmla="*/ 1499191 h 4912242"/>
+                <a:gd name="csX2" fmla="*/ 5092995 w 5092995"/>
+                <a:gd name="csY2" fmla="*/ 4912242 h 4912242"/>
+                <a:gd name="csX0" fmla="*/ 0 w 5092995"/>
+                <a:gd name="csY0" fmla="*/ 0 h 4912242"/>
+                <a:gd name="csX1" fmla="*/ 1998922 w 5092995"/>
+                <a:gd name="csY1" fmla="*/ 1977656 h 4912242"/>
+                <a:gd name="csX2" fmla="*/ 5092995 w 5092995"/>
+                <a:gd name="csY2" fmla="*/ 4912242 h 4912242"/>
+                <a:gd name="csX0" fmla="*/ 0 w 6602818"/>
+                <a:gd name="csY0" fmla="*/ 0 h 4401879"/>
+                <a:gd name="csX1" fmla="*/ 1998922 w 6602818"/>
+                <a:gd name="csY1" fmla="*/ 1977656 h 4401879"/>
+                <a:gd name="csX2" fmla="*/ 6602818 w 6602818"/>
+                <a:gd name="csY2" fmla="*/ 4401879 h 4401879"/>
+                <a:gd name="csX0" fmla="*/ 0 w 8442251"/>
+                <a:gd name="csY0" fmla="*/ 0 h 5411972"/>
+                <a:gd name="csX1" fmla="*/ 1998922 w 8442251"/>
+                <a:gd name="csY1" fmla="*/ 1977656 h 5411972"/>
+                <a:gd name="csX2" fmla="*/ 8442251 w 8442251"/>
+                <a:gd name="csY2" fmla="*/ 5411972 h 5411972"/>
+                <a:gd name="csX0" fmla="*/ 0 w 9484956"/>
+                <a:gd name="csY0" fmla="*/ 0 h 5398070"/>
+                <a:gd name="csX1" fmla="*/ 1998922 w 9484956"/>
+                <a:gd name="csY1" fmla="*/ 1977656 h 5398070"/>
+                <a:gd name="csX2" fmla="*/ 9484956 w 9484956"/>
+                <a:gd name="csY2" fmla="*/ 5398070 h 5398070"/>
+                <a:gd name="csX0" fmla="*/ 0 w 9484956"/>
+                <a:gd name="csY0" fmla="*/ 0 h 5398070"/>
+                <a:gd name="csX1" fmla="*/ 2763571 w 9484956"/>
+                <a:gd name="csY1" fmla="*/ 2770112 h 5398070"/>
+                <a:gd name="csX2" fmla="*/ 9484956 w 9484956"/>
+                <a:gd name="csY2" fmla="*/ 5398070 h 5398070"/>
+                <a:gd name="csX0" fmla="*/ 0 w 6721385"/>
+                <a:gd name="csY0" fmla="*/ 0 h 2627958"/>
+                <a:gd name="csX1" fmla="*/ 6721385 w 6721385"/>
+                <a:gd name="csY1" fmla="*/ 2627958 h 2627958"/>
+                <a:gd name="csX0" fmla="*/ 0 w 8987530"/>
+                <a:gd name="csY0" fmla="*/ 0 h 4908005"/>
+                <a:gd name="csX1" fmla="*/ 8987530 w 8987530"/>
+                <a:gd name="csY1" fmla="*/ 4908005 h 4908005"/>
+              </a:gdLst>
+              <a:ahLst/>
+              <a:cxnLst>
+                <a:cxn ang="0">
+                  <a:pos x="csX0" y="csY0"/>
+                </a:cxn>
+                <a:cxn ang="0">
+                  <a:pos x="csX1" y="csY1"/>
+                </a:cxn>
+              </a:cxnLst>
+              <a:rect l="l" t="t" r="r" b="b"/>
+              <a:pathLst>
+                <a:path w="8987530" h="4908005">
+                  <a:moveTo>
+                    <a:pt x="0" y="0"/>
+                  </a:moveTo>
+                  <a:lnTo>
+                    <a:pt x="8987530" y="4908005"/>
+                  </a:lnTo>
+                </a:path>
+              </a:pathLst>
+            </a:custGeom>
+            <a:noFill/>
+            <a:ln w="31750">
+              <a:solidFill>
+                <a:srgbClr val="FF0000"/>
+              </a:solidFill>
+            </a:ln>
+          </p:spPr>
+          <p:style>
+            <a:lnRef idx="2">
+              <a:schemeClr val="accent1">
+                <a:shade val="15000"/>
+              </a:schemeClr>
+            </a:lnRef>
+            <a:fillRef idx="1">
+              <a:schemeClr val="accent1"/>
+            </a:fillRef>
+            <a:effectRef idx="0">
+              <a:schemeClr val="accent1"/>
+            </a:effectRef>
+            <a:fontRef idx="minor">
+              <a:schemeClr val="lt1"/>
+            </a:fontRef>
+          </p:style>
+          <p:txBody>
+            <a:bodyPr rtlCol="0" anchor="ctr"/>
+            <a:lstStyle/>
+            <a:p>
+              <a:pPr algn="ctr"/>
+              <a:endParaRPr lang="en-US" dirty="0"/>
+            </a:p>
+          </p:txBody>
+        </p:sp>
+        <p:pic>
+          <p:nvPicPr>
+            <p:cNvPr id="76" name="Picture 75">
+              <a:extLst>
+                <a:ext uri="{FF2B5EF4-FFF2-40B4-BE49-F238E27FC236}">
+                  <a16:creationId xmlns:a16="http://schemas.microsoft.com/office/drawing/2014/main" id="{BF2F1F0C-42DF-B928-123E-710ED456C7C0}"/>
+                </a:ext>
+              </a:extLst>
+            </p:cNvPr>
+            <p:cNvPicPr>
+              <a:picLocks noChangeAspect="1"/>
+            </p:cNvPicPr>
+            <p:nvPr/>
+          </p:nvPicPr>
+          <p:blipFill>
+            <a:blip r:embed="rId8"/>
+            <a:stretch>
+              <a:fillRect/>
+            </a:stretch>
+          </p:blipFill>
+          <p:spPr>
+            <a:xfrm rot="2733373">
+              <a:off x="1854440" y="1830365"/>
+              <a:ext cx="1473200" cy="228600"/>
+            </a:xfrm>
+            <a:prstGeom prst="rect">
+              <a:avLst/>
+            </a:prstGeom>
+          </p:spPr>
+        </p:pic>
+        <p:pic>
+          <p:nvPicPr>
+            <p:cNvPr id="78" name="Picture 77">
+              <a:extLst>
+                <a:ext uri="{FF2B5EF4-FFF2-40B4-BE49-F238E27FC236}">
+                  <a16:creationId xmlns:a16="http://schemas.microsoft.com/office/drawing/2014/main" id="{86E9FCC3-E183-D5F7-8774-6C1B61C771E9}"/>
+                </a:ext>
+              </a:extLst>
+            </p:cNvPr>
+            <p:cNvPicPr>
+              <a:picLocks noChangeAspect="1"/>
+            </p:cNvPicPr>
+            <p:nvPr/>
+          </p:nvPicPr>
+          <p:blipFill>
+            <a:blip r:embed="rId9"/>
+            <a:stretch>
+              <a:fillRect/>
+            </a:stretch>
+          </p:blipFill>
+          <p:spPr>
+            <a:xfrm>
+              <a:off x="1016873" y="2493775"/>
+              <a:ext cx="177800" cy="190500"/>
+            </a:xfrm>
+            <a:prstGeom prst="rect">
+              <a:avLst/>
+            </a:prstGeom>
+          </p:spPr>
+        </p:pic>
+        <p:pic>
+          <p:nvPicPr>
+            <p:cNvPr id="79" name="Picture 78">
+              <a:extLst>
+                <a:ext uri="{FF2B5EF4-FFF2-40B4-BE49-F238E27FC236}">
+                  <a16:creationId xmlns:a16="http://schemas.microsoft.com/office/drawing/2014/main" id="{0CAEDA8F-D2A0-A15D-8ACB-B707889B789F}"/>
+                </a:ext>
+              </a:extLst>
+            </p:cNvPr>
+            <p:cNvPicPr>
+              <a:picLocks noChangeAspect="1"/>
+            </p:cNvPicPr>
+            <p:nvPr/>
+          </p:nvPicPr>
+          <p:blipFill>
+            <a:blip r:embed="rId10"/>
+            <a:stretch>
+              <a:fillRect/>
+            </a:stretch>
+          </p:blipFill>
+          <p:spPr>
+            <a:xfrm>
+              <a:off x="1308240" y="2872267"/>
+              <a:ext cx="190500" cy="177800"/>
+            </a:xfrm>
+            <a:prstGeom prst="rect">
+              <a:avLst/>
+            </a:prstGeom>
+          </p:spPr>
+        </p:pic>
+        <p:pic>
+          <p:nvPicPr>
+            <p:cNvPr id="80" name="Picture 79">
+              <a:extLst>
+                <a:ext uri="{FF2B5EF4-FFF2-40B4-BE49-F238E27FC236}">
+                  <a16:creationId xmlns:a16="http://schemas.microsoft.com/office/drawing/2014/main" id="{421232CD-B88A-0F22-2D88-F8D2DC3710E9}"/>
+                </a:ext>
+              </a:extLst>
+            </p:cNvPr>
+            <p:cNvPicPr>
+              <a:picLocks noChangeAspect="1"/>
+            </p:cNvPicPr>
+            <p:nvPr/>
+          </p:nvPicPr>
+          <p:blipFill>
+            <a:blip r:embed="rId11"/>
+            <a:stretch>
+              <a:fillRect/>
+            </a:stretch>
+          </p:blipFill>
+          <p:spPr>
+            <a:xfrm>
+              <a:off x="5997213" y="5396472"/>
+              <a:ext cx="190500" cy="190500"/>
+            </a:xfrm>
+            <a:prstGeom prst="rect">
+              <a:avLst/>
+            </a:prstGeom>
+          </p:spPr>
+        </p:pic>
+        <p:pic>
+          <p:nvPicPr>
+            <p:cNvPr id="81" name="Picture 80">
+              <a:extLst>
+                <a:ext uri="{FF2B5EF4-FFF2-40B4-BE49-F238E27FC236}">
+                  <a16:creationId xmlns:a16="http://schemas.microsoft.com/office/drawing/2014/main" id="{23A7A76C-8275-59DB-30E1-BD778950FD55}"/>
+                </a:ext>
+              </a:extLst>
+            </p:cNvPr>
+            <p:cNvPicPr>
+              <a:picLocks noChangeAspect="1"/>
+            </p:cNvPicPr>
+            <p:nvPr/>
+          </p:nvPicPr>
+          <p:blipFill>
+            <a:blip r:embed="rId12"/>
+            <a:stretch>
+              <a:fillRect/>
+            </a:stretch>
+          </p:blipFill>
+          <p:spPr>
+            <a:xfrm>
+              <a:off x="6735132" y="6221532"/>
+              <a:ext cx="203200" cy="177800"/>
+            </a:xfrm>
+            <a:prstGeom prst="rect">
+              <a:avLst/>
+            </a:prstGeom>
+          </p:spPr>
+        </p:pic>
+        <p:pic>
+          <p:nvPicPr>
+            <p:cNvPr id="82" name="Picture 81">
+              <a:extLst>
+                <a:ext uri="{FF2B5EF4-FFF2-40B4-BE49-F238E27FC236}">
+                  <a16:creationId xmlns:a16="http://schemas.microsoft.com/office/drawing/2014/main" id="{C61B7DFE-9A84-0329-FBBA-91D6B5C237B0}"/>
+                </a:ext>
+              </a:extLst>
+            </p:cNvPr>
+            <p:cNvPicPr>
+              <a:picLocks noChangeAspect="1"/>
+            </p:cNvPicPr>
+            <p:nvPr/>
+          </p:nvPicPr>
+          <p:blipFill>
+            <a:blip r:embed="rId13"/>
+            <a:stretch>
+              <a:fillRect/>
+            </a:stretch>
+          </p:blipFill>
+          <p:spPr>
+            <a:xfrm>
+              <a:off x="7336910" y="6636201"/>
+              <a:ext cx="190500" cy="177800"/>
+            </a:xfrm>
+            <a:prstGeom prst="rect">
+              <a:avLst/>
+            </a:prstGeom>
+          </p:spPr>
+        </p:pic>
+        <p:pic>
+          <p:nvPicPr>
+            <p:cNvPr id="85" name="Picture 84">
+              <a:extLst>
+                <a:ext uri="{FF2B5EF4-FFF2-40B4-BE49-F238E27FC236}">
+                  <a16:creationId xmlns:a16="http://schemas.microsoft.com/office/drawing/2014/main" id="{D9726BA9-BD74-E77F-BF7F-F30F4671FB58}"/>
+                </a:ext>
+              </a:extLst>
+            </p:cNvPr>
+            <p:cNvPicPr>
+              <a:picLocks noChangeAspect="1"/>
+            </p:cNvPicPr>
+            <p:nvPr/>
+          </p:nvPicPr>
+          <p:blipFill>
+            <a:blip r:embed="rId3"/>
+            <a:stretch>
+              <a:fillRect/>
+            </a:stretch>
+          </p:blipFill>
+          <p:spPr>
+            <a:xfrm>
+              <a:off x="1616693" y="3802529"/>
+              <a:ext cx="271956" cy="145691"/>
+            </a:xfrm>
+            <a:prstGeom prst="rect">
+              <a:avLst/>
+            </a:prstGeom>
+          </p:spPr>
+        </p:pic>
+        <p:pic>
+          <p:nvPicPr>
+            <p:cNvPr id="87" name="Picture 86">
+              <a:extLst>
+                <a:ext uri="{FF2B5EF4-FFF2-40B4-BE49-F238E27FC236}">
+                  <a16:creationId xmlns:a16="http://schemas.microsoft.com/office/drawing/2014/main" id="{F1A9FC9E-9875-B474-2EE8-ABBF39EE0B54}"/>
+                </a:ext>
+              </a:extLst>
+            </p:cNvPr>
+            <p:cNvPicPr>
+              <a:picLocks noChangeAspect="1"/>
+            </p:cNvPicPr>
+            <p:nvPr/>
+          </p:nvPicPr>
+          <p:blipFill>
+            <a:blip r:embed="rId8"/>
+            <a:stretch>
+              <a:fillRect/>
+            </a:stretch>
+          </p:blipFill>
+          <p:spPr>
+            <a:xfrm rot="2733373">
+              <a:off x="3308323" y="5552718"/>
+              <a:ext cx="1473200" cy="228600"/>
+            </a:xfrm>
+            <a:prstGeom prst="rect">
+              <a:avLst/>
+            </a:prstGeom>
+          </p:spPr>
+        </p:pic>
+        <p:cxnSp>
+          <p:nvCxnSpPr>
+            <p:cNvPr id="12" name="Straight Arrow Connector 11">
+              <a:extLst>
+                <a:ext uri="{FF2B5EF4-FFF2-40B4-BE49-F238E27FC236}">
+                  <a16:creationId xmlns:a16="http://schemas.microsoft.com/office/drawing/2014/main" id="{50473C63-8FCC-52BE-82A5-1F45E027F120}"/>
+                </a:ext>
+              </a:extLst>
+            </p:cNvPr>
+            <p:cNvCxnSpPr>
+              <a:cxnSpLocks/>
+            </p:cNvCxnSpPr>
+            <p:nvPr/>
+          </p:nvCxnSpPr>
+          <p:spPr>
+            <a:xfrm>
+              <a:off x="949808" y="4009815"/>
+              <a:ext cx="2058761" cy="0"/>
+            </a:xfrm>
+            <a:prstGeom prst="straightConnector1">
+              <a:avLst/>
+            </a:prstGeom>
+            <a:ln w="34925">
+              <a:solidFill>
+                <a:srgbClr val="0070C0"/>
+              </a:solidFill>
+              <a:tailEnd type="triangle" w="lg" len="lg"/>
+            </a:ln>
+          </p:spPr>
+          <p:style>
+            <a:lnRef idx="2">
+              <a:schemeClr val="accent1"/>
+            </a:lnRef>
+            <a:fillRef idx="0">
+              <a:schemeClr val="accent1"/>
+            </a:fillRef>
+            <a:effectRef idx="1">
+              <a:schemeClr val="accent1"/>
+            </a:effectRef>
+            <a:fontRef idx="minor">
+              <a:schemeClr val="tx1"/>
+            </a:fontRef>
+          </p:style>
+        </p:cxnSp>
+        <p:sp>
+          <p:nvSpPr>
+            <p:cNvPr id="9" name="Freeform 8">
+              <a:extLst>
+                <a:ext uri="{FF2B5EF4-FFF2-40B4-BE49-F238E27FC236}">
+                  <a16:creationId xmlns:a16="http://schemas.microsoft.com/office/drawing/2014/main" id="{9F7549A5-3488-9D32-260F-048DDD7D572A}"/>
+                </a:ext>
+              </a:extLst>
+            </p:cNvPr>
+            <p:cNvSpPr/>
+            <p:nvPr/>
+          </p:nvSpPr>
+          <p:spPr>
+            <a:xfrm>
+              <a:off x="1323112" y="3099602"/>
+              <a:ext cx="4572151" cy="2480117"/>
+            </a:xfrm>
+            <a:custGeom>
+              <a:avLst/>
+              <a:gdLst>
+                <a:gd name="csX0" fmla="*/ 0 w 5401340"/>
+                <a:gd name="csY0" fmla="*/ 0 h 5411972"/>
+                <a:gd name="csX1" fmla="*/ 5401340 w 5401340"/>
+                <a:gd name="csY1" fmla="*/ 5411972 h 5411972"/>
+                <a:gd name="csX0" fmla="*/ 0 w 3770453"/>
+                <a:gd name="csY0" fmla="*/ 0 h 3776676"/>
+                <a:gd name="csX1" fmla="*/ 3770453 w 3770453"/>
+                <a:gd name="csY1" fmla="*/ 3776676 h 3776676"/>
+              </a:gdLst>
+              <a:ahLst/>
+              <a:cxnLst>
+                <a:cxn ang="0">
+                  <a:pos x="csX0" y="csY0"/>
+                </a:cxn>
+                <a:cxn ang="0">
+                  <a:pos x="csX1" y="csY1"/>
+                </a:cxn>
+              </a:cxnLst>
+              <a:rect l="l" t="t" r="r" b="b"/>
+              <a:pathLst>
+                <a:path w="3770453" h="3776676">
+                  <a:moveTo>
+                    <a:pt x="0" y="0"/>
+                  </a:moveTo>
+                  <a:lnTo>
+                    <a:pt x="3770453" y="3776676"/>
+                  </a:lnTo>
+                </a:path>
+              </a:pathLst>
+            </a:custGeom>
+            <a:ln w="28575">
+              <a:solidFill>
+                <a:srgbClr val="0070C0"/>
+              </a:solidFill>
+            </a:ln>
+          </p:spPr>
+          <p:style>
+            <a:lnRef idx="1">
+              <a:schemeClr val="dk1"/>
+            </a:lnRef>
+            <a:fillRef idx="0">
+              <a:schemeClr val="dk1"/>
+            </a:fillRef>
+            <a:effectRef idx="0">
+              <a:schemeClr val="dk1"/>
+            </a:effectRef>
+            <a:fontRef idx="minor">
+              <a:schemeClr val="tx1"/>
+            </a:fontRef>
+          </p:style>
+          <p:txBody>
+            <a:bodyPr rtlCol="0" anchor="ctr"/>
+            <a:lstStyle/>
+            <a:p>
+              <a:pPr algn="ctr"/>
+              <a:endParaRPr lang="en-US"/>
+            </a:p>
+          </p:txBody>
+        </p:sp>
+        <p:cxnSp>
+          <p:nvCxnSpPr>
+            <p:cNvPr id="26" name="Straight Connector 25">
+              <a:extLst>
+                <a:ext uri="{FF2B5EF4-FFF2-40B4-BE49-F238E27FC236}">
+                  <a16:creationId xmlns:a16="http://schemas.microsoft.com/office/drawing/2014/main" id="{2CB790EF-BD95-501D-0C67-045C4652A654}"/>
+                </a:ext>
+              </a:extLst>
+            </p:cNvPr>
+            <p:cNvCxnSpPr>
+              <a:cxnSpLocks/>
+            </p:cNvCxnSpPr>
+            <p:nvPr/>
+          </p:nvCxnSpPr>
+          <p:spPr>
+            <a:xfrm>
+              <a:off x="925529" y="404047"/>
+              <a:ext cx="2328085" cy="0"/>
+            </a:xfrm>
+            <a:prstGeom prst="line">
+              <a:avLst/>
+            </a:prstGeom>
+          </p:spPr>
+          <p:style>
+            <a:lnRef idx="2">
+              <a:schemeClr val="accent1"/>
+            </a:lnRef>
+            <a:fillRef idx="0">
+              <a:schemeClr val="accent1"/>
+            </a:fillRef>
+            <a:effectRef idx="1">
+              <a:schemeClr val="accent1"/>
+            </a:effectRef>
+            <a:fontRef idx="minor">
+              <a:schemeClr val="tx1"/>
+            </a:fontRef>
+          </p:style>
+        </p:cxnSp>
+        <p:cxnSp>
+          <p:nvCxnSpPr>
+            <p:cNvPr id="31" name="Straight Connector 30">
+              <a:extLst>
+                <a:ext uri="{FF2B5EF4-FFF2-40B4-BE49-F238E27FC236}">
+                  <a16:creationId xmlns:a16="http://schemas.microsoft.com/office/drawing/2014/main" id="{9DA46620-1A4C-2745-1C39-3D29692DF2E5}"/>
+                </a:ext>
+              </a:extLst>
+            </p:cNvPr>
+            <p:cNvCxnSpPr>
+              <a:cxnSpLocks/>
+            </p:cNvCxnSpPr>
+            <p:nvPr/>
+          </p:nvCxnSpPr>
+          <p:spPr>
+            <a:xfrm>
+              <a:off x="5895263" y="5591359"/>
+              <a:ext cx="1227547" cy="1302887"/>
+            </a:xfrm>
+            <a:prstGeom prst="line">
+              <a:avLst/>
+            </a:prstGeom>
+            <a:ln w="31750"/>
+          </p:spPr>
+          <p:style>
+            <a:lnRef idx="2">
+              <a:schemeClr val="accent1"/>
+            </a:lnRef>
+            <a:fillRef idx="0">
+              <a:schemeClr val="accent1"/>
+            </a:fillRef>
+            <a:effectRef idx="1">
+              <a:schemeClr val="accent1"/>
+            </a:effectRef>
+            <a:fontRef idx="minor">
+              <a:schemeClr val="tx1"/>
+            </a:fontRef>
+          </p:style>
+        </p:cxnSp>
+        <p:cxnSp>
+          <p:nvCxnSpPr>
+            <p:cNvPr id="35" name="Straight Connector 34">
+              <a:extLst>
+                <a:ext uri="{FF2B5EF4-FFF2-40B4-BE49-F238E27FC236}">
+                  <a16:creationId xmlns:a16="http://schemas.microsoft.com/office/drawing/2014/main" id="{F6C96FFE-21C1-6709-2707-B99FC10E6A71}"/>
+                </a:ext>
+              </a:extLst>
+            </p:cNvPr>
+            <p:cNvCxnSpPr>
+              <a:cxnSpLocks/>
+            </p:cNvCxnSpPr>
+            <p:nvPr/>
+          </p:nvCxnSpPr>
+          <p:spPr>
+            <a:xfrm>
+              <a:off x="965285" y="2734733"/>
+              <a:ext cx="389767" cy="415085"/>
+            </a:xfrm>
+            <a:prstGeom prst="line">
+              <a:avLst/>
+            </a:prstGeom>
+            <a:ln w="31750"/>
+          </p:spPr>
+          <p:style>
+            <a:lnRef idx="2">
+              <a:schemeClr val="accent1"/>
+            </a:lnRef>
+            <a:fillRef idx="0">
+              <a:schemeClr val="accent1"/>
+            </a:fillRef>
+            <a:effectRef idx="1">
+              <a:schemeClr val="accent1"/>
+            </a:effectRef>
+            <a:fontRef idx="minor">
+              <a:schemeClr val="tx1"/>
+            </a:fontRef>
+          </p:style>
+        </p:cxnSp>
+        <p:pic>
+          <p:nvPicPr>
+            <p:cNvPr id="43" name="Picture 42">
+              <a:extLst>
+                <a:ext uri="{FF2B5EF4-FFF2-40B4-BE49-F238E27FC236}">
+                  <a16:creationId xmlns:a16="http://schemas.microsoft.com/office/drawing/2014/main" id="{B7C867EE-9CB1-B5EE-69EF-3E5CD9067D35}"/>
+                </a:ext>
+              </a:extLst>
+            </p:cNvPr>
+            <p:cNvPicPr>
+              <a:picLocks noChangeAspect="1"/>
+            </p:cNvPicPr>
+            <p:nvPr/>
+          </p:nvPicPr>
+          <p:blipFill>
+            <a:blip r:embed="rId14"/>
+            <a:stretch>
+              <a:fillRect/>
+            </a:stretch>
+          </p:blipFill>
+          <p:spPr>
+            <a:xfrm>
+              <a:off x="7767390" y="5934597"/>
+              <a:ext cx="584200" cy="241300"/>
+            </a:xfrm>
+            <a:prstGeom prst="rect">
+              <a:avLst/>
+            </a:prstGeom>
+          </p:spPr>
+        </p:pic>
+      </p:grpSp>
+    </p:spTree>
+    <p:extLst>
+      <p:ext uri="{BB962C8B-B14F-4D97-AF65-F5344CB8AC3E}">
+        <p14:creationId xmlns:p14="http://schemas.microsoft.com/office/powerpoint/2010/main" val="2551003649"/>
+      </p:ext>
+    </p:extLst>
+  </p:cSld>
+  <p:clrMapOvr>
+    <a:masterClrMapping/>
+  </p:clrMapOvr>
+</p:sld>
+</file>
+
+<file path=ppt/slides/slide6.xml><?xml version="1.0" encoding="utf-8"?>
+<p:sld xmlns:a="http://schemas.openxmlformats.org/drawingml/2006/main" xmlns:r="http://schemas.openxmlformats.org/officeDocument/2006/relationships" xmlns:p="http://schemas.openxmlformats.org/presentationml/2006/main">
+  <p:cSld>
+    <p:spTree>
+      <p:nvGrpSpPr>
+        <p:cNvPr id="1" name="">
+          <a:extLst>
+            <a:ext uri="{FF2B5EF4-FFF2-40B4-BE49-F238E27FC236}">
+              <a16:creationId xmlns:a16="http://schemas.microsoft.com/office/drawing/2014/main" id="{DE650DD3-9E23-B437-3C39-F8B96783A03A}"/>
+            </a:ext>
+          </a:extLst>
+        </p:cNvPr>
+        <p:cNvGrpSpPr/>
+        <p:nvPr/>
+      </p:nvGrpSpPr>
+      <p:grpSpPr>
+        <a:xfrm>
+          <a:off x="0" y="0"/>
+          <a:ext cx="0" cy="0"/>
+          <a:chOff x="0" y="0"/>
+          <a:chExt cx="0" cy="0"/>
+        </a:xfrm>
+      </p:grpSpPr>
+      <p:grpSp>
+        <p:nvGrpSpPr>
+          <p:cNvPr id="21" name="Group 20">
+            <a:extLst>
+              <a:ext uri="{FF2B5EF4-FFF2-40B4-BE49-F238E27FC236}">
+                <a16:creationId xmlns:a16="http://schemas.microsoft.com/office/drawing/2014/main" id="{E061CD64-5CE3-5EB9-C573-F4701D4095A1}"/>
+              </a:ext>
+            </a:extLst>
+          </p:cNvPr>
+          <p:cNvGrpSpPr/>
+          <p:nvPr/>
+        </p:nvGrpSpPr>
+        <p:grpSpPr>
+          <a:xfrm>
+            <a:off x="-202462" y="90681"/>
+            <a:ext cx="8772298" cy="6809848"/>
+            <a:chOff x="-202462" y="90681"/>
+            <a:chExt cx="8772298" cy="6809848"/>
+          </a:xfrm>
+        </p:grpSpPr>
+        <p:sp>
+          <p:nvSpPr>
+            <p:cNvPr id="30" name="Rectangle 29">
+              <a:extLst>
+                <a:ext uri="{FF2B5EF4-FFF2-40B4-BE49-F238E27FC236}">
+                  <a16:creationId xmlns:a16="http://schemas.microsoft.com/office/drawing/2014/main" id="{50ED6DE4-C9CF-642B-2EF0-726D65D452D6}"/>
+                </a:ext>
+              </a:extLst>
+            </p:cNvPr>
+            <p:cNvSpPr/>
+            <p:nvPr/>
+          </p:nvSpPr>
+          <p:spPr>
+            <a:xfrm>
+              <a:off x="712379" y="5542413"/>
+              <a:ext cx="7825563" cy="1302887"/>
+            </a:xfrm>
+            <a:prstGeom prst="rect">
+              <a:avLst/>
+            </a:prstGeom>
+            <a:solidFill>
+              <a:srgbClr val="FFC000"/>
+            </a:solidFill>
+            <a:ln>
+              <a:solidFill>
+                <a:srgbClr val="FFC000"/>
+              </a:solidFill>
+            </a:ln>
+          </p:spPr>
+          <p:style>
+            <a:lnRef idx="2">
+              <a:schemeClr val="accent1">
+                <a:shade val="15000"/>
+              </a:schemeClr>
+            </a:lnRef>
+            <a:fillRef idx="1">
+              <a:schemeClr val="accent1"/>
+            </a:fillRef>
+            <a:effectRef idx="0">
+              <a:schemeClr val="accent1"/>
+            </a:effectRef>
+            <a:fontRef idx="minor">
+              <a:schemeClr val="lt1"/>
+            </a:fontRef>
+          </p:style>
+          <p:txBody>
+            <a:bodyPr rtlCol="0" anchor="ctr"/>
+            <a:lstStyle/>
+            <a:p>
+              <a:pPr algn="ctr"/>
+              <a:endParaRPr lang="en-US" b="1" dirty="0"/>
+            </a:p>
+          </p:txBody>
+        </p:sp>
+        <p:sp>
+          <p:nvSpPr>
+            <p:cNvPr id="7" name="Rectangle 6">
+              <a:extLst>
+                <a:ext uri="{FF2B5EF4-FFF2-40B4-BE49-F238E27FC236}">
+                  <a16:creationId xmlns:a16="http://schemas.microsoft.com/office/drawing/2014/main" id="{FA3DC62A-A89F-E790-5CDC-29BE28CFF35D}"/>
+                </a:ext>
+              </a:extLst>
+            </p:cNvPr>
+            <p:cNvSpPr/>
+            <p:nvPr/>
+          </p:nvSpPr>
+          <p:spPr>
+            <a:xfrm>
+              <a:off x="712379" y="3117326"/>
+              <a:ext cx="7825563" cy="2419377"/>
+            </a:xfrm>
+            <a:prstGeom prst="rect">
+              <a:avLst/>
+            </a:prstGeom>
+            <a:solidFill>
+              <a:srgbClr val="FFFF00"/>
+            </a:solidFill>
+            <a:ln>
+              <a:noFill/>
+            </a:ln>
+          </p:spPr>
+          <p:style>
+            <a:lnRef idx="2">
+              <a:schemeClr val="accent1">
+                <a:shade val="15000"/>
+              </a:schemeClr>
+            </a:lnRef>
+            <a:fillRef idx="1">
+              <a:schemeClr val="accent1"/>
+            </a:fillRef>
+            <a:effectRef idx="0">
+              <a:schemeClr val="accent1"/>
+            </a:effectRef>
+            <a:fontRef idx="minor">
+              <a:schemeClr val="lt1"/>
+            </a:fontRef>
+          </p:style>
+          <p:txBody>
+            <a:bodyPr rtlCol="0" anchor="ctr"/>
+            <a:lstStyle/>
+            <a:p>
+              <a:pPr algn="ctr"/>
+              <a:endParaRPr lang="en-US" b="1" dirty="0"/>
+            </a:p>
+          </p:txBody>
+        </p:sp>
+        <p:cxnSp>
+          <p:nvCxnSpPr>
+            <p:cNvPr id="42" name="Straight Connector 41">
+              <a:extLst>
+                <a:ext uri="{FF2B5EF4-FFF2-40B4-BE49-F238E27FC236}">
+                  <a16:creationId xmlns:a16="http://schemas.microsoft.com/office/drawing/2014/main" id="{06BF8018-5A77-FF02-3167-BE058F606979}"/>
+                </a:ext>
+              </a:extLst>
+            </p:cNvPr>
+            <p:cNvCxnSpPr>
+              <a:cxnSpLocks/>
+            </p:cNvCxnSpPr>
+            <p:nvPr/>
+          </p:nvCxnSpPr>
+          <p:spPr>
+            <a:xfrm>
+              <a:off x="680484" y="3121660"/>
+              <a:ext cx="7825557" cy="4336"/>
+            </a:xfrm>
+            <a:prstGeom prst="line">
+              <a:avLst/>
+            </a:prstGeom>
+          </p:spPr>
+          <p:style>
+            <a:lnRef idx="2">
+              <a:schemeClr val="accent1"/>
+            </a:lnRef>
+            <a:fillRef idx="0">
+              <a:schemeClr val="accent1"/>
+            </a:fillRef>
+            <a:effectRef idx="1">
+              <a:schemeClr val="accent1"/>
+            </a:effectRef>
+            <a:fontRef idx="minor">
+              <a:schemeClr val="tx1"/>
+            </a:fontRef>
+          </p:style>
+        </p:cxnSp>
+        <p:cxnSp>
+          <p:nvCxnSpPr>
+            <p:cNvPr id="34" name="Straight Arrow Connector 33">
+              <a:extLst>
+                <a:ext uri="{FF2B5EF4-FFF2-40B4-BE49-F238E27FC236}">
+                  <a16:creationId xmlns:a16="http://schemas.microsoft.com/office/drawing/2014/main" id="{0AECE546-0935-1D87-EBB4-40628731DBDF}"/>
+                </a:ext>
+              </a:extLst>
+            </p:cNvPr>
+            <p:cNvCxnSpPr>
+              <a:cxnSpLocks/>
+            </p:cNvCxnSpPr>
+            <p:nvPr/>
+          </p:nvCxnSpPr>
+          <p:spPr>
+            <a:xfrm>
+              <a:off x="985258" y="6001644"/>
+              <a:ext cx="5298584" cy="0"/>
+            </a:xfrm>
+            <a:prstGeom prst="straightConnector1">
+              <a:avLst/>
+            </a:prstGeom>
+            <a:ln w="34925">
+              <a:solidFill>
+                <a:srgbClr val="0070C0"/>
+              </a:solidFill>
+              <a:tailEnd type="triangle" w="lg" len="lg"/>
+            </a:ln>
+          </p:spPr>
+          <p:style>
+            <a:lnRef idx="2">
+              <a:schemeClr val="accent1"/>
+            </a:lnRef>
+            <a:fillRef idx="0">
+              <a:schemeClr val="accent1"/>
+            </a:fillRef>
+            <a:effectRef idx="1">
+              <a:schemeClr val="accent1"/>
+            </a:effectRef>
+            <a:fontRef idx="minor">
+              <a:schemeClr val="tx1"/>
+            </a:fontRef>
+          </p:style>
+        </p:cxnSp>
+        <p:cxnSp>
+          <p:nvCxnSpPr>
+            <p:cNvPr id="36" name="Straight Arrow Connector 35">
+              <a:extLst>
+                <a:ext uri="{FF2B5EF4-FFF2-40B4-BE49-F238E27FC236}">
+                  <a16:creationId xmlns:a16="http://schemas.microsoft.com/office/drawing/2014/main" id="{A9F645A0-4B80-FE8C-0578-1BC6683A104E}"/>
+                </a:ext>
+              </a:extLst>
+            </p:cNvPr>
+            <p:cNvCxnSpPr>
+              <a:cxnSpLocks/>
+            </p:cNvCxnSpPr>
+            <p:nvPr/>
+          </p:nvCxnSpPr>
+          <p:spPr>
+            <a:xfrm>
+              <a:off x="933369" y="6272939"/>
+              <a:ext cx="5465668" cy="0"/>
+            </a:xfrm>
+            <a:prstGeom prst="straightConnector1">
+              <a:avLst/>
+            </a:prstGeom>
+            <a:ln w="34925">
+              <a:solidFill>
+                <a:srgbClr val="FF0000"/>
+              </a:solidFill>
+              <a:tailEnd type="triangle" w="lg" len="lg"/>
+            </a:ln>
+          </p:spPr>
+          <p:style>
+            <a:lnRef idx="2">
+              <a:schemeClr val="accent1"/>
+            </a:lnRef>
+            <a:fillRef idx="0">
+              <a:schemeClr val="accent1"/>
+            </a:fillRef>
+            <a:effectRef idx="1">
+              <a:schemeClr val="accent1"/>
+            </a:effectRef>
+            <a:fontRef idx="minor">
+              <a:schemeClr val="tx1"/>
+            </a:fontRef>
+          </p:style>
+        </p:cxnSp>
+        <p:pic>
+          <p:nvPicPr>
+            <p:cNvPr id="38" name="Picture 37">
+              <a:extLst>
+                <a:ext uri="{FF2B5EF4-FFF2-40B4-BE49-F238E27FC236}">
+                  <a16:creationId xmlns:a16="http://schemas.microsoft.com/office/drawing/2014/main" id="{8F96DA64-2571-73EB-6C0A-46D6F5A02869}"/>
+                </a:ext>
+              </a:extLst>
+            </p:cNvPr>
+            <p:cNvPicPr>
+              <a:picLocks noChangeAspect="1"/>
+            </p:cNvPicPr>
+            <p:nvPr/>
+          </p:nvPicPr>
+          <p:blipFill>
+            <a:blip r:embed="rId3"/>
+            <a:stretch>
+              <a:fillRect/>
+            </a:stretch>
+          </p:blipFill>
+          <p:spPr>
+            <a:xfrm>
+              <a:off x="1910869" y="5766008"/>
+              <a:ext cx="271956" cy="145691"/>
+            </a:xfrm>
+            <a:prstGeom prst="rect">
+              <a:avLst/>
+            </a:prstGeom>
+          </p:spPr>
+        </p:pic>
+        <p:pic>
+          <p:nvPicPr>
+            <p:cNvPr id="39" name="Picture 38">
+              <a:extLst>
+                <a:ext uri="{FF2B5EF4-FFF2-40B4-BE49-F238E27FC236}">
+                  <a16:creationId xmlns:a16="http://schemas.microsoft.com/office/drawing/2014/main" id="{0A61FFDB-69D3-BE10-B82C-2501C4736B36}"/>
+                </a:ext>
+              </a:extLst>
+            </p:cNvPr>
+            <p:cNvPicPr>
+              <a:picLocks noChangeAspect="1"/>
+            </p:cNvPicPr>
+            <p:nvPr/>
+          </p:nvPicPr>
+          <p:blipFill>
+            <a:blip r:embed="rId4"/>
+            <a:stretch>
+              <a:fillRect/>
+            </a:stretch>
+          </p:blipFill>
+          <p:spPr>
+            <a:xfrm>
+              <a:off x="1928865" y="6084767"/>
+              <a:ext cx="203967" cy="145691"/>
+            </a:xfrm>
+            <a:prstGeom prst="rect">
+              <a:avLst/>
+            </a:prstGeom>
+          </p:spPr>
+        </p:pic>
+        <p:pic>
+          <p:nvPicPr>
+            <p:cNvPr id="47" name="Picture 46">
+              <a:extLst>
+                <a:ext uri="{FF2B5EF4-FFF2-40B4-BE49-F238E27FC236}">
+                  <a16:creationId xmlns:a16="http://schemas.microsoft.com/office/drawing/2014/main" id="{5399AA62-B6AA-DA47-C9CB-56928CF63F0A}"/>
+                </a:ext>
+              </a:extLst>
+            </p:cNvPr>
+            <p:cNvPicPr>
+              <a:picLocks noChangeAspect="1"/>
+            </p:cNvPicPr>
+            <p:nvPr/>
+          </p:nvPicPr>
+          <p:blipFill>
+            <a:blip r:embed="rId5"/>
+            <a:stretch>
+              <a:fillRect/>
+            </a:stretch>
+          </p:blipFill>
+          <p:spPr>
+            <a:xfrm>
+              <a:off x="7872919" y="4185494"/>
+              <a:ext cx="495349" cy="174829"/>
+            </a:xfrm>
+            <a:prstGeom prst="rect">
+              <a:avLst/>
+            </a:prstGeom>
+          </p:spPr>
+        </p:pic>
+        <p:sp>
+          <p:nvSpPr>
+            <p:cNvPr id="2" name="Rectangle 1">
+              <a:extLst>
+                <a:ext uri="{FF2B5EF4-FFF2-40B4-BE49-F238E27FC236}">
+                  <a16:creationId xmlns:a16="http://schemas.microsoft.com/office/drawing/2014/main" id="{2CEA784E-1B9D-30C5-F115-DD98AC108EE5}"/>
+                </a:ext>
+              </a:extLst>
+            </p:cNvPr>
+            <p:cNvSpPr/>
+            <p:nvPr/>
+          </p:nvSpPr>
+          <p:spPr>
+            <a:xfrm>
+              <a:off x="744286" y="2750108"/>
+              <a:ext cx="7825550" cy="367217"/>
+            </a:xfrm>
+            <a:prstGeom prst="rect">
+              <a:avLst/>
+            </a:prstGeom>
+            <a:solidFill>
+              <a:srgbClr val="00B0F0">
+                <a:alpha val="15000"/>
+              </a:srgbClr>
+            </a:solidFill>
+            <a:ln>
+              <a:noFill/>
+            </a:ln>
+          </p:spPr>
+          <p:style>
+            <a:lnRef idx="2">
+              <a:schemeClr val="accent1">
+                <a:shade val="15000"/>
+              </a:schemeClr>
+            </a:lnRef>
+            <a:fillRef idx="1">
+              <a:schemeClr val="accent1"/>
+            </a:fillRef>
+            <a:effectRef idx="0">
+              <a:schemeClr val="accent1"/>
+            </a:effectRef>
+            <a:fontRef idx="minor">
+              <a:schemeClr val="lt1"/>
+            </a:fontRef>
+          </p:style>
+          <p:txBody>
+            <a:bodyPr rtlCol="0" anchor="ctr"/>
+            <a:lstStyle/>
+            <a:p>
+              <a:pPr algn="ctr"/>
+              <a:endParaRPr lang="en-US" b="1" dirty="0"/>
+            </a:p>
+          </p:txBody>
+        </p:sp>
+        <p:sp>
+          <p:nvSpPr>
+            <p:cNvPr id="5" name="Freeform 4">
+              <a:extLst>
+                <a:ext uri="{FF2B5EF4-FFF2-40B4-BE49-F238E27FC236}">
+                  <a16:creationId xmlns:a16="http://schemas.microsoft.com/office/drawing/2014/main" id="{377D4B39-4573-BD6C-6EF7-A3EB37A91E06}"/>
+                </a:ext>
+              </a:extLst>
+            </p:cNvPr>
+            <p:cNvSpPr/>
+            <p:nvPr/>
+          </p:nvSpPr>
+          <p:spPr>
+            <a:xfrm>
+              <a:off x="989484" y="2761550"/>
+              <a:ext cx="4130847" cy="4138979"/>
+            </a:xfrm>
+            <a:custGeom>
+              <a:avLst/>
+              <a:gdLst>
+                <a:gd name="csX0" fmla="*/ 0 w 5401340"/>
+                <a:gd name="csY0" fmla="*/ 0 h 5411972"/>
+                <a:gd name="csX1" fmla="*/ 5401340 w 5401340"/>
+                <a:gd name="csY1" fmla="*/ 5411972 h 5411972"/>
+              </a:gdLst>
+              <a:ahLst/>
+              <a:cxnLst>
+                <a:cxn ang="0">
+                  <a:pos x="csX0" y="csY0"/>
+                </a:cxn>
+                <a:cxn ang="0">
+                  <a:pos x="csX1" y="csY1"/>
+                </a:cxn>
+              </a:cxnLst>
+              <a:rect l="l" t="t" r="r" b="b"/>
+              <a:pathLst>
+                <a:path w="5401340" h="5411972">
+                  <a:moveTo>
+                    <a:pt x="0" y="0"/>
+                  </a:moveTo>
+                  <a:lnTo>
+                    <a:pt x="5401340" y="5411972"/>
+                  </a:lnTo>
+                </a:path>
+              </a:pathLst>
+            </a:custGeom>
+          </p:spPr>
+          <p:style>
+            <a:lnRef idx="1">
+              <a:schemeClr val="dk1"/>
+            </a:lnRef>
+            <a:fillRef idx="0">
+              <a:schemeClr val="dk1"/>
+            </a:fillRef>
+            <a:effectRef idx="0">
+              <a:schemeClr val="dk1"/>
+            </a:effectRef>
+            <a:fontRef idx="minor">
+              <a:schemeClr val="tx1"/>
+            </a:fontRef>
+          </p:style>
+          <p:txBody>
+            <a:bodyPr rtlCol="0" anchor="ctr"/>
+            <a:lstStyle/>
+            <a:p>
+              <a:pPr algn="ctr"/>
+              <a:endParaRPr lang="en-US"/>
+            </a:p>
+          </p:txBody>
+        </p:sp>
+        <p:sp>
+          <p:nvSpPr>
+            <p:cNvPr id="24" name="Freeform 23">
+              <a:extLst>
+                <a:ext uri="{FF2B5EF4-FFF2-40B4-BE49-F238E27FC236}">
+                  <a16:creationId xmlns:a16="http://schemas.microsoft.com/office/drawing/2014/main" id="{72040CC1-723B-290C-A3F8-70C66DB17334}"/>
+                </a:ext>
+              </a:extLst>
+            </p:cNvPr>
+            <p:cNvSpPr/>
+            <p:nvPr/>
+          </p:nvSpPr>
+          <p:spPr>
+            <a:xfrm>
+              <a:off x="951017" y="404047"/>
+              <a:ext cx="6171793" cy="6478758"/>
+            </a:xfrm>
+            <a:custGeom>
+              <a:avLst/>
+              <a:gdLst>
+                <a:gd name="csX0" fmla="*/ 0 w 5401340"/>
+                <a:gd name="csY0" fmla="*/ 0 h 5411972"/>
+                <a:gd name="csX1" fmla="*/ 5401340 w 5401340"/>
+                <a:gd name="csY1" fmla="*/ 5411972 h 5411972"/>
+              </a:gdLst>
+              <a:ahLst/>
+              <a:cxnLst>
+                <a:cxn ang="0">
+                  <a:pos x="csX0" y="csY0"/>
+                </a:cxn>
+                <a:cxn ang="0">
+                  <a:pos x="csX1" y="csY1"/>
+                </a:cxn>
+              </a:cxnLst>
+              <a:rect l="l" t="t" r="r" b="b"/>
+              <a:pathLst>
+                <a:path w="5401340" h="5411972">
+                  <a:moveTo>
+                    <a:pt x="0" y="0"/>
+                  </a:moveTo>
+                  <a:lnTo>
+                    <a:pt x="5401340" y="5411972"/>
+                  </a:lnTo>
+                </a:path>
+              </a:pathLst>
+            </a:custGeom>
+          </p:spPr>
+          <p:style>
+            <a:lnRef idx="1">
+              <a:schemeClr val="dk1"/>
+            </a:lnRef>
+            <a:fillRef idx="0">
+              <a:schemeClr val="dk1"/>
+            </a:fillRef>
+            <a:effectRef idx="0">
+              <a:schemeClr val="dk1"/>
+            </a:effectRef>
+            <a:fontRef idx="minor">
+              <a:schemeClr val="tx1"/>
+            </a:fontRef>
+          </p:style>
+          <p:txBody>
+            <a:bodyPr rtlCol="0" anchor="ctr"/>
+            <a:lstStyle/>
+            <a:p>
+              <a:pPr algn="ctr"/>
+              <a:r>
+                <a:rPr lang="en-US" dirty="0"/>
+                <a:t>`</a:t>
+              </a:r>
+            </a:p>
+          </p:txBody>
+        </p:sp>
+        <p:cxnSp>
+          <p:nvCxnSpPr>
+            <p:cNvPr id="27" name="Straight Connector 26">
+              <a:extLst>
+                <a:ext uri="{FF2B5EF4-FFF2-40B4-BE49-F238E27FC236}">
+                  <a16:creationId xmlns:a16="http://schemas.microsoft.com/office/drawing/2014/main" id="{8E360266-E7E0-1251-A514-C88552CE4259}"/>
+                </a:ext>
+              </a:extLst>
+            </p:cNvPr>
+            <p:cNvCxnSpPr>
+              <a:cxnSpLocks/>
+            </p:cNvCxnSpPr>
+            <p:nvPr/>
+          </p:nvCxnSpPr>
+          <p:spPr>
+            <a:xfrm flipH="1">
+              <a:off x="942223" y="111947"/>
+              <a:ext cx="43035" cy="6770858"/>
+            </a:xfrm>
+            <a:prstGeom prst="line">
+              <a:avLst/>
+            </a:prstGeom>
+          </p:spPr>
+          <p:style>
+            <a:lnRef idx="2">
+              <a:schemeClr val="accent1"/>
+            </a:lnRef>
+            <a:fillRef idx="0">
+              <a:schemeClr val="accent1"/>
+            </a:fillRef>
+            <a:effectRef idx="1">
+              <a:schemeClr val="accent1"/>
+            </a:effectRef>
+            <a:fontRef idx="minor">
+              <a:schemeClr val="tx1"/>
+            </a:fontRef>
+          </p:style>
+        </p:cxnSp>
+        <p:pic>
+          <p:nvPicPr>
+            <p:cNvPr id="58" name="Picture 57">
+              <a:extLst>
+                <a:ext uri="{FF2B5EF4-FFF2-40B4-BE49-F238E27FC236}">
+                  <a16:creationId xmlns:a16="http://schemas.microsoft.com/office/drawing/2014/main" id="{38514F29-C25B-436E-96DD-0DD6F577A06A}"/>
+                </a:ext>
+              </a:extLst>
+            </p:cNvPr>
+            <p:cNvPicPr>
+              <a:picLocks noChangeAspect="1"/>
+            </p:cNvPicPr>
+            <p:nvPr/>
+          </p:nvPicPr>
+          <p:blipFill>
+            <a:blip r:embed="rId6"/>
+            <a:stretch>
+              <a:fillRect/>
+            </a:stretch>
+          </p:blipFill>
+          <p:spPr>
+            <a:xfrm>
+              <a:off x="1730269" y="90681"/>
+              <a:ext cx="177800" cy="292100"/>
+            </a:xfrm>
+            <a:prstGeom prst="rect">
+              <a:avLst/>
+            </a:prstGeom>
+          </p:spPr>
+        </p:pic>
+        <p:pic>
+          <p:nvPicPr>
+            <p:cNvPr id="66" name="Picture 65">
+              <a:extLst>
+                <a:ext uri="{FF2B5EF4-FFF2-40B4-BE49-F238E27FC236}">
+                  <a16:creationId xmlns:a16="http://schemas.microsoft.com/office/drawing/2014/main" id="{71ABB23A-CBFB-D9F9-9043-0BC82645CCC2}"/>
+                </a:ext>
+              </a:extLst>
+            </p:cNvPr>
+            <p:cNvPicPr>
+              <a:picLocks noChangeAspect="1"/>
+            </p:cNvPicPr>
+            <p:nvPr/>
+          </p:nvPicPr>
+          <p:blipFill>
+            <a:blip r:embed="rId7"/>
+            <a:stretch>
+              <a:fillRect/>
+            </a:stretch>
+          </p:blipFill>
+          <p:spPr>
+            <a:xfrm>
+              <a:off x="6399037" y="2836229"/>
+              <a:ext cx="1981200" cy="228600"/>
+            </a:xfrm>
+            <a:prstGeom prst="rect">
+              <a:avLst/>
+            </a:prstGeom>
+          </p:spPr>
+        </p:pic>
+        <p:sp>
+          <p:nvSpPr>
+            <p:cNvPr id="3" name="Freeform 2">
+              <a:extLst>
+                <a:ext uri="{FF2B5EF4-FFF2-40B4-BE49-F238E27FC236}">
+                  <a16:creationId xmlns:a16="http://schemas.microsoft.com/office/drawing/2014/main" id="{10315C24-EAD6-8E5F-D3D0-BF14429E97E4}"/>
+                </a:ext>
+              </a:extLst>
+            </p:cNvPr>
+            <p:cNvSpPr/>
+            <p:nvPr/>
+          </p:nvSpPr>
+          <p:spPr>
+            <a:xfrm>
+              <a:off x="1357166" y="3121379"/>
+              <a:ext cx="6053728" cy="3772867"/>
+            </a:xfrm>
+            <a:custGeom>
+              <a:avLst/>
+              <a:gdLst>
+                <a:gd name="csX0" fmla="*/ 0 w 5092995"/>
+                <a:gd name="csY0" fmla="*/ 0 h 4912242"/>
+                <a:gd name="csX1" fmla="*/ 1456661 w 5092995"/>
+                <a:gd name="csY1" fmla="*/ 1499191 h 4912242"/>
+                <a:gd name="csX2" fmla="*/ 5092995 w 5092995"/>
+                <a:gd name="csY2" fmla="*/ 4912242 h 4912242"/>
+                <a:gd name="csX0" fmla="*/ 0 w 5092995"/>
+                <a:gd name="csY0" fmla="*/ 0 h 4912242"/>
+                <a:gd name="csX1" fmla="*/ 1998922 w 5092995"/>
+                <a:gd name="csY1" fmla="*/ 1977656 h 4912242"/>
+                <a:gd name="csX2" fmla="*/ 5092995 w 5092995"/>
+                <a:gd name="csY2" fmla="*/ 4912242 h 4912242"/>
+                <a:gd name="csX0" fmla="*/ 0 w 6602818"/>
+                <a:gd name="csY0" fmla="*/ 0 h 4401879"/>
+                <a:gd name="csX1" fmla="*/ 1998922 w 6602818"/>
+                <a:gd name="csY1" fmla="*/ 1977656 h 4401879"/>
+                <a:gd name="csX2" fmla="*/ 6602818 w 6602818"/>
+                <a:gd name="csY2" fmla="*/ 4401879 h 4401879"/>
+                <a:gd name="csX0" fmla="*/ 0 w 8442251"/>
+                <a:gd name="csY0" fmla="*/ 0 h 5411972"/>
+                <a:gd name="csX1" fmla="*/ 1998922 w 8442251"/>
+                <a:gd name="csY1" fmla="*/ 1977656 h 5411972"/>
+                <a:gd name="csX2" fmla="*/ 8442251 w 8442251"/>
+                <a:gd name="csY2" fmla="*/ 5411972 h 5411972"/>
+                <a:gd name="csX0" fmla="*/ 0 w 9484956"/>
+                <a:gd name="csY0" fmla="*/ 0 h 5398070"/>
+                <a:gd name="csX1" fmla="*/ 1998922 w 9484956"/>
+                <a:gd name="csY1" fmla="*/ 1977656 h 5398070"/>
+                <a:gd name="csX2" fmla="*/ 9484956 w 9484956"/>
+                <a:gd name="csY2" fmla="*/ 5398070 h 5398070"/>
+                <a:gd name="csX0" fmla="*/ 0 w 9484956"/>
+                <a:gd name="csY0" fmla="*/ 0 h 5398070"/>
+                <a:gd name="csX1" fmla="*/ 2763571 w 9484956"/>
+                <a:gd name="csY1" fmla="*/ 2770112 h 5398070"/>
+                <a:gd name="csX2" fmla="*/ 9484956 w 9484956"/>
+                <a:gd name="csY2" fmla="*/ 5398070 h 5398070"/>
+                <a:gd name="csX0" fmla="*/ 0 w 6721385"/>
+                <a:gd name="csY0" fmla="*/ 0 h 2627958"/>
+                <a:gd name="csX1" fmla="*/ 6721385 w 6721385"/>
+                <a:gd name="csY1" fmla="*/ 2627958 h 2627958"/>
+                <a:gd name="csX0" fmla="*/ 0 w 8987530"/>
+                <a:gd name="csY0" fmla="*/ 0 h 4908005"/>
+                <a:gd name="csX1" fmla="*/ 8987530 w 8987530"/>
+                <a:gd name="csY1" fmla="*/ 4908005 h 4908005"/>
+              </a:gdLst>
+              <a:ahLst/>
+              <a:cxnLst>
+                <a:cxn ang="0">
+                  <a:pos x="csX0" y="csY0"/>
+                </a:cxn>
+                <a:cxn ang="0">
+                  <a:pos x="csX1" y="csY1"/>
+                </a:cxn>
+              </a:cxnLst>
+              <a:rect l="l" t="t" r="r" b="b"/>
+              <a:pathLst>
+                <a:path w="8987530" h="4908005">
+                  <a:moveTo>
+                    <a:pt x="0" y="0"/>
+                  </a:moveTo>
+                  <a:lnTo>
+                    <a:pt x="8987530" y="4908005"/>
+                  </a:lnTo>
+                </a:path>
+              </a:pathLst>
+            </a:custGeom>
+            <a:noFill/>
+            <a:ln w="31750">
+              <a:solidFill>
+                <a:srgbClr val="FF0000"/>
+              </a:solidFill>
+            </a:ln>
+          </p:spPr>
+          <p:style>
+            <a:lnRef idx="2">
+              <a:schemeClr val="accent1">
+                <a:shade val="15000"/>
+              </a:schemeClr>
+            </a:lnRef>
+            <a:fillRef idx="1">
+              <a:schemeClr val="accent1"/>
+            </a:fillRef>
+            <a:effectRef idx="0">
+              <a:schemeClr val="accent1"/>
+            </a:effectRef>
+            <a:fontRef idx="minor">
+              <a:schemeClr val="lt1"/>
+            </a:fontRef>
+          </p:style>
+          <p:txBody>
+            <a:bodyPr rtlCol="0" anchor="ctr"/>
+            <a:lstStyle/>
+            <a:p>
+              <a:pPr algn="ctr"/>
+              <a:endParaRPr lang="en-US" dirty="0"/>
+            </a:p>
+          </p:txBody>
+        </p:sp>
+        <p:pic>
+          <p:nvPicPr>
+            <p:cNvPr id="76" name="Picture 75">
+              <a:extLst>
+                <a:ext uri="{FF2B5EF4-FFF2-40B4-BE49-F238E27FC236}">
+                  <a16:creationId xmlns:a16="http://schemas.microsoft.com/office/drawing/2014/main" id="{48EEC8F3-F8F7-BAC1-5031-8171720A051A}"/>
+                </a:ext>
+              </a:extLst>
+            </p:cNvPr>
+            <p:cNvPicPr>
+              <a:picLocks noChangeAspect="1"/>
+            </p:cNvPicPr>
+            <p:nvPr/>
+          </p:nvPicPr>
+          <p:blipFill>
+            <a:blip r:embed="rId8"/>
+            <a:stretch>
+              <a:fillRect/>
+            </a:stretch>
+          </p:blipFill>
+          <p:spPr>
+            <a:xfrm rot="2733373">
+              <a:off x="1854440" y="1830365"/>
+              <a:ext cx="1473200" cy="228600"/>
+            </a:xfrm>
+            <a:prstGeom prst="rect">
+              <a:avLst/>
+            </a:prstGeom>
+          </p:spPr>
+        </p:pic>
+        <p:pic>
+          <p:nvPicPr>
+            <p:cNvPr id="78" name="Picture 77">
+              <a:extLst>
+                <a:ext uri="{FF2B5EF4-FFF2-40B4-BE49-F238E27FC236}">
+                  <a16:creationId xmlns:a16="http://schemas.microsoft.com/office/drawing/2014/main" id="{E17D23A7-873E-1303-E8BF-A654A8E9606A}"/>
+                </a:ext>
+              </a:extLst>
+            </p:cNvPr>
+            <p:cNvPicPr>
+              <a:picLocks noChangeAspect="1"/>
+            </p:cNvPicPr>
+            <p:nvPr/>
+          </p:nvPicPr>
+          <p:blipFill>
+            <a:blip r:embed="rId9"/>
+            <a:stretch>
+              <a:fillRect/>
+            </a:stretch>
+          </p:blipFill>
+          <p:spPr>
+            <a:xfrm>
+              <a:off x="1016873" y="2493775"/>
+              <a:ext cx="177800" cy="190500"/>
+            </a:xfrm>
+            <a:prstGeom prst="rect">
+              <a:avLst/>
+            </a:prstGeom>
+          </p:spPr>
+        </p:pic>
+        <p:pic>
+          <p:nvPicPr>
+            <p:cNvPr id="79" name="Picture 78">
+              <a:extLst>
+                <a:ext uri="{FF2B5EF4-FFF2-40B4-BE49-F238E27FC236}">
+                  <a16:creationId xmlns:a16="http://schemas.microsoft.com/office/drawing/2014/main" id="{19838CA5-A09F-6555-B346-4CCB4DCC5DFE}"/>
+                </a:ext>
+              </a:extLst>
+            </p:cNvPr>
+            <p:cNvPicPr>
+              <a:picLocks noChangeAspect="1"/>
+            </p:cNvPicPr>
+            <p:nvPr/>
+          </p:nvPicPr>
+          <p:blipFill>
+            <a:blip r:embed="rId10"/>
+            <a:stretch>
+              <a:fillRect/>
+            </a:stretch>
+          </p:blipFill>
+          <p:spPr>
+            <a:xfrm>
+              <a:off x="1308240" y="2872267"/>
+              <a:ext cx="190500" cy="177800"/>
+            </a:xfrm>
+            <a:prstGeom prst="rect">
+              <a:avLst/>
+            </a:prstGeom>
+          </p:spPr>
+        </p:pic>
+        <p:pic>
+          <p:nvPicPr>
+            <p:cNvPr id="80" name="Picture 79">
+              <a:extLst>
+                <a:ext uri="{FF2B5EF4-FFF2-40B4-BE49-F238E27FC236}">
+                  <a16:creationId xmlns:a16="http://schemas.microsoft.com/office/drawing/2014/main" id="{22EA37B6-5416-429C-7B1E-E98634CA5C46}"/>
+                </a:ext>
+              </a:extLst>
+            </p:cNvPr>
+            <p:cNvPicPr>
+              <a:picLocks noChangeAspect="1"/>
+            </p:cNvPicPr>
+            <p:nvPr/>
+          </p:nvPicPr>
+          <p:blipFill>
+            <a:blip r:embed="rId11"/>
+            <a:stretch>
+              <a:fillRect/>
+            </a:stretch>
+          </p:blipFill>
+          <p:spPr>
+            <a:xfrm>
+              <a:off x="5997213" y="5396472"/>
+              <a:ext cx="190500" cy="190500"/>
+            </a:xfrm>
+            <a:prstGeom prst="rect">
+              <a:avLst/>
+            </a:prstGeom>
+          </p:spPr>
+        </p:pic>
+        <p:pic>
+          <p:nvPicPr>
+            <p:cNvPr id="81" name="Picture 80">
+              <a:extLst>
+                <a:ext uri="{FF2B5EF4-FFF2-40B4-BE49-F238E27FC236}">
+                  <a16:creationId xmlns:a16="http://schemas.microsoft.com/office/drawing/2014/main" id="{D38DC44F-48E2-A91B-5556-FFF70B1421FD}"/>
+                </a:ext>
+              </a:extLst>
+            </p:cNvPr>
+            <p:cNvPicPr>
+              <a:picLocks noChangeAspect="1"/>
+            </p:cNvPicPr>
+            <p:nvPr/>
+          </p:nvPicPr>
+          <p:blipFill>
+            <a:blip r:embed="rId12"/>
+            <a:stretch>
+              <a:fillRect/>
+            </a:stretch>
+          </p:blipFill>
+          <p:spPr>
+            <a:xfrm>
+              <a:off x="6735132" y="6221532"/>
+              <a:ext cx="203200" cy="177800"/>
+            </a:xfrm>
+            <a:prstGeom prst="rect">
+              <a:avLst/>
+            </a:prstGeom>
+          </p:spPr>
+        </p:pic>
+        <p:pic>
+          <p:nvPicPr>
+            <p:cNvPr id="82" name="Picture 81">
+              <a:extLst>
+                <a:ext uri="{FF2B5EF4-FFF2-40B4-BE49-F238E27FC236}">
+                  <a16:creationId xmlns:a16="http://schemas.microsoft.com/office/drawing/2014/main" id="{D3240C3A-E8D5-20C9-D090-78F011D5BAAD}"/>
+                </a:ext>
+              </a:extLst>
+            </p:cNvPr>
+            <p:cNvPicPr>
+              <a:picLocks noChangeAspect="1"/>
+            </p:cNvPicPr>
+            <p:nvPr/>
+          </p:nvPicPr>
+          <p:blipFill>
+            <a:blip r:embed="rId13"/>
+            <a:stretch>
+              <a:fillRect/>
+            </a:stretch>
+          </p:blipFill>
+          <p:spPr>
+            <a:xfrm>
+              <a:off x="7336910" y="6636201"/>
+              <a:ext cx="190500" cy="177800"/>
+            </a:xfrm>
+            <a:prstGeom prst="rect">
+              <a:avLst/>
+            </a:prstGeom>
+          </p:spPr>
+        </p:pic>
+        <p:pic>
+          <p:nvPicPr>
+            <p:cNvPr id="85" name="Picture 84">
+              <a:extLst>
+                <a:ext uri="{FF2B5EF4-FFF2-40B4-BE49-F238E27FC236}">
+                  <a16:creationId xmlns:a16="http://schemas.microsoft.com/office/drawing/2014/main" id="{74036612-2E9D-ABD7-DF2A-153113A08971}"/>
+                </a:ext>
+              </a:extLst>
+            </p:cNvPr>
+            <p:cNvPicPr>
+              <a:picLocks noChangeAspect="1"/>
+            </p:cNvPicPr>
+            <p:nvPr/>
+          </p:nvPicPr>
+          <p:blipFill>
+            <a:blip r:embed="rId3"/>
+            <a:stretch>
+              <a:fillRect/>
+            </a:stretch>
+          </p:blipFill>
+          <p:spPr>
+            <a:xfrm>
+              <a:off x="1616693" y="3802529"/>
+              <a:ext cx="271956" cy="145691"/>
+            </a:xfrm>
+            <a:prstGeom prst="rect">
+              <a:avLst/>
+            </a:prstGeom>
+          </p:spPr>
+        </p:pic>
+        <p:pic>
+          <p:nvPicPr>
+            <p:cNvPr id="87" name="Picture 86">
+              <a:extLst>
+                <a:ext uri="{FF2B5EF4-FFF2-40B4-BE49-F238E27FC236}">
+                  <a16:creationId xmlns:a16="http://schemas.microsoft.com/office/drawing/2014/main" id="{90724069-66FE-0D08-75F5-C123FF649058}"/>
+                </a:ext>
+              </a:extLst>
+            </p:cNvPr>
+            <p:cNvPicPr>
+              <a:picLocks noChangeAspect="1"/>
+            </p:cNvPicPr>
+            <p:nvPr/>
+          </p:nvPicPr>
+          <p:blipFill>
+            <a:blip r:embed="rId8"/>
+            <a:stretch>
+              <a:fillRect/>
+            </a:stretch>
+          </p:blipFill>
+          <p:spPr>
+            <a:xfrm rot="2733373">
+              <a:off x="3308323" y="5552718"/>
+              <a:ext cx="1473200" cy="228600"/>
+            </a:xfrm>
+            <a:prstGeom prst="rect">
+              <a:avLst/>
+            </a:prstGeom>
+          </p:spPr>
+        </p:pic>
+        <p:cxnSp>
+          <p:nvCxnSpPr>
+            <p:cNvPr id="12" name="Straight Arrow Connector 11">
+              <a:extLst>
+                <a:ext uri="{FF2B5EF4-FFF2-40B4-BE49-F238E27FC236}">
+                  <a16:creationId xmlns:a16="http://schemas.microsoft.com/office/drawing/2014/main" id="{64EE977A-A308-003A-519F-166E5AFED635}"/>
+                </a:ext>
+              </a:extLst>
+            </p:cNvPr>
+            <p:cNvCxnSpPr>
+              <a:cxnSpLocks/>
+            </p:cNvCxnSpPr>
+            <p:nvPr/>
+          </p:nvCxnSpPr>
+          <p:spPr>
+            <a:xfrm>
+              <a:off x="949808" y="4009815"/>
+              <a:ext cx="2058761" cy="0"/>
+            </a:xfrm>
+            <a:prstGeom prst="straightConnector1">
+              <a:avLst/>
+            </a:prstGeom>
+            <a:ln w="34925">
+              <a:solidFill>
+                <a:srgbClr val="0070C0"/>
+              </a:solidFill>
+              <a:tailEnd type="triangle" w="lg" len="lg"/>
+            </a:ln>
+          </p:spPr>
+          <p:style>
+            <a:lnRef idx="2">
+              <a:schemeClr val="accent1"/>
+            </a:lnRef>
+            <a:fillRef idx="0">
+              <a:schemeClr val="accent1"/>
+            </a:fillRef>
+            <a:effectRef idx="1">
+              <a:schemeClr val="accent1"/>
+            </a:effectRef>
+            <a:fontRef idx="minor">
+              <a:schemeClr val="tx1"/>
+            </a:fontRef>
+          </p:style>
+        </p:cxnSp>
+        <p:sp>
+          <p:nvSpPr>
+            <p:cNvPr id="9" name="Freeform 8">
+              <a:extLst>
+                <a:ext uri="{FF2B5EF4-FFF2-40B4-BE49-F238E27FC236}">
+                  <a16:creationId xmlns:a16="http://schemas.microsoft.com/office/drawing/2014/main" id="{6EB8B9D2-F008-829B-F64E-75D9873DBD48}"/>
+                </a:ext>
+              </a:extLst>
+            </p:cNvPr>
+            <p:cNvSpPr/>
+            <p:nvPr/>
+          </p:nvSpPr>
+          <p:spPr>
+            <a:xfrm>
+              <a:off x="1323112" y="3099602"/>
+              <a:ext cx="4572151" cy="2480117"/>
+            </a:xfrm>
+            <a:custGeom>
+              <a:avLst/>
+              <a:gdLst>
+                <a:gd name="csX0" fmla="*/ 0 w 5401340"/>
+                <a:gd name="csY0" fmla="*/ 0 h 5411972"/>
+                <a:gd name="csX1" fmla="*/ 5401340 w 5401340"/>
+                <a:gd name="csY1" fmla="*/ 5411972 h 5411972"/>
+                <a:gd name="csX0" fmla="*/ 0 w 3770453"/>
+                <a:gd name="csY0" fmla="*/ 0 h 3776676"/>
+                <a:gd name="csX1" fmla="*/ 3770453 w 3770453"/>
+                <a:gd name="csY1" fmla="*/ 3776676 h 3776676"/>
+              </a:gdLst>
+              <a:ahLst/>
+              <a:cxnLst>
+                <a:cxn ang="0">
+                  <a:pos x="csX0" y="csY0"/>
+                </a:cxn>
+                <a:cxn ang="0">
+                  <a:pos x="csX1" y="csY1"/>
+                </a:cxn>
+              </a:cxnLst>
+              <a:rect l="l" t="t" r="r" b="b"/>
+              <a:pathLst>
+                <a:path w="3770453" h="3776676">
+                  <a:moveTo>
+                    <a:pt x="0" y="0"/>
+                  </a:moveTo>
+                  <a:lnTo>
+                    <a:pt x="3770453" y="3776676"/>
+                  </a:lnTo>
+                </a:path>
+              </a:pathLst>
+            </a:custGeom>
+            <a:ln w="28575">
+              <a:solidFill>
+                <a:srgbClr val="0070C0"/>
+              </a:solidFill>
+            </a:ln>
+          </p:spPr>
+          <p:style>
+            <a:lnRef idx="1">
+              <a:schemeClr val="dk1"/>
+            </a:lnRef>
+            <a:fillRef idx="0">
+              <a:schemeClr val="dk1"/>
+            </a:fillRef>
+            <a:effectRef idx="0">
+              <a:schemeClr val="dk1"/>
+            </a:effectRef>
+            <a:fontRef idx="minor">
+              <a:schemeClr val="tx1"/>
+            </a:fontRef>
+          </p:style>
+          <p:txBody>
+            <a:bodyPr rtlCol="0" anchor="ctr"/>
+            <a:lstStyle/>
+            <a:p>
+              <a:pPr algn="ctr"/>
+              <a:endParaRPr lang="en-US"/>
+            </a:p>
+          </p:txBody>
+        </p:sp>
+        <p:cxnSp>
+          <p:nvCxnSpPr>
+            <p:cNvPr id="26" name="Straight Connector 25">
+              <a:extLst>
+                <a:ext uri="{FF2B5EF4-FFF2-40B4-BE49-F238E27FC236}">
+                  <a16:creationId xmlns:a16="http://schemas.microsoft.com/office/drawing/2014/main" id="{FF979535-23F4-193F-9519-CE9253073EA8}"/>
+                </a:ext>
+              </a:extLst>
+            </p:cNvPr>
+            <p:cNvCxnSpPr>
+              <a:cxnSpLocks/>
+            </p:cNvCxnSpPr>
+            <p:nvPr/>
+          </p:nvCxnSpPr>
+          <p:spPr>
+            <a:xfrm>
+              <a:off x="925529" y="404047"/>
+              <a:ext cx="2328085" cy="0"/>
+            </a:xfrm>
+            <a:prstGeom prst="line">
+              <a:avLst/>
+            </a:prstGeom>
+          </p:spPr>
+          <p:style>
+            <a:lnRef idx="2">
+              <a:schemeClr val="accent1"/>
+            </a:lnRef>
+            <a:fillRef idx="0">
+              <a:schemeClr val="accent1"/>
+            </a:fillRef>
+            <a:effectRef idx="1">
+              <a:schemeClr val="accent1"/>
+            </a:effectRef>
+            <a:fontRef idx="minor">
+              <a:schemeClr val="tx1"/>
+            </a:fontRef>
+          </p:style>
+        </p:cxnSp>
+        <p:cxnSp>
+          <p:nvCxnSpPr>
+            <p:cNvPr id="31" name="Straight Connector 30">
+              <a:extLst>
+                <a:ext uri="{FF2B5EF4-FFF2-40B4-BE49-F238E27FC236}">
+                  <a16:creationId xmlns:a16="http://schemas.microsoft.com/office/drawing/2014/main" id="{6435E902-931E-E7B9-2610-109D09DB4EF4}"/>
+                </a:ext>
+              </a:extLst>
+            </p:cNvPr>
+            <p:cNvCxnSpPr>
+              <a:cxnSpLocks/>
+            </p:cNvCxnSpPr>
+            <p:nvPr/>
+          </p:nvCxnSpPr>
+          <p:spPr>
+            <a:xfrm>
+              <a:off x="5895263" y="5591359"/>
+              <a:ext cx="1227547" cy="1302887"/>
+            </a:xfrm>
+            <a:prstGeom prst="line">
+              <a:avLst/>
+            </a:prstGeom>
+            <a:ln w="31750"/>
+          </p:spPr>
+          <p:style>
+            <a:lnRef idx="2">
+              <a:schemeClr val="accent1"/>
+            </a:lnRef>
+            <a:fillRef idx="0">
+              <a:schemeClr val="accent1"/>
+            </a:fillRef>
+            <a:effectRef idx="1">
+              <a:schemeClr val="accent1"/>
+            </a:effectRef>
+            <a:fontRef idx="minor">
+              <a:schemeClr val="tx1"/>
+            </a:fontRef>
+          </p:style>
+        </p:cxnSp>
+        <p:cxnSp>
+          <p:nvCxnSpPr>
+            <p:cNvPr id="35" name="Straight Connector 34">
+              <a:extLst>
+                <a:ext uri="{FF2B5EF4-FFF2-40B4-BE49-F238E27FC236}">
+                  <a16:creationId xmlns:a16="http://schemas.microsoft.com/office/drawing/2014/main" id="{B82A197F-9B65-25C6-1825-4090462239E3}"/>
+                </a:ext>
+              </a:extLst>
+            </p:cNvPr>
+            <p:cNvCxnSpPr>
+              <a:cxnSpLocks/>
+            </p:cNvCxnSpPr>
+            <p:nvPr/>
+          </p:nvCxnSpPr>
+          <p:spPr>
+            <a:xfrm>
+              <a:off x="965285" y="2734733"/>
+              <a:ext cx="389767" cy="415085"/>
+            </a:xfrm>
+            <a:prstGeom prst="line">
+              <a:avLst/>
+            </a:prstGeom>
+            <a:ln w="31750"/>
+          </p:spPr>
+          <p:style>
+            <a:lnRef idx="2">
+              <a:schemeClr val="accent1"/>
+            </a:lnRef>
+            <a:fillRef idx="0">
+              <a:schemeClr val="accent1"/>
+            </a:fillRef>
+            <a:effectRef idx="1">
+              <a:schemeClr val="accent1"/>
+            </a:effectRef>
+            <a:fontRef idx="minor">
+              <a:schemeClr val="tx1"/>
+            </a:fontRef>
+          </p:style>
+        </p:cxnSp>
+        <p:pic>
+          <p:nvPicPr>
+            <p:cNvPr id="43" name="Picture 42">
+              <a:extLst>
+                <a:ext uri="{FF2B5EF4-FFF2-40B4-BE49-F238E27FC236}">
+                  <a16:creationId xmlns:a16="http://schemas.microsoft.com/office/drawing/2014/main" id="{E9AE6934-3562-2751-72A1-3C1913D988C0}"/>
+                </a:ext>
+              </a:extLst>
+            </p:cNvPr>
+            <p:cNvPicPr>
+              <a:picLocks noChangeAspect="1"/>
+            </p:cNvPicPr>
+            <p:nvPr/>
+          </p:nvPicPr>
+          <p:blipFill>
+            <a:blip r:embed="rId14"/>
+            <a:stretch>
+              <a:fillRect/>
+            </a:stretch>
+          </p:blipFill>
+          <p:spPr>
+            <a:xfrm>
+              <a:off x="7767390" y="5934597"/>
+              <a:ext cx="584200" cy="241300"/>
+            </a:xfrm>
+            <a:prstGeom prst="rect">
+              <a:avLst/>
+            </a:prstGeom>
+          </p:spPr>
+        </p:pic>
+        <p:sp>
+          <p:nvSpPr>
+            <p:cNvPr id="4" name="Freeform 3">
+              <a:extLst>
+                <a:ext uri="{FF2B5EF4-FFF2-40B4-BE49-F238E27FC236}">
+                  <a16:creationId xmlns:a16="http://schemas.microsoft.com/office/drawing/2014/main" id="{F6EC532B-C95E-8E25-C321-00258F6434E6}"/>
+                </a:ext>
+              </a:extLst>
+            </p:cNvPr>
+            <p:cNvSpPr/>
+            <p:nvPr/>
+          </p:nvSpPr>
+          <p:spPr>
+            <a:xfrm>
+              <a:off x="-202462" y="5156208"/>
+              <a:ext cx="2359310" cy="393028"/>
+            </a:xfrm>
+            <a:custGeom>
+              <a:avLst/>
+              <a:gdLst>
+                <a:gd name="csX0" fmla="*/ 0 w 1594884"/>
+                <a:gd name="csY0" fmla="*/ 159488 h 202018"/>
+                <a:gd name="csX1" fmla="*/ 340242 w 1594884"/>
+                <a:gd name="csY1" fmla="*/ 10632 h 202018"/>
+                <a:gd name="csX2" fmla="*/ 499731 w 1594884"/>
+                <a:gd name="csY2" fmla="*/ 0 h 202018"/>
+                <a:gd name="csX3" fmla="*/ 967563 w 1594884"/>
+                <a:gd name="csY3" fmla="*/ 10632 h 202018"/>
+                <a:gd name="csX4" fmla="*/ 1350335 w 1594884"/>
+                <a:gd name="csY4" fmla="*/ 127591 h 202018"/>
+                <a:gd name="csX5" fmla="*/ 1594884 w 1594884"/>
+                <a:gd name="csY5" fmla="*/ 202018 h 202018"/>
+                <a:gd name="csX0" fmla="*/ 0 w 1594884"/>
+                <a:gd name="csY0" fmla="*/ 164233 h 206763"/>
+                <a:gd name="csX1" fmla="*/ 340242 w 1594884"/>
+                <a:gd name="csY1" fmla="*/ 15377 h 206763"/>
+                <a:gd name="csX2" fmla="*/ 499731 w 1594884"/>
+                <a:gd name="csY2" fmla="*/ 4745 h 206763"/>
+                <a:gd name="csX3" fmla="*/ 967563 w 1594884"/>
+                <a:gd name="csY3" fmla="*/ 15377 h 206763"/>
+                <a:gd name="csX4" fmla="*/ 1350335 w 1594884"/>
+                <a:gd name="csY4" fmla="*/ 132336 h 206763"/>
+                <a:gd name="csX5" fmla="*/ 1594884 w 1594884"/>
+                <a:gd name="csY5" fmla="*/ 206763 h 206763"/>
+                <a:gd name="csX0" fmla="*/ 0 w 1594884"/>
+                <a:gd name="csY0" fmla="*/ 164233 h 206763"/>
+                <a:gd name="csX1" fmla="*/ 340242 w 1594884"/>
+                <a:gd name="csY1" fmla="*/ 15377 h 206763"/>
+                <a:gd name="csX2" fmla="*/ 499731 w 1594884"/>
+                <a:gd name="csY2" fmla="*/ 4745 h 206763"/>
+                <a:gd name="csX3" fmla="*/ 967563 w 1594884"/>
+                <a:gd name="csY3" fmla="*/ 15377 h 206763"/>
+                <a:gd name="csX4" fmla="*/ 1594884 w 1594884"/>
+                <a:gd name="csY4" fmla="*/ 206763 h 206763"/>
+                <a:gd name="csX0" fmla="*/ 0 w 1594884"/>
+                <a:gd name="csY0" fmla="*/ 170203 h 212733"/>
+                <a:gd name="csX1" fmla="*/ 340242 w 1594884"/>
+                <a:gd name="csY1" fmla="*/ 21347 h 212733"/>
+                <a:gd name="csX2" fmla="*/ 967563 w 1594884"/>
+                <a:gd name="csY2" fmla="*/ 21347 h 212733"/>
+                <a:gd name="csX3" fmla="*/ 1594884 w 1594884"/>
+                <a:gd name="csY3" fmla="*/ 212733 h 212733"/>
+                <a:gd name="csX0" fmla="*/ 0 w 1594884"/>
+                <a:gd name="csY0" fmla="*/ 183561 h 226091"/>
+                <a:gd name="csX1" fmla="*/ 340242 w 1594884"/>
+                <a:gd name="csY1" fmla="*/ 34705 h 226091"/>
+                <a:gd name="csX2" fmla="*/ 967563 w 1594884"/>
+                <a:gd name="csY2" fmla="*/ 34705 h 226091"/>
+                <a:gd name="csX3" fmla="*/ 1594884 w 1594884"/>
+                <a:gd name="csY3" fmla="*/ 226091 h 226091"/>
+                <a:gd name="csX0" fmla="*/ 0 w 1594884"/>
+                <a:gd name="csY0" fmla="*/ 149194 h 191724"/>
+                <a:gd name="csX1" fmla="*/ 340242 w 1594884"/>
+                <a:gd name="csY1" fmla="*/ 338 h 191724"/>
+                <a:gd name="csX2" fmla="*/ 1594884 w 1594884"/>
+                <a:gd name="csY2" fmla="*/ 191724 h 191724"/>
+                <a:gd name="csX0" fmla="*/ 0 w 1594884"/>
+                <a:gd name="csY0" fmla="*/ 158692 h 201222"/>
+                <a:gd name="csX1" fmla="*/ 784742 w 1594884"/>
+                <a:gd name="csY1" fmla="*/ 311 h 201222"/>
+                <a:gd name="csX2" fmla="*/ 1594884 w 1594884"/>
+                <a:gd name="csY2" fmla="*/ 201222 h 201222"/>
+                <a:gd name="csX0" fmla="*/ 0 w 1594884"/>
+                <a:gd name="csY0" fmla="*/ 158663 h 201193"/>
+                <a:gd name="csX1" fmla="*/ 784742 w 1594884"/>
+                <a:gd name="csY1" fmla="*/ 282 h 201193"/>
+                <a:gd name="csX2" fmla="*/ 1594884 w 1594884"/>
+                <a:gd name="csY2" fmla="*/ 201193 h 201193"/>
+                <a:gd name="csX0" fmla="*/ 0 w 1610759"/>
+                <a:gd name="csY0" fmla="*/ 158449 h 178754"/>
+                <a:gd name="csX1" fmla="*/ 784742 w 1610759"/>
+                <a:gd name="csY1" fmla="*/ 68 h 178754"/>
+                <a:gd name="csX2" fmla="*/ 1610759 w 1610759"/>
+                <a:gd name="csY2" fmla="*/ 178754 h 178754"/>
+                <a:gd name="csX0" fmla="*/ 0 w 1617109"/>
+                <a:gd name="csY0" fmla="*/ 177432 h 178687"/>
+                <a:gd name="csX1" fmla="*/ 791092 w 1617109"/>
+                <a:gd name="csY1" fmla="*/ 1 h 178687"/>
+                <a:gd name="csX2" fmla="*/ 1617109 w 1617109"/>
+                <a:gd name="csY2" fmla="*/ 178687 h 178687"/>
+              </a:gdLst>
+              <a:ahLst/>
+              <a:cxnLst>
+                <a:cxn ang="0">
+                  <a:pos x="csX0" y="csY0"/>
+                </a:cxn>
+                <a:cxn ang="0">
+                  <a:pos x="csX1" y="csY1"/>
+                </a:cxn>
+                <a:cxn ang="0">
+                  <a:pos x="csX2" y="csY2"/>
+                </a:cxn>
+              </a:cxnLst>
+              <a:rect l="l" t="t" r="r" b="b"/>
+              <a:pathLst>
+                <a:path w="1617109" h="178687">
+                  <a:moveTo>
+                    <a:pt x="0" y="177432"/>
+                  </a:moveTo>
+                  <a:cubicBezTo>
+                    <a:pt x="265814" y="140513"/>
+                    <a:pt x="521574" y="-208"/>
+                    <a:pt x="791092" y="1"/>
+                  </a:cubicBezTo>
+                  <a:cubicBezTo>
+                    <a:pt x="1060610" y="210"/>
+                    <a:pt x="1355725" y="138815"/>
+                    <a:pt x="1617109" y="178687"/>
+                  </a:cubicBezTo>
+                </a:path>
+              </a:pathLst>
+            </a:custGeom>
+            <a:solidFill>
+              <a:srgbClr val="00B0F0"/>
+            </a:solidFill>
+            <a:ln w="3175"/>
+          </p:spPr>
+          <p:style>
+            <a:lnRef idx="2">
+              <a:schemeClr val="accent1">
+                <a:shade val="15000"/>
+              </a:schemeClr>
+            </a:lnRef>
+            <a:fillRef idx="1">
+              <a:schemeClr val="accent1"/>
+            </a:fillRef>
+            <a:effectRef idx="0">
+              <a:schemeClr val="accent1"/>
+            </a:effectRef>
+            <a:fontRef idx="minor">
+              <a:schemeClr val="lt1"/>
+            </a:fontRef>
+          </p:style>
+          <p:txBody>
+            <a:bodyPr rtlCol="0" anchor="ctr"/>
+            <a:lstStyle/>
+            <a:p>
+              <a:pPr algn="ctr"/>
+              <a:endParaRPr lang="en-US"/>
+            </a:p>
+          </p:txBody>
+        </p:sp>
+        <p:sp>
+          <p:nvSpPr>
+            <p:cNvPr id="6" name="Freeform 5">
+              <a:extLst>
+                <a:ext uri="{FF2B5EF4-FFF2-40B4-BE49-F238E27FC236}">
+                  <a16:creationId xmlns:a16="http://schemas.microsoft.com/office/drawing/2014/main" id="{1187DF51-C7CF-DE47-7CEB-0B2CAB25F758}"/>
+                </a:ext>
+              </a:extLst>
+            </p:cNvPr>
+            <p:cNvSpPr/>
+            <p:nvPr/>
+          </p:nvSpPr>
+          <p:spPr>
+            <a:xfrm>
+              <a:off x="990600" y="2755900"/>
+              <a:ext cx="4470400" cy="2374900"/>
+            </a:xfrm>
+            <a:custGeom>
+              <a:avLst/>
+              <a:gdLst>
+                <a:gd name="csX0" fmla="*/ 0 w 4470400"/>
+                <a:gd name="csY0" fmla="*/ 0 h 2374900"/>
+                <a:gd name="csX1" fmla="*/ 342900 w 4470400"/>
+                <a:gd name="csY1" fmla="*/ 393700 h 2374900"/>
+                <a:gd name="csX2" fmla="*/ 4470400 w 4470400"/>
+                <a:gd name="csY2" fmla="*/ 2374900 h 2374900"/>
+              </a:gdLst>
+              <a:ahLst/>
+              <a:cxnLst>
+                <a:cxn ang="0">
+                  <a:pos x="csX0" y="csY0"/>
+                </a:cxn>
+                <a:cxn ang="0">
+                  <a:pos x="csX1" y="csY1"/>
+                </a:cxn>
+                <a:cxn ang="0">
+                  <a:pos x="csX2" y="csY2"/>
+                </a:cxn>
+              </a:cxnLst>
+              <a:rect l="l" t="t" r="r" b="b"/>
+              <a:pathLst>
+                <a:path w="4470400" h="2374900">
+                  <a:moveTo>
+                    <a:pt x="0" y="0"/>
+                  </a:moveTo>
+                  <a:lnTo>
+                    <a:pt x="342900" y="393700"/>
+                  </a:lnTo>
+                  <a:lnTo>
+                    <a:pt x="4470400" y="2374900"/>
+                  </a:lnTo>
+                </a:path>
+              </a:pathLst>
+            </a:custGeom>
+            <a:noFill/>
+            <a:ln w="28575">
+              <a:solidFill>
+                <a:srgbClr val="0070C0"/>
+              </a:solidFill>
+            </a:ln>
+          </p:spPr>
+          <p:style>
+            <a:lnRef idx="2">
+              <a:schemeClr val="accent1">
+                <a:shade val="15000"/>
+              </a:schemeClr>
+            </a:lnRef>
+            <a:fillRef idx="1">
+              <a:schemeClr val="accent1"/>
+            </a:fillRef>
+            <a:effectRef idx="0">
+              <a:schemeClr val="accent1"/>
+            </a:effectRef>
+            <a:fontRef idx="minor">
+              <a:schemeClr val="lt1"/>
+            </a:fontRef>
+          </p:style>
+          <p:txBody>
+            <a:bodyPr rtlCol="0" anchor="ctr"/>
+            <a:lstStyle/>
+            <a:p>
+              <a:pPr algn="ctr"/>
+              <a:endParaRPr lang="en-US"/>
+            </a:p>
+          </p:txBody>
+        </p:sp>
+        <p:cxnSp>
+          <p:nvCxnSpPr>
+            <p:cNvPr id="8" name="Straight Connector 7">
+              <a:extLst>
+                <a:ext uri="{FF2B5EF4-FFF2-40B4-BE49-F238E27FC236}">
+                  <a16:creationId xmlns:a16="http://schemas.microsoft.com/office/drawing/2014/main" id="{CDD61984-D8B1-3902-EA67-DBD073778AFD}"/>
+                </a:ext>
+              </a:extLst>
+            </p:cNvPr>
+            <p:cNvCxnSpPr>
+              <a:cxnSpLocks/>
+            </p:cNvCxnSpPr>
+            <p:nvPr/>
+          </p:nvCxnSpPr>
+          <p:spPr>
+            <a:xfrm flipV="1">
+              <a:off x="963629" y="5130800"/>
+              <a:ext cx="4497371" cy="10347"/>
+            </a:xfrm>
+            <a:prstGeom prst="line">
+              <a:avLst/>
+            </a:prstGeom>
+            <a:ln>
+              <a:prstDash val="dashDot"/>
+            </a:ln>
+          </p:spPr>
+          <p:style>
+            <a:lnRef idx="2">
+              <a:schemeClr val="accent1"/>
+            </a:lnRef>
+            <a:fillRef idx="0">
+              <a:schemeClr val="accent1"/>
+            </a:fillRef>
+            <a:effectRef idx="1">
+              <a:schemeClr val="accent1"/>
+            </a:effectRef>
+            <a:fontRef idx="minor">
+              <a:schemeClr val="tx1"/>
+            </a:fontRef>
+          </p:style>
+        </p:cxnSp>
+        <p:pic>
+          <p:nvPicPr>
+            <p:cNvPr id="11" name="Picture 10">
+              <a:extLst>
+                <a:ext uri="{FF2B5EF4-FFF2-40B4-BE49-F238E27FC236}">
+                  <a16:creationId xmlns:a16="http://schemas.microsoft.com/office/drawing/2014/main" id="{41AE0D61-445A-96A1-AFE0-DC311AAE6EB6}"/>
+                </a:ext>
+              </a:extLst>
+            </p:cNvPr>
+            <p:cNvPicPr>
+              <a:picLocks noChangeAspect="1"/>
+            </p:cNvPicPr>
+            <p:nvPr/>
+          </p:nvPicPr>
+          <p:blipFill>
+            <a:blip r:embed="rId15"/>
+            <a:stretch>
+              <a:fillRect/>
+            </a:stretch>
+          </p:blipFill>
+          <p:spPr>
+            <a:xfrm>
+              <a:off x="5581650" y="4991100"/>
+              <a:ext cx="266700" cy="228600"/>
+            </a:xfrm>
+            <a:prstGeom prst="rect">
+              <a:avLst/>
+            </a:prstGeom>
+          </p:spPr>
+        </p:pic>
+        <p:pic>
+          <p:nvPicPr>
+            <p:cNvPr id="14" name="Picture 13">
+              <a:extLst>
+                <a:ext uri="{FF2B5EF4-FFF2-40B4-BE49-F238E27FC236}">
+                  <a16:creationId xmlns:a16="http://schemas.microsoft.com/office/drawing/2014/main" id="{9915BCCE-0F3F-FEE4-1780-EAD17E746245}"/>
+                </a:ext>
+              </a:extLst>
+            </p:cNvPr>
+            <p:cNvPicPr>
+              <a:picLocks noChangeAspect="1"/>
+            </p:cNvPicPr>
+            <p:nvPr/>
+          </p:nvPicPr>
+          <p:blipFill>
+            <a:blip r:embed="rId16"/>
+            <a:stretch>
+              <a:fillRect/>
+            </a:stretch>
+          </p:blipFill>
+          <p:spPr>
+            <a:xfrm>
+              <a:off x="1384300" y="3460750"/>
+              <a:ext cx="279400" cy="215900"/>
+            </a:xfrm>
+            <a:prstGeom prst="rect">
+              <a:avLst/>
+            </a:prstGeom>
+          </p:spPr>
+        </p:pic>
+        <p:cxnSp>
+          <p:nvCxnSpPr>
+            <p:cNvPr id="15" name="Straight Connector 14">
+              <a:extLst>
+                <a:ext uri="{FF2B5EF4-FFF2-40B4-BE49-F238E27FC236}">
+                  <a16:creationId xmlns:a16="http://schemas.microsoft.com/office/drawing/2014/main" id="{1B6A96C3-0420-1AF1-6643-04290C42D210}"/>
+                </a:ext>
+              </a:extLst>
+            </p:cNvPr>
+            <p:cNvCxnSpPr>
+              <a:cxnSpLocks/>
+              <a:endCxn id="9" idx="1"/>
+            </p:cNvCxnSpPr>
+            <p:nvPr/>
+          </p:nvCxnSpPr>
+          <p:spPr>
+            <a:xfrm>
+              <a:off x="1663700" y="3460750"/>
+              <a:ext cx="4231563" cy="2118969"/>
+            </a:xfrm>
+            <a:prstGeom prst="line">
+              <a:avLst/>
+            </a:prstGeom>
+            <a:ln>
+              <a:prstDash val="dash"/>
+            </a:ln>
+          </p:spPr>
+          <p:style>
+            <a:lnRef idx="2">
+              <a:schemeClr val="accent1"/>
+            </a:lnRef>
+            <a:fillRef idx="0">
+              <a:schemeClr val="accent1"/>
+            </a:fillRef>
+            <a:effectRef idx="1">
+              <a:schemeClr val="accent1"/>
+            </a:effectRef>
+            <a:fontRef idx="minor">
+              <a:schemeClr val="tx1"/>
+            </a:fontRef>
+          </p:style>
+        </p:cxnSp>
+        <p:sp>
+          <p:nvSpPr>
+            <p:cNvPr id="20" name="Freeform 19">
+              <a:extLst>
+                <a:ext uri="{FF2B5EF4-FFF2-40B4-BE49-F238E27FC236}">
+                  <a16:creationId xmlns:a16="http://schemas.microsoft.com/office/drawing/2014/main" id="{F4214B5B-BFC0-4452-A578-FBF1474871C6}"/>
+                </a:ext>
+              </a:extLst>
+            </p:cNvPr>
+            <p:cNvSpPr/>
+            <p:nvPr/>
+          </p:nvSpPr>
+          <p:spPr>
+            <a:xfrm>
+              <a:off x="1346200" y="3149600"/>
+              <a:ext cx="4546600" cy="2425700"/>
+            </a:xfrm>
+            <a:custGeom>
+              <a:avLst/>
+              <a:gdLst>
+                <a:gd name="csX0" fmla="*/ 0 w 4546600"/>
+                <a:gd name="csY0" fmla="*/ 0 h 2425700"/>
+                <a:gd name="csX1" fmla="*/ 4546600 w 4546600"/>
+                <a:gd name="csY1" fmla="*/ 2425700 h 2425700"/>
+                <a:gd name="csX2" fmla="*/ 4140200 w 4546600"/>
+                <a:gd name="csY2" fmla="*/ 2006600 h 2425700"/>
+                <a:gd name="csX3" fmla="*/ 0 w 4546600"/>
+                <a:gd name="csY3" fmla="*/ 0 h 2425700"/>
+              </a:gdLst>
+              <a:ahLst/>
+              <a:cxnLst>
+                <a:cxn ang="0">
+                  <a:pos x="csX0" y="csY0"/>
+                </a:cxn>
+                <a:cxn ang="0">
+                  <a:pos x="csX1" y="csY1"/>
+                </a:cxn>
+                <a:cxn ang="0">
+                  <a:pos x="csX2" y="csY2"/>
+                </a:cxn>
+                <a:cxn ang="0">
+                  <a:pos x="csX3" y="csY3"/>
+                </a:cxn>
+              </a:cxnLst>
+              <a:rect l="l" t="t" r="r" b="b"/>
+              <a:pathLst>
+                <a:path w="4546600" h="2425700">
+                  <a:moveTo>
+                    <a:pt x="0" y="0"/>
+                  </a:moveTo>
+                  <a:lnTo>
+                    <a:pt x="4546600" y="2425700"/>
+                  </a:lnTo>
+                  <a:lnTo>
+                    <a:pt x="4140200" y="2006600"/>
+                  </a:lnTo>
+                  <a:lnTo>
+                    <a:pt x="0" y="0"/>
+                  </a:lnTo>
+                  <a:close/>
+                </a:path>
+              </a:pathLst>
+            </a:custGeom>
+            <a:solidFill>
+              <a:schemeClr val="accent4">
+                <a:lumMod val="40000"/>
+                <a:lumOff val="60000"/>
+              </a:schemeClr>
+            </a:solidFill>
+          </p:spPr>
+          <p:style>
+            <a:lnRef idx="2">
+              <a:schemeClr val="accent1">
+                <a:shade val="15000"/>
+              </a:schemeClr>
+            </a:lnRef>
+            <a:fillRef idx="1">
+              <a:schemeClr val="accent1"/>
+            </a:fillRef>
+            <a:effectRef idx="0">
+              <a:schemeClr val="accent1"/>
+            </a:effectRef>
+            <a:fontRef idx="minor">
+              <a:schemeClr val="lt1"/>
+            </a:fontRef>
+          </p:style>
+          <p:txBody>
+            <a:bodyPr rtlCol="0" anchor="ctr"/>
+            <a:lstStyle/>
+            <a:p>
+              <a:pPr algn="ctr"/>
+              <a:endParaRPr lang="en-US"/>
+            </a:p>
+          </p:txBody>
+        </p:sp>
+      </p:grpSp>
+      <p:pic>
+        <p:nvPicPr>
+          <p:cNvPr id="22" name="Picture 21">
+            <a:extLst>
+              <a:ext uri="{FF2B5EF4-FFF2-40B4-BE49-F238E27FC236}">
+                <a16:creationId xmlns:a16="http://schemas.microsoft.com/office/drawing/2014/main" id="{C3106A65-22D2-256F-84CE-FFB68A026064}"/>
+              </a:ext>
+            </a:extLst>
+          </p:cNvPr>
+          <p:cNvPicPr>
+            <a:picLocks noChangeAspect="1"/>
+          </p:cNvPicPr>
+          <p:nvPr/>
+        </p:nvPicPr>
+        <p:blipFill>
+          <a:blip r:embed="rId17"/>
+          <a:stretch>
+            <a:fillRect/>
+          </a:stretch>
+        </p:blipFill>
+        <p:spPr>
+          <a:xfrm>
+            <a:off x="4997745" y="5464840"/>
+            <a:ext cx="190500" cy="177800"/>
+          </a:xfrm>
+          <a:prstGeom prst="rect">
+            <a:avLst/>
+          </a:prstGeom>
+        </p:spPr>
+      </p:pic>
+    </p:spTree>
+    <p:extLst>
+      <p:ext uri="{BB962C8B-B14F-4D97-AF65-F5344CB8AC3E}">
+        <p14:creationId xmlns:p14="http://schemas.microsoft.com/office/powerpoint/2010/main" val="417592258"/>
+      </p:ext>
+    </p:extLst>
+  </p:cSld>
+  <p:clrMapOvr>
+    <a:masterClrMapping/>
+  </p:clrMapOvr>
+</p:sld>
+</file>
+
+<file path=ppt/slides/slide7.xml><?xml version="1.0" encoding="utf-8"?>
+<p:sld xmlns:a="http://schemas.openxmlformats.org/drawingml/2006/main" xmlns:r="http://schemas.openxmlformats.org/officeDocument/2006/relationships" xmlns:p="http://schemas.openxmlformats.org/presentationml/2006/main">
+  <p:cSld>
+    <p:spTree>
+      <p:nvGrpSpPr>
+        <p:cNvPr id="1" name="">
+          <a:extLst>
+            <a:ext uri="{FF2B5EF4-FFF2-40B4-BE49-F238E27FC236}">
+              <a16:creationId xmlns:a16="http://schemas.microsoft.com/office/drawing/2014/main" id="{04EB6D3F-80B7-8F1A-F75B-106379AD91BC}"/>
+            </a:ext>
+          </a:extLst>
+        </p:cNvPr>
+        <p:cNvGrpSpPr/>
+        <p:nvPr/>
+      </p:nvGrpSpPr>
+      <p:grpSpPr>
+        <a:xfrm>
+          <a:off x="0" y="0"/>
+          <a:ext cx="0" cy="0"/>
+          <a:chOff x="0" y="0"/>
+          <a:chExt cx="0" cy="0"/>
+        </a:xfrm>
+      </p:grpSpPr>
+      <p:grpSp>
+        <p:nvGrpSpPr>
+          <p:cNvPr id="10" name="Group 9">
+            <a:extLst>
+              <a:ext uri="{FF2B5EF4-FFF2-40B4-BE49-F238E27FC236}">
+                <a16:creationId xmlns:a16="http://schemas.microsoft.com/office/drawing/2014/main" id="{A9774AA2-5AB2-95D7-0659-77E62FDD11E7}"/>
+              </a:ext>
+            </a:extLst>
+          </p:cNvPr>
+          <p:cNvGrpSpPr/>
+          <p:nvPr/>
+        </p:nvGrpSpPr>
+        <p:grpSpPr>
+          <a:xfrm>
+            <a:off x="546514" y="90681"/>
+            <a:ext cx="8023322" cy="6809848"/>
+            <a:chOff x="546514" y="90681"/>
+            <a:chExt cx="8023322" cy="6809848"/>
+          </a:xfrm>
+        </p:grpSpPr>
+        <p:sp>
+          <p:nvSpPr>
+            <p:cNvPr id="30" name="Rectangle 29">
+              <a:extLst>
+                <a:ext uri="{FF2B5EF4-FFF2-40B4-BE49-F238E27FC236}">
+                  <a16:creationId xmlns:a16="http://schemas.microsoft.com/office/drawing/2014/main" id="{92A67E5D-C6BE-3A4F-ECE9-121ED992580A}"/>
+                </a:ext>
+              </a:extLst>
+            </p:cNvPr>
+            <p:cNvSpPr/>
+            <p:nvPr/>
+          </p:nvSpPr>
+          <p:spPr>
+            <a:xfrm>
+              <a:off x="712379" y="5542413"/>
+              <a:ext cx="7825563" cy="1302887"/>
+            </a:xfrm>
+            <a:prstGeom prst="rect">
+              <a:avLst/>
+            </a:prstGeom>
+            <a:solidFill>
+              <a:srgbClr val="FFC000"/>
+            </a:solidFill>
+            <a:ln>
+              <a:solidFill>
+                <a:srgbClr val="FFC000"/>
+              </a:solidFill>
+            </a:ln>
+          </p:spPr>
+          <p:style>
+            <a:lnRef idx="2">
+              <a:schemeClr val="accent1">
+                <a:shade val="15000"/>
+              </a:schemeClr>
+            </a:lnRef>
+            <a:fillRef idx="1">
+              <a:schemeClr val="accent1"/>
+            </a:fillRef>
+            <a:effectRef idx="0">
+              <a:schemeClr val="accent1"/>
+            </a:effectRef>
+            <a:fontRef idx="minor">
+              <a:schemeClr val="lt1"/>
+            </a:fontRef>
+          </p:style>
+          <p:txBody>
+            <a:bodyPr rtlCol="0" anchor="ctr"/>
+            <a:lstStyle/>
+            <a:p>
+              <a:pPr algn="ctr"/>
+              <a:endParaRPr lang="en-US" b="1" dirty="0"/>
+            </a:p>
+          </p:txBody>
+        </p:sp>
+        <p:sp>
+          <p:nvSpPr>
+            <p:cNvPr id="7" name="Rectangle 6">
+              <a:extLst>
+                <a:ext uri="{FF2B5EF4-FFF2-40B4-BE49-F238E27FC236}">
+                  <a16:creationId xmlns:a16="http://schemas.microsoft.com/office/drawing/2014/main" id="{FC3C9246-A310-E3E2-4CBA-20FF84025636}"/>
+                </a:ext>
+              </a:extLst>
+            </p:cNvPr>
+            <p:cNvSpPr/>
+            <p:nvPr/>
+          </p:nvSpPr>
+          <p:spPr>
+            <a:xfrm>
+              <a:off x="712379" y="3117326"/>
+              <a:ext cx="7825563" cy="2419377"/>
+            </a:xfrm>
+            <a:prstGeom prst="rect">
+              <a:avLst/>
+            </a:prstGeom>
+            <a:solidFill>
+              <a:srgbClr val="FFFF00"/>
+            </a:solidFill>
+            <a:ln>
+              <a:noFill/>
+            </a:ln>
+          </p:spPr>
+          <p:style>
+            <a:lnRef idx="2">
+              <a:schemeClr val="accent1">
+                <a:shade val="15000"/>
+              </a:schemeClr>
+            </a:lnRef>
+            <a:fillRef idx="1">
+              <a:schemeClr val="accent1"/>
+            </a:fillRef>
+            <a:effectRef idx="0">
+              <a:schemeClr val="accent1"/>
+            </a:effectRef>
+            <a:fontRef idx="minor">
+              <a:schemeClr val="lt1"/>
+            </a:fontRef>
+          </p:style>
+          <p:txBody>
+            <a:bodyPr rtlCol="0" anchor="ctr"/>
+            <a:lstStyle/>
+            <a:p>
+              <a:pPr algn="ctr"/>
+              <a:endParaRPr lang="en-US" b="1" dirty="0"/>
+            </a:p>
+          </p:txBody>
+        </p:sp>
+        <p:cxnSp>
+          <p:nvCxnSpPr>
+            <p:cNvPr id="42" name="Straight Connector 41">
+              <a:extLst>
+                <a:ext uri="{FF2B5EF4-FFF2-40B4-BE49-F238E27FC236}">
+                  <a16:creationId xmlns:a16="http://schemas.microsoft.com/office/drawing/2014/main" id="{C5A7C741-0427-6673-8BDC-32947F164101}"/>
+                </a:ext>
+              </a:extLst>
+            </p:cNvPr>
+            <p:cNvCxnSpPr>
+              <a:cxnSpLocks/>
+            </p:cNvCxnSpPr>
+            <p:nvPr/>
+          </p:nvCxnSpPr>
+          <p:spPr>
+            <a:xfrm>
+              <a:off x="680484" y="3121660"/>
+              <a:ext cx="7825557" cy="4336"/>
+            </a:xfrm>
+            <a:prstGeom prst="line">
+              <a:avLst/>
+            </a:prstGeom>
+          </p:spPr>
+          <p:style>
+            <a:lnRef idx="2">
+              <a:schemeClr val="accent1"/>
+            </a:lnRef>
+            <a:fillRef idx="0">
+              <a:schemeClr val="accent1"/>
+            </a:fillRef>
+            <a:effectRef idx="1">
+              <a:schemeClr val="accent1"/>
+            </a:effectRef>
+            <a:fontRef idx="minor">
+              <a:schemeClr val="tx1"/>
+            </a:fontRef>
+          </p:style>
+        </p:cxnSp>
+        <p:cxnSp>
+          <p:nvCxnSpPr>
+            <p:cNvPr id="34" name="Straight Arrow Connector 33">
+              <a:extLst>
+                <a:ext uri="{FF2B5EF4-FFF2-40B4-BE49-F238E27FC236}">
+                  <a16:creationId xmlns:a16="http://schemas.microsoft.com/office/drawing/2014/main" id="{5740DBF5-4103-697F-4D3A-279F71262498}"/>
+                </a:ext>
+              </a:extLst>
+            </p:cNvPr>
+            <p:cNvCxnSpPr>
+              <a:cxnSpLocks/>
+            </p:cNvCxnSpPr>
+            <p:nvPr/>
+          </p:nvCxnSpPr>
+          <p:spPr>
+            <a:xfrm>
+              <a:off x="985258" y="6001644"/>
+              <a:ext cx="5298584" cy="0"/>
+            </a:xfrm>
+            <a:prstGeom prst="straightConnector1">
+              <a:avLst/>
+            </a:prstGeom>
+            <a:ln w="34925">
+              <a:solidFill>
+                <a:srgbClr val="0070C0"/>
+              </a:solidFill>
+              <a:tailEnd type="triangle" w="lg" len="lg"/>
+            </a:ln>
+          </p:spPr>
+          <p:style>
+            <a:lnRef idx="2">
+              <a:schemeClr val="accent1"/>
+            </a:lnRef>
+            <a:fillRef idx="0">
+              <a:schemeClr val="accent1"/>
+            </a:fillRef>
+            <a:effectRef idx="1">
+              <a:schemeClr val="accent1"/>
+            </a:effectRef>
+            <a:fontRef idx="minor">
+              <a:schemeClr val="tx1"/>
+            </a:fontRef>
+          </p:style>
+        </p:cxnSp>
+        <p:cxnSp>
+          <p:nvCxnSpPr>
+            <p:cNvPr id="36" name="Straight Arrow Connector 35">
+              <a:extLst>
+                <a:ext uri="{FF2B5EF4-FFF2-40B4-BE49-F238E27FC236}">
+                  <a16:creationId xmlns:a16="http://schemas.microsoft.com/office/drawing/2014/main" id="{CCE1FD5D-B3C7-1C9F-49E8-CD5192423935}"/>
+                </a:ext>
+              </a:extLst>
+            </p:cNvPr>
+            <p:cNvCxnSpPr>
+              <a:cxnSpLocks/>
+            </p:cNvCxnSpPr>
+            <p:nvPr/>
+          </p:nvCxnSpPr>
+          <p:spPr>
+            <a:xfrm>
+              <a:off x="933369" y="6272939"/>
+              <a:ext cx="5465668" cy="0"/>
+            </a:xfrm>
+            <a:prstGeom prst="straightConnector1">
+              <a:avLst/>
+            </a:prstGeom>
+            <a:ln w="34925">
+              <a:solidFill>
+                <a:srgbClr val="FF0000"/>
+              </a:solidFill>
+              <a:tailEnd type="triangle" w="lg" len="lg"/>
+            </a:ln>
+          </p:spPr>
+          <p:style>
+            <a:lnRef idx="2">
+              <a:schemeClr val="accent1"/>
+            </a:lnRef>
+            <a:fillRef idx="0">
+              <a:schemeClr val="accent1"/>
+            </a:fillRef>
+            <a:effectRef idx="1">
+              <a:schemeClr val="accent1"/>
+            </a:effectRef>
+            <a:fontRef idx="minor">
+              <a:schemeClr val="tx1"/>
+            </a:fontRef>
+          </p:style>
+        </p:cxnSp>
+        <p:pic>
+          <p:nvPicPr>
+            <p:cNvPr id="38" name="Picture 37">
+              <a:extLst>
+                <a:ext uri="{FF2B5EF4-FFF2-40B4-BE49-F238E27FC236}">
+                  <a16:creationId xmlns:a16="http://schemas.microsoft.com/office/drawing/2014/main" id="{B1C88BDC-44F7-DCAF-6A7D-A4A242D07411}"/>
+                </a:ext>
+              </a:extLst>
+            </p:cNvPr>
+            <p:cNvPicPr>
+              <a:picLocks noChangeAspect="1"/>
+            </p:cNvPicPr>
+            <p:nvPr/>
+          </p:nvPicPr>
+          <p:blipFill>
+            <a:blip r:embed="rId3"/>
+            <a:stretch>
+              <a:fillRect/>
+            </a:stretch>
+          </p:blipFill>
+          <p:spPr>
+            <a:xfrm>
+              <a:off x="1910869" y="5766008"/>
+              <a:ext cx="271956" cy="145691"/>
+            </a:xfrm>
+            <a:prstGeom prst="rect">
+              <a:avLst/>
+            </a:prstGeom>
+          </p:spPr>
+        </p:pic>
+        <p:pic>
+          <p:nvPicPr>
+            <p:cNvPr id="39" name="Picture 38">
+              <a:extLst>
+                <a:ext uri="{FF2B5EF4-FFF2-40B4-BE49-F238E27FC236}">
+                  <a16:creationId xmlns:a16="http://schemas.microsoft.com/office/drawing/2014/main" id="{EC62E390-0773-0313-E920-A8A0804A9EF1}"/>
+                </a:ext>
+              </a:extLst>
+            </p:cNvPr>
+            <p:cNvPicPr>
+              <a:picLocks noChangeAspect="1"/>
+            </p:cNvPicPr>
+            <p:nvPr/>
+          </p:nvPicPr>
+          <p:blipFill>
+            <a:blip r:embed="rId4"/>
+            <a:stretch>
+              <a:fillRect/>
+            </a:stretch>
+          </p:blipFill>
+          <p:spPr>
+            <a:xfrm>
+              <a:off x="1928865" y="6084767"/>
+              <a:ext cx="203967" cy="145691"/>
+            </a:xfrm>
+            <a:prstGeom prst="rect">
+              <a:avLst/>
+            </a:prstGeom>
+          </p:spPr>
+        </p:pic>
+        <p:pic>
+          <p:nvPicPr>
+            <p:cNvPr id="47" name="Picture 46">
+              <a:extLst>
+                <a:ext uri="{FF2B5EF4-FFF2-40B4-BE49-F238E27FC236}">
+                  <a16:creationId xmlns:a16="http://schemas.microsoft.com/office/drawing/2014/main" id="{1A36EC8F-281B-E6E2-50C8-1F023EB78EFD}"/>
+                </a:ext>
+              </a:extLst>
+            </p:cNvPr>
+            <p:cNvPicPr>
+              <a:picLocks noChangeAspect="1"/>
+            </p:cNvPicPr>
+            <p:nvPr/>
+          </p:nvPicPr>
+          <p:blipFill>
+            <a:blip r:embed="rId5"/>
+            <a:stretch>
+              <a:fillRect/>
+            </a:stretch>
+          </p:blipFill>
+          <p:spPr>
+            <a:xfrm>
+              <a:off x="7872919" y="4185494"/>
+              <a:ext cx="495349" cy="174829"/>
+            </a:xfrm>
+            <a:prstGeom prst="rect">
+              <a:avLst/>
+            </a:prstGeom>
+          </p:spPr>
+        </p:pic>
+        <p:sp>
+          <p:nvSpPr>
+            <p:cNvPr id="2" name="Rectangle 1">
+              <a:extLst>
+                <a:ext uri="{FF2B5EF4-FFF2-40B4-BE49-F238E27FC236}">
+                  <a16:creationId xmlns:a16="http://schemas.microsoft.com/office/drawing/2014/main" id="{DF9196FE-8E17-F5BA-18FC-67FBF6D4BE19}"/>
+                </a:ext>
+              </a:extLst>
+            </p:cNvPr>
+            <p:cNvSpPr/>
+            <p:nvPr/>
+          </p:nvSpPr>
+          <p:spPr>
+            <a:xfrm>
+              <a:off x="744286" y="2750108"/>
+              <a:ext cx="7825550" cy="367217"/>
+            </a:xfrm>
+            <a:prstGeom prst="rect">
+              <a:avLst/>
+            </a:prstGeom>
+            <a:solidFill>
+              <a:srgbClr val="00B0F0">
+                <a:alpha val="15000"/>
+              </a:srgbClr>
+            </a:solidFill>
+            <a:ln>
+              <a:noFill/>
+            </a:ln>
+          </p:spPr>
+          <p:style>
+            <a:lnRef idx="2">
+              <a:schemeClr val="accent1">
+                <a:shade val="15000"/>
+              </a:schemeClr>
+            </a:lnRef>
+            <a:fillRef idx="1">
+              <a:schemeClr val="accent1"/>
+            </a:fillRef>
+            <a:effectRef idx="0">
+              <a:schemeClr val="accent1"/>
+            </a:effectRef>
+            <a:fontRef idx="minor">
+              <a:schemeClr val="lt1"/>
+            </a:fontRef>
+          </p:style>
+          <p:txBody>
+            <a:bodyPr rtlCol="0" anchor="ctr"/>
+            <a:lstStyle/>
+            <a:p>
+              <a:pPr algn="ctr"/>
+              <a:endParaRPr lang="en-US" b="1" dirty="0"/>
+            </a:p>
+          </p:txBody>
+        </p:sp>
+        <p:sp>
+          <p:nvSpPr>
+            <p:cNvPr id="5" name="Freeform 4">
+              <a:extLst>
+                <a:ext uri="{FF2B5EF4-FFF2-40B4-BE49-F238E27FC236}">
+                  <a16:creationId xmlns:a16="http://schemas.microsoft.com/office/drawing/2014/main" id="{12F6AED4-07D0-C878-18FB-374FEB1196DB}"/>
+                </a:ext>
+              </a:extLst>
+            </p:cNvPr>
+            <p:cNvSpPr/>
+            <p:nvPr/>
+          </p:nvSpPr>
+          <p:spPr>
+            <a:xfrm>
+              <a:off x="989484" y="2761550"/>
+              <a:ext cx="4130847" cy="4138979"/>
+            </a:xfrm>
+            <a:custGeom>
+              <a:avLst/>
+              <a:gdLst>
+                <a:gd name="csX0" fmla="*/ 0 w 5401340"/>
+                <a:gd name="csY0" fmla="*/ 0 h 5411972"/>
+                <a:gd name="csX1" fmla="*/ 5401340 w 5401340"/>
+                <a:gd name="csY1" fmla="*/ 5411972 h 5411972"/>
+              </a:gdLst>
+              <a:ahLst/>
+              <a:cxnLst>
+                <a:cxn ang="0">
+                  <a:pos x="csX0" y="csY0"/>
+                </a:cxn>
+                <a:cxn ang="0">
+                  <a:pos x="csX1" y="csY1"/>
+                </a:cxn>
+              </a:cxnLst>
+              <a:rect l="l" t="t" r="r" b="b"/>
+              <a:pathLst>
+                <a:path w="5401340" h="5411972">
+                  <a:moveTo>
+                    <a:pt x="0" y="0"/>
+                  </a:moveTo>
+                  <a:lnTo>
+                    <a:pt x="5401340" y="5411972"/>
+                  </a:lnTo>
+                </a:path>
+              </a:pathLst>
+            </a:custGeom>
+          </p:spPr>
+          <p:style>
+            <a:lnRef idx="1">
+              <a:schemeClr val="dk1"/>
+            </a:lnRef>
+            <a:fillRef idx="0">
+              <a:schemeClr val="dk1"/>
+            </a:fillRef>
+            <a:effectRef idx="0">
+              <a:schemeClr val="dk1"/>
+            </a:effectRef>
+            <a:fontRef idx="minor">
+              <a:schemeClr val="tx1"/>
+            </a:fontRef>
+          </p:style>
+          <p:txBody>
+            <a:bodyPr rtlCol="0" anchor="ctr"/>
+            <a:lstStyle/>
+            <a:p>
+              <a:pPr algn="ctr"/>
+              <a:endParaRPr lang="en-US"/>
+            </a:p>
+          </p:txBody>
+        </p:sp>
+        <p:sp>
+          <p:nvSpPr>
+            <p:cNvPr id="24" name="Freeform 23">
+              <a:extLst>
+                <a:ext uri="{FF2B5EF4-FFF2-40B4-BE49-F238E27FC236}">
+                  <a16:creationId xmlns:a16="http://schemas.microsoft.com/office/drawing/2014/main" id="{A9B99994-2223-7B93-30E8-9F4B6E2AC8B3}"/>
+                </a:ext>
+              </a:extLst>
+            </p:cNvPr>
+            <p:cNvSpPr/>
+            <p:nvPr/>
+          </p:nvSpPr>
+          <p:spPr>
+            <a:xfrm>
+              <a:off x="951017" y="404047"/>
+              <a:ext cx="6171793" cy="6478758"/>
+            </a:xfrm>
+            <a:custGeom>
+              <a:avLst/>
+              <a:gdLst>
+                <a:gd name="csX0" fmla="*/ 0 w 5401340"/>
+                <a:gd name="csY0" fmla="*/ 0 h 5411972"/>
+                <a:gd name="csX1" fmla="*/ 5401340 w 5401340"/>
+                <a:gd name="csY1" fmla="*/ 5411972 h 5411972"/>
+              </a:gdLst>
+              <a:ahLst/>
+              <a:cxnLst>
+                <a:cxn ang="0">
+                  <a:pos x="csX0" y="csY0"/>
+                </a:cxn>
+                <a:cxn ang="0">
+                  <a:pos x="csX1" y="csY1"/>
+                </a:cxn>
+              </a:cxnLst>
+              <a:rect l="l" t="t" r="r" b="b"/>
+              <a:pathLst>
+                <a:path w="5401340" h="5411972">
+                  <a:moveTo>
+                    <a:pt x="0" y="0"/>
+                  </a:moveTo>
+                  <a:lnTo>
+                    <a:pt x="5401340" y="5411972"/>
+                  </a:lnTo>
+                </a:path>
+              </a:pathLst>
+            </a:custGeom>
+          </p:spPr>
+          <p:style>
+            <a:lnRef idx="1">
+              <a:schemeClr val="dk1"/>
+            </a:lnRef>
+            <a:fillRef idx="0">
+              <a:schemeClr val="dk1"/>
+            </a:fillRef>
+            <a:effectRef idx="0">
+              <a:schemeClr val="dk1"/>
+            </a:effectRef>
+            <a:fontRef idx="minor">
+              <a:schemeClr val="tx1"/>
+            </a:fontRef>
+          </p:style>
+          <p:txBody>
+            <a:bodyPr rtlCol="0" anchor="ctr"/>
+            <a:lstStyle/>
+            <a:p>
+              <a:pPr algn="ctr"/>
+              <a:r>
+                <a:rPr lang="en-US" dirty="0"/>
+                <a:t>`</a:t>
+              </a:r>
+            </a:p>
+          </p:txBody>
+        </p:sp>
+        <p:cxnSp>
+          <p:nvCxnSpPr>
+            <p:cNvPr id="27" name="Straight Connector 26">
+              <a:extLst>
+                <a:ext uri="{FF2B5EF4-FFF2-40B4-BE49-F238E27FC236}">
+                  <a16:creationId xmlns:a16="http://schemas.microsoft.com/office/drawing/2014/main" id="{BC8B94EC-550E-3133-36E0-A05C7EB68860}"/>
+                </a:ext>
+              </a:extLst>
+            </p:cNvPr>
+            <p:cNvCxnSpPr>
+              <a:cxnSpLocks/>
+            </p:cNvCxnSpPr>
+            <p:nvPr/>
+          </p:nvCxnSpPr>
+          <p:spPr>
+            <a:xfrm flipH="1">
+              <a:off x="942223" y="111947"/>
+              <a:ext cx="43035" cy="6770858"/>
+            </a:xfrm>
+            <a:prstGeom prst="line">
+              <a:avLst/>
+            </a:prstGeom>
+          </p:spPr>
+          <p:style>
+            <a:lnRef idx="2">
+              <a:schemeClr val="accent1"/>
+            </a:lnRef>
+            <a:fillRef idx="0">
+              <a:schemeClr val="accent1"/>
+            </a:fillRef>
+            <a:effectRef idx="1">
+              <a:schemeClr val="accent1"/>
+            </a:effectRef>
+            <a:fontRef idx="minor">
+              <a:schemeClr val="tx1"/>
+            </a:fontRef>
+          </p:style>
+        </p:cxnSp>
+        <p:pic>
+          <p:nvPicPr>
+            <p:cNvPr id="58" name="Picture 57">
+              <a:extLst>
+                <a:ext uri="{FF2B5EF4-FFF2-40B4-BE49-F238E27FC236}">
+                  <a16:creationId xmlns:a16="http://schemas.microsoft.com/office/drawing/2014/main" id="{FBCBA84A-D6C7-28AD-3E30-046F10733C8C}"/>
+                </a:ext>
+              </a:extLst>
+            </p:cNvPr>
+            <p:cNvPicPr>
+              <a:picLocks noChangeAspect="1"/>
+            </p:cNvPicPr>
+            <p:nvPr/>
+          </p:nvPicPr>
+          <p:blipFill>
+            <a:blip r:embed="rId6"/>
+            <a:stretch>
+              <a:fillRect/>
+            </a:stretch>
+          </p:blipFill>
+          <p:spPr>
+            <a:xfrm>
+              <a:off x="1730269" y="90681"/>
+              <a:ext cx="177800" cy="292100"/>
+            </a:xfrm>
+            <a:prstGeom prst="rect">
+              <a:avLst/>
+            </a:prstGeom>
+          </p:spPr>
+        </p:pic>
+        <p:pic>
+          <p:nvPicPr>
+            <p:cNvPr id="66" name="Picture 65">
+              <a:extLst>
+                <a:ext uri="{FF2B5EF4-FFF2-40B4-BE49-F238E27FC236}">
+                  <a16:creationId xmlns:a16="http://schemas.microsoft.com/office/drawing/2014/main" id="{86EB8551-1272-F603-98A6-76002E3440CE}"/>
+                </a:ext>
+              </a:extLst>
+            </p:cNvPr>
+            <p:cNvPicPr>
+              <a:picLocks noChangeAspect="1"/>
+            </p:cNvPicPr>
+            <p:nvPr/>
+          </p:nvPicPr>
+          <p:blipFill>
+            <a:blip r:embed="rId7"/>
+            <a:stretch>
+              <a:fillRect/>
+            </a:stretch>
+          </p:blipFill>
+          <p:spPr>
+            <a:xfrm>
+              <a:off x="6399037" y="2836229"/>
+              <a:ext cx="1981200" cy="228600"/>
+            </a:xfrm>
+            <a:prstGeom prst="rect">
+              <a:avLst/>
+            </a:prstGeom>
+          </p:spPr>
+        </p:pic>
+        <p:sp>
+          <p:nvSpPr>
+            <p:cNvPr id="3" name="Freeform 2">
+              <a:extLst>
+                <a:ext uri="{FF2B5EF4-FFF2-40B4-BE49-F238E27FC236}">
+                  <a16:creationId xmlns:a16="http://schemas.microsoft.com/office/drawing/2014/main" id="{1457622F-1D1E-D4F8-2EAE-5B838C8D3B87}"/>
+                </a:ext>
+              </a:extLst>
+            </p:cNvPr>
+            <p:cNvSpPr/>
+            <p:nvPr/>
+          </p:nvSpPr>
+          <p:spPr>
+            <a:xfrm>
+              <a:off x="1357166" y="3121379"/>
+              <a:ext cx="6053728" cy="3772867"/>
+            </a:xfrm>
+            <a:custGeom>
+              <a:avLst/>
+              <a:gdLst>
+                <a:gd name="csX0" fmla="*/ 0 w 5092995"/>
+                <a:gd name="csY0" fmla="*/ 0 h 4912242"/>
+                <a:gd name="csX1" fmla="*/ 1456661 w 5092995"/>
+                <a:gd name="csY1" fmla="*/ 1499191 h 4912242"/>
+                <a:gd name="csX2" fmla="*/ 5092995 w 5092995"/>
+                <a:gd name="csY2" fmla="*/ 4912242 h 4912242"/>
+                <a:gd name="csX0" fmla="*/ 0 w 5092995"/>
+                <a:gd name="csY0" fmla="*/ 0 h 4912242"/>
+                <a:gd name="csX1" fmla="*/ 1998922 w 5092995"/>
+                <a:gd name="csY1" fmla="*/ 1977656 h 4912242"/>
+                <a:gd name="csX2" fmla="*/ 5092995 w 5092995"/>
+                <a:gd name="csY2" fmla="*/ 4912242 h 4912242"/>
+                <a:gd name="csX0" fmla="*/ 0 w 6602818"/>
+                <a:gd name="csY0" fmla="*/ 0 h 4401879"/>
+                <a:gd name="csX1" fmla="*/ 1998922 w 6602818"/>
+                <a:gd name="csY1" fmla="*/ 1977656 h 4401879"/>
+                <a:gd name="csX2" fmla="*/ 6602818 w 6602818"/>
+                <a:gd name="csY2" fmla="*/ 4401879 h 4401879"/>
+                <a:gd name="csX0" fmla="*/ 0 w 8442251"/>
+                <a:gd name="csY0" fmla="*/ 0 h 5411972"/>
+                <a:gd name="csX1" fmla="*/ 1998922 w 8442251"/>
+                <a:gd name="csY1" fmla="*/ 1977656 h 5411972"/>
+                <a:gd name="csX2" fmla="*/ 8442251 w 8442251"/>
+                <a:gd name="csY2" fmla="*/ 5411972 h 5411972"/>
+                <a:gd name="csX0" fmla="*/ 0 w 9484956"/>
+                <a:gd name="csY0" fmla="*/ 0 h 5398070"/>
+                <a:gd name="csX1" fmla="*/ 1998922 w 9484956"/>
+                <a:gd name="csY1" fmla="*/ 1977656 h 5398070"/>
+                <a:gd name="csX2" fmla="*/ 9484956 w 9484956"/>
+                <a:gd name="csY2" fmla="*/ 5398070 h 5398070"/>
+                <a:gd name="csX0" fmla="*/ 0 w 9484956"/>
+                <a:gd name="csY0" fmla="*/ 0 h 5398070"/>
+                <a:gd name="csX1" fmla="*/ 2763571 w 9484956"/>
+                <a:gd name="csY1" fmla="*/ 2770112 h 5398070"/>
+                <a:gd name="csX2" fmla="*/ 9484956 w 9484956"/>
+                <a:gd name="csY2" fmla="*/ 5398070 h 5398070"/>
+                <a:gd name="csX0" fmla="*/ 0 w 6721385"/>
+                <a:gd name="csY0" fmla="*/ 0 h 2627958"/>
+                <a:gd name="csX1" fmla="*/ 6721385 w 6721385"/>
+                <a:gd name="csY1" fmla="*/ 2627958 h 2627958"/>
+                <a:gd name="csX0" fmla="*/ 0 w 8987530"/>
+                <a:gd name="csY0" fmla="*/ 0 h 4908005"/>
+                <a:gd name="csX1" fmla="*/ 8987530 w 8987530"/>
+                <a:gd name="csY1" fmla="*/ 4908005 h 4908005"/>
+              </a:gdLst>
+              <a:ahLst/>
+              <a:cxnLst>
+                <a:cxn ang="0">
+                  <a:pos x="csX0" y="csY0"/>
+                </a:cxn>
+                <a:cxn ang="0">
+                  <a:pos x="csX1" y="csY1"/>
+                </a:cxn>
+              </a:cxnLst>
+              <a:rect l="l" t="t" r="r" b="b"/>
+              <a:pathLst>
+                <a:path w="8987530" h="4908005">
+                  <a:moveTo>
+                    <a:pt x="0" y="0"/>
+                  </a:moveTo>
+                  <a:lnTo>
+                    <a:pt x="8987530" y="4908005"/>
+                  </a:lnTo>
+                </a:path>
+              </a:pathLst>
+            </a:custGeom>
+            <a:noFill/>
+            <a:ln w="31750">
+              <a:solidFill>
+                <a:srgbClr val="FF0000"/>
+              </a:solidFill>
+            </a:ln>
+          </p:spPr>
+          <p:style>
+            <a:lnRef idx="2">
+              <a:schemeClr val="accent1">
+                <a:shade val="15000"/>
+              </a:schemeClr>
+            </a:lnRef>
+            <a:fillRef idx="1">
+              <a:schemeClr val="accent1"/>
+            </a:fillRef>
+            <a:effectRef idx="0">
+              <a:schemeClr val="accent1"/>
+            </a:effectRef>
+            <a:fontRef idx="minor">
+              <a:schemeClr val="lt1"/>
+            </a:fontRef>
+          </p:style>
+          <p:txBody>
+            <a:bodyPr rtlCol="0" anchor="ctr"/>
+            <a:lstStyle/>
+            <a:p>
+              <a:pPr algn="ctr"/>
+              <a:endParaRPr lang="en-US" dirty="0"/>
+            </a:p>
+          </p:txBody>
+        </p:sp>
+        <p:pic>
+          <p:nvPicPr>
+            <p:cNvPr id="76" name="Picture 75">
+              <a:extLst>
+                <a:ext uri="{FF2B5EF4-FFF2-40B4-BE49-F238E27FC236}">
+                  <a16:creationId xmlns:a16="http://schemas.microsoft.com/office/drawing/2014/main" id="{C5A686C6-D1CF-F5E6-5D61-15E9A63BBEAE}"/>
+                </a:ext>
+              </a:extLst>
+            </p:cNvPr>
+            <p:cNvPicPr>
+              <a:picLocks noChangeAspect="1"/>
+            </p:cNvPicPr>
+            <p:nvPr/>
+          </p:nvPicPr>
+          <p:blipFill>
+            <a:blip r:embed="rId8"/>
+            <a:stretch>
+              <a:fillRect/>
+            </a:stretch>
+          </p:blipFill>
+          <p:spPr>
+            <a:xfrm rot="2733373">
+              <a:off x="1854440" y="1830365"/>
+              <a:ext cx="1473200" cy="228600"/>
+            </a:xfrm>
+            <a:prstGeom prst="rect">
+              <a:avLst/>
+            </a:prstGeom>
+          </p:spPr>
+        </p:pic>
+        <p:pic>
+          <p:nvPicPr>
+            <p:cNvPr id="78" name="Picture 77">
+              <a:extLst>
+                <a:ext uri="{FF2B5EF4-FFF2-40B4-BE49-F238E27FC236}">
+                  <a16:creationId xmlns:a16="http://schemas.microsoft.com/office/drawing/2014/main" id="{D7F09405-83A3-9019-9B63-A8404409A571}"/>
+                </a:ext>
+              </a:extLst>
+            </p:cNvPr>
+            <p:cNvPicPr>
+              <a:picLocks noChangeAspect="1"/>
+            </p:cNvPicPr>
+            <p:nvPr/>
+          </p:nvPicPr>
+          <p:blipFill>
+            <a:blip r:embed="rId9"/>
+            <a:stretch>
+              <a:fillRect/>
+            </a:stretch>
+          </p:blipFill>
+          <p:spPr>
+            <a:xfrm>
+              <a:off x="1016873" y="2493775"/>
+              <a:ext cx="177800" cy="190500"/>
+            </a:xfrm>
+            <a:prstGeom prst="rect">
+              <a:avLst/>
+            </a:prstGeom>
+          </p:spPr>
+        </p:pic>
+        <p:pic>
+          <p:nvPicPr>
+            <p:cNvPr id="79" name="Picture 78">
+              <a:extLst>
+                <a:ext uri="{FF2B5EF4-FFF2-40B4-BE49-F238E27FC236}">
+                  <a16:creationId xmlns:a16="http://schemas.microsoft.com/office/drawing/2014/main" id="{F8F965AE-052A-43E6-0A35-560BE722FBAA}"/>
+                </a:ext>
+              </a:extLst>
+            </p:cNvPr>
+            <p:cNvPicPr>
+              <a:picLocks noChangeAspect="1"/>
+            </p:cNvPicPr>
+            <p:nvPr/>
+          </p:nvPicPr>
+          <p:blipFill>
+            <a:blip r:embed="rId10"/>
+            <a:stretch>
+              <a:fillRect/>
+            </a:stretch>
+          </p:blipFill>
+          <p:spPr>
+            <a:xfrm>
+              <a:off x="1308240" y="2872267"/>
+              <a:ext cx="190500" cy="177800"/>
+            </a:xfrm>
+            <a:prstGeom prst="rect">
+              <a:avLst/>
+            </a:prstGeom>
+          </p:spPr>
+        </p:pic>
+        <p:pic>
+          <p:nvPicPr>
+            <p:cNvPr id="80" name="Picture 79">
+              <a:extLst>
+                <a:ext uri="{FF2B5EF4-FFF2-40B4-BE49-F238E27FC236}">
+                  <a16:creationId xmlns:a16="http://schemas.microsoft.com/office/drawing/2014/main" id="{9F780558-E129-5A1D-3C2F-CB9E9A6818AA}"/>
+                </a:ext>
+              </a:extLst>
+            </p:cNvPr>
+            <p:cNvPicPr>
+              <a:picLocks noChangeAspect="1"/>
+            </p:cNvPicPr>
+            <p:nvPr/>
+          </p:nvPicPr>
+          <p:blipFill>
+            <a:blip r:embed="rId11"/>
+            <a:stretch>
+              <a:fillRect/>
+            </a:stretch>
+          </p:blipFill>
+          <p:spPr>
+            <a:xfrm>
+              <a:off x="5997213" y="5396472"/>
+              <a:ext cx="190500" cy="190500"/>
+            </a:xfrm>
+            <a:prstGeom prst="rect">
+              <a:avLst/>
+            </a:prstGeom>
+          </p:spPr>
+        </p:pic>
+        <p:pic>
+          <p:nvPicPr>
+            <p:cNvPr id="81" name="Picture 80">
+              <a:extLst>
+                <a:ext uri="{FF2B5EF4-FFF2-40B4-BE49-F238E27FC236}">
+                  <a16:creationId xmlns:a16="http://schemas.microsoft.com/office/drawing/2014/main" id="{5BA96AE7-D3F8-9696-F4C7-ED7D7F75DDEF}"/>
+                </a:ext>
+              </a:extLst>
+            </p:cNvPr>
+            <p:cNvPicPr>
+              <a:picLocks noChangeAspect="1"/>
+            </p:cNvPicPr>
+            <p:nvPr/>
+          </p:nvPicPr>
+          <p:blipFill>
+            <a:blip r:embed="rId12"/>
+            <a:stretch>
+              <a:fillRect/>
+            </a:stretch>
+          </p:blipFill>
+          <p:spPr>
+            <a:xfrm>
+              <a:off x="6735132" y="6221532"/>
+              <a:ext cx="203200" cy="177800"/>
+            </a:xfrm>
+            <a:prstGeom prst="rect">
+              <a:avLst/>
+            </a:prstGeom>
+          </p:spPr>
+        </p:pic>
+        <p:pic>
+          <p:nvPicPr>
+            <p:cNvPr id="82" name="Picture 81">
+              <a:extLst>
+                <a:ext uri="{FF2B5EF4-FFF2-40B4-BE49-F238E27FC236}">
+                  <a16:creationId xmlns:a16="http://schemas.microsoft.com/office/drawing/2014/main" id="{D7DF4B5B-7E9A-A27A-611B-C0B069CD3800}"/>
+                </a:ext>
+              </a:extLst>
+            </p:cNvPr>
+            <p:cNvPicPr>
+              <a:picLocks noChangeAspect="1"/>
+            </p:cNvPicPr>
+            <p:nvPr/>
+          </p:nvPicPr>
+          <p:blipFill>
+            <a:blip r:embed="rId13"/>
+            <a:stretch>
+              <a:fillRect/>
+            </a:stretch>
+          </p:blipFill>
+          <p:spPr>
+            <a:xfrm>
+              <a:off x="7336910" y="6636201"/>
+              <a:ext cx="190500" cy="177800"/>
+            </a:xfrm>
+            <a:prstGeom prst="rect">
+              <a:avLst/>
+            </a:prstGeom>
+          </p:spPr>
+        </p:pic>
+        <p:pic>
+          <p:nvPicPr>
+            <p:cNvPr id="85" name="Picture 84">
+              <a:extLst>
+                <a:ext uri="{FF2B5EF4-FFF2-40B4-BE49-F238E27FC236}">
+                  <a16:creationId xmlns:a16="http://schemas.microsoft.com/office/drawing/2014/main" id="{3A69EE21-2809-1D21-1D47-B98A6DC5374E}"/>
+                </a:ext>
+              </a:extLst>
+            </p:cNvPr>
+            <p:cNvPicPr>
+              <a:picLocks noChangeAspect="1"/>
+            </p:cNvPicPr>
+            <p:nvPr/>
+          </p:nvPicPr>
+          <p:blipFill>
+            <a:blip r:embed="rId3"/>
+            <a:stretch>
+              <a:fillRect/>
+            </a:stretch>
+          </p:blipFill>
+          <p:spPr>
+            <a:xfrm>
+              <a:off x="1616693" y="3802529"/>
+              <a:ext cx="271956" cy="145691"/>
+            </a:xfrm>
+            <a:prstGeom prst="rect">
+              <a:avLst/>
+            </a:prstGeom>
+          </p:spPr>
+        </p:pic>
+        <p:pic>
+          <p:nvPicPr>
+            <p:cNvPr id="87" name="Picture 86">
+              <a:extLst>
+                <a:ext uri="{FF2B5EF4-FFF2-40B4-BE49-F238E27FC236}">
+                  <a16:creationId xmlns:a16="http://schemas.microsoft.com/office/drawing/2014/main" id="{58CCFAE7-BFC8-57CF-982F-9E56D6215FEE}"/>
+                </a:ext>
+              </a:extLst>
+            </p:cNvPr>
+            <p:cNvPicPr>
+              <a:picLocks noChangeAspect="1"/>
+            </p:cNvPicPr>
+            <p:nvPr/>
+          </p:nvPicPr>
+          <p:blipFill>
+            <a:blip r:embed="rId8"/>
+            <a:stretch>
+              <a:fillRect/>
+            </a:stretch>
+          </p:blipFill>
+          <p:spPr>
+            <a:xfrm rot="2733373">
+              <a:off x="3308323" y="5552718"/>
+              <a:ext cx="1473200" cy="228600"/>
+            </a:xfrm>
+            <a:prstGeom prst="rect">
+              <a:avLst/>
+            </a:prstGeom>
+          </p:spPr>
+        </p:pic>
+        <p:cxnSp>
+          <p:nvCxnSpPr>
+            <p:cNvPr id="12" name="Straight Arrow Connector 11">
+              <a:extLst>
+                <a:ext uri="{FF2B5EF4-FFF2-40B4-BE49-F238E27FC236}">
+                  <a16:creationId xmlns:a16="http://schemas.microsoft.com/office/drawing/2014/main" id="{E478A380-03B5-A456-4C06-46587B5600E6}"/>
+                </a:ext>
+              </a:extLst>
+            </p:cNvPr>
+            <p:cNvCxnSpPr>
+              <a:cxnSpLocks/>
+            </p:cNvCxnSpPr>
+            <p:nvPr/>
+          </p:nvCxnSpPr>
+          <p:spPr>
+            <a:xfrm>
+              <a:off x="949808" y="4009815"/>
+              <a:ext cx="2058761" cy="0"/>
+            </a:xfrm>
+            <a:prstGeom prst="straightConnector1">
+              <a:avLst/>
+            </a:prstGeom>
+            <a:ln w="34925">
+              <a:solidFill>
+                <a:srgbClr val="0070C0"/>
+              </a:solidFill>
+              <a:tailEnd type="triangle" w="lg" len="lg"/>
+            </a:ln>
+          </p:spPr>
+          <p:style>
+            <a:lnRef idx="2">
+              <a:schemeClr val="accent1"/>
+            </a:lnRef>
+            <a:fillRef idx="0">
+              <a:schemeClr val="accent1"/>
+            </a:fillRef>
+            <a:effectRef idx="1">
+              <a:schemeClr val="accent1"/>
+            </a:effectRef>
+            <a:fontRef idx="minor">
+              <a:schemeClr val="tx1"/>
+            </a:fontRef>
+          </p:style>
+        </p:cxnSp>
+        <p:sp>
+          <p:nvSpPr>
+            <p:cNvPr id="9" name="Freeform 8">
+              <a:extLst>
+                <a:ext uri="{FF2B5EF4-FFF2-40B4-BE49-F238E27FC236}">
+                  <a16:creationId xmlns:a16="http://schemas.microsoft.com/office/drawing/2014/main" id="{D248B6CF-643C-4F12-4DAB-7EE5F0ABDA30}"/>
+                </a:ext>
+              </a:extLst>
+            </p:cNvPr>
+            <p:cNvSpPr/>
+            <p:nvPr/>
+          </p:nvSpPr>
+          <p:spPr>
+            <a:xfrm>
+              <a:off x="1323112" y="3099602"/>
+              <a:ext cx="4572151" cy="2480117"/>
+            </a:xfrm>
+            <a:custGeom>
+              <a:avLst/>
+              <a:gdLst>
+                <a:gd name="csX0" fmla="*/ 0 w 5401340"/>
+                <a:gd name="csY0" fmla="*/ 0 h 5411972"/>
+                <a:gd name="csX1" fmla="*/ 5401340 w 5401340"/>
+                <a:gd name="csY1" fmla="*/ 5411972 h 5411972"/>
+                <a:gd name="csX0" fmla="*/ 0 w 3770453"/>
+                <a:gd name="csY0" fmla="*/ 0 h 3776676"/>
+                <a:gd name="csX1" fmla="*/ 3770453 w 3770453"/>
+                <a:gd name="csY1" fmla="*/ 3776676 h 3776676"/>
+              </a:gdLst>
+              <a:ahLst/>
+              <a:cxnLst>
+                <a:cxn ang="0">
+                  <a:pos x="csX0" y="csY0"/>
+                </a:cxn>
+                <a:cxn ang="0">
+                  <a:pos x="csX1" y="csY1"/>
+                </a:cxn>
+              </a:cxnLst>
+              <a:rect l="l" t="t" r="r" b="b"/>
+              <a:pathLst>
+                <a:path w="3770453" h="3776676">
+                  <a:moveTo>
+                    <a:pt x="0" y="0"/>
+                  </a:moveTo>
+                  <a:lnTo>
+                    <a:pt x="3770453" y="3776676"/>
+                  </a:lnTo>
+                </a:path>
+              </a:pathLst>
+            </a:custGeom>
+            <a:ln w="28575">
+              <a:solidFill>
+                <a:srgbClr val="0070C0"/>
+              </a:solidFill>
+            </a:ln>
+          </p:spPr>
+          <p:style>
+            <a:lnRef idx="1">
+              <a:schemeClr val="dk1"/>
+            </a:lnRef>
+            <a:fillRef idx="0">
+              <a:schemeClr val="dk1"/>
+            </a:fillRef>
+            <a:effectRef idx="0">
+              <a:schemeClr val="dk1"/>
+            </a:effectRef>
+            <a:fontRef idx="minor">
+              <a:schemeClr val="tx1"/>
+            </a:fontRef>
+          </p:style>
+          <p:txBody>
+            <a:bodyPr rtlCol="0" anchor="ctr"/>
+            <a:lstStyle/>
+            <a:p>
+              <a:pPr algn="ctr"/>
+              <a:endParaRPr lang="en-US"/>
+            </a:p>
+          </p:txBody>
+        </p:sp>
+        <p:cxnSp>
+          <p:nvCxnSpPr>
+            <p:cNvPr id="26" name="Straight Connector 25">
+              <a:extLst>
+                <a:ext uri="{FF2B5EF4-FFF2-40B4-BE49-F238E27FC236}">
+                  <a16:creationId xmlns:a16="http://schemas.microsoft.com/office/drawing/2014/main" id="{B5F9A899-F7B1-AF75-83EA-91741C2E421A}"/>
+                </a:ext>
+              </a:extLst>
+            </p:cNvPr>
+            <p:cNvCxnSpPr>
+              <a:cxnSpLocks/>
+            </p:cNvCxnSpPr>
+            <p:nvPr/>
+          </p:nvCxnSpPr>
+          <p:spPr>
+            <a:xfrm>
+              <a:off x="925529" y="404047"/>
+              <a:ext cx="2328085" cy="0"/>
+            </a:xfrm>
+            <a:prstGeom prst="line">
+              <a:avLst/>
+            </a:prstGeom>
+          </p:spPr>
+          <p:style>
+            <a:lnRef idx="2">
+              <a:schemeClr val="accent1"/>
+            </a:lnRef>
+            <a:fillRef idx="0">
+              <a:schemeClr val="accent1"/>
+            </a:fillRef>
+            <a:effectRef idx="1">
+              <a:schemeClr val="accent1"/>
+            </a:effectRef>
+            <a:fontRef idx="minor">
+              <a:schemeClr val="tx1"/>
+            </a:fontRef>
+          </p:style>
+        </p:cxnSp>
+        <p:cxnSp>
+          <p:nvCxnSpPr>
+            <p:cNvPr id="31" name="Straight Connector 30">
+              <a:extLst>
+                <a:ext uri="{FF2B5EF4-FFF2-40B4-BE49-F238E27FC236}">
+                  <a16:creationId xmlns:a16="http://schemas.microsoft.com/office/drawing/2014/main" id="{75321AEB-9D7E-A119-CFC2-60EE07A112B9}"/>
+                </a:ext>
+              </a:extLst>
+            </p:cNvPr>
+            <p:cNvCxnSpPr>
+              <a:cxnSpLocks/>
+            </p:cNvCxnSpPr>
+            <p:nvPr/>
+          </p:nvCxnSpPr>
+          <p:spPr>
+            <a:xfrm>
+              <a:off x="5895263" y="5591359"/>
+              <a:ext cx="1227547" cy="1302887"/>
+            </a:xfrm>
+            <a:prstGeom prst="line">
+              <a:avLst/>
+            </a:prstGeom>
+            <a:ln w="31750"/>
+          </p:spPr>
+          <p:style>
+            <a:lnRef idx="2">
+              <a:schemeClr val="accent1"/>
+            </a:lnRef>
+            <a:fillRef idx="0">
+              <a:schemeClr val="accent1"/>
+            </a:fillRef>
+            <a:effectRef idx="1">
+              <a:schemeClr val="accent1"/>
+            </a:effectRef>
+            <a:fontRef idx="minor">
+              <a:schemeClr val="tx1"/>
+            </a:fontRef>
+          </p:style>
+        </p:cxnSp>
+        <p:cxnSp>
+          <p:nvCxnSpPr>
+            <p:cNvPr id="35" name="Straight Connector 34">
+              <a:extLst>
+                <a:ext uri="{FF2B5EF4-FFF2-40B4-BE49-F238E27FC236}">
+                  <a16:creationId xmlns:a16="http://schemas.microsoft.com/office/drawing/2014/main" id="{51AD8C57-BFC7-977E-84A8-BDCD1C40D1EC}"/>
+                </a:ext>
+              </a:extLst>
+            </p:cNvPr>
+            <p:cNvCxnSpPr>
+              <a:cxnSpLocks/>
+            </p:cNvCxnSpPr>
+            <p:nvPr/>
+          </p:nvCxnSpPr>
+          <p:spPr>
+            <a:xfrm>
+              <a:off x="965285" y="2734733"/>
+              <a:ext cx="389767" cy="415085"/>
+            </a:xfrm>
+            <a:prstGeom prst="line">
+              <a:avLst/>
+            </a:prstGeom>
+            <a:ln w="31750"/>
+          </p:spPr>
+          <p:style>
+            <a:lnRef idx="2">
+              <a:schemeClr val="accent1"/>
+            </a:lnRef>
+            <a:fillRef idx="0">
+              <a:schemeClr val="accent1"/>
+            </a:fillRef>
+            <a:effectRef idx="1">
+              <a:schemeClr val="accent1"/>
+            </a:effectRef>
+            <a:fontRef idx="minor">
+              <a:schemeClr val="tx1"/>
+            </a:fontRef>
+          </p:style>
+        </p:cxnSp>
+        <p:pic>
+          <p:nvPicPr>
+            <p:cNvPr id="43" name="Picture 42">
+              <a:extLst>
+                <a:ext uri="{FF2B5EF4-FFF2-40B4-BE49-F238E27FC236}">
+                  <a16:creationId xmlns:a16="http://schemas.microsoft.com/office/drawing/2014/main" id="{FED58226-3BB5-5D91-3F7A-3458F72FD4F1}"/>
+                </a:ext>
+              </a:extLst>
+            </p:cNvPr>
+            <p:cNvPicPr>
+              <a:picLocks noChangeAspect="1"/>
+            </p:cNvPicPr>
+            <p:nvPr/>
+          </p:nvPicPr>
+          <p:blipFill>
+            <a:blip r:embed="rId14"/>
+            <a:stretch>
+              <a:fillRect/>
+            </a:stretch>
+          </p:blipFill>
+          <p:spPr>
+            <a:xfrm>
+              <a:off x="7767390" y="5934597"/>
+              <a:ext cx="584200" cy="241300"/>
+            </a:xfrm>
+            <a:prstGeom prst="rect">
+              <a:avLst/>
+            </a:prstGeom>
+          </p:spPr>
+        </p:pic>
+        <p:sp>
+          <p:nvSpPr>
+            <p:cNvPr id="4" name="Freeform 3">
+              <a:extLst>
+                <a:ext uri="{FF2B5EF4-FFF2-40B4-BE49-F238E27FC236}">
+                  <a16:creationId xmlns:a16="http://schemas.microsoft.com/office/drawing/2014/main" id="{D2B33833-0D09-C2AC-3740-7D1617C64BB3}"/>
+                </a:ext>
+              </a:extLst>
+            </p:cNvPr>
+            <p:cNvSpPr/>
+            <p:nvPr/>
+          </p:nvSpPr>
+          <p:spPr>
+            <a:xfrm>
+              <a:off x="546514" y="3111853"/>
+              <a:ext cx="298121" cy="2430559"/>
+            </a:xfrm>
+            <a:custGeom>
+              <a:avLst/>
+              <a:gdLst>
+                <a:gd name="csX0" fmla="*/ 0 w 1594884"/>
+                <a:gd name="csY0" fmla="*/ 159488 h 202018"/>
+                <a:gd name="csX1" fmla="*/ 340242 w 1594884"/>
+                <a:gd name="csY1" fmla="*/ 10632 h 202018"/>
+                <a:gd name="csX2" fmla="*/ 499731 w 1594884"/>
+                <a:gd name="csY2" fmla="*/ 0 h 202018"/>
+                <a:gd name="csX3" fmla="*/ 967563 w 1594884"/>
+                <a:gd name="csY3" fmla="*/ 10632 h 202018"/>
+                <a:gd name="csX4" fmla="*/ 1350335 w 1594884"/>
+                <a:gd name="csY4" fmla="*/ 127591 h 202018"/>
+                <a:gd name="csX5" fmla="*/ 1594884 w 1594884"/>
+                <a:gd name="csY5" fmla="*/ 202018 h 202018"/>
+                <a:gd name="csX0" fmla="*/ 0 w 1594884"/>
+                <a:gd name="csY0" fmla="*/ 164233 h 206763"/>
+                <a:gd name="csX1" fmla="*/ 340242 w 1594884"/>
+                <a:gd name="csY1" fmla="*/ 15377 h 206763"/>
+                <a:gd name="csX2" fmla="*/ 499731 w 1594884"/>
+                <a:gd name="csY2" fmla="*/ 4745 h 206763"/>
+                <a:gd name="csX3" fmla="*/ 967563 w 1594884"/>
+                <a:gd name="csY3" fmla="*/ 15377 h 206763"/>
+                <a:gd name="csX4" fmla="*/ 1350335 w 1594884"/>
+                <a:gd name="csY4" fmla="*/ 132336 h 206763"/>
+                <a:gd name="csX5" fmla="*/ 1594884 w 1594884"/>
+                <a:gd name="csY5" fmla="*/ 206763 h 206763"/>
+                <a:gd name="csX0" fmla="*/ 0 w 1594884"/>
+                <a:gd name="csY0" fmla="*/ 164233 h 206763"/>
+                <a:gd name="csX1" fmla="*/ 340242 w 1594884"/>
+                <a:gd name="csY1" fmla="*/ 15377 h 206763"/>
+                <a:gd name="csX2" fmla="*/ 499731 w 1594884"/>
+                <a:gd name="csY2" fmla="*/ 4745 h 206763"/>
+                <a:gd name="csX3" fmla="*/ 967563 w 1594884"/>
+                <a:gd name="csY3" fmla="*/ 15377 h 206763"/>
+                <a:gd name="csX4" fmla="*/ 1594884 w 1594884"/>
+                <a:gd name="csY4" fmla="*/ 206763 h 206763"/>
+                <a:gd name="csX0" fmla="*/ 0 w 1594884"/>
+                <a:gd name="csY0" fmla="*/ 170203 h 212733"/>
+                <a:gd name="csX1" fmla="*/ 340242 w 1594884"/>
+                <a:gd name="csY1" fmla="*/ 21347 h 212733"/>
+                <a:gd name="csX2" fmla="*/ 967563 w 1594884"/>
+                <a:gd name="csY2" fmla="*/ 21347 h 212733"/>
+                <a:gd name="csX3" fmla="*/ 1594884 w 1594884"/>
+                <a:gd name="csY3" fmla="*/ 212733 h 212733"/>
+                <a:gd name="csX0" fmla="*/ 0 w 1594884"/>
+                <a:gd name="csY0" fmla="*/ 183561 h 226091"/>
+                <a:gd name="csX1" fmla="*/ 340242 w 1594884"/>
+                <a:gd name="csY1" fmla="*/ 34705 h 226091"/>
+                <a:gd name="csX2" fmla="*/ 967563 w 1594884"/>
+                <a:gd name="csY2" fmla="*/ 34705 h 226091"/>
+                <a:gd name="csX3" fmla="*/ 1594884 w 1594884"/>
+                <a:gd name="csY3" fmla="*/ 226091 h 226091"/>
+                <a:gd name="csX0" fmla="*/ 0 w 1594884"/>
+                <a:gd name="csY0" fmla="*/ 149194 h 191724"/>
+                <a:gd name="csX1" fmla="*/ 340242 w 1594884"/>
+                <a:gd name="csY1" fmla="*/ 338 h 191724"/>
+                <a:gd name="csX2" fmla="*/ 1594884 w 1594884"/>
+                <a:gd name="csY2" fmla="*/ 191724 h 191724"/>
+                <a:gd name="csX0" fmla="*/ 0 w 1594884"/>
+                <a:gd name="csY0" fmla="*/ 158692 h 201222"/>
+                <a:gd name="csX1" fmla="*/ 784742 w 1594884"/>
+                <a:gd name="csY1" fmla="*/ 311 h 201222"/>
+                <a:gd name="csX2" fmla="*/ 1594884 w 1594884"/>
+                <a:gd name="csY2" fmla="*/ 201222 h 201222"/>
+                <a:gd name="csX0" fmla="*/ 0 w 1594884"/>
+                <a:gd name="csY0" fmla="*/ 158663 h 201193"/>
+                <a:gd name="csX1" fmla="*/ 784742 w 1594884"/>
+                <a:gd name="csY1" fmla="*/ 282 h 201193"/>
+                <a:gd name="csX2" fmla="*/ 1594884 w 1594884"/>
+                <a:gd name="csY2" fmla="*/ 201193 h 201193"/>
+                <a:gd name="csX0" fmla="*/ 0 w 1610759"/>
+                <a:gd name="csY0" fmla="*/ 158449 h 178754"/>
+                <a:gd name="csX1" fmla="*/ 784742 w 1610759"/>
+                <a:gd name="csY1" fmla="*/ 68 h 178754"/>
+                <a:gd name="csX2" fmla="*/ 1610759 w 1610759"/>
+                <a:gd name="csY2" fmla="*/ 178754 h 178754"/>
+                <a:gd name="csX0" fmla="*/ 0 w 1617109"/>
+                <a:gd name="csY0" fmla="*/ 177432 h 178687"/>
+                <a:gd name="csX1" fmla="*/ 791092 w 1617109"/>
+                <a:gd name="csY1" fmla="*/ 1 h 178687"/>
+                <a:gd name="csX2" fmla="*/ 1617109 w 1617109"/>
+                <a:gd name="csY2" fmla="*/ 178687 h 178687"/>
+                <a:gd name="csX0" fmla="*/ 0 w 1617109"/>
+                <a:gd name="csY0" fmla="*/ 191339 h 192594"/>
+                <a:gd name="csX1" fmla="*/ 791092 w 1617109"/>
+                <a:gd name="csY1" fmla="*/ 13908 h 192594"/>
+                <a:gd name="csX2" fmla="*/ 955000 w 1617109"/>
+                <a:gd name="csY2" fmla="*/ 31745 h 192594"/>
+                <a:gd name="csX3" fmla="*/ 1617109 w 1617109"/>
+                <a:gd name="csY3" fmla="*/ 192594 h 192594"/>
+                <a:gd name="csX0" fmla="*/ 0 w 1617109"/>
+                <a:gd name="csY0" fmla="*/ 191339 h 192594"/>
+                <a:gd name="csX1" fmla="*/ 589228 w 1617109"/>
+                <a:gd name="csY1" fmla="*/ 30804 h 192594"/>
+                <a:gd name="csX2" fmla="*/ 791092 w 1617109"/>
+                <a:gd name="csY2" fmla="*/ 13908 h 192594"/>
+                <a:gd name="csX3" fmla="*/ 955000 w 1617109"/>
+                <a:gd name="csY3" fmla="*/ 31745 h 192594"/>
+                <a:gd name="csX4" fmla="*/ 1617109 w 1617109"/>
+                <a:gd name="csY4" fmla="*/ 192594 h 192594"/>
+                <a:gd name="csX0" fmla="*/ 0 w 1617109"/>
+                <a:gd name="csY0" fmla="*/ 180156 h 181411"/>
+                <a:gd name="csX1" fmla="*/ 589228 w 1617109"/>
+                <a:gd name="csY1" fmla="*/ 19621 h 181411"/>
+                <a:gd name="csX2" fmla="*/ 955000 w 1617109"/>
+                <a:gd name="csY2" fmla="*/ 20562 h 181411"/>
+                <a:gd name="csX3" fmla="*/ 1617109 w 1617109"/>
+                <a:gd name="csY3" fmla="*/ 181411 h 181411"/>
+                <a:gd name="csX0" fmla="*/ 0 w 1617109"/>
+                <a:gd name="csY0" fmla="*/ 171832 h 173087"/>
+                <a:gd name="csX1" fmla="*/ 589228 w 1617109"/>
+                <a:gd name="csY1" fmla="*/ 11297 h 173087"/>
+                <a:gd name="csX2" fmla="*/ 955000 w 1617109"/>
+                <a:gd name="csY2" fmla="*/ 12238 h 173087"/>
+                <a:gd name="csX3" fmla="*/ 1617109 w 1617109"/>
+                <a:gd name="csY3" fmla="*/ 173087 h 173087"/>
+                <a:gd name="csX0" fmla="*/ 0 w 1617109"/>
+                <a:gd name="csY0" fmla="*/ 160535 h 161790"/>
+                <a:gd name="csX1" fmla="*/ 589228 w 1617109"/>
+                <a:gd name="csY1" fmla="*/ 0 h 161790"/>
+                <a:gd name="csX2" fmla="*/ 955000 w 1617109"/>
+                <a:gd name="csY2" fmla="*/ 941 h 161790"/>
+                <a:gd name="csX3" fmla="*/ 1617109 w 1617109"/>
+                <a:gd name="csY3" fmla="*/ 161790 h 161790"/>
+                <a:gd name="csX0" fmla="*/ 0 w 1617109"/>
+                <a:gd name="csY0" fmla="*/ 160535 h 161790"/>
+                <a:gd name="csX1" fmla="*/ 589228 w 1617109"/>
+                <a:gd name="csY1" fmla="*/ 0 h 161790"/>
+                <a:gd name="csX2" fmla="*/ 1046443 w 1617109"/>
+                <a:gd name="csY2" fmla="*/ 0 h 161790"/>
+                <a:gd name="csX3" fmla="*/ 1617109 w 1617109"/>
+                <a:gd name="csY3" fmla="*/ 161790 h 161790"/>
+                <a:gd name="csX0" fmla="*/ 0 w 1617109"/>
+                <a:gd name="csY0" fmla="*/ 160535 h 161790"/>
+                <a:gd name="csX1" fmla="*/ 589228 w 1617109"/>
+                <a:gd name="csY1" fmla="*/ 0 h 161790"/>
+                <a:gd name="csX2" fmla="*/ 1046443 w 1617109"/>
+                <a:gd name="csY2" fmla="*/ 0 h 161790"/>
+                <a:gd name="csX3" fmla="*/ 1617109 w 1617109"/>
+                <a:gd name="csY3" fmla="*/ 161790 h 161790"/>
+                <a:gd name="csX0" fmla="*/ 0 w 1617109"/>
+                <a:gd name="csY0" fmla="*/ 160535 h 161790"/>
+                <a:gd name="csX1" fmla="*/ 589228 w 1617109"/>
+                <a:gd name="csY1" fmla="*/ 0 h 161790"/>
+                <a:gd name="csX2" fmla="*/ 1046443 w 1617109"/>
+                <a:gd name="csY2" fmla="*/ 0 h 161790"/>
+                <a:gd name="csX3" fmla="*/ 1617109 w 1617109"/>
+                <a:gd name="csY3" fmla="*/ 161790 h 161790"/>
+                <a:gd name="csX0" fmla="*/ 0 w 1617109"/>
+                <a:gd name="csY0" fmla="*/ 160535 h 161790"/>
+                <a:gd name="csX1" fmla="*/ 589228 w 1617109"/>
+                <a:gd name="csY1" fmla="*/ 0 h 161790"/>
+                <a:gd name="csX2" fmla="*/ 1046443 w 1617109"/>
+                <a:gd name="csY2" fmla="*/ 0 h 161790"/>
+                <a:gd name="csX3" fmla="*/ 1617109 w 1617109"/>
+                <a:gd name="csY3" fmla="*/ 161790 h 161790"/>
+                <a:gd name="csX0" fmla="*/ 0 w 1124724"/>
+                <a:gd name="csY0" fmla="*/ 160535 h 161084"/>
+                <a:gd name="csX1" fmla="*/ 589228 w 1124724"/>
+                <a:gd name="csY1" fmla="*/ 0 h 161084"/>
+                <a:gd name="csX2" fmla="*/ 1046443 w 1124724"/>
+                <a:gd name="csY2" fmla="*/ 0 h 161084"/>
+                <a:gd name="csX3" fmla="*/ 1124724 w 1124724"/>
+                <a:gd name="csY3" fmla="*/ 161084 h 161084"/>
+                <a:gd name="csX0" fmla="*/ 0 w 653441"/>
+                <a:gd name="csY0" fmla="*/ 161476 h 161476"/>
+                <a:gd name="csX1" fmla="*/ 117945 w 653441"/>
+                <a:gd name="csY1" fmla="*/ 0 h 161476"/>
+                <a:gd name="csX2" fmla="*/ 575160 w 653441"/>
+                <a:gd name="csY2" fmla="*/ 0 h 161476"/>
+                <a:gd name="csX3" fmla="*/ 653441 w 653441"/>
+                <a:gd name="csY3" fmla="*/ 161084 h 161476"/>
+                <a:gd name="csX0" fmla="*/ 0 w 653441"/>
+                <a:gd name="csY0" fmla="*/ 161476 h 162731"/>
+                <a:gd name="csX1" fmla="*/ 117945 w 653441"/>
+                <a:gd name="csY1" fmla="*/ 0 h 162731"/>
+                <a:gd name="csX2" fmla="*/ 575160 w 653441"/>
+                <a:gd name="csY2" fmla="*/ 0 h 162731"/>
+                <a:gd name="csX3" fmla="*/ 653441 w 653441"/>
+                <a:gd name="csY3" fmla="*/ 162731 h 162731"/>
+                <a:gd name="csX0" fmla="*/ 0 w 660475"/>
+                <a:gd name="csY0" fmla="*/ 161476 h 161476"/>
+                <a:gd name="csX1" fmla="*/ 117945 w 660475"/>
+                <a:gd name="csY1" fmla="*/ 0 h 161476"/>
+                <a:gd name="csX2" fmla="*/ 575160 w 660475"/>
+                <a:gd name="csY2" fmla="*/ 0 h 161476"/>
+                <a:gd name="csX3" fmla="*/ 660475 w 660475"/>
+                <a:gd name="csY3" fmla="*/ 161320 h 161476"/>
+              </a:gdLst>
+              <a:ahLst/>
+              <a:cxnLst>
+                <a:cxn ang="0">
+                  <a:pos x="csX0" y="csY0"/>
+                </a:cxn>
+                <a:cxn ang="0">
+                  <a:pos x="csX1" y="csY1"/>
+                </a:cxn>
+                <a:cxn ang="0">
+                  <a:pos x="csX2" y="csY2"/>
+                </a:cxn>
+                <a:cxn ang="0">
+                  <a:pos x="csX3" y="csY3"/>
+                </a:cxn>
+              </a:cxnLst>
+              <a:rect l="l" t="t" r="r" b="b"/>
+              <a:pathLst>
+                <a:path w="660475" h="161476">
+                  <a:moveTo>
+                    <a:pt x="0" y="161476"/>
+                  </a:moveTo>
+                  <a:cubicBezTo>
+                    <a:pt x="98205" y="134720"/>
+                    <a:pt x="92425" y="27775"/>
+                    <a:pt x="117945" y="0"/>
+                  </a:cubicBezTo>
+                  <a:lnTo>
+                    <a:pt x="575160" y="0"/>
+                  </a:lnTo>
+                  <a:cubicBezTo>
+                    <a:pt x="558078" y="30722"/>
+                    <a:pt x="550123" y="134512"/>
+                    <a:pt x="660475" y="161320"/>
+                  </a:cubicBezTo>
+                </a:path>
+              </a:pathLst>
+            </a:custGeom>
+            <a:pattFill prst="sphere">
+              <a:fgClr>
+                <a:srgbClr val="FFC000"/>
+              </a:fgClr>
+              <a:bgClr>
+                <a:srgbClr val="00B0F0"/>
+              </a:bgClr>
+            </a:pattFill>
+            <a:ln w="3175"/>
+          </p:spPr>
+          <p:style>
+            <a:lnRef idx="2">
+              <a:schemeClr val="accent1">
+                <a:shade val="15000"/>
+              </a:schemeClr>
+            </a:lnRef>
+            <a:fillRef idx="1">
+              <a:schemeClr val="accent1"/>
+            </a:fillRef>
+            <a:effectRef idx="0">
+              <a:schemeClr val="accent1"/>
+            </a:effectRef>
+            <a:fontRef idx="minor">
+              <a:schemeClr val="lt1"/>
+            </a:fontRef>
+          </p:style>
+          <p:txBody>
+            <a:bodyPr rtlCol="0" anchor="ctr"/>
+            <a:lstStyle/>
+            <a:p>
+              <a:pPr algn="ctr"/>
+              <a:endParaRPr lang="en-US"/>
+            </a:p>
+          </p:txBody>
+        </p:sp>
+      </p:grpSp>
+    </p:spTree>
+    <p:extLst>
+      <p:ext uri="{BB962C8B-B14F-4D97-AF65-F5344CB8AC3E}">
+        <p14:creationId xmlns:p14="http://schemas.microsoft.com/office/powerpoint/2010/main" val="2123514046"/>
+      </p:ext>
+    </p:extLst>
+  </p:cSld>
+  <p:clrMapOvr>
+    <a:masterClrMapping/>
+  </p:clrMapOvr>
+</p:sld>
+</file>
+
 <file path=ppt/theme/theme1.xml><?xml version="1.0" encoding="utf-8"?>
 <a:theme xmlns:a="http://schemas.openxmlformats.org/drawingml/2006/main" name="Office Theme">
   <a:themeElements>
@@ -4451,4 +13898,319 @@
     </a:ext>
   </a:extLst>
 </a:theme>
+</file>
+
+<file path=ppt/theme/theme2.xml><?xml version="1.0" encoding="utf-8"?>
+<a:theme xmlns:a="http://schemas.openxmlformats.org/drawingml/2006/main" name="Office Theme">
+  <a:themeElements>
+    <a:clrScheme name="Office">
+      <a:dk1>
+        <a:sysClr val="windowText" lastClr="000000"/>
+      </a:dk1>
+      <a:lt1>
+        <a:sysClr val="window" lastClr="FFFFFF"/>
+      </a:lt1>
+      <a:dk2>
+        <a:srgbClr val="0E2841"/>
+      </a:dk2>
+      <a:lt2>
+        <a:srgbClr val="E8E8E8"/>
+      </a:lt2>
+      <a:accent1>
+        <a:srgbClr val="156082"/>
+      </a:accent1>
+      <a:accent2>
+        <a:srgbClr val="E97132"/>
+      </a:accent2>
+      <a:accent3>
+        <a:srgbClr val="196B24"/>
+      </a:accent3>
+      <a:accent4>
+        <a:srgbClr val="0F9ED5"/>
+      </a:accent4>
+      <a:accent5>
+        <a:srgbClr val="A02B93"/>
+      </a:accent5>
+      <a:accent6>
+        <a:srgbClr val="4EA72E"/>
+      </a:accent6>
+      <a:hlink>
+        <a:srgbClr val="467886"/>
+      </a:hlink>
+      <a:folHlink>
+        <a:srgbClr val="96607D"/>
+      </a:folHlink>
+    </a:clrScheme>
+    <a:fontScheme name="Office">
+      <a:majorFont>
+        <a:latin typeface="Aptos Display" panose="02110004020202020204"/>
+        <a:ea typeface=""/>
+        <a:cs typeface=""/>
+        <a:font script="Jpan" typeface="游ゴシック Light"/>
+        <a:font script="Hang" typeface="맑은 고딕"/>
+        <a:font script="Hans" typeface="等线 Light"/>
+        <a:font script="Hant" typeface="新細明體"/>
+        <a:font script="Arab" typeface="Times New Roman"/>
+        <a:font script="Hebr" typeface="Times New Roman"/>
+        <a:font script="Thai" typeface="Angsana New"/>
+        <a:font script="Ethi" typeface="Nyala"/>
+        <a:font script="Beng" typeface="Vrinda"/>
+        <a:font script="Gujr" typeface="Shruti"/>
+        <a:font script="Khmr" typeface="MoolBoran"/>
+        <a:font script="Knda" typeface="Tunga"/>
+        <a:font script="Guru" typeface="Raavi"/>
+        <a:font script="Cans" typeface="Euphemia"/>
+        <a:font script="Cher" typeface="Plantagenet Cherokee"/>
+        <a:font script="Yiii" typeface="Microsoft Yi Baiti"/>
+        <a:font script="Tibt" typeface="Microsoft Himalaya"/>
+        <a:font script="Thaa" typeface="MV Boli"/>
+        <a:font script="Deva" typeface="Mangal"/>
+        <a:font script="Telu" typeface="Gautami"/>
+        <a:font script="Taml" typeface="Latha"/>
+        <a:font script="Syrc" typeface="Estrangelo Edessa"/>
+        <a:font script="Orya" typeface="Kalinga"/>
+        <a:font script="Mlym" typeface="Kartika"/>
+        <a:font script="Laoo" typeface="DokChampa"/>
+        <a:font script="Sinh" typeface="Iskoola Pota"/>
+        <a:font script="Mong" typeface="Mongolian Baiti"/>
+        <a:font script="Viet" typeface="Times New Roman"/>
+        <a:font script="Uigh" typeface="Microsoft Uighur"/>
+        <a:font script="Geor" typeface="Sylfaen"/>
+        <a:font script="Armn" typeface="Arial"/>
+        <a:font script="Bugi" typeface="Leelawadee UI"/>
+        <a:font script="Bopo" typeface="Microsoft JhengHei"/>
+        <a:font script="Java" typeface="Javanese Text"/>
+        <a:font script="Lisu" typeface="Segoe UI"/>
+        <a:font script="Mymr" typeface="Myanmar Text"/>
+        <a:font script="Nkoo" typeface="Ebrima"/>
+        <a:font script="Olck" typeface="Nirmala UI"/>
+        <a:font script="Osma" typeface="Ebrima"/>
+        <a:font script="Phag" typeface="Phagspa"/>
+        <a:font script="Syrn" typeface="Estrangelo Edessa"/>
+        <a:font script="Syrj" typeface="Estrangelo Edessa"/>
+        <a:font script="Syre" typeface="Estrangelo Edessa"/>
+        <a:font script="Sora" typeface="Nirmala UI"/>
+        <a:font script="Tale" typeface="Microsoft Tai Le"/>
+        <a:font script="Talu" typeface="Microsoft New Tai Lue"/>
+        <a:font script="Tfng" typeface="Ebrima"/>
+      </a:majorFont>
+      <a:minorFont>
+        <a:latin typeface="Aptos" panose="02110004020202020204"/>
+        <a:ea typeface=""/>
+        <a:cs typeface=""/>
+        <a:font script="Jpan" typeface="游ゴシック"/>
+        <a:font script="Hang" typeface="맑은 고딕"/>
+        <a:font script="Hans" typeface="等线"/>
+        <a:font script="Hant" typeface="新細明體"/>
+        <a:font script="Arab" typeface="Arial"/>
+        <a:font script="Hebr" typeface="Arial"/>
+        <a:font script="Thai" typeface="Cordia New"/>
+        <a:font script="Ethi" typeface="Nyala"/>
+        <a:font script="Beng" typeface="Vrinda"/>
+        <a:font script="Gujr" typeface="Shruti"/>
+        <a:font script="Khmr" typeface="DaunPenh"/>
+        <a:font script="Knda" typeface="Tunga"/>
+        <a:font script="Guru" typeface="Raavi"/>
+        <a:font script="Cans" typeface="Euphemia"/>
+        <a:font script="Cher" typeface="Plantagenet Cherokee"/>
+        <a:font script="Yiii" typeface="Microsoft Yi Baiti"/>
+        <a:font script="Tibt" typeface="Microsoft Himalaya"/>
+        <a:font script="Thaa" typeface="MV Boli"/>
+        <a:font script="Deva" typeface="Mangal"/>
+        <a:font script="Telu" typeface="Gautami"/>
+        <a:font script="Taml" typeface="Latha"/>
+        <a:font script="Syrc" typeface="Estrangelo Edessa"/>
+        <a:font script="Orya" typeface="Kalinga"/>
+        <a:font script="Mlym" typeface="Kartika"/>
+        <a:font script="Laoo" typeface="DokChampa"/>
+        <a:font script="Sinh" typeface="Iskoola Pota"/>
+        <a:font script="Mong" typeface="Mongolian Baiti"/>
+        <a:font script="Viet" typeface="Arial"/>
+        <a:font script="Uigh" typeface="Microsoft Uighur"/>
+        <a:font script="Geor" typeface="Sylfaen"/>
+        <a:font script="Armn" typeface="Arial"/>
+        <a:font script="Bugi" typeface="Leelawadee UI"/>
+        <a:font script="Bopo" typeface="Microsoft JhengHei"/>
+        <a:font script="Java" typeface="Javanese Text"/>
+        <a:font script="Lisu" typeface="Segoe UI"/>
+        <a:font script="Mymr" typeface="Myanmar Text"/>
+        <a:font script="Nkoo" typeface="Ebrima"/>
+        <a:font script="Olck" typeface="Nirmala UI"/>
+        <a:font script="Osma" typeface="Ebrima"/>
+        <a:font script="Phag" typeface="Phagspa"/>
+        <a:font script="Syrn" typeface="Estrangelo Edessa"/>
+        <a:font script="Syrj" typeface="Estrangelo Edessa"/>
+        <a:font script="Syre" typeface="Estrangelo Edessa"/>
+        <a:font script="Sora" typeface="Nirmala UI"/>
+        <a:font script="Tale" typeface="Microsoft Tai Le"/>
+        <a:font script="Talu" typeface="Microsoft New Tai Lue"/>
+        <a:font script="Tfng" typeface="Ebrima"/>
+      </a:minorFont>
+    </a:fontScheme>
+    <a:fmtScheme name="Office">
+      <a:fillStyleLst>
+        <a:solidFill>
+          <a:schemeClr val="phClr"/>
+        </a:solidFill>
+        <a:gradFill rotWithShape="1">
+          <a:gsLst>
+            <a:gs pos="0">
+              <a:schemeClr val="phClr">
+                <a:lumMod val="110000"/>
+                <a:satMod val="105000"/>
+                <a:tint val="67000"/>
+              </a:schemeClr>
+            </a:gs>
+            <a:gs pos="50000">
+              <a:schemeClr val="phClr">
+                <a:lumMod val="105000"/>
+                <a:satMod val="103000"/>
+                <a:tint val="73000"/>
+              </a:schemeClr>
+            </a:gs>
+            <a:gs pos="100000">
+              <a:schemeClr val="phClr">
+                <a:lumMod val="105000"/>
+                <a:satMod val="109000"/>
+                <a:tint val="81000"/>
+              </a:schemeClr>
+            </a:gs>
+          </a:gsLst>
+          <a:lin ang="5400000" scaled="0"/>
+        </a:gradFill>
+        <a:gradFill rotWithShape="1">
+          <a:gsLst>
+            <a:gs pos="0">
+              <a:schemeClr val="phClr">
+                <a:satMod val="103000"/>
+                <a:lumMod val="102000"/>
+                <a:tint val="94000"/>
+              </a:schemeClr>
+            </a:gs>
+            <a:gs pos="50000">
+              <a:schemeClr val="phClr">
+                <a:satMod val="110000"/>
+                <a:lumMod val="100000"/>
+                <a:shade val="100000"/>
+              </a:schemeClr>
+            </a:gs>
+            <a:gs pos="100000">
+              <a:schemeClr val="phClr">
+                <a:lumMod val="99000"/>
+                <a:satMod val="120000"/>
+                <a:shade val="78000"/>
+              </a:schemeClr>
+            </a:gs>
+          </a:gsLst>
+          <a:lin ang="5400000" scaled="0"/>
+        </a:gradFill>
+      </a:fillStyleLst>
+      <a:lnStyleLst>
+        <a:ln w="12700" cap="flat" cmpd="sng" algn="ctr">
+          <a:solidFill>
+            <a:schemeClr val="phClr"/>
+          </a:solidFill>
+          <a:prstDash val="solid"/>
+          <a:miter lim="800000"/>
+        </a:ln>
+        <a:ln w="19050" cap="flat" cmpd="sng" algn="ctr">
+          <a:solidFill>
+            <a:schemeClr val="phClr"/>
+          </a:solidFill>
+          <a:prstDash val="solid"/>
+          <a:miter lim="800000"/>
+        </a:ln>
+        <a:ln w="25400" cap="flat" cmpd="sng" algn="ctr">
+          <a:solidFill>
+            <a:schemeClr val="phClr"/>
+          </a:solidFill>
+          <a:prstDash val="solid"/>
+          <a:miter lim="800000"/>
+        </a:ln>
+      </a:lnStyleLst>
+      <a:effectStyleLst>
+        <a:effectStyle>
+          <a:effectLst/>
+        </a:effectStyle>
+        <a:effectStyle>
+          <a:effectLst/>
+        </a:effectStyle>
+        <a:effectStyle>
+          <a:effectLst>
+            <a:outerShdw blurRad="57150" dist="19050" dir="5400000" algn="ctr" rotWithShape="0">
+              <a:srgbClr val="000000">
+                <a:alpha val="63000"/>
+              </a:srgbClr>
+            </a:outerShdw>
+          </a:effectLst>
+        </a:effectStyle>
+      </a:effectStyleLst>
+      <a:bgFillStyleLst>
+        <a:solidFill>
+          <a:schemeClr val="phClr"/>
+        </a:solidFill>
+        <a:solidFill>
+          <a:schemeClr val="phClr">
+            <a:tint val="95000"/>
+            <a:satMod val="170000"/>
+          </a:schemeClr>
+        </a:solidFill>
+        <a:gradFill rotWithShape="1">
+          <a:gsLst>
+            <a:gs pos="0">
+              <a:schemeClr val="phClr">
+                <a:tint val="93000"/>
+                <a:satMod val="150000"/>
+                <a:shade val="98000"/>
+                <a:lumMod val="102000"/>
+              </a:schemeClr>
+            </a:gs>
+            <a:gs pos="50000">
+              <a:schemeClr val="phClr">
+                <a:tint val="98000"/>
+                <a:satMod val="130000"/>
+                <a:shade val="90000"/>
+                <a:lumMod val="103000"/>
+              </a:schemeClr>
+            </a:gs>
+            <a:gs pos="100000">
+              <a:schemeClr val="phClr">
+                <a:shade val="63000"/>
+                <a:satMod val="120000"/>
+              </a:schemeClr>
+            </a:gs>
+          </a:gsLst>
+          <a:lin ang="5400000" scaled="0"/>
+        </a:gradFill>
+      </a:bgFillStyleLst>
+    </a:fmtScheme>
+  </a:themeElements>
+  <a:objectDefaults>
+    <a:lnDef>
+      <a:spPr/>
+      <a:bodyPr/>
+      <a:lstStyle/>
+      <a:style>
+        <a:lnRef idx="2">
+          <a:schemeClr val="accent1"/>
+        </a:lnRef>
+        <a:fillRef idx="0">
+          <a:schemeClr val="accent1"/>
+        </a:fillRef>
+        <a:effectRef idx="1">
+          <a:schemeClr val="accent1"/>
+        </a:effectRef>
+        <a:fontRef idx="minor">
+          <a:schemeClr val="tx1"/>
+        </a:fontRef>
+      </a:style>
+    </a:lnDef>
+  </a:objectDefaults>
+  <a:extraClrSchemeLst/>
+  <a:extLst>
+    <a:ext uri="{05A4C25C-085E-4340-85A3-A5531E510DB2}">
+      <thm15:themeFamily xmlns:thm15="http://schemas.microsoft.com/office/thememl/2012/main" name="Office Theme" id="{2E142A2C-CD16-42D6-873A-C26D2A0506FA}" vid="{1BDDFF52-6CD6-40A5-AB3C-68EB2F1E4D0A}"/>
+    </a:ext>
+  </a:extLst>
+</a:theme>
 </file>
--- a/Projects/ARK_RWS/images/Plaatjes_RWS_ARK.pptx
+++ b/Projects/ARK_RWS/images/Plaatjes_RWS_ARK.pptx
@@ -5,7 +5,7 @@
     <p:sldMasterId id="2147483660" r:id="rId1"/>
   </p:sldMasterIdLst>
   <p:notesMasterIdLst>
-    <p:notesMasterId r:id="rId9"/>
+    <p:notesMasterId r:id="rId10"/>
   </p:notesMasterIdLst>
   <p:sldIdLst>
     <p:sldId id="256" r:id="rId2"/>
@@ -15,6 +15,7 @@
     <p:sldId id="260" r:id="rId6"/>
     <p:sldId id="261" r:id="rId7"/>
     <p:sldId id="262" r:id="rId8"/>
+    <p:sldId id="263" r:id="rId9"/>
   </p:sldIdLst>
   <p:sldSz cx="9144000" cy="6858000" type="screen4x3"/>
   <p:notesSz cx="6858000" cy="9144000"/>
@@ -214,7 +215,7 @@
           <a:p>
             <a:fld id="{2088E2FE-21FC-6D40-83CF-D5B3B52CADA7}" type="datetimeFigureOut">
               <a:rPr lang="en-US" smtClean="0"/>
-              <a:t>4/26/26</a:t>
+              <a:t>6/12/26</a:t>
             </a:fld>
             <a:endParaRPr lang="en-US"/>
           </a:p>
@@ -1128,7 +1129,7 @@
           <a:p>
             <a:fld id="{A6AF225C-868F-9540-9455-9F5B5C0F2A40}" type="datetimeFigureOut">
               <a:rPr lang="en-US" smtClean="0"/>
-              <a:t>4/26/26</a:t>
+              <a:t>6/12/26</a:t>
             </a:fld>
             <a:endParaRPr lang="en-US"/>
           </a:p>
@@ -1298,7 +1299,7 @@
           <a:p>
             <a:fld id="{A6AF225C-868F-9540-9455-9F5B5C0F2A40}" type="datetimeFigureOut">
               <a:rPr lang="en-US" smtClean="0"/>
-              <a:t>4/26/26</a:t>
+              <a:t>6/12/26</a:t>
             </a:fld>
             <a:endParaRPr lang="en-US"/>
           </a:p>
@@ -1478,7 +1479,7 @@
           <a:p>
             <a:fld id="{A6AF225C-868F-9540-9455-9F5B5C0F2A40}" type="datetimeFigureOut">
               <a:rPr lang="en-US" smtClean="0"/>
-              <a:t>4/26/26</a:t>
+              <a:t>6/12/26</a:t>
             </a:fld>
             <a:endParaRPr lang="en-US"/>
           </a:p>
@@ -1648,7 +1649,7 @@
           <a:p>
             <a:fld id="{A6AF225C-868F-9540-9455-9F5B5C0F2A40}" type="datetimeFigureOut">
               <a:rPr lang="en-US" smtClean="0"/>
-              <a:t>4/26/26</a:t>
+              <a:t>6/12/26</a:t>
             </a:fld>
             <a:endParaRPr lang="en-US"/>
           </a:p>
@@ -1894,7 +1895,7 @@
           <a:p>
             <a:fld id="{A6AF225C-868F-9540-9455-9F5B5C0F2A40}" type="datetimeFigureOut">
               <a:rPr lang="en-US" smtClean="0"/>
-              <a:t>4/26/26</a:t>
+              <a:t>6/12/26</a:t>
             </a:fld>
             <a:endParaRPr lang="en-US"/>
           </a:p>
@@ -2126,7 +2127,7 @@
           <a:p>
             <a:fld id="{A6AF225C-868F-9540-9455-9F5B5C0F2A40}" type="datetimeFigureOut">
               <a:rPr lang="en-US" smtClean="0"/>
-              <a:t>4/26/26</a:t>
+              <a:t>6/12/26</a:t>
             </a:fld>
             <a:endParaRPr lang="en-US"/>
           </a:p>
@@ -2493,7 +2494,7 @@
           <a:p>
             <a:fld id="{A6AF225C-868F-9540-9455-9F5B5C0F2A40}" type="datetimeFigureOut">
               <a:rPr lang="en-US" smtClean="0"/>
-              <a:t>4/26/26</a:t>
+              <a:t>6/12/26</a:t>
             </a:fld>
             <a:endParaRPr lang="en-US"/>
           </a:p>
@@ -2611,7 +2612,7 @@
           <a:p>
             <a:fld id="{A6AF225C-868F-9540-9455-9F5B5C0F2A40}" type="datetimeFigureOut">
               <a:rPr lang="en-US" smtClean="0"/>
-              <a:t>4/26/26</a:t>
+              <a:t>6/12/26</a:t>
             </a:fld>
             <a:endParaRPr lang="en-US"/>
           </a:p>
@@ -2706,7 +2707,7 @@
           <a:p>
             <a:fld id="{A6AF225C-868F-9540-9455-9F5B5C0F2A40}" type="datetimeFigureOut">
               <a:rPr lang="en-US" smtClean="0"/>
-              <a:t>4/26/26</a:t>
+              <a:t>6/12/26</a:t>
             </a:fld>
             <a:endParaRPr lang="en-US"/>
           </a:p>
@@ -2983,7 +2984,7 @@
           <a:p>
             <a:fld id="{A6AF225C-868F-9540-9455-9F5B5C0F2A40}" type="datetimeFigureOut">
               <a:rPr lang="en-US" smtClean="0"/>
-              <a:t>4/26/26</a:t>
+              <a:t>6/12/26</a:t>
             </a:fld>
             <a:endParaRPr lang="en-US"/>
           </a:p>
@@ -3240,7 +3241,7 @@
           <a:p>
             <a:fld id="{A6AF225C-868F-9540-9455-9F5B5C0F2A40}" type="datetimeFigureOut">
               <a:rPr lang="en-US" smtClean="0"/>
-              <a:t>4/26/26</a:t>
+              <a:t>6/12/26</a:t>
             </a:fld>
             <a:endParaRPr lang="en-US"/>
           </a:p>
@@ -3453,7 +3454,7 @@
           <a:p>
             <a:fld id="{A6AF225C-868F-9540-9455-9F5B5C0F2A40}" type="datetimeFigureOut">
               <a:rPr lang="en-US" smtClean="0"/>
-              <a:t>4/26/26</a:t>
+              <a:t>6/12/26</a:t>
             </a:fld>
             <a:endParaRPr lang="en-US"/>
           </a:p>
@@ -13576,6 +13577,877 @@
     <p:extLst>
       <p:ext uri="{BB962C8B-B14F-4D97-AF65-F5344CB8AC3E}">
         <p14:creationId xmlns:p14="http://schemas.microsoft.com/office/powerpoint/2010/main" val="2123514046"/>
+      </p:ext>
+    </p:extLst>
+  </p:cSld>
+  <p:clrMapOvr>
+    <a:masterClrMapping/>
+  </p:clrMapOvr>
+</p:sld>
+</file>
+
+<file path=ppt/slides/slide8.xml><?xml version="1.0" encoding="utf-8"?>
+<p:sld xmlns:a="http://schemas.openxmlformats.org/drawingml/2006/main" xmlns:r="http://schemas.openxmlformats.org/officeDocument/2006/relationships" xmlns:p="http://schemas.openxmlformats.org/presentationml/2006/main">
+  <p:cSld>
+    <p:spTree>
+      <p:nvGrpSpPr>
+        <p:cNvPr id="1" name=""/>
+        <p:cNvGrpSpPr/>
+        <p:nvPr/>
+      </p:nvGrpSpPr>
+      <p:grpSpPr>
+        <a:xfrm>
+          <a:off x="0" y="0"/>
+          <a:ext cx="0" cy="0"/>
+          <a:chOff x="0" y="0"/>
+          <a:chExt cx="0" cy="0"/>
+        </a:xfrm>
+      </p:grpSpPr>
+      <p:grpSp>
+        <p:nvGrpSpPr>
+          <p:cNvPr id="42" name="Group 41">
+            <a:extLst>
+              <a:ext uri="{FF2B5EF4-FFF2-40B4-BE49-F238E27FC236}">
+                <a16:creationId xmlns:a16="http://schemas.microsoft.com/office/drawing/2014/main" id="{A8319626-4FCB-503E-9C6A-5FE36B58081C}"/>
+              </a:ext>
+            </a:extLst>
+          </p:cNvPr>
+          <p:cNvGrpSpPr/>
+          <p:nvPr/>
+        </p:nvGrpSpPr>
+        <p:grpSpPr>
+          <a:xfrm>
+            <a:off x="1410182" y="460978"/>
+            <a:ext cx="5538805" cy="3852589"/>
+            <a:chOff x="1410182" y="460978"/>
+            <a:chExt cx="5538805" cy="3852589"/>
+          </a:xfrm>
+        </p:grpSpPr>
+        <p:cxnSp>
+          <p:nvCxnSpPr>
+            <p:cNvPr id="3" name="Straight Connector 2">
+              <a:extLst>
+                <a:ext uri="{FF2B5EF4-FFF2-40B4-BE49-F238E27FC236}">
+                  <a16:creationId xmlns:a16="http://schemas.microsoft.com/office/drawing/2014/main" id="{A5210F3F-9B1E-FE2D-FE21-A1A8443A15B4}"/>
+                </a:ext>
+              </a:extLst>
+            </p:cNvPr>
+            <p:cNvCxnSpPr>
+              <a:cxnSpLocks/>
+            </p:cNvCxnSpPr>
+            <p:nvPr/>
+          </p:nvCxnSpPr>
+          <p:spPr>
+            <a:xfrm>
+              <a:off x="3253563" y="1403498"/>
+              <a:ext cx="0" cy="1020725"/>
+            </a:xfrm>
+            <a:prstGeom prst="line">
+              <a:avLst/>
+            </a:prstGeom>
+            <a:ln>
+              <a:tailEnd type="triangle" w="lg" len="lg"/>
+            </a:ln>
+          </p:spPr>
+          <p:style>
+            <a:lnRef idx="2">
+              <a:schemeClr val="accent1"/>
+            </a:lnRef>
+            <a:fillRef idx="0">
+              <a:schemeClr val="accent1"/>
+            </a:fillRef>
+            <a:effectRef idx="1">
+              <a:schemeClr val="accent1"/>
+            </a:effectRef>
+            <a:fontRef idx="minor">
+              <a:schemeClr val="tx1"/>
+            </a:fontRef>
+          </p:style>
+        </p:cxnSp>
+        <p:pic>
+          <p:nvPicPr>
+            <p:cNvPr id="6" name="Picture 5">
+              <a:extLst>
+                <a:ext uri="{FF2B5EF4-FFF2-40B4-BE49-F238E27FC236}">
+                  <a16:creationId xmlns:a16="http://schemas.microsoft.com/office/drawing/2014/main" id="{37AD9660-6959-F528-243D-4BA43EFE633F}"/>
+                </a:ext>
+              </a:extLst>
+            </p:cNvPr>
+            <p:cNvPicPr>
+              <a:picLocks noChangeAspect="1"/>
+            </p:cNvPicPr>
+            <p:nvPr/>
+          </p:nvPicPr>
+          <p:blipFill>
+            <a:blip r:embed="rId2"/>
+            <a:stretch>
+              <a:fillRect/>
+            </a:stretch>
+          </p:blipFill>
+          <p:spPr>
+            <a:xfrm>
+              <a:off x="2814823" y="1018067"/>
+              <a:ext cx="622300" cy="228600"/>
+            </a:xfrm>
+            <a:prstGeom prst="rect">
+              <a:avLst/>
+            </a:prstGeom>
+          </p:spPr>
+        </p:pic>
+        <p:pic>
+          <p:nvPicPr>
+            <p:cNvPr id="8" name="Picture 7">
+              <a:extLst>
+                <a:ext uri="{FF2B5EF4-FFF2-40B4-BE49-F238E27FC236}">
+                  <a16:creationId xmlns:a16="http://schemas.microsoft.com/office/drawing/2014/main" id="{2DD2B8C9-072D-C504-F2AC-E11465F9FBC5}"/>
+                </a:ext>
+              </a:extLst>
+            </p:cNvPr>
+            <p:cNvPicPr>
+              <a:picLocks noChangeAspect="1"/>
+            </p:cNvPicPr>
+            <p:nvPr/>
+          </p:nvPicPr>
+          <p:blipFill>
+            <a:blip r:embed="rId3"/>
+            <a:stretch>
+              <a:fillRect/>
+            </a:stretch>
+          </p:blipFill>
+          <p:spPr>
+            <a:xfrm>
+              <a:off x="3143544" y="4059567"/>
+              <a:ext cx="241300" cy="254000"/>
+            </a:xfrm>
+            <a:prstGeom prst="rect">
+              <a:avLst/>
+            </a:prstGeom>
+          </p:spPr>
+        </p:pic>
+        <p:cxnSp>
+          <p:nvCxnSpPr>
+            <p:cNvPr id="9" name="Straight Connector 8">
+              <a:extLst>
+                <a:ext uri="{FF2B5EF4-FFF2-40B4-BE49-F238E27FC236}">
+                  <a16:creationId xmlns:a16="http://schemas.microsoft.com/office/drawing/2014/main" id="{EECA1E16-15D0-B71A-FE7B-3CE06BC1E8DD}"/>
+                </a:ext>
+              </a:extLst>
+            </p:cNvPr>
+            <p:cNvCxnSpPr>
+              <a:cxnSpLocks/>
+            </p:cNvCxnSpPr>
+            <p:nvPr/>
+          </p:nvCxnSpPr>
+          <p:spPr>
+            <a:xfrm>
+              <a:off x="3253563" y="2918637"/>
+              <a:ext cx="0" cy="1020725"/>
+            </a:xfrm>
+            <a:prstGeom prst="line">
+              <a:avLst/>
+            </a:prstGeom>
+            <a:ln>
+              <a:tailEnd type="triangle" w="lg" len="lg"/>
+            </a:ln>
+          </p:spPr>
+          <p:style>
+            <a:lnRef idx="2">
+              <a:schemeClr val="accent1"/>
+            </a:lnRef>
+            <a:fillRef idx="0">
+              <a:schemeClr val="accent1"/>
+            </a:fillRef>
+            <a:effectRef idx="1">
+              <a:schemeClr val="accent1"/>
+            </a:effectRef>
+            <a:fontRef idx="minor">
+              <a:schemeClr val="tx1"/>
+            </a:fontRef>
+          </p:style>
+        </p:cxnSp>
+        <p:sp>
+          <p:nvSpPr>
+            <p:cNvPr id="10" name="Left Brace 9">
+              <a:extLst>
+                <a:ext uri="{FF2B5EF4-FFF2-40B4-BE49-F238E27FC236}">
+                  <a16:creationId xmlns:a16="http://schemas.microsoft.com/office/drawing/2014/main" id="{54D325D0-45BF-6FDF-A246-3DC82BED8F8F}"/>
+                </a:ext>
+              </a:extLst>
+            </p:cNvPr>
+            <p:cNvSpPr/>
+            <p:nvPr/>
+          </p:nvSpPr>
+          <p:spPr>
+            <a:xfrm>
+              <a:off x="2062719" y="1217425"/>
+              <a:ext cx="580750" cy="1464635"/>
+            </a:xfrm>
+            <a:prstGeom prst="leftBrace">
+              <a:avLst/>
+            </a:prstGeom>
+          </p:spPr>
+          <p:style>
+            <a:lnRef idx="2">
+              <a:schemeClr val="accent1"/>
+            </a:lnRef>
+            <a:fillRef idx="0">
+              <a:schemeClr val="accent1"/>
+            </a:fillRef>
+            <a:effectRef idx="1">
+              <a:schemeClr val="accent1"/>
+            </a:effectRef>
+            <a:fontRef idx="minor">
+              <a:schemeClr val="tx1"/>
+            </a:fontRef>
+          </p:style>
+          <p:txBody>
+            <a:bodyPr rtlCol="0" anchor="ctr"/>
+            <a:lstStyle/>
+            <a:p>
+              <a:pPr algn="ctr"/>
+              <a:endParaRPr lang="en-US"/>
+            </a:p>
+          </p:txBody>
+        </p:sp>
+        <p:sp>
+          <p:nvSpPr>
+            <p:cNvPr id="11" name="Left Brace 10">
+              <a:extLst>
+                <a:ext uri="{FF2B5EF4-FFF2-40B4-BE49-F238E27FC236}">
+                  <a16:creationId xmlns:a16="http://schemas.microsoft.com/office/drawing/2014/main" id="{3EE77622-4949-7011-3702-7C68BEEB4E83}"/>
+                </a:ext>
+              </a:extLst>
+            </p:cNvPr>
+            <p:cNvSpPr/>
+            <p:nvPr/>
+          </p:nvSpPr>
+          <p:spPr>
+            <a:xfrm>
+              <a:off x="2066260" y="2783952"/>
+              <a:ext cx="580750" cy="1275615"/>
+            </a:xfrm>
+            <a:prstGeom prst="leftBrace">
+              <a:avLst/>
+            </a:prstGeom>
+          </p:spPr>
+          <p:style>
+            <a:lnRef idx="2">
+              <a:schemeClr val="accent1"/>
+            </a:lnRef>
+            <a:fillRef idx="0">
+              <a:schemeClr val="accent1"/>
+            </a:fillRef>
+            <a:effectRef idx="1">
+              <a:schemeClr val="accent1"/>
+            </a:effectRef>
+            <a:fontRef idx="minor">
+              <a:schemeClr val="tx1"/>
+            </a:fontRef>
+          </p:style>
+          <p:txBody>
+            <a:bodyPr rtlCol="0" anchor="ctr"/>
+            <a:lstStyle/>
+            <a:p>
+              <a:pPr algn="ctr"/>
+              <a:endParaRPr lang="en-US"/>
+            </a:p>
+          </p:txBody>
+        </p:sp>
+        <p:pic>
+          <p:nvPicPr>
+            <p:cNvPr id="13" name="Picture 12">
+              <a:extLst>
+                <a:ext uri="{FF2B5EF4-FFF2-40B4-BE49-F238E27FC236}">
+                  <a16:creationId xmlns:a16="http://schemas.microsoft.com/office/drawing/2014/main" id="{D6E3EBFE-FCE9-0AEE-9CBB-61AD22112A97}"/>
+                </a:ext>
+              </a:extLst>
+            </p:cNvPr>
+            <p:cNvPicPr>
+              <a:picLocks noChangeAspect="1"/>
+            </p:cNvPicPr>
+            <p:nvPr/>
+          </p:nvPicPr>
+          <p:blipFill>
+            <a:blip r:embed="rId4"/>
+            <a:stretch>
+              <a:fillRect/>
+            </a:stretch>
+          </p:blipFill>
+          <p:spPr>
+            <a:xfrm>
+              <a:off x="1744322" y="3320901"/>
+              <a:ext cx="254000" cy="152400"/>
+            </a:xfrm>
+            <a:prstGeom prst="rect">
+              <a:avLst/>
+            </a:prstGeom>
+          </p:spPr>
+        </p:pic>
+        <p:cxnSp>
+          <p:nvCxnSpPr>
+            <p:cNvPr id="18" name="Straight Connector 17">
+              <a:extLst>
+                <a:ext uri="{FF2B5EF4-FFF2-40B4-BE49-F238E27FC236}">
+                  <a16:creationId xmlns:a16="http://schemas.microsoft.com/office/drawing/2014/main" id="{35C09E97-224A-24BD-78A1-6993C00D77FB}"/>
+                </a:ext>
+              </a:extLst>
+            </p:cNvPr>
+            <p:cNvCxnSpPr>
+              <a:cxnSpLocks/>
+            </p:cNvCxnSpPr>
+            <p:nvPr/>
+          </p:nvCxnSpPr>
+          <p:spPr>
+            <a:xfrm>
+              <a:off x="6253335" y="1393852"/>
+              <a:ext cx="0" cy="834654"/>
+            </a:xfrm>
+            <a:prstGeom prst="line">
+              <a:avLst/>
+            </a:prstGeom>
+            <a:ln>
+              <a:tailEnd type="triangle" w="lg" len="lg"/>
+            </a:ln>
+          </p:spPr>
+          <p:style>
+            <a:lnRef idx="2">
+              <a:schemeClr val="accent1"/>
+            </a:lnRef>
+            <a:fillRef idx="0">
+              <a:schemeClr val="accent1"/>
+            </a:fillRef>
+            <a:effectRef idx="1">
+              <a:schemeClr val="accent1"/>
+            </a:effectRef>
+            <a:fontRef idx="minor">
+              <a:schemeClr val="tx1"/>
+            </a:fontRef>
+          </p:style>
+        </p:cxnSp>
+        <p:pic>
+          <p:nvPicPr>
+            <p:cNvPr id="19" name="Picture 18">
+              <a:extLst>
+                <a:ext uri="{FF2B5EF4-FFF2-40B4-BE49-F238E27FC236}">
+                  <a16:creationId xmlns:a16="http://schemas.microsoft.com/office/drawing/2014/main" id="{FAC9AC2E-ECEB-6517-5F73-4BCC387B36E5}"/>
+                </a:ext>
+              </a:extLst>
+            </p:cNvPr>
+            <p:cNvPicPr>
+              <a:picLocks noChangeAspect="1"/>
+            </p:cNvPicPr>
+            <p:nvPr/>
+          </p:nvPicPr>
+          <p:blipFill>
+            <a:blip r:embed="rId2"/>
+            <a:stretch>
+              <a:fillRect/>
+            </a:stretch>
+          </p:blipFill>
+          <p:spPr>
+            <a:xfrm>
+              <a:off x="5814595" y="1008421"/>
+              <a:ext cx="622300" cy="228600"/>
+            </a:xfrm>
+            <a:prstGeom prst="rect">
+              <a:avLst/>
+            </a:prstGeom>
+          </p:spPr>
+        </p:pic>
+        <p:pic>
+          <p:nvPicPr>
+            <p:cNvPr id="21" name="Picture 20">
+              <a:extLst>
+                <a:ext uri="{FF2B5EF4-FFF2-40B4-BE49-F238E27FC236}">
+                  <a16:creationId xmlns:a16="http://schemas.microsoft.com/office/drawing/2014/main" id="{E8208DA6-195F-2140-50B8-7D581117DC6C}"/>
+                </a:ext>
+              </a:extLst>
+            </p:cNvPr>
+            <p:cNvPicPr>
+              <a:picLocks noChangeAspect="1"/>
+            </p:cNvPicPr>
+            <p:nvPr/>
+          </p:nvPicPr>
+          <p:blipFill>
+            <a:blip r:embed="rId3"/>
+            <a:stretch>
+              <a:fillRect/>
+            </a:stretch>
+          </p:blipFill>
+          <p:spPr>
+            <a:xfrm>
+              <a:off x="6143316" y="4049921"/>
+              <a:ext cx="241300" cy="254000"/>
+            </a:xfrm>
+            <a:prstGeom prst="rect">
+              <a:avLst/>
+            </a:prstGeom>
+          </p:spPr>
+        </p:pic>
+        <p:cxnSp>
+          <p:nvCxnSpPr>
+            <p:cNvPr id="22" name="Straight Connector 21">
+              <a:extLst>
+                <a:ext uri="{FF2B5EF4-FFF2-40B4-BE49-F238E27FC236}">
+                  <a16:creationId xmlns:a16="http://schemas.microsoft.com/office/drawing/2014/main" id="{B7D1F412-702C-A148-FEE9-77F3C70D88B3}"/>
+                </a:ext>
+              </a:extLst>
+            </p:cNvPr>
+            <p:cNvCxnSpPr>
+              <a:cxnSpLocks/>
+            </p:cNvCxnSpPr>
+            <p:nvPr/>
+          </p:nvCxnSpPr>
+          <p:spPr>
+            <a:xfrm>
+              <a:off x="6253335" y="2682060"/>
+              <a:ext cx="0" cy="1247656"/>
+            </a:xfrm>
+            <a:prstGeom prst="line">
+              <a:avLst/>
+            </a:prstGeom>
+            <a:ln>
+              <a:tailEnd type="triangle" w="lg" len="lg"/>
+            </a:ln>
+          </p:spPr>
+          <p:style>
+            <a:lnRef idx="2">
+              <a:schemeClr val="accent1"/>
+            </a:lnRef>
+            <a:fillRef idx="0">
+              <a:schemeClr val="accent1"/>
+            </a:fillRef>
+            <a:effectRef idx="1">
+              <a:schemeClr val="accent1"/>
+            </a:effectRef>
+            <a:fontRef idx="minor">
+              <a:schemeClr val="tx1"/>
+            </a:fontRef>
+          </p:style>
+        </p:cxnSp>
+        <p:sp>
+          <p:nvSpPr>
+            <p:cNvPr id="23" name="Left Brace 22">
+              <a:extLst>
+                <a:ext uri="{FF2B5EF4-FFF2-40B4-BE49-F238E27FC236}">
+                  <a16:creationId xmlns:a16="http://schemas.microsoft.com/office/drawing/2014/main" id="{086EA95A-07D1-7963-C614-13E302030B0B}"/>
+                </a:ext>
+              </a:extLst>
+            </p:cNvPr>
+            <p:cNvSpPr/>
+            <p:nvPr/>
+          </p:nvSpPr>
+          <p:spPr>
+            <a:xfrm>
+              <a:off x="5062491" y="1207780"/>
+              <a:ext cx="580750" cy="1020726"/>
+            </a:xfrm>
+            <a:prstGeom prst="leftBrace">
+              <a:avLst/>
+            </a:prstGeom>
+          </p:spPr>
+          <p:style>
+            <a:lnRef idx="2">
+              <a:schemeClr val="accent1"/>
+            </a:lnRef>
+            <a:fillRef idx="0">
+              <a:schemeClr val="accent1"/>
+            </a:fillRef>
+            <a:effectRef idx="1">
+              <a:schemeClr val="accent1"/>
+            </a:effectRef>
+            <a:fontRef idx="minor">
+              <a:schemeClr val="tx1"/>
+            </a:fontRef>
+          </p:style>
+          <p:txBody>
+            <a:bodyPr rtlCol="0" anchor="ctr"/>
+            <a:lstStyle/>
+            <a:p>
+              <a:pPr algn="ctr"/>
+              <a:endParaRPr lang="en-US"/>
+            </a:p>
+          </p:txBody>
+        </p:sp>
+        <p:sp>
+          <p:nvSpPr>
+            <p:cNvPr id="24" name="Left Brace 23">
+              <a:extLst>
+                <a:ext uri="{FF2B5EF4-FFF2-40B4-BE49-F238E27FC236}">
+                  <a16:creationId xmlns:a16="http://schemas.microsoft.com/office/drawing/2014/main" id="{7B3FCEBA-076B-BCB3-371D-6D95B1746A63}"/>
+                </a:ext>
+              </a:extLst>
+            </p:cNvPr>
+            <p:cNvSpPr/>
+            <p:nvPr/>
+          </p:nvSpPr>
+          <p:spPr>
+            <a:xfrm>
+              <a:off x="5066032" y="2424224"/>
+              <a:ext cx="538608" cy="1625698"/>
+            </a:xfrm>
+            <a:prstGeom prst="leftBrace">
+              <a:avLst/>
+            </a:prstGeom>
+          </p:spPr>
+          <p:style>
+            <a:lnRef idx="2">
+              <a:schemeClr val="accent1"/>
+            </a:lnRef>
+            <a:fillRef idx="0">
+              <a:schemeClr val="accent1"/>
+            </a:fillRef>
+            <a:effectRef idx="1">
+              <a:schemeClr val="accent1"/>
+            </a:effectRef>
+            <a:fontRef idx="minor">
+              <a:schemeClr val="tx1"/>
+            </a:fontRef>
+          </p:style>
+          <p:txBody>
+            <a:bodyPr rtlCol="0" anchor="ctr"/>
+            <a:lstStyle/>
+            <a:p>
+              <a:pPr algn="ctr"/>
+              <a:endParaRPr lang="en-US"/>
+            </a:p>
+          </p:txBody>
+        </p:sp>
+        <p:pic>
+          <p:nvPicPr>
+            <p:cNvPr id="26" name="Picture 25">
+              <a:extLst>
+                <a:ext uri="{FF2B5EF4-FFF2-40B4-BE49-F238E27FC236}">
+                  <a16:creationId xmlns:a16="http://schemas.microsoft.com/office/drawing/2014/main" id="{763406FD-0E73-7795-84C0-5CE25B15547A}"/>
+                </a:ext>
+              </a:extLst>
+            </p:cNvPr>
+            <p:cNvPicPr>
+              <a:picLocks noChangeAspect="1"/>
+            </p:cNvPicPr>
+            <p:nvPr/>
+          </p:nvPicPr>
+          <p:blipFill>
+            <a:blip r:embed="rId4"/>
+            <a:stretch>
+              <a:fillRect/>
+            </a:stretch>
+          </p:blipFill>
+          <p:spPr>
+            <a:xfrm>
+              <a:off x="4709369" y="3160784"/>
+              <a:ext cx="254000" cy="152400"/>
+            </a:xfrm>
+            <a:prstGeom prst="rect">
+              <a:avLst/>
+            </a:prstGeom>
+          </p:spPr>
+        </p:pic>
+        <p:pic>
+          <p:nvPicPr>
+            <p:cNvPr id="31" name="Picture 30">
+              <a:extLst>
+                <a:ext uri="{FF2B5EF4-FFF2-40B4-BE49-F238E27FC236}">
+                  <a16:creationId xmlns:a16="http://schemas.microsoft.com/office/drawing/2014/main" id="{231EC986-EE35-18A2-8850-8CE21BE74CF5}"/>
+                </a:ext>
+              </a:extLst>
+            </p:cNvPr>
+            <p:cNvPicPr>
+              <a:picLocks noChangeAspect="1"/>
+            </p:cNvPicPr>
+            <p:nvPr/>
+          </p:nvPicPr>
+          <p:blipFill>
+            <a:blip r:embed="rId5"/>
+            <a:stretch>
+              <a:fillRect/>
+            </a:stretch>
+          </p:blipFill>
+          <p:spPr>
+            <a:xfrm>
+              <a:off x="6380224" y="1691270"/>
+              <a:ext cx="203200" cy="165100"/>
+            </a:xfrm>
+            <a:prstGeom prst="rect">
+              <a:avLst/>
+            </a:prstGeom>
+          </p:spPr>
+        </p:pic>
+        <p:pic>
+          <p:nvPicPr>
+            <p:cNvPr id="32" name="Picture 31">
+              <a:extLst>
+                <a:ext uri="{FF2B5EF4-FFF2-40B4-BE49-F238E27FC236}">
+                  <a16:creationId xmlns:a16="http://schemas.microsoft.com/office/drawing/2014/main" id="{118FADC2-DB57-9A9A-6850-49D610175A05}"/>
+                </a:ext>
+              </a:extLst>
+            </p:cNvPr>
+            <p:cNvPicPr>
+              <a:picLocks noChangeAspect="1"/>
+            </p:cNvPicPr>
+            <p:nvPr/>
+          </p:nvPicPr>
+          <p:blipFill>
+            <a:blip r:embed="rId5"/>
+            <a:stretch>
+              <a:fillRect/>
+            </a:stretch>
+          </p:blipFill>
+          <p:spPr>
+            <a:xfrm>
+              <a:off x="6370579" y="3035861"/>
+              <a:ext cx="203200" cy="165100"/>
+            </a:xfrm>
+            <a:prstGeom prst="rect">
+              <a:avLst/>
+            </a:prstGeom>
+          </p:spPr>
+        </p:pic>
+        <p:pic>
+          <p:nvPicPr>
+            <p:cNvPr id="33" name="Picture 32">
+              <a:extLst>
+                <a:ext uri="{FF2B5EF4-FFF2-40B4-BE49-F238E27FC236}">
+                  <a16:creationId xmlns:a16="http://schemas.microsoft.com/office/drawing/2014/main" id="{C7E7297D-8889-6EE7-E871-F63363EC6D33}"/>
+                </a:ext>
+              </a:extLst>
+            </p:cNvPr>
+            <p:cNvPicPr>
+              <a:picLocks noChangeAspect="1"/>
+            </p:cNvPicPr>
+            <p:nvPr/>
+          </p:nvPicPr>
+          <p:blipFill>
+            <a:blip r:embed="rId6"/>
+            <a:stretch>
+              <a:fillRect/>
+            </a:stretch>
+          </p:blipFill>
+          <p:spPr>
+            <a:xfrm>
+              <a:off x="3345405" y="1830170"/>
+              <a:ext cx="254000" cy="165100"/>
+            </a:xfrm>
+            <a:prstGeom prst="rect">
+              <a:avLst/>
+            </a:prstGeom>
+          </p:spPr>
+        </p:pic>
+        <p:pic>
+          <p:nvPicPr>
+            <p:cNvPr id="34" name="Picture 33">
+              <a:extLst>
+                <a:ext uri="{FF2B5EF4-FFF2-40B4-BE49-F238E27FC236}">
+                  <a16:creationId xmlns:a16="http://schemas.microsoft.com/office/drawing/2014/main" id="{49FE63C6-E15E-1319-45F3-BE310B3E1EA0}"/>
+                </a:ext>
+              </a:extLst>
+            </p:cNvPr>
+            <p:cNvPicPr>
+              <a:picLocks noChangeAspect="1"/>
+            </p:cNvPicPr>
+            <p:nvPr/>
+          </p:nvPicPr>
+          <p:blipFill>
+            <a:blip r:embed="rId6"/>
+            <a:stretch>
+              <a:fillRect/>
+            </a:stretch>
+          </p:blipFill>
+          <p:spPr>
+            <a:xfrm>
+              <a:off x="3347333" y="3255784"/>
+              <a:ext cx="254000" cy="165100"/>
+            </a:xfrm>
+            <a:prstGeom prst="rect">
+              <a:avLst/>
+            </a:prstGeom>
+          </p:spPr>
+        </p:pic>
+        <p:pic>
+          <p:nvPicPr>
+            <p:cNvPr id="35" name="Picture 34">
+              <a:extLst>
+                <a:ext uri="{FF2B5EF4-FFF2-40B4-BE49-F238E27FC236}">
+                  <a16:creationId xmlns:a16="http://schemas.microsoft.com/office/drawing/2014/main" id="{3B171879-A2EC-ED53-8BBB-905474110EBF}"/>
+                </a:ext>
+              </a:extLst>
+            </p:cNvPr>
+            <p:cNvPicPr>
+              <a:picLocks noChangeAspect="1"/>
+            </p:cNvPicPr>
+            <p:nvPr/>
+          </p:nvPicPr>
+          <p:blipFill>
+            <a:blip r:embed="rId7"/>
+            <a:stretch>
+              <a:fillRect/>
+            </a:stretch>
+          </p:blipFill>
+          <p:spPr>
+            <a:xfrm>
+              <a:off x="2942464" y="2538069"/>
+              <a:ext cx="596900" cy="254000"/>
+            </a:xfrm>
+            <a:prstGeom prst="rect">
+              <a:avLst/>
+            </a:prstGeom>
+          </p:spPr>
+        </p:pic>
+        <p:pic>
+          <p:nvPicPr>
+            <p:cNvPr id="36" name="Picture 35">
+              <a:extLst>
+                <a:ext uri="{FF2B5EF4-FFF2-40B4-BE49-F238E27FC236}">
+                  <a16:creationId xmlns:a16="http://schemas.microsoft.com/office/drawing/2014/main" id="{18160F0F-036C-71A0-D1B7-C9D3CF67188E}"/>
+                </a:ext>
+              </a:extLst>
+            </p:cNvPr>
+            <p:cNvPicPr>
+              <a:picLocks noChangeAspect="1"/>
+            </p:cNvPicPr>
+            <p:nvPr/>
+          </p:nvPicPr>
+          <p:blipFill>
+            <a:blip r:embed="rId8"/>
+            <a:stretch>
+              <a:fillRect/>
+            </a:stretch>
+          </p:blipFill>
+          <p:spPr>
+            <a:xfrm>
+              <a:off x="6051949" y="2271851"/>
+              <a:ext cx="558800" cy="254000"/>
+            </a:xfrm>
+            <a:prstGeom prst="rect">
+              <a:avLst/>
+            </a:prstGeom>
+          </p:spPr>
+        </p:pic>
+        <p:pic>
+          <p:nvPicPr>
+            <p:cNvPr id="37" name="Picture 36">
+              <a:extLst>
+                <a:ext uri="{FF2B5EF4-FFF2-40B4-BE49-F238E27FC236}">
+                  <a16:creationId xmlns:a16="http://schemas.microsoft.com/office/drawing/2014/main" id="{8568B358-A5E4-E587-F00C-11D09526CCFA}"/>
+                </a:ext>
+              </a:extLst>
+            </p:cNvPr>
+            <p:cNvPicPr>
+              <a:picLocks noChangeAspect="1"/>
+            </p:cNvPicPr>
+            <p:nvPr/>
+          </p:nvPicPr>
+          <p:blipFill>
+            <a:blip r:embed="rId9"/>
+            <a:stretch>
+              <a:fillRect/>
+            </a:stretch>
+          </p:blipFill>
+          <p:spPr>
+            <a:xfrm>
+              <a:off x="4508421" y="1620698"/>
+              <a:ext cx="520700" cy="190500"/>
+            </a:xfrm>
+            <a:prstGeom prst="rect">
+              <a:avLst/>
+            </a:prstGeom>
+          </p:spPr>
+        </p:pic>
+        <p:pic>
+          <p:nvPicPr>
+            <p:cNvPr id="38" name="Picture 37">
+              <a:extLst>
+                <a:ext uri="{FF2B5EF4-FFF2-40B4-BE49-F238E27FC236}">
+                  <a16:creationId xmlns:a16="http://schemas.microsoft.com/office/drawing/2014/main" id="{A4D77164-BBD8-CCA3-A559-608C443EBA95}"/>
+                </a:ext>
+              </a:extLst>
+            </p:cNvPr>
+            <p:cNvPicPr>
+              <a:picLocks noChangeAspect="1"/>
+            </p:cNvPicPr>
+            <p:nvPr/>
+          </p:nvPicPr>
+          <p:blipFill>
+            <a:blip r:embed="rId10"/>
+            <a:stretch>
+              <a:fillRect/>
+            </a:stretch>
+          </p:blipFill>
+          <p:spPr>
+            <a:xfrm>
+              <a:off x="1491527" y="1852195"/>
+              <a:ext cx="558800" cy="190500"/>
+            </a:xfrm>
+            <a:prstGeom prst="rect">
+              <a:avLst/>
+            </a:prstGeom>
+          </p:spPr>
+        </p:pic>
+        <p:pic>
+          <p:nvPicPr>
+            <p:cNvPr id="40" name="Picture 39">
+              <a:extLst>
+                <a:ext uri="{FF2B5EF4-FFF2-40B4-BE49-F238E27FC236}">
+                  <a16:creationId xmlns:a16="http://schemas.microsoft.com/office/drawing/2014/main" id="{51724FF9-FB4B-670F-F260-B9C63199DE6C}"/>
+                </a:ext>
+              </a:extLst>
+            </p:cNvPr>
+            <p:cNvPicPr>
+              <a:picLocks noChangeAspect="1"/>
+            </p:cNvPicPr>
+            <p:nvPr/>
+          </p:nvPicPr>
+          <p:blipFill>
+            <a:blip r:embed="rId11"/>
+            <a:stretch>
+              <a:fillRect/>
+            </a:stretch>
+          </p:blipFill>
+          <p:spPr>
+            <a:xfrm>
+              <a:off x="1410182" y="460978"/>
+              <a:ext cx="2133600" cy="241300"/>
+            </a:xfrm>
+            <a:prstGeom prst="rect">
+              <a:avLst/>
+            </a:prstGeom>
+          </p:spPr>
+        </p:pic>
+        <p:pic>
+          <p:nvPicPr>
+            <p:cNvPr id="41" name="Picture 40">
+              <a:extLst>
+                <a:ext uri="{FF2B5EF4-FFF2-40B4-BE49-F238E27FC236}">
+                  <a16:creationId xmlns:a16="http://schemas.microsoft.com/office/drawing/2014/main" id="{239B240F-595F-16D5-E2B1-F27BA2A3A369}"/>
+                </a:ext>
+              </a:extLst>
+            </p:cNvPr>
+            <p:cNvPicPr>
+              <a:picLocks noChangeAspect="1"/>
+            </p:cNvPicPr>
+            <p:nvPr/>
+          </p:nvPicPr>
+          <p:blipFill>
+            <a:blip r:embed="rId12"/>
+            <a:stretch>
+              <a:fillRect/>
+            </a:stretch>
+          </p:blipFill>
+          <p:spPr>
+            <a:xfrm>
+              <a:off x="4764587" y="507279"/>
+              <a:ext cx="2184400" cy="241300"/>
+            </a:xfrm>
+            <a:prstGeom prst="rect">
+              <a:avLst/>
+            </a:prstGeom>
+          </p:spPr>
+        </p:pic>
+      </p:grpSp>
+    </p:spTree>
+    <p:extLst>
+      <p:ext uri="{BB962C8B-B14F-4D97-AF65-F5344CB8AC3E}">
+        <p14:creationId xmlns:p14="http://schemas.microsoft.com/office/powerpoint/2010/main" val="3641942641"/>
       </p:ext>
     </p:extLst>
   </p:cSld>

--- a/Projects/ARK_RWS/images/Plaatjes_RWS_ARK.pptx
+++ b/Projects/ARK_RWS/images/Plaatjes_RWS_ARK.pptx
@@ -5,7 +5,7 @@
     <p:sldMasterId id="2147483660" r:id="rId1"/>
   </p:sldMasterIdLst>
   <p:notesMasterIdLst>
-    <p:notesMasterId r:id="rId17"/>
+    <p:notesMasterId r:id="rId18"/>
   </p:notesMasterIdLst>
   <p:sldIdLst>
     <p:sldId id="256" r:id="rId2"/>
@@ -15,14 +15,15 @@
     <p:sldId id="260" r:id="rId6"/>
     <p:sldId id="261" r:id="rId7"/>
     <p:sldId id="262" r:id="rId8"/>
-    <p:sldId id="263" r:id="rId9"/>
-    <p:sldId id="264" r:id="rId10"/>
-    <p:sldId id="266" r:id="rId11"/>
-    <p:sldId id="267" r:id="rId12"/>
-    <p:sldId id="269" r:id="rId13"/>
-    <p:sldId id="268" r:id="rId14"/>
-    <p:sldId id="265" r:id="rId15"/>
-    <p:sldId id="270" r:id="rId16"/>
+    <p:sldId id="271" r:id="rId9"/>
+    <p:sldId id="263" r:id="rId10"/>
+    <p:sldId id="264" r:id="rId11"/>
+    <p:sldId id="266" r:id="rId12"/>
+    <p:sldId id="267" r:id="rId13"/>
+    <p:sldId id="269" r:id="rId14"/>
+    <p:sldId id="268" r:id="rId15"/>
+    <p:sldId id="265" r:id="rId16"/>
+    <p:sldId id="270" r:id="rId17"/>
   </p:sldIdLst>
   <p:sldSz cx="9144000" cy="6858000" type="screen4x3"/>
   <p:notesSz cx="6858000" cy="9144000"/>
@@ -222,7 +223,7 @@
           <a:p>
             <a:fld id="{2088E2FE-21FC-6D40-83CF-D5B3B52CADA7}" type="datetimeFigureOut">
               <a:rPr lang="en-US" smtClean="0"/>
-              <a:t>6/17/26</a:t>
+              <a:t>6/23/26</a:t>
             </a:fld>
             <a:endParaRPr lang="en-US"/>
           </a:p>
@@ -1070,7 +1071,7 @@
           <a:p>
             <a:fld id="{5DFF6948-008A-8C42-9496-ED1ACA90CE0D}" type="slidenum">
               <a:rPr lang="en-US" smtClean="0"/>
-              <a:t>9</a:t>
+              <a:t>10</a:t>
             </a:fld>
             <a:endParaRPr lang="en-US"/>
           </a:p>
@@ -1154,7 +1155,7 @@
           <a:p>
             <a:fld id="{5DFF6948-008A-8C42-9496-ED1ACA90CE0D}" type="slidenum">
               <a:rPr lang="en-US" smtClean="0"/>
-              <a:t>11</a:t>
+              <a:t>12</a:t>
             </a:fld>
             <a:endParaRPr lang="en-US"/>
           </a:p>
@@ -1262,7 +1263,7 @@
           <a:p>
             <a:fld id="{5DFF6948-008A-8C42-9496-ED1ACA90CE0D}" type="slidenum">
               <a:rPr lang="en-US" smtClean="0"/>
-              <a:t>15</a:t>
+              <a:t>16</a:t>
             </a:fld>
             <a:endParaRPr lang="en-US"/>
           </a:p>
@@ -1412,7 +1413,7 @@
           <a:p>
             <a:fld id="{A6AF225C-868F-9540-9455-9F5B5C0F2A40}" type="datetimeFigureOut">
               <a:rPr lang="en-US" smtClean="0"/>
-              <a:t>6/17/26</a:t>
+              <a:t>6/23/26</a:t>
             </a:fld>
             <a:endParaRPr lang="en-US"/>
           </a:p>
@@ -1582,7 +1583,7 @@
           <a:p>
             <a:fld id="{A6AF225C-868F-9540-9455-9F5B5C0F2A40}" type="datetimeFigureOut">
               <a:rPr lang="en-US" smtClean="0"/>
-              <a:t>6/17/26</a:t>
+              <a:t>6/23/26</a:t>
             </a:fld>
             <a:endParaRPr lang="en-US"/>
           </a:p>
@@ -1762,7 +1763,7 @@
           <a:p>
             <a:fld id="{A6AF225C-868F-9540-9455-9F5B5C0F2A40}" type="datetimeFigureOut">
               <a:rPr lang="en-US" smtClean="0"/>
-              <a:t>6/17/26</a:t>
+              <a:t>6/23/26</a:t>
             </a:fld>
             <a:endParaRPr lang="en-US"/>
           </a:p>
@@ -1932,7 +1933,7 @@
           <a:p>
             <a:fld id="{A6AF225C-868F-9540-9455-9F5B5C0F2A40}" type="datetimeFigureOut">
               <a:rPr lang="en-US" smtClean="0"/>
-              <a:t>6/17/26</a:t>
+              <a:t>6/23/26</a:t>
             </a:fld>
             <a:endParaRPr lang="en-US"/>
           </a:p>
@@ -2178,7 +2179,7 @@
           <a:p>
             <a:fld id="{A6AF225C-868F-9540-9455-9F5B5C0F2A40}" type="datetimeFigureOut">
               <a:rPr lang="en-US" smtClean="0"/>
-              <a:t>6/17/26</a:t>
+              <a:t>6/23/26</a:t>
             </a:fld>
             <a:endParaRPr lang="en-US"/>
           </a:p>
@@ -2410,7 +2411,7 @@
           <a:p>
             <a:fld id="{A6AF225C-868F-9540-9455-9F5B5C0F2A40}" type="datetimeFigureOut">
               <a:rPr lang="en-US" smtClean="0"/>
-              <a:t>6/17/26</a:t>
+              <a:t>6/23/26</a:t>
             </a:fld>
             <a:endParaRPr lang="en-US"/>
           </a:p>
@@ -2777,7 +2778,7 @@
           <a:p>
             <a:fld id="{A6AF225C-868F-9540-9455-9F5B5C0F2A40}" type="datetimeFigureOut">
               <a:rPr lang="en-US" smtClean="0"/>
-              <a:t>6/17/26</a:t>
+              <a:t>6/23/26</a:t>
             </a:fld>
             <a:endParaRPr lang="en-US"/>
           </a:p>
@@ -2895,7 +2896,7 @@
           <a:p>
             <a:fld id="{A6AF225C-868F-9540-9455-9F5B5C0F2A40}" type="datetimeFigureOut">
               <a:rPr lang="en-US" smtClean="0"/>
-              <a:t>6/17/26</a:t>
+              <a:t>6/23/26</a:t>
             </a:fld>
             <a:endParaRPr lang="en-US"/>
           </a:p>
@@ -2990,7 +2991,7 @@
           <a:p>
             <a:fld id="{A6AF225C-868F-9540-9455-9F5B5C0F2A40}" type="datetimeFigureOut">
               <a:rPr lang="en-US" smtClean="0"/>
-              <a:t>6/17/26</a:t>
+              <a:t>6/23/26</a:t>
             </a:fld>
             <a:endParaRPr lang="en-US"/>
           </a:p>
@@ -3267,7 +3268,7 @@
           <a:p>
             <a:fld id="{A6AF225C-868F-9540-9455-9F5B5C0F2A40}" type="datetimeFigureOut">
               <a:rPr lang="en-US" smtClean="0"/>
-              <a:t>6/17/26</a:t>
+              <a:t>6/23/26</a:t>
             </a:fld>
             <a:endParaRPr lang="en-US"/>
           </a:p>
@@ -3524,7 +3525,7 @@
           <a:p>
             <a:fld id="{A6AF225C-868F-9540-9455-9F5B5C0F2A40}" type="datetimeFigureOut">
               <a:rPr lang="en-US" smtClean="0"/>
-              <a:t>6/17/26</a:t>
+              <a:t>6/23/26</a:t>
             </a:fld>
             <a:endParaRPr lang="en-US"/>
           </a:p>
@@ -3737,7 +3738,7 @@
           <a:p>
             <a:fld id="{A6AF225C-868F-9540-9455-9F5B5C0F2A40}" type="datetimeFigureOut">
               <a:rPr lang="en-US" smtClean="0"/>
-              <a:t>6/17/26</a:t>
+              <a:t>6/23/26</a:t>
             </a:fld>
             <a:endParaRPr lang="en-US"/>
           </a:p>
@@ -4247,6 +4248,1271 @@
           <a:chExt cx="0" cy="0"/>
         </a:xfrm>
       </p:grpSpPr>
+      <p:pic>
+        <p:nvPicPr>
+          <p:cNvPr id="2" name="Picture 1">
+            <a:extLst>
+              <a:ext uri="{FF2B5EF4-FFF2-40B4-BE49-F238E27FC236}">
+                <a16:creationId xmlns:a16="http://schemas.microsoft.com/office/drawing/2014/main" id="{D5C99B90-6DED-84EA-B474-CE7F94CDAA62}"/>
+              </a:ext>
+            </a:extLst>
+          </p:cNvPr>
+          <p:cNvPicPr>
+            <a:picLocks noChangeAspect="1"/>
+          </p:cNvPicPr>
+          <p:nvPr/>
+        </p:nvPicPr>
+        <p:blipFill>
+          <a:blip r:embed="rId3"/>
+          <a:stretch>
+            <a:fillRect/>
+          </a:stretch>
+        </p:blipFill>
+        <p:spPr>
+          <a:xfrm>
+            <a:off x="685800" y="1054917"/>
+            <a:ext cx="7772400" cy="4748165"/>
+          </a:xfrm>
+          <a:prstGeom prst="rect">
+            <a:avLst/>
+          </a:prstGeom>
+        </p:spPr>
+      </p:pic>
+      <p:pic>
+        <p:nvPicPr>
+          <p:cNvPr id="3" name="Picture 2">
+            <a:extLst>
+              <a:ext uri="{FF2B5EF4-FFF2-40B4-BE49-F238E27FC236}">
+                <a16:creationId xmlns:a16="http://schemas.microsoft.com/office/drawing/2014/main" id="{524BD3AB-0A5E-F861-C636-6E4FFCA0C7E7}"/>
+              </a:ext>
+            </a:extLst>
+          </p:cNvPr>
+          <p:cNvPicPr>
+            <a:picLocks noChangeAspect="1"/>
+          </p:cNvPicPr>
+          <p:nvPr/>
+        </p:nvPicPr>
+        <p:blipFill>
+          <a:blip r:embed="rId4"/>
+          <a:stretch>
+            <a:fillRect/>
+          </a:stretch>
+        </p:blipFill>
+        <p:spPr>
+          <a:xfrm>
+            <a:off x="5794349" y="1877942"/>
+            <a:ext cx="1168998" cy="822019"/>
+          </a:xfrm>
+          <a:prstGeom prst="rect">
+            <a:avLst/>
+          </a:prstGeom>
+        </p:spPr>
+      </p:pic>
+      <p:grpSp>
+        <p:nvGrpSpPr>
+          <p:cNvPr id="28" name="Group 27">
+            <a:extLst>
+              <a:ext uri="{FF2B5EF4-FFF2-40B4-BE49-F238E27FC236}">
+                <a16:creationId xmlns:a16="http://schemas.microsoft.com/office/drawing/2014/main" id="{308C5896-BB3E-FB9C-D7CE-498393E743CA}"/>
+              </a:ext>
+            </a:extLst>
+          </p:cNvPr>
+          <p:cNvGrpSpPr/>
+          <p:nvPr/>
+        </p:nvGrpSpPr>
+        <p:grpSpPr>
+          <a:xfrm>
+            <a:off x="685392" y="1593775"/>
+            <a:ext cx="532992" cy="426250"/>
+            <a:chOff x="294203" y="2026688"/>
+            <a:chExt cx="532992" cy="895655"/>
+          </a:xfrm>
+        </p:grpSpPr>
+        <p:cxnSp>
+          <p:nvCxnSpPr>
+            <p:cNvPr id="14" name="Straight Connector 13">
+              <a:extLst>
+                <a:ext uri="{FF2B5EF4-FFF2-40B4-BE49-F238E27FC236}">
+                  <a16:creationId xmlns:a16="http://schemas.microsoft.com/office/drawing/2014/main" id="{CB863880-873A-6D32-B3F7-6904EB1A8BA8}"/>
+                </a:ext>
+              </a:extLst>
+            </p:cNvPr>
+            <p:cNvCxnSpPr>
+              <a:cxnSpLocks/>
+            </p:cNvCxnSpPr>
+            <p:nvPr/>
+          </p:nvCxnSpPr>
+          <p:spPr>
+            <a:xfrm>
+              <a:off x="294203" y="2026688"/>
+              <a:ext cx="532992" cy="0"/>
+            </a:xfrm>
+            <a:prstGeom prst="line">
+              <a:avLst/>
+            </a:prstGeom>
+            <a:ln w="6350"/>
+          </p:spPr>
+          <p:style>
+            <a:lnRef idx="2">
+              <a:schemeClr val="accent1"/>
+            </a:lnRef>
+            <a:fillRef idx="0">
+              <a:schemeClr val="accent1"/>
+            </a:fillRef>
+            <a:effectRef idx="1">
+              <a:schemeClr val="accent1"/>
+            </a:effectRef>
+            <a:fontRef idx="minor">
+              <a:schemeClr val="tx1"/>
+            </a:fontRef>
+          </p:style>
+        </p:cxnSp>
+        <p:cxnSp>
+          <p:nvCxnSpPr>
+            <p:cNvPr id="16" name="Straight Connector 15">
+              <a:extLst>
+                <a:ext uri="{FF2B5EF4-FFF2-40B4-BE49-F238E27FC236}">
+                  <a16:creationId xmlns:a16="http://schemas.microsoft.com/office/drawing/2014/main" id="{3D2D765E-54E8-6175-7FAB-7A2B9CD2877E}"/>
+                </a:ext>
+              </a:extLst>
+            </p:cNvPr>
+            <p:cNvCxnSpPr>
+              <a:cxnSpLocks/>
+            </p:cNvCxnSpPr>
+            <p:nvPr/>
+          </p:nvCxnSpPr>
+          <p:spPr>
+            <a:xfrm>
+              <a:off x="294203" y="2175964"/>
+              <a:ext cx="532992" cy="0"/>
+            </a:xfrm>
+            <a:prstGeom prst="line">
+              <a:avLst/>
+            </a:prstGeom>
+            <a:ln w="6350"/>
+          </p:spPr>
+          <p:style>
+            <a:lnRef idx="2">
+              <a:schemeClr val="accent1"/>
+            </a:lnRef>
+            <a:fillRef idx="0">
+              <a:schemeClr val="accent1"/>
+            </a:fillRef>
+            <a:effectRef idx="1">
+              <a:schemeClr val="accent1"/>
+            </a:effectRef>
+            <a:fontRef idx="minor">
+              <a:schemeClr val="tx1"/>
+            </a:fontRef>
+          </p:style>
+        </p:cxnSp>
+        <p:cxnSp>
+          <p:nvCxnSpPr>
+            <p:cNvPr id="17" name="Straight Connector 16">
+              <a:extLst>
+                <a:ext uri="{FF2B5EF4-FFF2-40B4-BE49-F238E27FC236}">
+                  <a16:creationId xmlns:a16="http://schemas.microsoft.com/office/drawing/2014/main" id="{859AA0B9-0D7C-849F-C44E-2786E5100EA4}"/>
+                </a:ext>
+              </a:extLst>
+            </p:cNvPr>
+            <p:cNvCxnSpPr>
+              <a:cxnSpLocks/>
+            </p:cNvCxnSpPr>
+            <p:nvPr/>
+          </p:nvCxnSpPr>
+          <p:spPr>
+            <a:xfrm>
+              <a:off x="294203" y="2325240"/>
+              <a:ext cx="532992" cy="0"/>
+            </a:xfrm>
+            <a:prstGeom prst="line">
+              <a:avLst/>
+            </a:prstGeom>
+            <a:ln w="6350"/>
+          </p:spPr>
+          <p:style>
+            <a:lnRef idx="2">
+              <a:schemeClr val="accent1"/>
+            </a:lnRef>
+            <a:fillRef idx="0">
+              <a:schemeClr val="accent1"/>
+            </a:fillRef>
+            <a:effectRef idx="1">
+              <a:schemeClr val="accent1"/>
+            </a:effectRef>
+            <a:fontRef idx="minor">
+              <a:schemeClr val="tx1"/>
+            </a:fontRef>
+          </p:style>
+        </p:cxnSp>
+        <p:cxnSp>
+          <p:nvCxnSpPr>
+            <p:cNvPr id="18" name="Straight Connector 17">
+              <a:extLst>
+                <a:ext uri="{FF2B5EF4-FFF2-40B4-BE49-F238E27FC236}">
+                  <a16:creationId xmlns:a16="http://schemas.microsoft.com/office/drawing/2014/main" id="{87BF2044-3623-4F0A-78FA-CA2113730AC4}"/>
+                </a:ext>
+              </a:extLst>
+            </p:cNvPr>
+            <p:cNvCxnSpPr>
+              <a:cxnSpLocks/>
+            </p:cNvCxnSpPr>
+            <p:nvPr/>
+          </p:nvCxnSpPr>
+          <p:spPr>
+            <a:xfrm>
+              <a:off x="294203" y="2474516"/>
+              <a:ext cx="532992" cy="0"/>
+            </a:xfrm>
+            <a:prstGeom prst="line">
+              <a:avLst/>
+            </a:prstGeom>
+            <a:ln w="6350"/>
+          </p:spPr>
+          <p:style>
+            <a:lnRef idx="2">
+              <a:schemeClr val="accent1"/>
+            </a:lnRef>
+            <a:fillRef idx="0">
+              <a:schemeClr val="accent1"/>
+            </a:fillRef>
+            <a:effectRef idx="1">
+              <a:schemeClr val="accent1"/>
+            </a:effectRef>
+            <a:fontRef idx="minor">
+              <a:schemeClr val="tx1"/>
+            </a:fontRef>
+          </p:style>
+        </p:cxnSp>
+        <p:cxnSp>
+          <p:nvCxnSpPr>
+            <p:cNvPr id="19" name="Straight Connector 18">
+              <a:extLst>
+                <a:ext uri="{FF2B5EF4-FFF2-40B4-BE49-F238E27FC236}">
+                  <a16:creationId xmlns:a16="http://schemas.microsoft.com/office/drawing/2014/main" id="{80C3579A-EE76-23B6-A013-B537E5422870}"/>
+                </a:ext>
+              </a:extLst>
+            </p:cNvPr>
+            <p:cNvCxnSpPr>
+              <a:cxnSpLocks/>
+            </p:cNvCxnSpPr>
+            <p:nvPr/>
+          </p:nvCxnSpPr>
+          <p:spPr>
+            <a:xfrm>
+              <a:off x="294203" y="2623792"/>
+              <a:ext cx="532992" cy="0"/>
+            </a:xfrm>
+            <a:prstGeom prst="line">
+              <a:avLst/>
+            </a:prstGeom>
+            <a:ln w="6350"/>
+          </p:spPr>
+          <p:style>
+            <a:lnRef idx="2">
+              <a:schemeClr val="accent1"/>
+            </a:lnRef>
+            <a:fillRef idx="0">
+              <a:schemeClr val="accent1"/>
+            </a:fillRef>
+            <a:effectRef idx="1">
+              <a:schemeClr val="accent1"/>
+            </a:effectRef>
+            <a:fontRef idx="minor">
+              <a:schemeClr val="tx1"/>
+            </a:fontRef>
+          </p:style>
+        </p:cxnSp>
+        <p:cxnSp>
+          <p:nvCxnSpPr>
+            <p:cNvPr id="20" name="Straight Connector 19">
+              <a:extLst>
+                <a:ext uri="{FF2B5EF4-FFF2-40B4-BE49-F238E27FC236}">
+                  <a16:creationId xmlns:a16="http://schemas.microsoft.com/office/drawing/2014/main" id="{A350371B-E2C9-E1BF-B8B8-64EF26DE08B9}"/>
+                </a:ext>
+              </a:extLst>
+            </p:cNvPr>
+            <p:cNvCxnSpPr>
+              <a:cxnSpLocks/>
+            </p:cNvCxnSpPr>
+            <p:nvPr/>
+          </p:nvCxnSpPr>
+          <p:spPr>
+            <a:xfrm>
+              <a:off x="294203" y="2773068"/>
+              <a:ext cx="532992" cy="0"/>
+            </a:xfrm>
+            <a:prstGeom prst="line">
+              <a:avLst/>
+            </a:prstGeom>
+            <a:ln w="6350"/>
+          </p:spPr>
+          <p:style>
+            <a:lnRef idx="2">
+              <a:schemeClr val="accent1"/>
+            </a:lnRef>
+            <a:fillRef idx="0">
+              <a:schemeClr val="accent1"/>
+            </a:fillRef>
+            <a:effectRef idx="1">
+              <a:schemeClr val="accent1"/>
+            </a:effectRef>
+            <a:fontRef idx="minor">
+              <a:schemeClr val="tx1"/>
+            </a:fontRef>
+          </p:style>
+        </p:cxnSp>
+        <p:cxnSp>
+          <p:nvCxnSpPr>
+            <p:cNvPr id="22" name="Straight Connector 21">
+              <a:extLst>
+                <a:ext uri="{FF2B5EF4-FFF2-40B4-BE49-F238E27FC236}">
+                  <a16:creationId xmlns:a16="http://schemas.microsoft.com/office/drawing/2014/main" id="{1BDB0D35-AC71-66F1-C460-F8A058E0A0AA}"/>
+                </a:ext>
+              </a:extLst>
+            </p:cNvPr>
+            <p:cNvCxnSpPr>
+              <a:cxnSpLocks/>
+            </p:cNvCxnSpPr>
+            <p:nvPr/>
+          </p:nvCxnSpPr>
+          <p:spPr>
+            <a:xfrm>
+              <a:off x="294203" y="2922343"/>
+              <a:ext cx="532992" cy="0"/>
+            </a:xfrm>
+            <a:prstGeom prst="line">
+              <a:avLst/>
+            </a:prstGeom>
+            <a:ln w="6350"/>
+          </p:spPr>
+          <p:style>
+            <a:lnRef idx="2">
+              <a:schemeClr val="accent1"/>
+            </a:lnRef>
+            <a:fillRef idx="0">
+              <a:schemeClr val="accent1"/>
+            </a:fillRef>
+            <a:effectRef idx="1">
+              <a:schemeClr val="accent1"/>
+            </a:effectRef>
+            <a:fontRef idx="minor">
+              <a:schemeClr val="tx1"/>
+            </a:fontRef>
+          </p:style>
+        </p:cxnSp>
+      </p:grpSp>
+      <p:grpSp>
+        <p:nvGrpSpPr>
+          <p:cNvPr id="43" name="Group 42">
+            <a:extLst>
+              <a:ext uri="{FF2B5EF4-FFF2-40B4-BE49-F238E27FC236}">
+                <a16:creationId xmlns:a16="http://schemas.microsoft.com/office/drawing/2014/main" id="{0AD28136-BBC4-3386-8CAE-090B01ACE696}"/>
+              </a:ext>
+            </a:extLst>
+          </p:cNvPr>
+          <p:cNvGrpSpPr/>
+          <p:nvPr/>
+        </p:nvGrpSpPr>
+        <p:grpSpPr>
+          <a:xfrm>
+            <a:off x="1273967" y="1507871"/>
+            <a:ext cx="6915170" cy="1455864"/>
+            <a:chOff x="1273967" y="1507871"/>
+            <a:chExt cx="6915170" cy="1455864"/>
+          </a:xfrm>
+        </p:grpSpPr>
+        <p:sp>
+          <p:nvSpPr>
+            <p:cNvPr id="12" name="Rectangle 11">
+              <a:extLst>
+                <a:ext uri="{FF2B5EF4-FFF2-40B4-BE49-F238E27FC236}">
+                  <a16:creationId xmlns:a16="http://schemas.microsoft.com/office/drawing/2014/main" id="{06CB120A-8E3C-66C6-773A-1C0DD07A8721}"/>
+                </a:ext>
+              </a:extLst>
+            </p:cNvPr>
+            <p:cNvSpPr/>
+            <p:nvPr/>
+          </p:nvSpPr>
+          <p:spPr>
+            <a:xfrm>
+              <a:off x="4485939" y="1651145"/>
+              <a:ext cx="982556" cy="858964"/>
+            </a:xfrm>
+            <a:prstGeom prst="rect">
+              <a:avLst/>
+            </a:prstGeom>
+            <a:solidFill>
+              <a:srgbClr val="00B0F0">
+                <a:alpha val="10000"/>
+              </a:srgbClr>
+            </a:solidFill>
+            <a:ln w="6350"/>
+          </p:spPr>
+          <p:style>
+            <a:lnRef idx="2">
+              <a:schemeClr val="accent1">
+                <a:shade val="15000"/>
+              </a:schemeClr>
+            </a:lnRef>
+            <a:fillRef idx="1">
+              <a:schemeClr val="accent1"/>
+            </a:fillRef>
+            <a:effectRef idx="0">
+              <a:schemeClr val="accent1"/>
+            </a:effectRef>
+            <a:fontRef idx="minor">
+              <a:schemeClr val="lt1"/>
+            </a:fontRef>
+          </p:style>
+          <p:txBody>
+            <a:bodyPr rtlCol="0" anchor="ctr"/>
+            <a:lstStyle/>
+            <a:p>
+              <a:pPr algn="ctr"/>
+              <a:endParaRPr lang="en-US"/>
+            </a:p>
+          </p:txBody>
+        </p:sp>
+        <p:grpSp>
+          <p:nvGrpSpPr>
+            <p:cNvPr id="31" name="Group 30">
+              <a:extLst>
+                <a:ext uri="{FF2B5EF4-FFF2-40B4-BE49-F238E27FC236}">
+                  <a16:creationId xmlns:a16="http://schemas.microsoft.com/office/drawing/2014/main" id="{4870CFA2-D585-B1FA-BF3E-ADA1D6F37FCB}"/>
+                </a:ext>
+              </a:extLst>
+            </p:cNvPr>
+            <p:cNvGrpSpPr/>
+            <p:nvPr/>
+          </p:nvGrpSpPr>
+          <p:grpSpPr>
+            <a:xfrm>
+              <a:off x="1273967" y="1591981"/>
+              <a:ext cx="6915170" cy="851177"/>
+              <a:chOff x="1273967" y="1591981"/>
+              <a:chExt cx="6915170" cy="851177"/>
+            </a:xfrm>
+          </p:grpSpPr>
+          <p:cxnSp>
+            <p:nvCxnSpPr>
+              <p:cNvPr id="5" name="Straight Connector 4">
+                <a:extLst>
+                  <a:ext uri="{FF2B5EF4-FFF2-40B4-BE49-F238E27FC236}">
+                    <a16:creationId xmlns:a16="http://schemas.microsoft.com/office/drawing/2014/main" id="{C0BE2B20-F5AF-8071-79DB-81C08D0616BC}"/>
+                  </a:ext>
+                </a:extLst>
+              </p:cNvPr>
+              <p:cNvCxnSpPr>
+                <a:cxnSpLocks/>
+              </p:cNvCxnSpPr>
+              <p:nvPr/>
+            </p:nvCxnSpPr>
+            <p:spPr>
+              <a:xfrm>
+                <a:off x="1278731" y="2443158"/>
+                <a:ext cx="6908007" cy="0"/>
+              </a:xfrm>
+              <a:prstGeom prst="line">
+                <a:avLst/>
+              </a:prstGeom>
+              <a:ln w="6350">
+                <a:solidFill>
+                  <a:schemeClr val="accent1"/>
+                </a:solidFill>
+              </a:ln>
+            </p:spPr>
+            <p:style>
+              <a:lnRef idx="2">
+                <a:schemeClr val="accent1"/>
+              </a:lnRef>
+              <a:fillRef idx="0">
+                <a:schemeClr val="accent1"/>
+              </a:fillRef>
+              <a:effectRef idx="1">
+                <a:schemeClr val="accent1"/>
+              </a:effectRef>
+              <a:fontRef idx="minor">
+                <a:schemeClr val="tx1"/>
+              </a:fontRef>
+            </p:style>
+          </p:cxnSp>
+          <p:cxnSp>
+            <p:nvCxnSpPr>
+              <p:cNvPr id="8" name="Straight Connector 7">
+                <a:extLst>
+                  <a:ext uri="{FF2B5EF4-FFF2-40B4-BE49-F238E27FC236}">
+                    <a16:creationId xmlns:a16="http://schemas.microsoft.com/office/drawing/2014/main" id="{0933216A-B997-6BE0-7AA4-B148EB50EC80}"/>
+                  </a:ext>
+                </a:extLst>
+              </p:cNvPr>
+              <p:cNvCxnSpPr>
+                <a:cxnSpLocks/>
+              </p:cNvCxnSpPr>
+              <p:nvPr/>
+            </p:nvCxnSpPr>
+            <p:spPr>
+              <a:xfrm>
+                <a:off x="1273967" y="2016908"/>
+                <a:ext cx="6908007" cy="0"/>
+              </a:xfrm>
+              <a:prstGeom prst="line">
+                <a:avLst/>
+              </a:prstGeom>
+              <a:ln w="6350"/>
+            </p:spPr>
+            <p:style>
+              <a:lnRef idx="2">
+                <a:schemeClr val="accent1"/>
+              </a:lnRef>
+              <a:fillRef idx="0">
+                <a:schemeClr val="accent1"/>
+              </a:fillRef>
+              <a:effectRef idx="1">
+                <a:schemeClr val="accent1"/>
+              </a:effectRef>
+              <a:fontRef idx="minor">
+                <a:schemeClr val="tx1"/>
+              </a:fontRef>
+            </p:style>
+          </p:cxnSp>
+          <p:cxnSp>
+            <p:nvCxnSpPr>
+              <p:cNvPr id="29" name="Straight Connector 28">
+                <a:extLst>
+                  <a:ext uri="{FF2B5EF4-FFF2-40B4-BE49-F238E27FC236}">
+                    <a16:creationId xmlns:a16="http://schemas.microsoft.com/office/drawing/2014/main" id="{29387D16-9C52-EC10-E295-573E6B0D8F0B}"/>
+                  </a:ext>
+                </a:extLst>
+              </p:cNvPr>
+              <p:cNvCxnSpPr>
+                <a:cxnSpLocks/>
+              </p:cNvCxnSpPr>
+              <p:nvPr/>
+            </p:nvCxnSpPr>
+            <p:spPr>
+              <a:xfrm>
+                <a:off x="1275755" y="1591981"/>
+                <a:ext cx="6908007" cy="0"/>
+              </a:xfrm>
+              <a:prstGeom prst="line">
+                <a:avLst/>
+              </a:prstGeom>
+              <a:ln w="6350"/>
+            </p:spPr>
+            <p:style>
+              <a:lnRef idx="2">
+                <a:schemeClr val="accent1"/>
+              </a:lnRef>
+              <a:fillRef idx="0">
+                <a:schemeClr val="accent1"/>
+              </a:fillRef>
+              <a:effectRef idx="1">
+                <a:schemeClr val="accent1"/>
+              </a:effectRef>
+              <a:fontRef idx="minor">
+                <a:schemeClr val="tx1"/>
+              </a:fontRef>
+            </p:style>
+          </p:cxnSp>
+          <p:cxnSp>
+            <p:nvCxnSpPr>
+              <p:cNvPr id="30" name="Straight Connector 29">
+                <a:extLst>
+                  <a:ext uri="{FF2B5EF4-FFF2-40B4-BE49-F238E27FC236}">
+                    <a16:creationId xmlns:a16="http://schemas.microsoft.com/office/drawing/2014/main" id="{BC348182-70D2-BD82-6323-7E0D246B02C1}"/>
+                  </a:ext>
+                </a:extLst>
+              </p:cNvPr>
+              <p:cNvCxnSpPr>
+                <a:cxnSpLocks/>
+              </p:cNvCxnSpPr>
+              <p:nvPr/>
+            </p:nvCxnSpPr>
+            <p:spPr>
+              <a:xfrm>
+                <a:off x="1281130" y="1651145"/>
+                <a:ext cx="6908007" cy="0"/>
+              </a:xfrm>
+              <a:prstGeom prst="line">
+                <a:avLst/>
+              </a:prstGeom>
+              <a:ln w="6350"/>
+            </p:spPr>
+            <p:style>
+              <a:lnRef idx="2">
+                <a:schemeClr val="accent1"/>
+              </a:lnRef>
+              <a:fillRef idx="0">
+                <a:schemeClr val="accent1"/>
+              </a:fillRef>
+              <a:effectRef idx="1">
+                <a:schemeClr val="accent1"/>
+              </a:effectRef>
+              <a:fontRef idx="minor">
+                <a:schemeClr val="tx1"/>
+              </a:fontRef>
+            </p:style>
+          </p:cxnSp>
+        </p:grpSp>
+        <p:grpSp>
+          <p:nvGrpSpPr>
+            <p:cNvPr id="39" name="Group 38">
+              <a:extLst>
+                <a:ext uri="{FF2B5EF4-FFF2-40B4-BE49-F238E27FC236}">
+                  <a16:creationId xmlns:a16="http://schemas.microsoft.com/office/drawing/2014/main" id="{5C4B9178-13B5-7870-5A5F-53BD4025EF79}"/>
+                </a:ext>
+              </a:extLst>
+            </p:cNvPr>
+            <p:cNvGrpSpPr/>
+            <p:nvPr/>
+          </p:nvGrpSpPr>
+          <p:grpSpPr>
+            <a:xfrm>
+              <a:off x="4478768" y="1507871"/>
+              <a:ext cx="984329" cy="1455864"/>
+              <a:chOff x="4478768" y="1507871"/>
+              <a:chExt cx="984329" cy="1455864"/>
+            </a:xfrm>
+          </p:grpSpPr>
+          <p:cxnSp>
+            <p:nvCxnSpPr>
+              <p:cNvPr id="33" name="Straight Connector 32">
+                <a:extLst>
+                  <a:ext uri="{FF2B5EF4-FFF2-40B4-BE49-F238E27FC236}">
+                    <a16:creationId xmlns:a16="http://schemas.microsoft.com/office/drawing/2014/main" id="{B6D5EE85-2EA7-06F4-B974-A2ABCD72FD3A}"/>
+                  </a:ext>
+                </a:extLst>
+              </p:cNvPr>
+              <p:cNvCxnSpPr>
+                <a:cxnSpLocks/>
+              </p:cNvCxnSpPr>
+              <p:nvPr/>
+            </p:nvCxnSpPr>
+            <p:spPr>
+              <a:xfrm>
+                <a:off x="4478768" y="1507871"/>
+                <a:ext cx="0" cy="1455864"/>
+              </a:xfrm>
+              <a:prstGeom prst="line">
+                <a:avLst/>
+              </a:prstGeom>
+            </p:spPr>
+            <p:style>
+              <a:lnRef idx="2">
+                <a:schemeClr val="accent1"/>
+              </a:lnRef>
+              <a:fillRef idx="0">
+                <a:schemeClr val="accent1"/>
+              </a:fillRef>
+              <a:effectRef idx="1">
+                <a:schemeClr val="accent1"/>
+              </a:effectRef>
+              <a:fontRef idx="minor">
+                <a:schemeClr val="tx1"/>
+              </a:fontRef>
+            </p:style>
+          </p:cxnSp>
+          <p:cxnSp>
+            <p:nvCxnSpPr>
+              <p:cNvPr id="37" name="Straight Connector 36">
+                <a:extLst>
+                  <a:ext uri="{FF2B5EF4-FFF2-40B4-BE49-F238E27FC236}">
+                    <a16:creationId xmlns:a16="http://schemas.microsoft.com/office/drawing/2014/main" id="{BE2A573A-E3C3-B069-B645-B6E8A962C857}"/>
+                  </a:ext>
+                </a:extLst>
+              </p:cNvPr>
+              <p:cNvCxnSpPr>
+                <a:cxnSpLocks/>
+              </p:cNvCxnSpPr>
+              <p:nvPr/>
+            </p:nvCxnSpPr>
+            <p:spPr>
+              <a:xfrm>
+                <a:off x="5463097" y="1507871"/>
+                <a:ext cx="0" cy="1455864"/>
+              </a:xfrm>
+              <a:prstGeom prst="line">
+                <a:avLst/>
+              </a:prstGeom>
+            </p:spPr>
+            <p:style>
+              <a:lnRef idx="2">
+                <a:schemeClr val="accent1"/>
+              </a:lnRef>
+              <a:fillRef idx="0">
+                <a:schemeClr val="accent1"/>
+              </a:fillRef>
+              <a:effectRef idx="1">
+                <a:schemeClr val="accent1"/>
+              </a:effectRef>
+              <a:fontRef idx="minor">
+                <a:schemeClr val="tx1"/>
+              </a:fontRef>
+            </p:style>
+          </p:cxnSp>
+          <p:sp>
+            <p:nvSpPr>
+              <p:cNvPr id="38" name="Freeform 37">
+                <a:extLst>
+                  <a:ext uri="{FF2B5EF4-FFF2-40B4-BE49-F238E27FC236}">
+                    <a16:creationId xmlns:a16="http://schemas.microsoft.com/office/drawing/2014/main" id="{13B86A15-A115-54C1-376F-CC451F7EA3B8}"/>
+                  </a:ext>
+                </a:extLst>
+              </p:cNvPr>
+              <p:cNvSpPr/>
+              <p:nvPr/>
+            </p:nvSpPr>
+            <p:spPr>
+              <a:xfrm>
+                <a:off x="4489450" y="1908175"/>
+                <a:ext cx="968375" cy="692150"/>
+              </a:xfrm>
+              <a:custGeom>
+                <a:avLst/>
+                <a:gdLst>
+                  <a:gd name="csX0" fmla="*/ 0 w 1212850"/>
+                  <a:gd name="csY0" fmla="*/ 0 h 1320800"/>
+                  <a:gd name="csX1" fmla="*/ 327025 w 1212850"/>
+                  <a:gd name="csY1" fmla="*/ 1158875 h 1320800"/>
+                  <a:gd name="csX2" fmla="*/ 431800 w 1212850"/>
+                  <a:gd name="csY2" fmla="*/ 1260475 h 1320800"/>
+                  <a:gd name="csX3" fmla="*/ 488950 w 1212850"/>
+                  <a:gd name="csY3" fmla="*/ 1279525 h 1320800"/>
+                  <a:gd name="csX4" fmla="*/ 546100 w 1212850"/>
+                  <a:gd name="csY4" fmla="*/ 1257300 h 1320800"/>
+                  <a:gd name="csX5" fmla="*/ 606425 w 1212850"/>
+                  <a:gd name="csY5" fmla="*/ 1228725 h 1320800"/>
+                  <a:gd name="csX6" fmla="*/ 679450 w 1212850"/>
+                  <a:gd name="csY6" fmla="*/ 1212850 h 1320800"/>
+                  <a:gd name="csX7" fmla="*/ 746125 w 1212850"/>
+                  <a:gd name="csY7" fmla="*/ 1209675 h 1320800"/>
+                  <a:gd name="csX8" fmla="*/ 822325 w 1212850"/>
+                  <a:gd name="csY8" fmla="*/ 1222375 h 1320800"/>
+                  <a:gd name="csX9" fmla="*/ 876300 w 1212850"/>
+                  <a:gd name="csY9" fmla="*/ 1238250 h 1320800"/>
+                  <a:gd name="csX10" fmla="*/ 914400 w 1212850"/>
+                  <a:gd name="csY10" fmla="*/ 1276350 h 1320800"/>
+                  <a:gd name="csX11" fmla="*/ 942975 w 1212850"/>
+                  <a:gd name="csY11" fmla="*/ 1320800 h 1320800"/>
+                  <a:gd name="csX12" fmla="*/ 965200 w 1212850"/>
+                  <a:gd name="csY12" fmla="*/ 1301750 h 1320800"/>
+                  <a:gd name="csX13" fmla="*/ 1006475 w 1212850"/>
+                  <a:gd name="csY13" fmla="*/ 1311275 h 1320800"/>
+                  <a:gd name="csX14" fmla="*/ 1006475 w 1212850"/>
+                  <a:gd name="csY14" fmla="*/ 1311275 h 1320800"/>
+                  <a:gd name="csX15" fmla="*/ 1089025 w 1212850"/>
+                  <a:gd name="csY15" fmla="*/ 1190625 h 1320800"/>
+                  <a:gd name="csX16" fmla="*/ 1127125 w 1212850"/>
+                  <a:gd name="csY16" fmla="*/ 1108075 h 1320800"/>
+                  <a:gd name="csX17" fmla="*/ 1187450 w 1212850"/>
+                  <a:gd name="csY17" fmla="*/ 1038225 h 1320800"/>
+                  <a:gd name="csX18" fmla="*/ 1212850 w 1212850"/>
+                  <a:gd name="csY18" fmla="*/ 1003300 h 1320800"/>
+                  <a:gd name="csX0" fmla="*/ 0 w 968375"/>
+                  <a:gd name="csY0" fmla="*/ 0 h 692150"/>
+                  <a:gd name="csX1" fmla="*/ 82550 w 968375"/>
+                  <a:gd name="csY1" fmla="*/ 530225 h 692150"/>
+                  <a:gd name="csX2" fmla="*/ 187325 w 968375"/>
+                  <a:gd name="csY2" fmla="*/ 631825 h 692150"/>
+                  <a:gd name="csX3" fmla="*/ 244475 w 968375"/>
+                  <a:gd name="csY3" fmla="*/ 650875 h 692150"/>
+                  <a:gd name="csX4" fmla="*/ 301625 w 968375"/>
+                  <a:gd name="csY4" fmla="*/ 628650 h 692150"/>
+                  <a:gd name="csX5" fmla="*/ 361950 w 968375"/>
+                  <a:gd name="csY5" fmla="*/ 600075 h 692150"/>
+                  <a:gd name="csX6" fmla="*/ 434975 w 968375"/>
+                  <a:gd name="csY6" fmla="*/ 584200 h 692150"/>
+                  <a:gd name="csX7" fmla="*/ 501650 w 968375"/>
+                  <a:gd name="csY7" fmla="*/ 581025 h 692150"/>
+                  <a:gd name="csX8" fmla="*/ 577850 w 968375"/>
+                  <a:gd name="csY8" fmla="*/ 593725 h 692150"/>
+                  <a:gd name="csX9" fmla="*/ 631825 w 968375"/>
+                  <a:gd name="csY9" fmla="*/ 609600 h 692150"/>
+                  <a:gd name="csX10" fmla="*/ 669925 w 968375"/>
+                  <a:gd name="csY10" fmla="*/ 647700 h 692150"/>
+                  <a:gd name="csX11" fmla="*/ 698500 w 968375"/>
+                  <a:gd name="csY11" fmla="*/ 692150 h 692150"/>
+                  <a:gd name="csX12" fmla="*/ 720725 w 968375"/>
+                  <a:gd name="csY12" fmla="*/ 673100 h 692150"/>
+                  <a:gd name="csX13" fmla="*/ 762000 w 968375"/>
+                  <a:gd name="csY13" fmla="*/ 682625 h 692150"/>
+                  <a:gd name="csX14" fmla="*/ 762000 w 968375"/>
+                  <a:gd name="csY14" fmla="*/ 682625 h 692150"/>
+                  <a:gd name="csX15" fmla="*/ 844550 w 968375"/>
+                  <a:gd name="csY15" fmla="*/ 561975 h 692150"/>
+                  <a:gd name="csX16" fmla="*/ 882650 w 968375"/>
+                  <a:gd name="csY16" fmla="*/ 479425 h 692150"/>
+                  <a:gd name="csX17" fmla="*/ 942975 w 968375"/>
+                  <a:gd name="csY17" fmla="*/ 409575 h 692150"/>
+                  <a:gd name="csX18" fmla="*/ 968375 w 968375"/>
+                  <a:gd name="csY18" fmla="*/ 374650 h 692150"/>
+                </a:gdLst>
+                <a:ahLst/>
+                <a:cxnLst>
+                  <a:cxn ang="0">
+                    <a:pos x="csX0" y="csY0"/>
+                  </a:cxn>
+                  <a:cxn ang="0">
+                    <a:pos x="csX1" y="csY1"/>
+                  </a:cxn>
+                  <a:cxn ang="0">
+                    <a:pos x="csX2" y="csY2"/>
+                  </a:cxn>
+                  <a:cxn ang="0">
+                    <a:pos x="csX3" y="csY3"/>
+                  </a:cxn>
+                  <a:cxn ang="0">
+                    <a:pos x="csX4" y="csY4"/>
+                  </a:cxn>
+                  <a:cxn ang="0">
+                    <a:pos x="csX5" y="csY5"/>
+                  </a:cxn>
+                  <a:cxn ang="0">
+                    <a:pos x="csX6" y="csY6"/>
+                  </a:cxn>
+                  <a:cxn ang="0">
+                    <a:pos x="csX7" y="csY7"/>
+                  </a:cxn>
+                  <a:cxn ang="0">
+                    <a:pos x="csX8" y="csY8"/>
+                  </a:cxn>
+                  <a:cxn ang="0">
+                    <a:pos x="csX9" y="csY9"/>
+                  </a:cxn>
+                  <a:cxn ang="0">
+                    <a:pos x="csX10" y="csY10"/>
+                  </a:cxn>
+                  <a:cxn ang="0">
+                    <a:pos x="csX11" y="csY11"/>
+                  </a:cxn>
+                  <a:cxn ang="0">
+                    <a:pos x="csX12" y="csY12"/>
+                  </a:cxn>
+                  <a:cxn ang="0">
+                    <a:pos x="csX13" y="csY13"/>
+                  </a:cxn>
+                  <a:cxn ang="0">
+                    <a:pos x="csX14" y="csY14"/>
+                  </a:cxn>
+                  <a:cxn ang="0">
+                    <a:pos x="csX15" y="csY15"/>
+                  </a:cxn>
+                  <a:cxn ang="0">
+                    <a:pos x="csX16" y="csY16"/>
+                  </a:cxn>
+                  <a:cxn ang="0">
+                    <a:pos x="csX17" y="csY17"/>
+                  </a:cxn>
+                  <a:cxn ang="0">
+                    <a:pos x="csX18" y="csY18"/>
+                  </a:cxn>
+                </a:cxnLst>
+                <a:rect l="l" t="t" r="r" b="b"/>
+                <a:pathLst>
+                  <a:path w="968375" h="692150">
+                    <a:moveTo>
+                      <a:pt x="0" y="0"/>
+                    </a:moveTo>
+                    <a:lnTo>
+                      <a:pt x="82550" y="530225"/>
+                    </a:lnTo>
+                    <a:lnTo>
+                      <a:pt x="187325" y="631825"/>
+                    </a:lnTo>
+                    <a:lnTo>
+                      <a:pt x="244475" y="650875"/>
+                    </a:lnTo>
+                    <a:lnTo>
+                      <a:pt x="301625" y="628650"/>
+                    </a:lnTo>
+                    <a:lnTo>
+                      <a:pt x="361950" y="600075"/>
+                    </a:lnTo>
+                    <a:lnTo>
+                      <a:pt x="434975" y="584200"/>
+                    </a:lnTo>
+                    <a:lnTo>
+                      <a:pt x="501650" y="581025"/>
+                    </a:lnTo>
+                    <a:lnTo>
+                      <a:pt x="577850" y="593725"/>
+                    </a:lnTo>
+                    <a:lnTo>
+                      <a:pt x="631825" y="609600"/>
+                    </a:lnTo>
+                    <a:lnTo>
+                      <a:pt x="669925" y="647700"/>
+                    </a:lnTo>
+                    <a:lnTo>
+                      <a:pt x="698500" y="692150"/>
+                    </a:lnTo>
+                    <a:lnTo>
+                      <a:pt x="720725" y="673100"/>
+                    </a:lnTo>
+                    <a:lnTo>
+                      <a:pt x="762000" y="682625"/>
+                    </a:lnTo>
+                    <a:lnTo>
+                      <a:pt x="762000" y="682625"/>
+                    </a:lnTo>
+                    <a:lnTo>
+                      <a:pt x="844550" y="561975"/>
+                    </a:lnTo>
+                    <a:lnTo>
+                      <a:pt x="882650" y="479425"/>
+                    </a:lnTo>
+                    <a:lnTo>
+                      <a:pt x="942975" y="409575"/>
+                    </a:lnTo>
+                    <a:lnTo>
+                      <a:pt x="968375" y="374650"/>
+                    </a:lnTo>
+                  </a:path>
+                </a:pathLst>
+              </a:custGeom>
+              <a:noFill/>
+              <a:ln w="6350"/>
+            </p:spPr>
+            <p:style>
+              <a:lnRef idx="2">
+                <a:schemeClr val="accent1">
+                  <a:shade val="15000"/>
+                </a:schemeClr>
+              </a:lnRef>
+              <a:fillRef idx="1">
+                <a:schemeClr val="accent1"/>
+              </a:fillRef>
+              <a:effectRef idx="0">
+                <a:schemeClr val="accent1"/>
+              </a:effectRef>
+              <a:fontRef idx="minor">
+                <a:schemeClr val="lt1"/>
+              </a:fontRef>
+            </p:style>
+            <p:txBody>
+              <a:bodyPr rtlCol="0" anchor="ctr"/>
+              <a:lstStyle/>
+              <a:p>
+                <a:pPr algn="ctr"/>
+                <a:endParaRPr lang="en-US"/>
+              </a:p>
+            </p:txBody>
+          </p:sp>
+        </p:grpSp>
+      </p:grpSp>
+      <p:sp>
+        <p:nvSpPr>
+          <p:cNvPr id="40" name="Rectangle 39">
+            <a:extLst>
+              <a:ext uri="{FF2B5EF4-FFF2-40B4-BE49-F238E27FC236}">
+                <a16:creationId xmlns:a16="http://schemas.microsoft.com/office/drawing/2014/main" id="{384F3505-0657-4F4B-9106-029A2B71478F}"/>
+              </a:ext>
+            </a:extLst>
+          </p:cNvPr>
+          <p:cNvSpPr/>
+          <p:nvPr/>
+        </p:nvSpPr>
+        <p:spPr>
+          <a:xfrm>
+            <a:off x="4485939" y="2352942"/>
+            <a:ext cx="86061" cy="60548"/>
+          </a:xfrm>
+          <a:prstGeom prst="rect">
+            <a:avLst/>
+          </a:prstGeom>
+          <a:solidFill>
+            <a:srgbClr val="C00000"/>
+          </a:solidFill>
+          <a:ln w="6350"/>
+        </p:spPr>
+        <p:style>
+          <a:lnRef idx="2">
+            <a:schemeClr val="accent1">
+              <a:shade val="15000"/>
+            </a:schemeClr>
+          </a:lnRef>
+          <a:fillRef idx="1">
+            <a:schemeClr val="accent1"/>
+          </a:fillRef>
+          <a:effectRef idx="0">
+            <a:schemeClr val="accent1"/>
+          </a:effectRef>
+          <a:fontRef idx="minor">
+            <a:schemeClr val="lt1"/>
+          </a:fontRef>
+        </p:style>
+        <p:txBody>
+          <a:bodyPr rtlCol="0" anchor="ctr"/>
+          <a:lstStyle/>
+          <a:p>
+            <a:pPr algn="ctr"/>
+            <a:endParaRPr lang="en-US"/>
+          </a:p>
+        </p:txBody>
+      </p:sp>
+      <p:sp>
+        <p:nvSpPr>
+          <p:cNvPr id="41" name="Rectangle 40">
+            <a:extLst>
+              <a:ext uri="{FF2B5EF4-FFF2-40B4-BE49-F238E27FC236}">
+                <a16:creationId xmlns:a16="http://schemas.microsoft.com/office/drawing/2014/main" id="{FD3DC1F7-191E-3E9A-1792-C355277DE69D}"/>
+              </a:ext>
+            </a:extLst>
+          </p:cNvPr>
+          <p:cNvSpPr/>
+          <p:nvPr/>
+        </p:nvSpPr>
+        <p:spPr>
+          <a:xfrm>
+            <a:off x="4479589" y="2209800"/>
+            <a:ext cx="86061" cy="143138"/>
+          </a:xfrm>
+          <a:custGeom>
+            <a:avLst/>
+            <a:gdLst>
+              <a:gd name="csX0" fmla="*/ 0 w 86061"/>
+              <a:gd name="csY0" fmla="*/ 0 h 124315"/>
+              <a:gd name="csX1" fmla="*/ 86061 w 86061"/>
+              <a:gd name="csY1" fmla="*/ 0 h 124315"/>
+              <a:gd name="csX2" fmla="*/ 86061 w 86061"/>
+              <a:gd name="csY2" fmla="*/ 124315 h 124315"/>
+              <a:gd name="csX3" fmla="*/ 0 w 86061"/>
+              <a:gd name="csY3" fmla="*/ 124315 h 124315"/>
+              <a:gd name="csX4" fmla="*/ 0 w 86061"/>
+              <a:gd name="csY4" fmla="*/ 0 h 124315"/>
+              <a:gd name="csX0" fmla="*/ 0 w 86061"/>
+              <a:gd name="csY0" fmla="*/ 0 h 124315"/>
+              <a:gd name="csX1" fmla="*/ 73361 w 86061"/>
+              <a:gd name="csY1" fmla="*/ 6350 h 124315"/>
+              <a:gd name="csX2" fmla="*/ 86061 w 86061"/>
+              <a:gd name="csY2" fmla="*/ 124315 h 124315"/>
+              <a:gd name="csX3" fmla="*/ 0 w 86061"/>
+              <a:gd name="csY3" fmla="*/ 124315 h 124315"/>
+              <a:gd name="csX4" fmla="*/ 0 w 86061"/>
+              <a:gd name="csY4" fmla="*/ 0 h 124315"/>
+            </a:gdLst>
+            <a:ahLst/>
+            <a:cxnLst>
+              <a:cxn ang="0">
+                <a:pos x="csX0" y="csY0"/>
+              </a:cxn>
+              <a:cxn ang="0">
+                <a:pos x="csX1" y="csY1"/>
+              </a:cxn>
+              <a:cxn ang="0">
+                <a:pos x="csX2" y="csY2"/>
+              </a:cxn>
+              <a:cxn ang="0">
+                <a:pos x="csX3" y="csY3"/>
+              </a:cxn>
+              <a:cxn ang="0">
+                <a:pos x="csX4" y="csY4"/>
+              </a:cxn>
+            </a:cxnLst>
+            <a:rect l="l" t="t" r="r" b="b"/>
+            <a:pathLst>
+              <a:path w="86061" h="124315">
+                <a:moveTo>
+                  <a:pt x="0" y="0"/>
+                </a:moveTo>
+                <a:lnTo>
+                  <a:pt x="73361" y="6350"/>
+                </a:lnTo>
+                <a:lnTo>
+                  <a:pt x="86061" y="124315"/>
+                </a:lnTo>
+                <a:lnTo>
+                  <a:pt x="0" y="124315"/>
+                </a:lnTo>
+                <a:lnTo>
+                  <a:pt x="0" y="0"/>
+                </a:lnTo>
+                <a:close/>
+              </a:path>
+            </a:pathLst>
+          </a:custGeom>
+          <a:solidFill>
+            <a:srgbClr val="FFC000"/>
+          </a:solidFill>
+          <a:ln w="6350"/>
+        </p:spPr>
+        <p:style>
+          <a:lnRef idx="2">
+            <a:schemeClr val="accent1">
+              <a:shade val="15000"/>
+            </a:schemeClr>
+          </a:lnRef>
+          <a:fillRef idx="1">
+            <a:schemeClr val="accent1"/>
+          </a:fillRef>
+          <a:effectRef idx="0">
+            <a:schemeClr val="accent1"/>
+          </a:effectRef>
+          <a:fontRef idx="minor">
+            <a:schemeClr val="lt1"/>
+          </a:fontRef>
+        </p:style>
+        <p:txBody>
+          <a:bodyPr rtlCol="0" anchor="ctr"/>
+          <a:lstStyle/>
+          <a:p>
+            <a:pPr algn="ctr"/>
+            <a:endParaRPr lang="en-US"/>
+          </a:p>
+        </p:txBody>
+      </p:sp>
+      <p:sp>
+        <p:nvSpPr>
+          <p:cNvPr id="42" name="Rectangle 41">
+            <a:extLst>
+              <a:ext uri="{FF2B5EF4-FFF2-40B4-BE49-F238E27FC236}">
+                <a16:creationId xmlns:a16="http://schemas.microsoft.com/office/drawing/2014/main" id="{47D3C7BA-1431-BA7C-724B-6441AEE015A0}"/>
+              </a:ext>
+            </a:extLst>
+          </p:cNvPr>
+          <p:cNvSpPr/>
+          <p:nvPr/>
+        </p:nvSpPr>
+        <p:spPr>
+          <a:xfrm>
+            <a:off x="4485939" y="1922582"/>
+            <a:ext cx="54311" cy="301011"/>
+          </a:xfrm>
+          <a:custGeom>
+            <a:avLst/>
+            <a:gdLst>
+              <a:gd name="csX0" fmla="*/ 0 w 86061"/>
+              <a:gd name="csY0" fmla="*/ 0 h 301011"/>
+              <a:gd name="csX1" fmla="*/ 86061 w 86061"/>
+              <a:gd name="csY1" fmla="*/ 0 h 301011"/>
+              <a:gd name="csX2" fmla="*/ 86061 w 86061"/>
+              <a:gd name="csY2" fmla="*/ 301011 h 301011"/>
+              <a:gd name="csX3" fmla="*/ 0 w 86061"/>
+              <a:gd name="csY3" fmla="*/ 301011 h 301011"/>
+              <a:gd name="csX4" fmla="*/ 0 w 86061"/>
+              <a:gd name="csY4" fmla="*/ 0 h 301011"/>
+              <a:gd name="csX0" fmla="*/ 0 w 86061"/>
+              <a:gd name="csY0" fmla="*/ 0 h 301011"/>
+              <a:gd name="csX1" fmla="*/ 6686 w 86061"/>
+              <a:gd name="csY1" fmla="*/ 6350 h 301011"/>
+              <a:gd name="csX2" fmla="*/ 86061 w 86061"/>
+              <a:gd name="csY2" fmla="*/ 301011 h 301011"/>
+              <a:gd name="csX3" fmla="*/ 0 w 86061"/>
+              <a:gd name="csY3" fmla="*/ 301011 h 301011"/>
+              <a:gd name="csX4" fmla="*/ 0 w 86061"/>
+              <a:gd name="csY4" fmla="*/ 0 h 301011"/>
+              <a:gd name="csX0" fmla="*/ 0 w 54311"/>
+              <a:gd name="csY0" fmla="*/ 0 h 301011"/>
+              <a:gd name="csX1" fmla="*/ 6686 w 54311"/>
+              <a:gd name="csY1" fmla="*/ 6350 h 301011"/>
+              <a:gd name="csX2" fmla="*/ 54311 w 54311"/>
+              <a:gd name="csY2" fmla="*/ 288311 h 301011"/>
+              <a:gd name="csX3" fmla="*/ 0 w 54311"/>
+              <a:gd name="csY3" fmla="*/ 301011 h 301011"/>
+              <a:gd name="csX4" fmla="*/ 0 w 54311"/>
+              <a:gd name="csY4" fmla="*/ 0 h 301011"/>
+            </a:gdLst>
+            <a:ahLst/>
+            <a:cxnLst>
+              <a:cxn ang="0">
+                <a:pos x="csX0" y="csY0"/>
+              </a:cxn>
+              <a:cxn ang="0">
+                <a:pos x="csX1" y="csY1"/>
+              </a:cxn>
+              <a:cxn ang="0">
+                <a:pos x="csX2" y="csY2"/>
+              </a:cxn>
+              <a:cxn ang="0">
+                <a:pos x="csX3" y="csY3"/>
+              </a:cxn>
+              <a:cxn ang="0">
+                <a:pos x="csX4" y="csY4"/>
+              </a:cxn>
+            </a:cxnLst>
+            <a:rect l="l" t="t" r="r" b="b"/>
+            <a:pathLst>
+              <a:path w="54311" h="301011">
+                <a:moveTo>
+                  <a:pt x="0" y="0"/>
+                </a:moveTo>
+                <a:lnTo>
+                  <a:pt x="6686" y="6350"/>
+                </a:lnTo>
+                <a:lnTo>
+                  <a:pt x="54311" y="288311"/>
+                </a:lnTo>
+                <a:lnTo>
+                  <a:pt x="0" y="301011"/>
+                </a:lnTo>
+                <a:lnTo>
+                  <a:pt x="0" y="0"/>
+                </a:lnTo>
+                <a:close/>
+              </a:path>
+            </a:pathLst>
+          </a:custGeom>
+          <a:solidFill>
+            <a:srgbClr val="29FFDD"/>
+          </a:solidFill>
+          <a:ln w="6350"/>
+        </p:spPr>
+        <p:style>
+          <a:lnRef idx="2">
+            <a:schemeClr val="accent1">
+              <a:shade val="15000"/>
+            </a:schemeClr>
+          </a:lnRef>
+          <a:fillRef idx="1">
+            <a:schemeClr val="accent1"/>
+          </a:fillRef>
+          <a:effectRef idx="0">
+            <a:schemeClr val="accent1"/>
+          </a:effectRef>
+          <a:fontRef idx="minor">
+            <a:schemeClr val="lt1"/>
+          </a:fontRef>
+        </p:style>
+        <p:txBody>
+          <a:bodyPr rtlCol="0" anchor="ctr"/>
+          <a:lstStyle/>
+          <a:p>
+            <a:pPr algn="ctr"/>
+            <a:endParaRPr lang="en-US"/>
+          </a:p>
+        </p:txBody>
+      </p:sp>
+    </p:spTree>
+    <p:extLst>
+      <p:ext uri="{BB962C8B-B14F-4D97-AF65-F5344CB8AC3E}">
+        <p14:creationId xmlns:p14="http://schemas.microsoft.com/office/powerpoint/2010/main" val="3984114281"/>
+      </p:ext>
+    </p:extLst>
+  </p:cSld>
+  <p:clrMapOvr>
+    <a:masterClrMapping/>
+  </p:clrMapOvr>
+</p:sld>
+</file>
+
+<file path=ppt/slides/slide11.xml><?xml version="1.0" encoding="utf-8"?>
+<p:sld xmlns:a="http://schemas.openxmlformats.org/drawingml/2006/main" xmlns:r="http://schemas.openxmlformats.org/officeDocument/2006/relationships" xmlns:p="http://schemas.openxmlformats.org/presentationml/2006/main">
+  <p:cSld>
+    <p:spTree>
+      <p:nvGrpSpPr>
+        <p:cNvPr id="1" name=""/>
+        <p:cNvGrpSpPr/>
+        <p:nvPr/>
+      </p:nvGrpSpPr>
+      <p:grpSpPr>
+        <a:xfrm>
+          <a:off x="0" y="0"/>
+          <a:ext cx="0" cy="0"/>
+          <a:chOff x="0" y="0"/>
+          <a:chExt cx="0" cy="0"/>
+        </a:xfrm>
+      </p:grpSpPr>
       <p:grpSp>
         <p:nvGrpSpPr>
           <p:cNvPr id="26" name="Group 25">
@@ -4873,7 +6139,7 @@
 </p:sld>
 </file>
 
-<file path=ppt/slides/slide11.xml><?xml version="1.0" encoding="utf-8"?>
+<file path=ppt/slides/slide12.xml><?xml version="1.0" encoding="utf-8"?>
 <p:sld xmlns:a="http://schemas.openxmlformats.org/drawingml/2006/main" xmlns:r="http://schemas.openxmlformats.org/officeDocument/2006/relationships" xmlns:p="http://schemas.openxmlformats.org/presentationml/2006/main">
   <p:cSld>
     <p:spTree>
@@ -7273,7 +8539,7 @@
 </p:sld>
 </file>
 
-<file path=ppt/slides/slide12.xml><?xml version="1.0" encoding="utf-8"?>
+<file path=ppt/slides/slide13.xml><?xml version="1.0" encoding="utf-8"?>
 <p:sld xmlns:a="http://schemas.openxmlformats.org/drawingml/2006/main" xmlns:r="http://schemas.openxmlformats.org/officeDocument/2006/relationships" xmlns:p="http://schemas.openxmlformats.org/presentationml/2006/main">
   <p:cSld>
     <p:spTree>
@@ -9006,7 +10272,7 @@
 </p:sld>
 </file>
 
-<file path=ppt/slides/slide13.xml><?xml version="1.0" encoding="utf-8"?>
+<file path=ppt/slides/slide14.xml><?xml version="1.0" encoding="utf-8"?>
 <p:sld xmlns:a="http://schemas.openxmlformats.org/drawingml/2006/main" xmlns:r="http://schemas.openxmlformats.org/officeDocument/2006/relationships" xmlns:p="http://schemas.openxmlformats.org/presentationml/2006/main">
   <p:cSld>
     <p:spTree>
@@ -10535,7 +11801,7 @@
 </p:sld>
 </file>
 
-<file path=ppt/slides/slide14.xml><?xml version="1.0" encoding="utf-8"?>
+<file path=ppt/slides/slide15.xml><?xml version="1.0" encoding="utf-8"?>
 <p:sld xmlns:a="http://schemas.openxmlformats.org/drawingml/2006/main" xmlns:r="http://schemas.openxmlformats.org/officeDocument/2006/relationships" xmlns:p="http://schemas.openxmlformats.org/presentationml/2006/main">
   <p:cSld>
     <p:spTree>
@@ -10595,7 +11861,7 @@
 </p:sld>
 </file>
 
-<file path=ppt/slides/slide15.xml><?xml version="1.0" encoding="utf-8"?>
+<file path=ppt/slides/slide16.xml><?xml version="1.0" encoding="utf-8"?>
 <p:sld xmlns:a="http://schemas.openxmlformats.org/drawingml/2006/main" xmlns:r="http://schemas.openxmlformats.org/officeDocument/2006/relationships" xmlns:p="http://schemas.openxmlformats.org/presentationml/2006/main">
   <p:cSld>
     <p:spTree>
@@ -25732,10 +26998,10 @@
       </p:grpSpPr>
       <p:grpSp>
         <p:nvGrpSpPr>
-          <p:cNvPr id="42" name="Group 41">
+          <p:cNvPr id="149" name="Group 148">
             <a:extLst>
               <a:ext uri="{FF2B5EF4-FFF2-40B4-BE49-F238E27FC236}">
-                <a16:creationId xmlns:a16="http://schemas.microsoft.com/office/drawing/2014/main" id="{A8319626-4FCB-503E-9C6A-5FE36B58081C}"/>
+                <a16:creationId xmlns:a16="http://schemas.microsoft.com/office/drawing/2014/main" id="{B5BCEF2C-F326-C0AD-3E90-8917C7947A22}"/>
               </a:ext>
             </a:extLst>
           </p:cNvPr>
@@ -25744,1295 +27010,18 @@
         </p:nvGrpSpPr>
         <p:grpSpPr>
           <a:xfrm>
-            <a:off x="1410182" y="460978"/>
-            <a:ext cx="5538805" cy="3852589"/>
-            <a:chOff x="1410182" y="460978"/>
-            <a:chExt cx="5538805" cy="3852589"/>
+            <a:off x="323410" y="336890"/>
+            <a:ext cx="4320600" cy="4100250"/>
+            <a:chOff x="323410" y="336890"/>
+            <a:chExt cx="4320600" cy="4100250"/>
           </a:xfrm>
         </p:grpSpPr>
-        <p:cxnSp>
-          <p:nvCxnSpPr>
-            <p:cNvPr id="3" name="Straight Connector 2">
-              <a:extLst>
-                <a:ext uri="{FF2B5EF4-FFF2-40B4-BE49-F238E27FC236}">
-                  <a16:creationId xmlns:a16="http://schemas.microsoft.com/office/drawing/2014/main" id="{A5210F3F-9B1E-FE2D-FE21-A1A8443A15B4}"/>
-                </a:ext>
-              </a:extLst>
-            </p:cNvPr>
-            <p:cNvCxnSpPr>
-              <a:cxnSpLocks/>
-            </p:cNvCxnSpPr>
-            <p:nvPr/>
-          </p:nvCxnSpPr>
-          <p:spPr>
-            <a:xfrm>
-              <a:off x="3253563" y="1403498"/>
-              <a:ext cx="0" cy="1020725"/>
-            </a:xfrm>
-            <a:prstGeom prst="line">
-              <a:avLst/>
-            </a:prstGeom>
-            <a:ln>
-              <a:tailEnd type="triangle" w="lg" len="lg"/>
-            </a:ln>
-          </p:spPr>
-          <p:style>
-            <a:lnRef idx="2">
-              <a:schemeClr val="accent1"/>
-            </a:lnRef>
-            <a:fillRef idx="0">
-              <a:schemeClr val="accent1"/>
-            </a:fillRef>
-            <a:effectRef idx="1">
-              <a:schemeClr val="accent1"/>
-            </a:effectRef>
-            <a:fontRef idx="minor">
-              <a:schemeClr val="tx1"/>
-            </a:fontRef>
-          </p:style>
-        </p:cxnSp>
-        <p:pic>
-          <p:nvPicPr>
-            <p:cNvPr id="6" name="Picture 5">
-              <a:extLst>
-                <a:ext uri="{FF2B5EF4-FFF2-40B4-BE49-F238E27FC236}">
-                  <a16:creationId xmlns:a16="http://schemas.microsoft.com/office/drawing/2014/main" id="{37AD9660-6959-F528-243D-4BA43EFE633F}"/>
-                </a:ext>
-              </a:extLst>
-            </p:cNvPr>
-            <p:cNvPicPr>
-              <a:picLocks noChangeAspect="1"/>
-            </p:cNvPicPr>
-            <p:nvPr/>
-          </p:nvPicPr>
-          <p:blipFill>
-            <a:blip r:embed="rId2"/>
-            <a:stretch>
-              <a:fillRect/>
-            </a:stretch>
-          </p:blipFill>
-          <p:spPr>
-            <a:xfrm>
-              <a:off x="2814823" y="1018067"/>
-              <a:ext cx="622300" cy="228600"/>
-            </a:xfrm>
-            <a:prstGeom prst="rect">
-              <a:avLst/>
-            </a:prstGeom>
-          </p:spPr>
-        </p:pic>
-        <p:pic>
-          <p:nvPicPr>
-            <p:cNvPr id="8" name="Picture 7">
-              <a:extLst>
-                <a:ext uri="{FF2B5EF4-FFF2-40B4-BE49-F238E27FC236}">
-                  <a16:creationId xmlns:a16="http://schemas.microsoft.com/office/drawing/2014/main" id="{2DD2B8C9-072D-C504-F2AC-E11465F9FBC5}"/>
-                </a:ext>
-              </a:extLst>
-            </p:cNvPr>
-            <p:cNvPicPr>
-              <a:picLocks noChangeAspect="1"/>
-            </p:cNvPicPr>
-            <p:nvPr/>
-          </p:nvPicPr>
-          <p:blipFill>
-            <a:blip r:embed="rId3"/>
-            <a:stretch>
-              <a:fillRect/>
-            </a:stretch>
-          </p:blipFill>
-          <p:spPr>
-            <a:xfrm>
-              <a:off x="3143544" y="4059567"/>
-              <a:ext cx="241300" cy="254000"/>
-            </a:xfrm>
-            <a:prstGeom prst="rect">
-              <a:avLst/>
-            </a:prstGeom>
-          </p:spPr>
-        </p:pic>
-        <p:cxnSp>
-          <p:nvCxnSpPr>
-            <p:cNvPr id="9" name="Straight Connector 8">
-              <a:extLst>
-                <a:ext uri="{FF2B5EF4-FFF2-40B4-BE49-F238E27FC236}">
-                  <a16:creationId xmlns:a16="http://schemas.microsoft.com/office/drawing/2014/main" id="{EECA1E16-15D0-B71A-FE7B-3CE06BC1E8DD}"/>
-                </a:ext>
-              </a:extLst>
-            </p:cNvPr>
-            <p:cNvCxnSpPr>
-              <a:cxnSpLocks/>
-            </p:cNvCxnSpPr>
-            <p:nvPr/>
-          </p:nvCxnSpPr>
-          <p:spPr>
-            <a:xfrm>
-              <a:off x="3253563" y="2918637"/>
-              <a:ext cx="0" cy="1020725"/>
-            </a:xfrm>
-            <a:prstGeom prst="line">
-              <a:avLst/>
-            </a:prstGeom>
-            <a:ln>
-              <a:tailEnd type="triangle" w="lg" len="lg"/>
-            </a:ln>
-          </p:spPr>
-          <p:style>
-            <a:lnRef idx="2">
-              <a:schemeClr val="accent1"/>
-            </a:lnRef>
-            <a:fillRef idx="0">
-              <a:schemeClr val="accent1"/>
-            </a:fillRef>
-            <a:effectRef idx="1">
-              <a:schemeClr val="accent1"/>
-            </a:effectRef>
-            <a:fontRef idx="minor">
-              <a:schemeClr val="tx1"/>
-            </a:fontRef>
-          </p:style>
-        </p:cxnSp>
-        <p:sp>
-          <p:nvSpPr>
-            <p:cNvPr id="10" name="Left Brace 9">
-              <a:extLst>
-                <a:ext uri="{FF2B5EF4-FFF2-40B4-BE49-F238E27FC236}">
-                  <a16:creationId xmlns:a16="http://schemas.microsoft.com/office/drawing/2014/main" id="{54D325D0-45BF-6FDF-A246-3DC82BED8F8F}"/>
-                </a:ext>
-              </a:extLst>
-            </p:cNvPr>
-            <p:cNvSpPr/>
-            <p:nvPr/>
-          </p:nvSpPr>
-          <p:spPr>
-            <a:xfrm>
-              <a:off x="2062719" y="1217425"/>
-              <a:ext cx="580750" cy="1464635"/>
-            </a:xfrm>
-            <a:prstGeom prst="leftBrace">
-              <a:avLst/>
-            </a:prstGeom>
-          </p:spPr>
-          <p:style>
-            <a:lnRef idx="2">
-              <a:schemeClr val="accent1"/>
-            </a:lnRef>
-            <a:fillRef idx="0">
-              <a:schemeClr val="accent1"/>
-            </a:fillRef>
-            <a:effectRef idx="1">
-              <a:schemeClr val="accent1"/>
-            </a:effectRef>
-            <a:fontRef idx="minor">
-              <a:schemeClr val="tx1"/>
-            </a:fontRef>
-          </p:style>
-          <p:txBody>
-            <a:bodyPr rtlCol="0" anchor="ctr"/>
-            <a:lstStyle/>
-            <a:p>
-              <a:pPr algn="ctr"/>
-              <a:endParaRPr lang="en-US"/>
-            </a:p>
-          </p:txBody>
-        </p:sp>
-        <p:sp>
-          <p:nvSpPr>
-            <p:cNvPr id="11" name="Left Brace 10">
-              <a:extLst>
-                <a:ext uri="{FF2B5EF4-FFF2-40B4-BE49-F238E27FC236}">
-                  <a16:creationId xmlns:a16="http://schemas.microsoft.com/office/drawing/2014/main" id="{3EE77622-4949-7011-3702-7C68BEEB4E83}"/>
-                </a:ext>
-              </a:extLst>
-            </p:cNvPr>
-            <p:cNvSpPr/>
-            <p:nvPr/>
-          </p:nvSpPr>
-          <p:spPr>
-            <a:xfrm>
-              <a:off x="2066260" y="2783952"/>
-              <a:ext cx="580750" cy="1275615"/>
-            </a:xfrm>
-            <a:prstGeom prst="leftBrace">
-              <a:avLst/>
-            </a:prstGeom>
-          </p:spPr>
-          <p:style>
-            <a:lnRef idx="2">
-              <a:schemeClr val="accent1"/>
-            </a:lnRef>
-            <a:fillRef idx="0">
-              <a:schemeClr val="accent1"/>
-            </a:fillRef>
-            <a:effectRef idx="1">
-              <a:schemeClr val="accent1"/>
-            </a:effectRef>
-            <a:fontRef idx="minor">
-              <a:schemeClr val="tx1"/>
-            </a:fontRef>
-          </p:style>
-          <p:txBody>
-            <a:bodyPr rtlCol="0" anchor="ctr"/>
-            <a:lstStyle/>
-            <a:p>
-              <a:pPr algn="ctr"/>
-              <a:endParaRPr lang="en-US"/>
-            </a:p>
-          </p:txBody>
-        </p:sp>
-        <p:pic>
-          <p:nvPicPr>
-            <p:cNvPr id="13" name="Picture 12">
-              <a:extLst>
-                <a:ext uri="{FF2B5EF4-FFF2-40B4-BE49-F238E27FC236}">
-                  <a16:creationId xmlns:a16="http://schemas.microsoft.com/office/drawing/2014/main" id="{D6E3EBFE-FCE9-0AEE-9CBB-61AD22112A97}"/>
-                </a:ext>
-              </a:extLst>
-            </p:cNvPr>
-            <p:cNvPicPr>
-              <a:picLocks noChangeAspect="1"/>
-            </p:cNvPicPr>
-            <p:nvPr/>
-          </p:nvPicPr>
-          <p:blipFill>
-            <a:blip r:embed="rId4"/>
-            <a:stretch>
-              <a:fillRect/>
-            </a:stretch>
-          </p:blipFill>
-          <p:spPr>
-            <a:xfrm>
-              <a:off x="1744322" y="3320901"/>
-              <a:ext cx="254000" cy="152400"/>
-            </a:xfrm>
-            <a:prstGeom prst="rect">
-              <a:avLst/>
-            </a:prstGeom>
-          </p:spPr>
-        </p:pic>
-        <p:cxnSp>
-          <p:nvCxnSpPr>
-            <p:cNvPr id="18" name="Straight Connector 17">
-              <a:extLst>
-                <a:ext uri="{FF2B5EF4-FFF2-40B4-BE49-F238E27FC236}">
-                  <a16:creationId xmlns:a16="http://schemas.microsoft.com/office/drawing/2014/main" id="{35C09E97-224A-24BD-78A1-6993C00D77FB}"/>
-                </a:ext>
-              </a:extLst>
-            </p:cNvPr>
-            <p:cNvCxnSpPr>
-              <a:cxnSpLocks/>
-            </p:cNvCxnSpPr>
-            <p:nvPr/>
-          </p:nvCxnSpPr>
-          <p:spPr>
-            <a:xfrm>
-              <a:off x="6253335" y="1393852"/>
-              <a:ext cx="0" cy="834654"/>
-            </a:xfrm>
-            <a:prstGeom prst="line">
-              <a:avLst/>
-            </a:prstGeom>
-            <a:ln>
-              <a:tailEnd type="triangle" w="lg" len="lg"/>
-            </a:ln>
-          </p:spPr>
-          <p:style>
-            <a:lnRef idx="2">
-              <a:schemeClr val="accent1"/>
-            </a:lnRef>
-            <a:fillRef idx="0">
-              <a:schemeClr val="accent1"/>
-            </a:fillRef>
-            <a:effectRef idx="1">
-              <a:schemeClr val="accent1"/>
-            </a:effectRef>
-            <a:fontRef idx="minor">
-              <a:schemeClr val="tx1"/>
-            </a:fontRef>
-          </p:style>
-        </p:cxnSp>
-        <p:pic>
-          <p:nvPicPr>
-            <p:cNvPr id="19" name="Picture 18">
-              <a:extLst>
-                <a:ext uri="{FF2B5EF4-FFF2-40B4-BE49-F238E27FC236}">
-                  <a16:creationId xmlns:a16="http://schemas.microsoft.com/office/drawing/2014/main" id="{FAC9AC2E-ECEB-6517-5F73-4BCC387B36E5}"/>
-                </a:ext>
-              </a:extLst>
-            </p:cNvPr>
-            <p:cNvPicPr>
-              <a:picLocks noChangeAspect="1"/>
-            </p:cNvPicPr>
-            <p:nvPr/>
-          </p:nvPicPr>
-          <p:blipFill>
-            <a:blip r:embed="rId2"/>
-            <a:stretch>
-              <a:fillRect/>
-            </a:stretch>
-          </p:blipFill>
-          <p:spPr>
-            <a:xfrm>
-              <a:off x="5814595" y="1008421"/>
-              <a:ext cx="622300" cy="228600"/>
-            </a:xfrm>
-            <a:prstGeom prst="rect">
-              <a:avLst/>
-            </a:prstGeom>
-          </p:spPr>
-        </p:pic>
-        <p:pic>
-          <p:nvPicPr>
-            <p:cNvPr id="21" name="Picture 20">
-              <a:extLst>
-                <a:ext uri="{FF2B5EF4-FFF2-40B4-BE49-F238E27FC236}">
-                  <a16:creationId xmlns:a16="http://schemas.microsoft.com/office/drawing/2014/main" id="{E8208DA6-195F-2140-50B8-7D581117DC6C}"/>
-                </a:ext>
-              </a:extLst>
-            </p:cNvPr>
-            <p:cNvPicPr>
-              <a:picLocks noChangeAspect="1"/>
-            </p:cNvPicPr>
-            <p:nvPr/>
-          </p:nvPicPr>
-          <p:blipFill>
-            <a:blip r:embed="rId3"/>
-            <a:stretch>
-              <a:fillRect/>
-            </a:stretch>
-          </p:blipFill>
-          <p:spPr>
-            <a:xfrm>
-              <a:off x="6143316" y="4049921"/>
-              <a:ext cx="241300" cy="254000"/>
-            </a:xfrm>
-            <a:prstGeom prst="rect">
-              <a:avLst/>
-            </a:prstGeom>
-          </p:spPr>
-        </p:pic>
-        <p:cxnSp>
-          <p:nvCxnSpPr>
-            <p:cNvPr id="22" name="Straight Connector 21">
-              <a:extLst>
-                <a:ext uri="{FF2B5EF4-FFF2-40B4-BE49-F238E27FC236}">
-                  <a16:creationId xmlns:a16="http://schemas.microsoft.com/office/drawing/2014/main" id="{B7D1F412-702C-A148-FEE9-77F3C70D88B3}"/>
-                </a:ext>
-              </a:extLst>
-            </p:cNvPr>
-            <p:cNvCxnSpPr>
-              <a:cxnSpLocks/>
-            </p:cNvCxnSpPr>
-            <p:nvPr/>
-          </p:nvCxnSpPr>
-          <p:spPr>
-            <a:xfrm>
-              <a:off x="6253335" y="2682060"/>
-              <a:ext cx="0" cy="1247656"/>
-            </a:xfrm>
-            <a:prstGeom prst="line">
-              <a:avLst/>
-            </a:prstGeom>
-            <a:ln>
-              <a:tailEnd type="triangle" w="lg" len="lg"/>
-            </a:ln>
-          </p:spPr>
-          <p:style>
-            <a:lnRef idx="2">
-              <a:schemeClr val="accent1"/>
-            </a:lnRef>
-            <a:fillRef idx="0">
-              <a:schemeClr val="accent1"/>
-            </a:fillRef>
-            <a:effectRef idx="1">
-              <a:schemeClr val="accent1"/>
-            </a:effectRef>
-            <a:fontRef idx="minor">
-              <a:schemeClr val="tx1"/>
-            </a:fontRef>
-          </p:style>
-        </p:cxnSp>
-        <p:sp>
-          <p:nvSpPr>
-            <p:cNvPr id="23" name="Left Brace 22">
-              <a:extLst>
-                <a:ext uri="{FF2B5EF4-FFF2-40B4-BE49-F238E27FC236}">
-                  <a16:creationId xmlns:a16="http://schemas.microsoft.com/office/drawing/2014/main" id="{086EA95A-07D1-7963-C614-13E302030B0B}"/>
-                </a:ext>
-              </a:extLst>
-            </p:cNvPr>
-            <p:cNvSpPr/>
-            <p:nvPr/>
-          </p:nvSpPr>
-          <p:spPr>
-            <a:xfrm>
-              <a:off x="5062491" y="1207780"/>
-              <a:ext cx="580750" cy="1020726"/>
-            </a:xfrm>
-            <a:prstGeom prst="leftBrace">
-              <a:avLst/>
-            </a:prstGeom>
-          </p:spPr>
-          <p:style>
-            <a:lnRef idx="2">
-              <a:schemeClr val="accent1"/>
-            </a:lnRef>
-            <a:fillRef idx="0">
-              <a:schemeClr val="accent1"/>
-            </a:fillRef>
-            <a:effectRef idx="1">
-              <a:schemeClr val="accent1"/>
-            </a:effectRef>
-            <a:fontRef idx="minor">
-              <a:schemeClr val="tx1"/>
-            </a:fontRef>
-          </p:style>
-          <p:txBody>
-            <a:bodyPr rtlCol="0" anchor="ctr"/>
-            <a:lstStyle/>
-            <a:p>
-              <a:pPr algn="ctr"/>
-              <a:endParaRPr lang="en-US"/>
-            </a:p>
-          </p:txBody>
-        </p:sp>
-        <p:sp>
-          <p:nvSpPr>
-            <p:cNvPr id="24" name="Left Brace 23">
-              <a:extLst>
-                <a:ext uri="{FF2B5EF4-FFF2-40B4-BE49-F238E27FC236}">
-                  <a16:creationId xmlns:a16="http://schemas.microsoft.com/office/drawing/2014/main" id="{7B3FCEBA-076B-BCB3-371D-6D95B1746A63}"/>
-                </a:ext>
-              </a:extLst>
-            </p:cNvPr>
-            <p:cNvSpPr/>
-            <p:nvPr/>
-          </p:nvSpPr>
-          <p:spPr>
-            <a:xfrm>
-              <a:off x="5066032" y="2424224"/>
-              <a:ext cx="538608" cy="1625698"/>
-            </a:xfrm>
-            <a:prstGeom prst="leftBrace">
-              <a:avLst/>
-            </a:prstGeom>
-          </p:spPr>
-          <p:style>
-            <a:lnRef idx="2">
-              <a:schemeClr val="accent1"/>
-            </a:lnRef>
-            <a:fillRef idx="0">
-              <a:schemeClr val="accent1"/>
-            </a:fillRef>
-            <a:effectRef idx="1">
-              <a:schemeClr val="accent1"/>
-            </a:effectRef>
-            <a:fontRef idx="minor">
-              <a:schemeClr val="tx1"/>
-            </a:fontRef>
-          </p:style>
-          <p:txBody>
-            <a:bodyPr rtlCol="0" anchor="ctr"/>
-            <a:lstStyle/>
-            <a:p>
-              <a:pPr algn="ctr"/>
-              <a:endParaRPr lang="en-US"/>
-            </a:p>
-          </p:txBody>
-        </p:sp>
-        <p:pic>
-          <p:nvPicPr>
-            <p:cNvPr id="26" name="Picture 25">
-              <a:extLst>
-                <a:ext uri="{FF2B5EF4-FFF2-40B4-BE49-F238E27FC236}">
-                  <a16:creationId xmlns:a16="http://schemas.microsoft.com/office/drawing/2014/main" id="{763406FD-0E73-7795-84C0-5CE25B15547A}"/>
-                </a:ext>
-              </a:extLst>
-            </p:cNvPr>
-            <p:cNvPicPr>
-              <a:picLocks noChangeAspect="1"/>
-            </p:cNvPicPr>
-            <p:nvPr/>
-          </p:nvPicPr>
-          <p:blipFill>
-            <a:blip r:embed="rId4"/>
-            <a:stretch>
-              <a:fillRect/>
-            </a:stretch>
-          </p:blipFill>
-          <p:spPr>
-            <a:xfrm>
-              <a:off x="4709369" y="3160784"/>
-              <a:ext cx="254000" cy="152400"/>
-            </a:xfrm>
-            <a:prstGeom prst="rect">
-              <a:avLst/>
-            </a:prstGeom>
-          </p:spPr>
-        </p:pic>
-        <p:pic>
-          <p:nvPicPr>
-            <p:cNvPr id="31" name="Picture 30">
-              <a:extLst>
-                <a:ext uri="{FF2B5EF4-FFF2-40B4-BE49-F238E27FC236}">
-                  <a16:creationId xmlns:a16="http://schemas.microsoft.com/office/drawing/2014/main" id="{231EC986-EE35-18A2-8850-8CE21BE74CF5}"/>
-                </a:ext>
-              </a:extLst>
-            </p:cNvPr>
-            <p:cNvPicPr>
-              <a:picLocks noChangeAspect="1"/>
-            </p:cNvPicPr>
-            <p:nvPr/>
-          </p:nvPicPr>
-          <p:blipFill>
-            <a:blip r:embed="rId5"/>
-            <a:stretch>
-              <a:fillRect/>
-            </a:stretch>
-          </p:blipFill>
-          <p:spPr>
-            <a:xfrm>
-              <a:off x="6380224" y="1691270"/>
-              <a:ext cx="203200" cy="165100"/>
-            </a:xfrm>
-            <a:prstGeom prst="rect">
-              <a:avLst/>
-            </a:prstGeom>
-          </p:spPr>
-        </p:pic>
-        <p:pic>
-          <p:nvPicPr>
-            <p:cNvPr id="32" name="Picture 31">
-              <a:extLst>
-                <a:ext uri="{FF2B5EF4-FFF2-40B4-BE49-F238E27FC236}">
-                  <a16:creationId xmlns:a16="http://schemas.microsoft.com/office/drawing/2014/main" id="{118FADC2-DB57-9A9A-6850-49D610175A05}"/>
-                </a:ext>
-              </a:extLst>
-            </p:cNvPr>
-            <p:cNvPicPr>
-              <a:picLocks noChangeAspect="1"/>
-            </p:cNvPicPr>
-            <p:nvPr/>
-          </p:nvPicPr>
-          <p:blipFill>
-            <a:blip r:embed="rId5"/>
-            <a:stretch>
-              <a:fillRect/>
-            </a:stretch>
-          </p:blipFill>
-          <p:spPr>
-            <a:xfrm>
-              <a:off x="6370579" y="3035861"/>
-              <a:ext cx="203200" cy="165100"/>
-            </a:xfrm>
-            <a:prstGeom prst="rect">
-              <a:avLst/>
-            </a:prstGeom>
-          </p:spPr>
-        </p:pic>
-        <p:pic>
-          <p:nvPicPr>
-            <p:cNvPr id="33" name="Picture 32">
-              <a:extLst>
-                <a:ext uri="{FF2B5EF4-FFF2-40B4-BE49-F238E27FC236}">
-                  <a16:creationId xmlns:a16="http://schemas.microsoft.com/office/drawing/2014/main" id="{C7E7297D-8889-6EE7-E871-F63363EC6D33}"/>
-                </a:ext>
-              </a:extLst>
-            </p:cNvPr>
-            <p:cNvPicPr>
-              <a:picLocks noChangeAspect="1"/>
-            </p:cNvPicPr>
-            <p:nvPr/>
-          </p:nvPicPr>
-          <p:blipFill>
-            <a:blip r:embed="rId6"/>
-            <a:stretch>
-              <a:fillRect/>
-            </a:stretch>
-          </p:blipFill>
-          <p:spPr>
-            <a:xfrm>
-              <a:off x="3345405" y="1830170"/>
-              <a:ext cx="254000" cy="165100"/>
-            </a:xfrm>
-            <a:prstGeom prst="rect">
-              <a:avLst/>
-            </a:prstGeom>
-          </p:spPr>
-        </p:pic>
-        <p:pic>
-          <p:nvPicPr>
-            <p:cNvPr id="34" name="Picture 33">
-              <a:extLst>
-                <a:ext uri="{FF2B5EF4-FFF2-40B4-BE49-F238E27FC236}">
-                  <a16:creationId xmlns:a16="http://schemas.microsoft.com/office/drawing/2014/main" id="{49FE63C6-E15E-1319-45F3-BE310B3E1EA0}"/>
-                </a:ext>
-              </a:extLst>
-            </p:cNvPr>
-            <p:cNvPicPr>
-              <a:picLocks noChangeAspect="1"/>
-            </p:cNvPicPr>
-            <p:nvPr/>
-          </p:nvPicPr>
-          <p:blipFill>
-            <a:blip r:embed="rId6"/>
-            <a:stretch>
-              <a:fillRect/>
-            </a:stretch>
-          </p:blipFill>
-          <p:spPr>
-            <a:xfrm>
-              <a:off x="3347333" y="3255784"/>
-              <a:ext cx="254000" cy="165100"/>
-            </a:xfrm>
-            <a:prstGeom prst="rect">
-              <a:avLst/>
-            </a:prstGeom>
-          </p:spPr>
-        </p:pic>
-        <p:pic>
-          <p:nvPicPr>
-            <p:cNvPr id="35" name="Picture 34">
-              <a:extLst>
-                <a:ext uri="{FF2B5EF4-FFF2-40B4-BE49-F238E27FC236}">
-                  <a16:creationId xmlns:a16="http://schemas.microsoft.com/office/drawing/2014/main" id="{3B171879-A2EC-ED53-8BBB-905474110EBF}"/>
-                </a:ext>
-              </a:extLst>
-            </p:cNvPr>
-            <p:cNvPicPr>
-              <a:picLocks noChangeAspect="1"/>
-            </p:cNvPicPr>
-            <p:nvPr/>
-          </p:nvPicPr>
-          <p:blipFill>
-            <a:blip r:embed="rId7"/>
-            <a:stretch>
-              <a:fillRect/>
-            </a:stretch>
-          </p:blipFill>
-          <p:spPr>
-            <a:xfrm>
-              <a:off x="2942464" y="2538069"/>
-              <a:ext cx="596900" cy="254000"/>
-            </a:xfrm>
-            <a:prstGeom prst="rect">
-              <a:avLst/>
-            </a:prstGeom>
-          </p:spPr>
-        </p:pic>
-        <p:pic>
-          <p:nvPicPr>
-            <p:cNvPr id="36" name="Picture 35">
-              <a:extLst>
-                <a:ext uri="{FF2B5EF4-FFF2-40B4-BE49-F238E27FC236}">
-                  <a16:creationId xmlns:a16="http://schemas.microsoft.com/office/drawing/2014/main" id="{18160F0F-036C-71A0-D1B7-C9D3CF67188E}"/>
-                </a:ext>
-              </a:extLst>
-            </p:cNvPr>
-            <p:cNvPicPr>
-              <a:picLocks noChangeAspect="1"/>
-            </p:cNvPicPr>
-            <p:nvPr/>
-          </p:nvPicPr>
-          <p:blipFill>
-            <a:blip r:embed="rId8"/>
-            <a:stretch>
-              <a:fillRect/>
-            </a:stretch>
-          </p:blipFill>
-          <p:spPr>
-            <a:xfrm>
-              <a:off x="6051949" y="2271851"/>
-              <a:ext cx="558800" cy="254000"/>
-            </a:xfrm>
-            <a:prstGeom prst="rect">
-              <a:avLst/>
-            </a:prstGeom>
-          </p:spPr>
-        </p:pic>
-        <p:pic>
-          <p:nvPicPr>
-            <p:cNvPr id="37" name="Picture 36">
-              <a:extLst>
-                <a:ext uri="{FF2B5EF4-FFF2-40B4-BE49-F238E27FC236}">
-                  <a16:creationId xmlns:a16="http://schemas.microsoft.com/office/drawing/2014/main" id="{8568B358-A5E4-E587-F00C-11D09526CCFA}"/>
-                </a:ext>
-              </a:extLst>
-            </p:cNvPr>
-            <p:cNvPicPr>
-              <a:picLocks noChangeAspect="1"/>
-            </p:cNvPicPr>
-            <p:nvPr/>
-          </p:nvPicPr>
-          <p:blipFill>
-            <a:blip r:embed="rId9"/>
-            <a:stretch>
-              <a:fillRect/>
-            </a:stretch>
-          </p:blipFill>
-          <p:spPr>
-            <a:xfrm>
-              <a:off x="4508421" y="1620698"/>
-              <a:ext cx="520700" cy="190500"/>
-            </a:xfrm>
-            <a:prstGeom prst="rect">
-              <a:avLst/>
-            </a:prstGeom>
-          </p:spPr>
-        </p:pic>
-        <p:pic>
-          <p:nvPicPr>
-            <p:cNvPr id="38" name="Picture 37">
-              <a:extLst>
-                <a:ext uri="{FF2B5EF4-FFF2-40B4-BE49-F238E27FC236}">
-                  <a16:creationId xmlns:a16="http://schemas.microsoft.com/office/drawing/2014/main" id="{A4D77164-BBD8-CCA3-A559-608C443EBA95}"/>
-                </a:ext>
-              </a:extLst>
-            </p:cNvPr>
-            <p:cNvPicPr>
-              <a:picLocks noChangeAspect="1"/>
-            </p:cNvPicPr>
-            <p:nvPr/>
-          </p:nvPicPr>
-          <p:blipFill>
-            <a:blip r:embed="rId10"/>
-            <a:stretch>
-              <a:fillRect/>
-            </a:stretch>
-          </p:blipFill>
-          <p:spPr>
-            <a:xfrm>
-              <a:off x="1491527" y="1852195"/>
-              <a:ext cx="558800" cy="190500"/>
-            </a:xfrm>
-            <a:prstGeom prst="rect">
-              <a:avLst/>
-            </a:prstGeom>
-          </p:spPr>
-        </p:pic>
-        <p:pic>
-          <p:nvPicPr>
-            <p:cNvPr id="40" name="Picture 39">
-              <a:extLst>
-                <a:ext uri="{FF2B5EF4-FFF2-40B4-BE49-F238E27FC236}">
-                  <a16:creationId xmlns:a16="http://schemas.microsoft.com/office/drawing/2014/main" id="{51724FF9-FB4B-670F-F260-B9C63199DE6C}"/>
-                </a:ext>
-              </a:extLst>
-            </p:cNvPr>
-            <p:cNvPicPr>
-              <a:picLocks noChangeAspect="1"/>
-            </p:cNvPicPr>
-            <p:nvPr/>
-          </p:nvPicPr>
-          <p:blipFill>
-            <a:blip r:embed="rId11"/>
-            <a:stretch>
-              <a:fillRect/>
-            </a:stretch>
-          </p:blipFill>
-          <p:spPr>
-            <a:xfrm>
-              <a:off x="1410182" y="460978"/>
-              <a:ext cx="2133600" cy="241300"/>
-            </a:xfrm>
-            <a:prstGeom prst="rect">
-              <a:avLst/>
-            </a:prstGeom>
-          </p:spPr>
-        </p:pic>
-        <p:pic>
-          <p:nvPicPr>
-            <p:cNvPr id="41" name="Picture 40">
-              <a:extLst>
-                <a:ext uri="{FF2B5EF4-FFF2-40B4-BE49-F238E27FC236}">
-                  <a16:creationId xmlns:a16="http://schemas.microsoft.com/office/drawing/2014/main" id="{239B240F-595F-16D5-E2B1-F27BA2A3A369}"/>
-                </a:ext>
-              </a:extLst>
-            </p:cNvPr>
-            <p:cNvPicPr>
-              <a:picLocks noChangeAspect="1"/>
-            </p:cNvPicPr>
-            <p:nvPr/>
-          </p:nvPicPr>
-          <p:blipFill>
-            <a:blip r:embed="rId12"/>
-            <a:stretch>
-              <a:fillRect/>
-            </a:stretch>
-          </p:blipFill>
-          <p:spPr>
-            <a:xfrm>
-              <a:off x="4764587" y="507279"/>
-              <a:ext cx="2184400" cy="241300"/>
-            </a:xfrm>
-            <a:prstGeom prst="rect">
-              <a:avLst/>
-            </a:prstGeom>
-          </p:spPr>
-        </p:pic>
-      </p:grpSp>
-    </p:spTree>
-    <p:extLst>
-      <p:ext uri="{BB962C8B-B14F-4D97-AF65-F5344CB8AC3E}">
-        <p14:creationId xmlns:p14="http://schemas.microsoft.com/office/powerpoint/2010/main" val="3641942641"/>
-      </p:ext>
-    </p:extLst>
-  </p:cSld>
-  <p:clrMapOvr>
-    <a:masterClrMapping/>
-  </p:clrMapOvr>
-</p:sld>
-</file>
-
-<file path=ppt/slides/slide9.xml><?xml version="1.0" encoding="utf-8"?>
-<p:sld xmlns:a="http://schemas.openxmlformats.org/drawingml/2006/main" xmlns:r="http://schemas.openxmlformats.org/officeDocument/2006/relationships" xmlns:p="http://schemas.openxmlformats.org/presentationml/2006/main">
-  <p:cSld>
-    <p:spTree>
-      <p:nvGrpSpPr>
-        <p:cNvPr id="1" name=""/>
-        <p:cNvGrpSpPr/>
-        <p:nvPr/>
-      </p:nvGrpSpPr>
-      <p:grpSpPr>
-        <a:xfrm>
-          <a:off x="0" y="0"/>
-          <a:ext cx="0" cy="0"/>
-          <a:chOff x="0" y="0"/>
-          <a:chExt cx="0" cy="0"/>
-        </a:xfrm>
-      </p:grpSpPr>
-      <p:pic>
-        <p:nvPicPr>
-          <p:cNvPr id="2" name="Picture 1">
-            <a:extLst>
-              <a:ext uri="{FF2B5EF4-FFF2-40B4-BE49-F238E27FC236}">
-                <a16:creationId xmlns:a16="http://schemas.microsoft.com/office/drawing/2014/main" id="{D5C99B90-6DED-84EA-B474-CE7F94CDAA62}"/>
-              </a:ext>
-            </a:extLst>
-          </p:cNvPr>
-          <p:cNvPicPr>
-            <a:picLocks noChangeAspect="1"/>
-          </p:cNvPicPr>
-          <p:nvPr/>
-        </p:nvPicPr>
-        <p:blipFill>
-          <a:blip r:embed="rId3"/>
-          <a:stretch>
-            <a:fillRect/>
-          </a:stretch>
-        </p:blipFill>
-        <p:spPr>
-          <a:xfrm>
-            <a:off x="685800" y="1054917"/>
-            <a:ext cx="7772400" cy="4748165"/>
-          </a:xfrm>
-          <a:prstGeom prst="rect">
-            <a:avLst/>
-          </a:prstGeom>
-        </p:spPr>
-      </p:pic>
-      <p:pic>
-        <p:nvPicPr>
-          <p:cNvPr id="3" name="Picture 2">
-            <a:extLst>
-              <a:ext uri="{FF2B5EF4-FFF2-40B4-BE49-F238E27FC236}">
-                <a16:creationId xmlns:a16="http://schemas.microsoft.com/office/drawing/2014/main" id="{524BD3AB-0A5E-F861-C636-6E4FFCA0C7E7}"/>
-              </a:ext>
-            </a:extLst>
-          </p:cNvPr>
-          <p:cNvPicPr>
-            <a:picLocks noChangeAspect="1"/>
-          </p:cNvPicPr>
-          <p:nvPr/>
-        </p:nvPicPr>
-        <p:blipFill>
-          <a:blip r:embed="rId4"/>
-          <a:stretch>
-            <a:fillRect/>
-          </a:stretch>
-        </p:blipFill>
-        <p:spPr>
-          <a:xfrm>
-            <a:off x="5794349" y="1877942"/>
-            <a:ext cx="1168998" cy="822019"/>
-          </a:xfrm>
-          <a:prstGeom prst="rect">
-            <a:avLst/>
-          </a:prstGeom>
-        </p:spPr>
-      </p:pic>
-      <p:grpSp>
-        <p:nvGrpSpPr>
-          <p:cNvPr id="28" name="Group 27">
-            <a:extLst>
-              <a:ext uri="{FF2B5EF4-FFF2-40B4-BE49-F238E27FC236}">
-                <a16:creationId xmlns:a16="http://schemas.microsoft.com/office/drawing/2014/main" id="{308C5896-BB3E-FB9C-D7CE-498393E743CA}"/>
-              </a:ext>
-            </a:extLst>
-          </p:cNvPr>
-          <p:cNvGrpSpPr/>
-          <p:nvPr/>
-        </p:nvGrpSpPr>
-        <p:grpSpPr>
-          <a:xfrm>
-            <a:off x="685392" y="1593775"/>
-            <a:ext cx="532992" cy="426250"/>
-            <a:chOff x="294203" y="2026688"/>
-            <a:chExt cx="532992" cy="895655"/>
-          </a:xfrm>
-        </p:grpSpPr>
-        <p:cxnSp>
-          <p:nvCxnSpPr>
-            <p:cNvPr id="14" name="Straight Connector 13">
-              <a:extLst>
-                <a:ext uri="{FF2B5EF4-FFF2-40B4-BE49-F238E27FC236}">
-                  <a16:creationId xmlns:a16="http://schemas.microsoft.com/office/drawing/2014/main" id="{CB863880-873A-6D32-B3F7-6904EB1A8BA8}"/>
-                </a:ext>
-              </a:extLst>
-            </p:cNvPr>
-            <p:cNvCxnSpPr>
-              <a:cxnSpLocks/>
-            </p:cNvCxnSpPr>
-            <p:nvPr/>
-          </p:nvCxnSpPr>
-          <p:spPr>
-            <a:xfrm>
-              <a:off x="294203" y="2026688"/>
-              <a:ext cx="532992" cy="0"/>
-            </a:xfrm>
-            <a:prstGeom prst="line">
-              <a:avLst/>
-            </a:prstGeom>
-            <a:ln w="6350"/>
-          </p:spPr>
-          <p:style>
-            <a:lnRef idx="2">
-              <a:schemeClr val="accent1"/>
-            </a:lnRef>
-            <a:fillRef idx="0">
-              <a:schemeClr val="accent1"/>
-            </a:fillRef>
-            <a:effectRef idx="1">
-              <a:schemeClr val="accent1"/>
-            </a:effectRef>
-            <a:fontRef idx="minor">
-              <a:schemeClr val="tx1"/>
-            </a:fontRef>
-          </p:style>
-        </p:cxnSp>
-        <p:cxnSp>
-          <p:nvCxnSpPr>
-            <p:cNvPr id="16" name="Straight Connector 15">
-              <a:extLst>
-                <a:ext uri="{FF2B5EF4-FFF2-40B4-BE49-F238E27FC236}">
-                  <a16:creationId xmlns:a16="http://schemas.microsoft.com/office/drawing/2014/main" id="{3D2D765E-54E8-6175-7FAB-7A2B9CD2877E}"/>
-                </a:ext>
-              </a:extLst>
-            </p:cNvPr>
-            <p:cNvCxnSpPr>
-              <a:cxnSpLocks/>
-            </p:cNvCxnSpPr>
-            <p:nvPr/>
-          </p:nvCxnSpPr>
-          <p:spPr>
-            <a:xfrm>
-              <a:off x="294203" y="2175964"/>
-              <a:ext cx="532992" cy="0"/>
-            </a:xfrm>
-            <a:prstGeom prst="line">
-              <a:avLst/>
-            </a:prstGeom>
-            <a:ln w="6350"/>
-          </p:spPr>
-          <p:style>
-            <a:lnRef idx="2">
-              <a:schemeClr val="accent1"/>
-            </a:lnRef>
-            <a:fillRef idx="0">
-              <a:schemeClr val="accent1"/>
-            </a:fillRef>
-            <a:effectRef idx="1">
-              <a:schemeClr val="accent1"/>
-            </a:effectRef>
-            <a:fontRef idx="minor">
-              <a:schemeClr val="tx1"/>
-            </a:fontRef>
-          </p:style>
-        </p:cxnSp>
-        <p:cxnSp>
-          <p:nvCxnSpPr>
-            <p:cNvPr id="17" name="Straight Connector 16">
-              <a:extLst>
-                <a:ext uri="{FF2B5EF4-FFF2-40B4-BE49-F238E27FC236}">
-                  <a16:creationId xmlns:a16="http://schemas.microsoft.com/office/drawing/2014/main" id="{859AA0B9-0D7C-849F-C44E-2786E5100EA4}"/>
-                </a:ext>
-              </a:extLst>
-            </p:cNvPr>
-            <p:cNvCxnSpPr>
-              <a:cxnSpLocks/>
-            </p:cNvCxnSpPr>
-            <p:nvPr/>
-          </p:nvCxnSpPr>
-          <p:spPr>
-            <a:xfrm>
-              <a:off x="294203" y="2325240"/>
-              <a:ext cx="532992" cy="0"/>
-            </a:xfrm>
-            <a:prstGeom prst="line">
-              <a:avLst/>
-            </a:prstGeom>
-            <a:ln w="6350"/>
-          </p:spPr>
-          <p:style>
-            <a:lnRef idx="2">
-              <a:schemeClr val="accent1"/>
-            </a:lnRef>
-            <a:fillRef idx="0">
-              <a:schemeClr val="accent1"/>
-            </a:fillRef>
-            <a:effectRef idx="1">
-              <a:schemeClr val="accent1"/>
-            </a:effectRef>
-            <a:fontRef idx="minor">
-              <a:schemeClr val="tx1"/>
-            </a:fontRef>
-          </p:style>
-        </p:cxnSp>
-        <p:cxnSp>
-          <p:nvCxnSpPr>
-            <p:cNvPr id="18" name="Straight Connector 17">
-              <a:extLst>
-                <a:ext uri="{FF2B5EF4-FFF2-40B4-BE49-F238E27FC236}">
-                  <a16:creationId xmlns:a16="http://schemas.microsoft.com/office/drawing/2014/main" id="{87BF2044-3623-4F0A-78FA-CA2113730AC4}"/>
-                </a:ext>
-              </a:extLst>
-            </p:cNvPr>
-            <p:cNvCxnSpPr>
-              <a:cxnSpLocks/>
-            </p:cNvCxnSpPr>
-            <p:nvPr/>
-          </p:nvCxnSpPr>
-          <p:spPr>
-            <a:xfrm>
-              <a:off x="294203" y="2474516"/>
-              <a:ext cx="532992" cy="0"/>
-            </a:xfrm>
-            <a:prstGeom prst="line">
-              <a:avLst/>
-            </a:prstGeom>
-            <a:ln w="6350"/>
-          </p:spPr>
-          <p:style>
-            <a:lnRef idx="2">
-              <a:schemeClr val="accent1"/>
-            </a:lnRef>
-            <a:fillRef idx="0">
-              <a:schemeClr val="accent1"/>
-            </a:fillRef>
-            <a:effectRef idx="1">
-              <a:schemeClr val="accent1"/>
-            </a:effectRef>
-            <a:fontRef idx="minor">
-              <a:schemeClr val="tx1"/>
-            </a:fontRef>
-          </p:style>
-        </p:cxnSp>
-        <p:cxnSp>
-          <p:nvCxnSpPr>
-            <p:cNvPr id="19" name="Straight Connector 18">
-              <a:extLst>
-                <a:ext uri="{FF2B5EF4-FFF2-40B4-BE49-F238E27FC236}">
-                  <a16:creationId xmlns:a16="http://schemas.microsoft.com/office/drawing/2014/main" id="{80C3579A-EE76-23B6-A013-B537E5422870}"/>
-                </a:ext>
-              </a:extLst>
-            </p:cNvPr>
-            <p:cNvCxnSpPr>
-              <a:cxnSpLocks/>
-            </p:cNvCxnSpPr>
-            <p:nvPr/>
-          </p:nvCxnSpPr>
-          <p:spPr>
-            <a:xfrm>
-              <a:off x="294203" y="2623792"/>
-              <a:ext cx="532992" cy="0"/>
-            </a:xfrm>
-            <a:prstGeom prst="line">
-              <a:avLst/>
-            </a:prstGeom>
-            <a:ln w="6350"/>
-          </p:spPr>
-          <p:style>
-            <a:lnRef idx="2">
-              <a:schemeClr val="accent1"/>
-            </a:lnRef>
-            <a:fillRef idx="0">
-              <a:schemeClr val="accent1"/>
-            </a:fillRef>
-            <a:effectRef idx="1">
-              <a:schemeClr val="accent1"/>
-            </a:effectRef>
-            <a:fontRef idx="minor">
-              <a:schemeClr val="tx1"/>
-            </a:fontRef>
-          </p:style>
-        </p:cxnSp>
-        <p:cxnSp>
-          <p:nvCxnSpPr>
-            <p:cNvPr id="20" name="Straight Connector 19">
-              <a:extLst>
-                <a:ext uri="{FF2B5EF4-FFF2-40B4-BE49-F238E27FC236}">
-                  <a16:creationId xmlns:a16="http://schemas.microsoft.com/office/drawing/2014/main" id="{A350371B-E2C9-E1BF-B8B8-64EF26DE08B9}"/>
-                </a:ext>
-              </a:extLst>
-            </p:cNvPr>
-            <p:cNvCxnSpPr>
-              <a:cxnSpLocks/>
-            </p:cNvCxnSpPr>
-            <p:nvPr/>
-          </p:nvCxnSpPr>
-          <p:spPr>
-            <a:xfrm>
-              <a:off x="294203" y="2773068"/>
-              <a:ext cx="532992" cy="0"/>
-            </a:xfrm>
-            <a:prstGeom prst="line">
-              <a:avLst/>
-            </a:prstGeom>
-            <a:ln w="6350"/>
-          </p:spPr>
-          <p:style>
-            <a:lnRef idx="2">
-              <a:schemeClr val="accent1"/>
-            </a:lnRef>
-            <a:fillRef idx="0">
-              <a:schemeClr val="accent1"/>
-            </a:fillRef>
-            <a:effectRef idx="1">
-              <a:schemeClr val="accent1"/>
-            </a:effectRef>
-            <a:fontRef idx="minor">
-              <a:schemeClr val="tx1"/>
-            </a:fontRef>
-          </p:style>
-        </p:cxnSp>
-        <p:cxnSp>
-          <p:nvCxnSpPr>
-            <p:cNvPr id="22" name="Straight Connector 21">
-              <a:extLst>
-                <a:ext uri="{FF2B5EF4-FFF2-40B4-BE49-F238E27FC236}">
-                  <a16:creationId xmlns:a16="http://schemas.microsoft.com/office/drawing/2014/main" id="{1BDB0D35-AC71-66F1-C460-F8A058E0A0AA}"/>
-                </a:ext>
-              </a:extLst>
-            </p:cNvPr>
-            <p:cNvCxnSpPr>
-              <a:cxnSpLocks/>
-            </p:cNvCxnSpPr>
-            <p:nvPr/>
-          </p:nvCxnSpPr>
-          <p:spPr>
-            <a:xfrm>
-              <a:off x="294203" y="2922343"/>
-              <a:ext cx="532992" cy="0"/>
-            </a:xfrm>
-            <a:prstGeom prst="line">
-              <a:avLst/>
-            </a:prstGeom>
-            <a:ln w="6350"/>
-          </p:spPr>
-          <p:style>
-            <a:lnRef idx="2">
-              <a:schemeClr val="accent1"/>
-            </a:lnRef>
-            <a:fillRef idx="0">
-              <a:schemeClr val="accent1"/>
-            </a:fillRef>
-            <a:effectRef idx="1">
-              <a:schemeClr val="accent1"/>
-            </a:effectRef>
-            <a:fontRef idx="minor">
-              <a:schemeClr val="tx1"/>
-            </a:fontRef>
-          </p:style>
-        </p:cxnSp>
-      </p:grpSp>
-      <p:grpSp>
-        <p:nvGrpSpPr>
-          <p:cNvPr id="43" name="Group 42">
-            <a:extLst>
-              <a:ext uri="{FF2B5EF4-FFF2-40B4-BE49-F238E27FC236}">
-                <a16:creationId xmlns:a16="http://schemas.microsoft.com/office/drawing/2014/main" id="{0AD28136-BBC4-3386-8CAE-090B01ACE696}"/>
-              </a:ext>
-            </a:extLst>
-          </p:cNvPr>
-          <p:cNvGrpSpPr/>
-          <p:nvPr/>
-        </p:nvGrpSpPr>
-        <p:grpSpPr>
-          <a:xfrm>
-            <a:off x="1273967" y="1507871"/>
-            <a:ext cx="6915170" cy="1455864"/>
-            <a:chOff x="1273967" y="1507871"/>
-            <a:chExt cx="6915170" cy="1455864"/>
-          </a:xfrm>
-        </p:grpSpPr>
-        <p:sp>
-          <p:nvSpPr>
-            <p:cNvPr id="12" name="Rectangle 11">
-              <a:extLst>
-                <a:ext uri="{FF2B5EF4-FFF2-40B4-BE49-F238E27FC236}">
-                  <a16:creationId xmlns:a16="http://schemas.microsoft.com/office/drawing/2014/main" id="{06CB120A-8E3C-66C6-773A-1C0DD07A8721}"/>
-                </a:ext>
-              </a:extLst>
-            </p:cNvPr>
-            <p:cNvSpPr/>
-            <p:nvPr/>
-          </p:nvSpPr>
-          <p:spPr>
-            <a:xfrm>
-              <a:off x="4485939" y="1651145"/>
-              <a:ext cx="982556" cy="858964"/>
-            </a:xfrm>
-            <a:prstGeom prst="rect">
-              <a:avLst/>
-            </a:prstGeom>
-            <a:solidFill>
-              <a:srgbClr val="00B0F0">
-                <a:alpha val="10000"/>
-              </a:srgbClr>
-            </a:solidFill>
-            <a:ln w="6350"/>
-          </p:spPr>
-          <p:style>
-            <a:lnRef idx="2">
-              <a:schemeClr val="accent1">
-                <a:shade val="15000"/>
-              </a:schemeClr>
-            </a:lnRef>
-            <a:fillRef idx="1">
-              <a:schemeClr val="accent1"/>
-            </a:fillRef>
-            <a:effectRef idx="0">
-              <a:schemeClr val="accent1"/>
-            </a:effectRef>
-            <a:fontRef idx="minor">
-              <a:schemeClr val="lt1"/>
-            </a:fontRef>
-          </p:style>
-          <p:txBody>
-            <a:bodyPr rtlCol="0" anchor="ctr"/>
-            <a:lstStyle/>
-            <a:p>
-              <a:pPr algn="ctr"/>
-              <a:endParaRPr lang="en-US"/>
-            </a:p>
-          </p:txBody>
-        </p:sp>
         <p:grpSp>
           <p:nvGrpSpPr>
-            <p:cNvPr id="31" name="Group 30">
-              <a:extLst>
-                <a:ext uri="{FF2B5EF4-FFF2-40B4-BE49-F238E27FC236}">
-                  <a16:creationId xmlns:a16="http://schemas.microsoft.com/office/drawing/2014/main" id="{4870CFA2-D585-B1FA-BF3E-ADA1D6F37FCB}"/>
+            <p:cNvPr id="101" name="Group 100">
+              <a:extLst>
+                <a:ext uri="{FF2B5EF4-FFF2-40B4-BE49-F238E27FC236}">
+                  <a16:creationId xmlns:a16="http://schemas.microsoft.com/office/drawing/2014/main" id="{B7B81E39-58C9-4687-1C85-7644E621AE84}"/>
                 </a:ext>
               </a:extLst>
             </p:cNvPr>
@@ -27041,275 +27030,18 @@
           </p:nvGrpSpPr>
           <p:grpSpPr>
             <a:xfrm>
-              <a:off x="1273967" y="1591981"/>
-              <a:ext cx="6915170" cy="851177"/>
-              <a:chOff x="1273967" y="1591981"/>
-              <a:chExt cx="6915170" cy="851177"/>
+              <a:off x="669819" y="1772273"/>
+              <a:ext cx="3110052" cy="2574120"/>
+              <a:chOff x="669819" y="1772273"/>
+              <a:chExt cx="3110052" cy="2574120"/>
             </a:xfrm>
           </p:grpSpPr>
-          <p:cxnSp>
-            <p:nvCxnSpPr>
-              <p:cNvPr id="5" name="Straight Connector 4">
+          <p:sp>
+            <p:nvSpPr>
+              <p:cNvPr id="98" name="Rectangle 97">
                 <a:extLst>
                   <a:ext uri="{FF2B5EF4-FFF2-40B4-BE49-F238E27FC236}">
-                    <a16:creationId xmlns:a16="http://schemas.microsoft.com/office/drawing/2014/main" id="{C0BE2B20-F5AF-8071-79DB-81C08D0616BC}"/>
-                  </a:ext>
-                </a:extLst>
-              </p:cNvPr>
-              <p:cNvCxnSpPr>
-                <a:cxnSpLocks/>
-              </p:cNvCxnSpPr>
-              <p:nvPr/>
-            </p:nvCxnSpPr>
-            <p:spPr>
-              <a:xfrm>
-                <a:off x="1278731" y="2443158"/>
-                <a:ext cx="6908007" cy="0"/>
-              </a:xfrm>
-              <a:prstGeom prst="line">
-                <a:avLst/>
-              </a:prstGeom>
-              <a:ln w="6350">
-                <a:solidFill>
-                  <a:schemeClr val="accent1"/>
-                </a:solidFill>
-              </a:ln>
-            </p:spPr>
-            <p:style>
-              <a:lnRef idx="2">
-                <a:schemeClr val="accent1"/>
-              </a:lnRef>
-              <a:fillRef idx="0">
-                <a:schemeClr val="accent1"/>
-              </a:fillRef>
-              <a:effectRef idx="1">
-                <a:schemeClr val="accent1"/>
-              </a:effectRef>
-              <a:fontRef idx="minor">
-                <a:schemeClr val="tx1"/>
-              </a:fontRef>
-            </p:style>
-          </p:cxnSp>
-          <p:cxnSp>
-            <p:nvCxnSpPr>
-              <p:cNvPr id="8" name="Straight Connector 7">
-                <a:extLst>
-                  <a:ext uri="{FF2B5EF4-FFF2-40B4-BE49-F238E27FC236}">
-                    <a16:creationId xmlns:a16="http://schemas.microsoft.com/office/drawing/2014/main" id="{0933216A-B997-6BE0-7AA4-B148EB50EC80}"/>
-                  </a:ext>
-                </a:extLst>
-              </p:cNvPr>
-              <p:cNvCxnSpPr>
-                <a:cxnSpLocks/>
-              </p:cNvCxnSpPr>
-              <p:nvPr/>
-            </p:nvCxnSpPr>
-            <p:spPr>
-              <a:xfrm>
-                <a:off x="1273967" y="2016908"/>
-                <a:ext cx="6908007" cy="0"/>
-              </a:xfrm>
-              <a:prstGeom prst="line">
-                <a:avLst/>
-              </a:prstGeom>
-              <a:ln w="6350"/>
-            </p:spPr>
-            <p:style>
-              <a:lnRef idx="2">
-                <a:schemeClr val="accent1"/>
-              </a:lnRef>
-              <a:fillRef idx="0">
-                <a:schemeClr val="accent1"/>
-              </a:fillRef>
-              <a:effectRef idx="1">
-                <a:schemeClr val="accent1"/>
-              </a:effectRef>
-              <a:fontRef idx="minor">
-                <a:schemeClr val="tx1"/>
-              </a:fontRef>
-            </p:style>
-          </p:cxnSp>
-          <p:cxnSp>
-            <p:nvCxnSpPr>
-              <p:cNvPr id="29" name="Straight Connector 28">
-                <a:extLst>
-                  <a:ext uri="{FF2B5EF4-FFF2-40B4-BE49-F238E27FC236}">
-                    <a16:creationId xmlns:a16="http://schemas.microsoft.com/office/drawing/2014/main" id="{29387D16-9C52-EC10-E295-573E6B0D8F0B}"/>
-                  </a:ext>
-                </a:extLst>
-              </p:cNvPr>
-              <p:cNvCxnSpPr>
-                <a:cxnSpLocks/>
-              </p:cNvCxnSpPr>
-              <p:nvPr/>
-            </p:nvCxnSpPr>
-            <p:spPr>
-              <a:xfrm>
-                <a:off x="1275755" y="1591981"/>
-                <a:ext cx="6908007" cy="0"/>
-              </a:xfrm>
-              <a:prstGeom prst="line">
-                <a:avLst/>
-              </a:prstGeom>
-              <a:ln w="6350"/>
-            </p:spPr>
-            <p:style>
-              <a:lnRef idx="2">
-                <a:schemeClr val="accent1"/>
-              </a:lnRef>
-              <a:fillRef idx="0">
-                <a:schemeClr val="accent1"/>
-              </a:fillRef>
-              <a:effectRef idx="1">
-                <a:schemeClr val="accent1"/>
-              </a:effectRef>
-              <a:fontRef idx="minor">
-                <a:schemeClr val="tx1"/>
-              </a:fontRef>
-            </p:style>
-          </p:cxnSp>
-          <p:cxnSp>
-            <p:nvCxnSpPr>
-              <p:cNvPr id="30" name="Straight Connector 29">
-                <a:extLst>
-                  <a:ext uri="{FF2B5EF4-FFF2-40B4-BE49-F238E27FC236}">
-                    <a16:creationId xmlns:a16="http://schemas.microsoft.com/office/drawing/2014/main" id="{BC348182-70D2-BD82-6323-7E0D246B02C1}"/>
-                  </a:ext>
-                </a:extLst>
-              </p:cNvPr>
-              <p:cNvCxnSpPr>
-                <a:cxnSpLocks/>
-              </p:cNvCxnSpPr>
-              <p:nvPr/>
-            </p:nvCxnSpPr>
-            <p:spPr>
-              <a:xfrm>
-                <a:off x="1281130" y="1651145"/>
-                <a:ext cx="6908007" cy="0"/>
-              </a:xfrm>
-              <a:prstGeom prst="line">
-                <a:avLst/>
-              </a:prstGeom>
-              <a:ln w="6350"/>
-            </p:spPr>
-            <p:style>
-              <a:lnRef idx="2">
-                <a:schemeClr val="accent1"/>
-              </a:lnRef>
-              <a:fillRef idx="0">
-                <a:schemeClr val="accent1"/>
-              </a:fillRef>
-              <a:effectRef idx="1">
-                <a:schemeClr val="accent1"/>
-              </a:effectRef>
-              <a:fontRef idx="minor">
-                <a:schemeClr val="tx1"/>
-              </a:fontRef>
-            </p:style>
-          </p:cxnSp>
-        </p:grpSp>
-        <p:grpSp>
-          <p:nvGrpSpPr>
-            <p:cNvPr id="39" name="Group 38">
-              <a:extLst>
-                <a:ext uri="{FF2B5EF4-FFF2-40B4-BE49-F238E27FC236}">
-                  <a16:creationId xmlns:a16="http://schemas.microsoft.com/office/drawing/2014/main" id="{5C4B9178-13B5-7870-5A5F-53BD4025EF79}"/>
-                </a:ext>
-              </a:extLst>
-            </p:cNvPr>
-            <p:cNvGrpSpPr/>
-            <p:nvPr/>
-          </p:nvGrpSpPr>
-          <p:grpSpPr>
-            <a:xfrm>
-              <a:off x="4478768" y="1507871"/>
-              <a:ext cx="984329" cy="1455864"/>
-              <a:chOff x="4478768" y="1507871"/>
-              <a:chExt cx="984329" cy="1455864"/>
-            </a:xfrm>
-          </p:grpSpPr>
-          <p:cxnSp>
-            <p:nvCxnSpPr>
-              <p:cNvPr id="33" name="Straight Connector 32">
-                <a:extLst>
-                  <a:ext uri="{FF2B5EF4-FFF2-40B4-BE49-F238E27FC236}">
-                    <a16:creationId xmlns:a16="http://schemas.microsoft.com/office/drawing/2014/main" id="{B6D5EE85-2EA7-06F4-B974-A2ABCD72FD3A}"/>
-                  </a:ext>
-                </a:extLst>
-              </p:cNvPr>
-              <p:cNvCxnSpPr>
-                <a:cxnSpLocks/>
-              </p:cNvCxnSpPr>
-              <p:nvPr/>
-            </p:nvCxnSpPr>
-            <p:spPr>
-              <a:xfrm>
-                <a:off x="4478768" y="1507871"/>
-                <a:ext cx="0" cy="1455864"/>
-              </a:xfrm>
-              <a:prstGeom prst="line">
-                <a:avLst/>
-              </a:prstGeom>
-            </p:spPr>
-            <p:style>
-              <a:lnRef idx="2">
-                <a:schemeClr val="accent1"/>
-              </a:lnRef>
-              <a:fillRef idx="0">
-                <a:schemeClr val="accent1"/>
-              </a:fillRef>
-              <a:effectRef idx="1">
-                <a:schemeClr val="accent1"/>
-              </a:effectRef>
-              <a:fontRef idx="minor">
-                <a:schemeClr val="tx1"/>
-              </a:fontRef>
-            </p:style>
-          </p:cxnSp>
-          <p:cxnSp>
-            <p:nvCxnSpPr>
-              <p:cNvPr id="37" name="Straight Connector 36">
-                <a:extLst>
-                  <a:ext uri="{FF2B5EF4-FFF2-40B4-BE49-F238E27FC236}">
-                    <a16:creationId xmlns:a16="http://schemas.microsoft.com/office/drawing/2014/main" id="{BE2A573A-E3C3-B069-B645-B6E8A962C857}"/>
-                  </a:ext>
-                </a:extLst>
-              </p:cNvPr>
-              <p:cNvCxnSpPr>
-                <a:cxnSpLocks/>
-              </p:cNvCxnSpPr>
-              <p:nvPr/>
-            </p:nvCxnSpPr>
-            <p:spPr>
-              <a:xfrm>
-                <a:off x="5463097" y="1507871"/>
-                <a:ext cx="0" cy="1455864"/>
-              </a:xfrm>
-              <a:prstGeom prst="line">
-                <a:avLst/>
-              </a:prstGeom>
-            </p:spPr>
-            <p:style>
-              <a:lnRef idx="2">
-                <a:schemeClr val="accent1"/>
-              </a:lnRef>
-              <a:fillRef idx="0">
-                <a:schemeClr val="accent1"/>
-              </a:fillRef>
-              <a:effectRef idx="1">
-                <a:schemeClr val="accent1"/>
-              </a:effectRef>
-              <a:fontRef idx="minor">
-                <a:schemeClr val="tx1"/>
-              </a:fontRef>
-            </p:style>
-          </p:cxnSp>
-          <p:sp>
-            <p:nvSpPr>
-              <p:cNvPr id="38" name="Freeform 37">
-                <a:extLst>
-                  <a:ext uri="{FF2B5EF4-FFF2-40B4-BE49-F238E27FC236}">
-                    <a16:creationId xmlns:a16="http://schemas.microsoft.com/office/drawing/2014/main" id="{13B86A15-A115-54C1-376F-CC451F7EA3B8}"/>
+                    <a16:creationId xmlns:a16="http://schemas.microsoft.com/office/drawing/2014/main" id="{5B9E3DE5-C5E8-8BD4-A878-C7CF5389E1C9}"/>
                   </a:ext>
                 </a:extLst>
               </p:cNvPr>
@@ -27318,214 +27050,132 @@
             </p:nvSpPr>
             <p:spPr>
               <a:xfrm>
-                <a:off x="4489450" y="1908175"/>
-                <a:ext cx="968375" cy="692150"/>
+                <a:off x="683459" y="2058990"/>
+                <a:ext cx="3096411" cy="1145695"/>
               </a:xfrm>
-              <a:custGeom>
+              <a:prstGeom prst="rect">
                 <a:avLst/>
-                <a:gdLst>
-                  <a:gd name="csX0" fmla="*/ 0 w 1212850"/>
-                  <a:gd name="csY0" fmla="*/ 0 h 1320800"/>
-                  <a:gd name="csX1" fmla="*/ 327025 w 1212850"/>
-                  <a:gd name="csY1" fmla="*/ 1158875 h 1320800"/>
-                  <a:gd name="csX2" fmla="*/ 431800 w 1212850"/>
-                  <a:gd name="csY2" fmla="*/ 1260475 h 1320800"/>
-                  <a:gd name="csX3" fmla="*/ 488950 w 1212850"/>
-                  <a:gd name="csY3" fmla="*/ 1279525 h 1320800"/>
-                  <a:gd name="csX4" fmla="*/ 546100 w 1212850"/>
-                  <a:gd name="csY4" fmla="*/ 1257300 h 1320800"/>
-                  <a:gd name="csX5" fmla="*/ 606425 w 1212850"/>
-                  <a:gd name="csY5" fmla="*/ 1228725 h 1320800"/>
-                  <a:gd name="csX6" fmla="*/ 679450 w 1212850"/>
-                  <a:gd name="csY6" fmla="*/ 1212850 h 1320800"/>
-                  <a:gd name="csX7" fmla="*/ 746125 w 1212850"/>
-                  <a:gd name="csY7" fmla="*/ 1209675 h 1320800"/>
-                  <a:gd name="csX8" fmla="*/ 822325 w 1212850"/>
-                  <a:gd name="csY8" fmla="*/ 1222375 h 1320800"/>
-                  <a:gd name="csX9" fmla="*/ 876300 w 1212850"/>
-                  <a:gd name="csY9" fmla="*/ 1238250 h 1320800"/>
-                  <a:gd name="csX10" fmla="*/ 914400 w 1212850"/>
-                  <a:gd name="csY10" fmla="*/ 1276350 h 1320800"/>
-                  <a:gd name="csX11" fmla="*/ 942975 w 1212850"/>
-                  <a:gd name="csY11" fmla="*/ 1320800 h 1320800"/>
-                  <a:gd name="csX12" fmla="*/ 965200 w 1212850"/>
-                  <a:gd name="csY12" fmla="*/ 1301750 h 1320800"/>
-                  <a:gd name="csX13" fmla="*/ 1006475 w 1212850"/>
-                  <a:gd name="csY13" fmla="*/ 1311275 h 1320800"/>
-                  <a:gd name="csX14" fmla="*/ 1006475 w 1212850"/>
-                  <a:gd name="csY14" fmla="*/ 1311275 h 1320800"/>
-                  <a:gd name="csX15" fmla="*/ 1089025 w 1212850"/>
-                  <a:gd name="csY15" fmla="*/ 1190625 h 1320800"/>
-                  <a:gd name="csX16" fmla="*/ 1127125 w 1212850"/>
-                  <a:gd name="csY16" fmla="*/ 1108075 h 1320800"/>
-                  <a:gd name="csX17" fmla="*/ 1187450 w 1212850"/>
-                  <a:gd name="csY17" fmla="*/ 1038225 h 1320800"/>
-                  <a:gd name="csX18" fmla="*/ 1212850 w 1212850"/>
-                  <a:gd name="csY18" fmla="*/ 1003300 h 1320800"/>
-                  <a:gd name="csX0" fmla="*/ 0 w 968375"/>
-                  <a:gd name="csY0" fmla="*/ 0 h 692150"/>
-                  <a:gd name="csX1" fmla="*/ 82550 w 968375"/>
-                  <a:gd name="csY1" fmla="*/ 530225 h 692150"/>
-                  <a:gd name="csX2" fmla="*/ 187325 w 968375"/>
-                  <a:gd name="csY2" fmla="*/ 631825 h 692150"/>
-                  <a:gd name="csX3" fmla="*/ 244475 w 968375"/>
-                  <a:gd name="csY3" fmla="*/ 650875 h 692150"/>
-                  <a:gd name="csX4" fmla="*/ 301625 w 968375"/>
-                  <a:gd name="csY4" fmla="*/ 628650 h 692150"/>
-                  <a:gd name="csX5" fmla="*/ 361950 w 968375"/>
-                  <a:gd name="csY5" fmla="*/ 600075 h 692150"/>
-                  <a:gd name="csX6" fmla="*/ 434975 w 968375"/>
-                  <a:gd name="csY6" fmla="*/ 584200 h 692150"/>
-                  <a:gd name="csX7" fmla="*/ 501650 w 968375"/>
-                  <a:gd name="csY7" fmla="*/ 581025 h 692150"/>
-                  <a:gd name="csX8" fmla="*/ 577850 w 968375"/>
-                  <a:gd name="csY8" fmla="*/ 593725 h 692150"/>
-                  <a:gd name="csX9" fmla="*/ 631825 w 968375"/>
-                  <a:gd name="csY9" fmla="*/ 609600 h 692150"/>
-                  <a:gd name="csX10" fmla="*/ 669925 w 968375"/>
-                  <a:gd name="csY10" fmla="*/ 647700 h 692150"/>
-                  <a:gd name="csX11" fmla="*/ 698500 w 968375"/>
-                  <a:gd name="csY11" fmla="*/ 692150 h 692150"/>
-                  <a:gd name="csX12" fmla="*/ 720725 w 968375"/>
-                  <a:gd name="csY12" fmla="*/ 673100 h 692150"/>
-                  <a:gd name="csX13" fmla="*/ 762000 w 968375"/>
-                  <a:gd name="csY13" fmla="*/ 682625 h 692150"/>
-                  <a:gd name="csX14" fmla="*/ 762000 w 968375"/>
-                  <a:gd name="csY14" fmla="*/ 682625 h 692150"/>
-                  <a:gd name="csX15" fmla="*/ 844550 w 968375"/>
-                  <a:gd name="csY15" fmla="*/ 561975 h 692150"/>
-                  <a:gd name="csX16" fmla="*/ 882650 w 968375"/>
-                  <a:gd name="csY16" fmla="*/ 479425 h 692150"/>
-                  <a:gd name="csX17" fmla="*/ 942975 w 968375"/>
-                  <a:gd name="csY17" fmla="*/ 409575 h 692150"/>
-                  <a:gd name="csX18" fmla="*/ 968375 w 968375"/>
-                  <a:gd name="csY18" fmla="*/ 374650 h 692150"/>
-                </a:gdLst>
-                <a:ahLst/>
-                <a:cxnLst>
-                  <a:cxn ang="0">
-                    <a:pos x="csX0" y="csY0"/>
-                  </a:cxn>
-                  <a:cxn ang="0">
-                    <a:pos x="csX1" y="csY1"/>
-                  </a:cxn>
-                  <a:cxn ang="0">
-                    <a:pos x="csX2" y="csY2"/>
-                  </a:cxn>
-                  <a:cxn ang="0">
-                    <a:pos x="csX3" y="csY3"/>
-                  </a:cxn>
-                  <a:cxn ang="0">
-                    <a:pos x="csX4" y="csY4"/>
-                  </a:cxn>
-                  <a:cxn ang="0">
-                    <a:pos x="csX5" y="csY5"/>
-                  </a:cxn>
-                  <a:cxn ang="0">
-                    <a:pos x="csX6" y="csY6"/>
-                  </a:cxn>
-                  <a:cxn ang="0">
-                    <a:pos x="csX7" y="csY7"/>
-                  </a:cxn>
-                  <a:cxn ang="0">
-                    <a:pos x="csX8" y="csY8"/>
-                  </a:cxn>
-                  <a:cxn ang="0">
-                    <a:pos x="csX9" y="csY9"/>
-                  </a:cxn>
-                  <a:cxn ang="0">
-                    <a:pos x="csX10" y="csY10"/>
-                  </a:cxn>
-                  <a:cxn ang="0">
-                    <a:pos x="csX11" y="csY11"/>
-                  </a:cxn>
-                  <a:cxn ang="0">
-                    <a:pos x="csX12" y="csY12"/>
-                  </a:cxn>
-                  <a:cxn ang="0">
-                    <a:pos x="csX13" y="csY13"/>
-                  </a:cxn>
-                  <a:cxn ang="0">
-                    <a:pos x="csX14" y="csY14"/>
-                  </a:cxn>
-                  <a:cxn ang="0">
-                    <a:pos x="csX15" y="csY15"/>
-                  </a:cxn>
-                  <a:cxn ang="0">
-                    <a:pos x="csX16" y="csY16"/>
-                  </a:cxn>
-                  <a:cxn ang="0">
-                    <a:pos x="csX17" y="csY17"/>
-                  </a:cxn>
-                  <a:cxn ang="0">
-                    <a:pos x="csX18" y="csY18"/>
-                  </a:cxn>
-                </a:cxnLst>
-                <a:rect l="l" t="t" r="r" b="b"/>
-                <a:pathLst>
-                  <a:path w="968375" h="692150">
-                    <a:moveTo>
-                      <a:pt x="0" y="0"/>
-                    </a:moveTo>
-                    <a:lnTo>
-                      <a:pt x="82550" y="530225"/>
-                    </a:lnTo>
-                    <a:lnTo>
-                      <a:pt x="187325" y="631825"/>
-                    </a:lnTo>
-                    <a:lnTo>
-                      <a:pt x="244475" y="650875"/>
-                    </a:lnTo>
-                    <a:lnTo>
-                      <a:pt x="301625" y="628650"/>
-                    </a:lnTo>
-                    <a:lnTo>
-                      <a:pt x="361950" y="600075"/>
-                    </a:lnTo>
-                    <a:lnTo>
-                      <a:pt x="434975" y="584200"/>
-                    </a:lnTo>
-                    <a:lnTo>
-                      <a:pt x="501650" y="581025"/>
-                    </a:lnTo>
-                    <a:lnTo>
-                      <a:pt x="577850" y="593725"/>
-                    </a:lnTo>
-                    <a:lnTo>
-                      <a:pt x="631825" y="609600"/>
-                    </a:lnTo>
-                    <a:lnTo>
-                      <a:pt x="669925" y="647700"/>
-                    </a:lnTo>
-                    <a:lnTo>
-                      <a:pt x="698500" y="692150"/>
-                    </a:lnTo>
-                    <a:lnTo>
-                      <a:pt x="720725" y="673100"/>
-                    </a:lnTo>
-                    <a:lnTo>
-                      <a:pt x="762000" y="682625"/>
-                    </a:lnTo>
-                    <a:lnTo>
-                      <a:pt x="762000" y="682625"/>
-                    </a:lnTo>
-                    <a:lnTo>
-                      <a:pt x="844550" y="561975"/>
-                    </a:lnTo>
-                    <a:lnTo>
-                      <a:pt x="882650" y="479425"/>
-                    </a:lnTo>
-                    <a:lnTo>
-                      <a:pt x="942975" y="409575"/>
-                    </a:lnTo>
-                    <a:lnTo>
-                      <a:pt x="968375" y="374650"/>
-                    </a:lnTo>
-                  </a:path>
-                </a:pathLst>
-              </a:custGeom>
-              <a:noFill/>
-              <a:ln w="6350"/>
+              </a:prstGeom>
+              <a:solidFill>
+                <a:schemeClr val="accent6">
+                  <a:lumMod val="60000"/>
+                  <a:lumOff val="40000"/>
+                  <a:alpha val="23000"/>
+                </a:schemeClr>
+              </a:solidFill>
+              <a:ln>
+                <a:noFill/>
+              </a:ln>
+            </p:spPr>
+            <p:style>
+              <a:lnRef idx="2">
+                <a:schemeClr val="accent1">
+                  <a:shade val="15000"/>
+                </a:schemeClr>
+              </a:lnRef>
+              <a:fillRef idx="1">
+                <a:schemeClr val="accent1"/>
+              </a:fillRef>
+              <a:effectRef idx="0">
+                <a:schemeClr val="accent1"/>
+              </a:effectRef>
+              <a:fontRef idx="minor">
+                <a:schemeClr val="lt1"/>
+              </a:fontRef>
+            </p:style>
+            <p:txBody>
+              <a:bodyPr rtlCol="0" anchor="ctr"/>
+              <a:lstStyle/>
+              <a:p>
+                <a:pPr algn="ctr"/>
+                <a:endParaRPr lang="en-US"/>
+              </a:p>
+            </p:txBody>
+          </p:sp>
+          <p:sp>
+            <p:nvSpPr>
+              <p:cNvPr id="99" name="Rectangle 98">
+                <a:extLst>
+                  <a:ext uri="{FF2B5EF4-FFF2-40B4-BE49-F238E27FC236}">
+                    <a16:creationId xmlns:a16="http://schemas.microsoft.com/office/drawing/2014/main" id="{03BB2F92-EB25-9511-FB76-500193C4E70B}"/>
+                  </a:ext>
+                </a:extLst>
+              </p:cNvPr>
+              <p:cNvSpPr/>
+              <p:nvPr/>
+            </p:nvSpPr>
+            <p:spPr>
+              <a:xfrm>
+                <a:off x="669819" y="1772273"/>
+                <a:ext cx="3096411" cy="286618"/>
+              </a:xfrm>
+              <a:prstGeom prst="rect">
+                <a:avLst/>
+              </a:prstGeom>
+              <a:solidFill>
+                <a:schemeClr val="accent6">
+                  <a:lumMod val="20000"/>
+                  <a:lumOff val="80000"/>
+                  <a:alpha val="23000"/>
+                </a:schemeClr>
+              </a:solidFill>
+              <a:ln>
+                <a:noFill/>
+              </a:ln>
+            </p:spPr>
+            <p:style>
+              <a:lnRef idx="2">
+                <a:schemeClr val="accent1">
+                  <a:shade val="15000"/>
+                </a:schemeClr>
+              </a:lnRef>
+              <a:fillRef idx="1">
+                <a:schemeClr val="accent1"/>
+              </a:fillRef>
+              <a:effectRef idx="0">
+                <a:schemeClr val="accent1"/>
+              </a:effectRef>
+              <a:fontRef idx="minor">
+                <a:schemeClr val="lt1"/>
+              </a:fontRef>
+            </p:style>
+            <p:txBody>
+              <a:bodyPr rtlCol="0" anchor="ctr"/>
+              <a:lstStyle/>
+              <a:p>
+                <a:pPr algn="ctr"/>
+                <a:endParaRPr lang="en-US"/>
+              </a:p>
+            </p:txBody>
+          </p:sp>
+          <p:sp>
+            <p:nvSpPr>
+              <p:cNvPr id="100" name="Rectangle 99">
+                <a:extLst>
+                  <a:ext uri="{FF2B5EF4-FFF2-40B4-BE49-F238E27FC236}">
+                    <a16:creationId xmlns:a16="http://schemas.microsoft.com/office/drawing/2014/main" id="{C1987D5B-C3FC-C98E-4A7F-BB64356E6BE8}"/>
+                  </a:ext>
+                </a:extLst>
+              </p:cNvPr>
+              <p:cNvSpPr/>
+              <p:nvPr/>
+            </p:nvSpPr>
+            <p:spPr>
+              <a:xfrm>
+                <a:off x="683460" y="3200698"/>
+                <a:ext cx="3096411" cy="1145695"/>
+              </a:xfrm>
+              <a:prstGeom prst="rect">
+                <a:avLst/>
+              </a:prstGeom>
+              <a:solidFill>
+                <a:srgbClr val="FFFF00">
+                  <a:alpha val="23000"/>
+                </a:srgbClr>
+              </a:solidFill>
+              <a:ln>
+                <a:noFill/>
+              </a:ln>
             </p:spPr>
             <p:style>
               <a:lnRef idx="2">
@@ -27553,293 +27203,3111 @@
             </p:txBody>
           </p:sp>
         </p:grpSp>
+        <p:sp>
+          <p:nvSpPr>
+            <p:cNvPr id="36" name="Freeform 35">
+              <a:extLst>
+                <a:ext uri="{FF2B5EF4-FFF2-40B4-BE49-F238E27FC236}">
+                  <a16:creationId xmlns:a16="http://schemas.microsoft.com/office/drawing/2014/main" id="{B64BE177-4A0C-F605-30E6-1BD832D0717C}"/>
+                </a:ext>
+              </a:extLst>
+            </p:cNvPr>
+            <p:cNvSpPr/>
+            <p:nvPr/>
+          </p:nvSpPr>
+          <p:spPr>
+            <a:xfrm>
+              <a:off x="675773" y="2060810"/>
+              <a:ext cx="223713" cy="365156"/>
+            </a:xfrm>
+            <a:custGeom>
+              <a:avLst/>
+              <a:gdLst>
+                <a:gd name="csX0" fmla="*/ 0 w 211016"/>
+                <a:gd name="csY0" fmla="*/ 228600 h 237392"/>
+                <a:gd name="csX1" fmla="*/ 158262 w 211016"/>
+                <a:gd name="csY1" fmla="*/ 237392 h 237392"/>
+                <a:gd name="csX2" fmla="*/ 211016 w 211016"/>
+                <a:gd name="csY2" fmla="*/ 0 h 237392"/>
+                <a:gd name="csX3" fmla="*/ 17585 w 211016"/>
+                <a:gd name="csY3" fmla="*/ 0 h 237392"/>
+                <a:gd name="csX0" fmla="*/ 17340 w 193431"/>
+                <a:gd name="csY0" fmla="*/ 241300 h 241300"/>
+                <a:gd name="csX1" fmla="*/ 140677 w 193431"/>
+                <a:gd name="csY1" fmla="*/ 237392 h 241300"/>
+                <a:gd name="csX2" fmla="*/ 193431 w 193431"/>
+                <a:gd name="csY2" fmla="*/ 0 h 241300"/>
+                <a:gd name="csX3" fmla="*/ 0 w 193431"/>
+                <a:gd name="csY3" fmla="*/ 0 h 241300"/>
+                <a:gd name="csX0" fmla="*/ 4640 w 193431"/>
+                <a:gd name="csY0" fmla="*/ 238125 h 238125"/>
+                <a:gd name="csX1" fmla="*/ 140677 w 193431"/>
+                <a:gd name="csY1" fmla="*/ 237392 h 238125"/>
+                <a:gd name="csX2" fmla="*/ 193431 w 193431"/>
+                <a:gd name="csY2" fmla="*/ 0 h 238125"/>
+                <a:gd name="csX3" fmla="*/ 0 w 193431"/>
+                <a:gd name="csY3" fmla="*/ 0 h 238125"/>
+                <a:gd name="csX0" fmla="*/ 0 w 198316"/>
+                <a:gd name="csY0" fmla="*/ 238125 h 238125"/>
+                <a:gd name="csX1" fmla="*/ 145562 w 198316"/>
+                <a:gd name="csY1" fmla="*/ 237392 h 238125"/>
+                <a:gd name="csX2" fmla="*/ 198316 w 198316"/>
+                <a:gd name="csY2" fmla="*/ 0 h 238125"/>
+                <a:gd name="csX3" fmla="*/ 4885 w 198316"/>
+                <a:gd name="csY3" fmla="*/ 0 h 238125"/>
+              </a:gdLst>
+              <a:ahLst/>
+              <a:cxnLst>
+                <a:cxn ang="0">
+                  <a:pos x="csX0" y="csY0"/>
+                </a:cxn>
+                <a:cxn ang="0">
+                  <a:pos x="csX1" y="csY1"/>
+                </a:cxn>
+                <a:cxn ang="0">
+                  <a:pos x="csX2" y="csY2"/>
+                </a:cxn>
+                <a:cxn ang="0">
+                  <a:pos x="csX3" y="csY3"/>
+                </a:cxn>
+              </a:cxnLst>
+              <a:rect l="l" t="t" r="r" b="b"/>
+              <a:pathLst>
+                <a:path w="198316" h="238125">
+                  <a:moveTo>
+                    <a:pt x="0" y="238125"/>
+                  </a:moveTo>
+                  <a:lnTo>
+                    <a:pt x="145562" y="237392"/>
+                  </a:lnTo>
+                  <a:lnTo>
+                    <a:pt x="198316" y="0"/>
+                  </a:lnTo>
+                  <a:lnTo>
+                    <a:pt x="4885" y="0"/>
+                  </a:lnTo>
+                </a:path>
+              </a:pathLst>
+            </a:custGeom>
+            <a:solidFill>
+              <a:srgbClr val="00B0F0"/>
+            </a:solidFill>
+            <a:ln>
+              <a:noFill/>
+            </a:ln>
+          </p:spPr>
+          <p:style>
+            <a:lnRef idx="2">
+              <a:schemeClr val="accent1">
+                <a:shade val="15000"/>
+              </a:schemeClr>
+            </a:lnRef>
+            <a:fillRef idx="1">
+              <a:schemeClr val="accent1"/>
+            </a:fillRef>
+            <a:effectRef idx="0">
+              <a:schemeClr val="accent1"/>
+            </a:effectRef>
+            <a:fontRef idx="minor">
+              <a:schemeClr val="lt1"/>
+            </a:fontRef>
+          </p:style>
+          <p:txBody>
+            <a:bodyPr rtlCol="0" anchor="ctr"/>
+            <a:lstStyle/>
+            <a:p>
+              <a:pPr algn="ctr"/>
+              <a:endParaRPr lang="en-US"/>
+            </a:p>
+          </p:txBody>
+        </p:sp>
+        <p:cxnSp>
+          <p:nvCxnSpPr>
+            <p:cNvPr id="3" name="Straight Connector 2">
+              <a:extLst>
+                <a:ext uri="{FF2B5EF4-FFF2-40B4-BE49-F238E27FC236}">
+                  <a16:creationId xmlns:a16="http://schemas.microsoft.com/office/drawing/2014/main" id="{7E62664D-7BB1-622F-47BE-51BA740ADB14}"/>
+                </a:ext>
+              </a:extLst>
+            </p:cNvPr>
+            <p:cNvCxnSpPr>
+              <a:cxnSpLocks/>
+            </p:cNvCxnSpPr>
+            <p:nvPr/>
+          </p:nvCxnSpPr>
+          <p:spPr>
+            <a:xfrm>
+              <a:off x="971500" y="1302480"/>
+              <a:ext cx="0" cy="3134660"/>
+            </a:xfrm>
+            <a:prstGeom prst="line">
+              <a:avLst/>
+            </a:prstGeom>
+          </p:spPr>
+          <p:style>
+            <a:lnRef idx="2">
+              <a:schemeClr val="accent1"/>
+            </a:lnRef>
+            <a:fillRef idx="0">
+              <a:schemeClr val="accent1"/>
+            </a:fillRef>
+            <a:effectRef idx="1">
+              <a:schemeClr val="accent1"/>
+            </a:effectRef>
+            <a:fontRef idx="minor">
+              <a:schemeClr val="tx1"/>
+            </a:fontRef>
+          </p:style>
+        </p:cxnSp>
+        <p:cxnSp>
+          <p:nvCxnSpPr>
+            <p:cNvPr id="11" name="Straight Connector 10">
+              <a:extLst>
+                <a:ext uri="{FF2B5EF4-FFF2-40B4-BE49-F238E27FC236}">
+                  <a16:creationId xmlns:a16="http://schemas.microsoft.com/office/drawing/2014/main" id="{60986B24-EE43-539C-536A-1B3D0D4FBC4A}"/>
+                </a:ext>
+              </a:extLst>
+            </p:cNvPr>
+            <p:cNvCxnSpPr>
+              <a:cxnSpLocks/>
+            </p:cNvCxnSpPr>
+            <p:nvPr/>
+          </p:nvCxnSpPr>
+          <p:spPr>
+            <a:xfrm>
+              <a:off x="971500" y="2060810"/>
+              <a:ext cx="2810760" cy="0"/>
+            </a:xfrm>
+            <a:prstGeom prst="line">
+              <a:avLst/>
+            </a:prstGeom>
+            <a:ln w="6350">
+              <a:prstDash val="dash"/>
+            </a:ln>
+          </p:spPr>
+          <p:style>
+            <a:lnRef idx="2">
+              <a:schemeClr val="accent1"/>
+            </a:lnRef>
+            <a:fillRef idx="0">
+              <a:schemeClr val="accent1"/>
+            </a:fillRef>
+            <a:effectRef idx="1">
+              <a:schemeClr val="accent1"/>
+            </a:effectRef>
+            <a:fontRef idx="minor">
+              <a:schemeClr val="tx1"/>
+            </a:fontRef>
+          </p:style>
+        </p:cxnSp>
+        <p:cxnSp>
+          <p:nvCxnSpPr>
+            <p:cNvPr id="12" name="Straight Connector 11">
+              <a:extLst>
+                <a:ext uri="{FF2B5EF4-FFF2-40B4-BE49-F238E27FC236}">
+                  <a16:creationId xmlns:a16="http://schemas.microsoft.com/office/drawing/2014/main" id="{0CF410A8-D0B8-68AB-E880-B3596FDB12B2}"/>
+                </a:ext>
+              </a:extLst>
+            </p:cNvPr>
+            <p:cNvCxnSpPr>
+              <a:cxnSpLocks/>
+            </p:cNvCxnSpPr>
+            <p:nvPr/>
+          </p:nvCxnSpPr>
+          <p:spPr>
+            <a:xfrm>
+              <a:off x="971500" y="3212970"/>
+              <a:ext cx="2810760" cy="0"/>
+            </a:xfrm>
+            <a:prstGeom prst="line">
+              <a:avLst/>
+            </a:prstGeom>
+          </p:spPr>
+          <p:style>
+            <a:lnRef idx="2">
+              <a:schemeClr val="accent1"/>
+            </a:lnRef>
+            <a:fillRef idx="0">
+              <a:schemeClr val="accent1"/>
+            </a:fillRef>
+            <a:effectRef idx="1">
+              <a:schemeClr val="accent1"/>
+            </a:effectRef>
+            <a:fontRef idx="minor">
+              <a:schemeClr val="tx1"/>
+            </a:fontRef>
+          </p:style>
+        </p:cxnSp>
+        <p:cxnSp>
+          <p:nvCxnSpPr>
+            <p:cNvPr id="24" name="Straight Connector 23">
+              <a:extLst>
+                <a:ext uri="{FF2B5EF4-FFF2-40B4-BE49-F238E27FC236}">
+                  <a16:creationId xmlns:a16="http://schemas.microsoft.com/office/drawing/2014/main" id="{C5D70E98-DEBD-1AF7-43EF-3DAFF9A6F3E0}"/>
+                </a:ext>
+              </a:extLst>
+            </p:cNvPr>
+            <p:cNvCxnSpPr>
+              <a:cxnSpLocks/>
+            </p:cNvCxnSpPr>
+            <p:nvPr/>
+          </p:nvCxnSpPr>
+          <p:spPr>
+            <a:xfrm>
+              <a:off x="827480" y="1268700"/>
+              <a:ext cx="144000" cy="0"/>
+            </a:xfrm>
+            <a:prstGeom prst="line">
+              <a:avLst/>
+            </a:prstGeom>
+          </p:spPr>
+          <p:style>
+            <a:lnRef idx="2">
+              <a:schemeClr val="accent1"/>
+            </a:lnRef>
+            <a:fillRef idx="0">
+              <a:schemeClr val="accent1"/>
+            </a:fillRef>
+            <a:effectRef idx="1">
+              <a:schemeClr val="accent1"/>
+            </a:effectRef>
+            <a:fontRef idx="minor">
+              <a:schemeClr val="tx1"/>
+            </a:fontRef>
+          </p:style>
+        </p:cxnSp>
+        <p:cxnSp>
+          <p:nvCxnSpPr>
+            <p:cNvPr id="25" name="Straight Connector 24">
+              <a:extLst>
+                <a:ext uri="{FF2B5EF4-FFF2-40B4-BE49-F238E27FC236}">
+                  <a16:creationId xmlns:a16="http://schemas.microsoft.com/office/drawing/2014/main" id="{2E99425E-6872-7E8E-346C-D0649ED5E979}"/>
+                </a:ext>
+              </a:extLst>
+            </p:cNvPr>
+            <p:cNvCxnSpPr>
+              <a:cxnSpLocks/>
+            </p:cNvCxnSpPr>
+            <p:nvPr/>
+          </p:nvCxnSpPr>
+          <p:spPr>
+            <a:xfrm>
+              <a:off x="827480" y="1988800"/>
+              <a:ext cx="144000" cy="0"/>
+            </a:xfrm>
+            <a:prstGeom prst="line">
+              <a:avLst/>
+            </a:prstGeom>
+          </p:spPr>
+          <p:style>
+            <a:lnRef idx="2">
+              <a:schemeClr val="accent1"/>
+            </a:lnRef>
+            <a:fillRef idx="0">
+              <a:schemeClr val="accent1"/>
+            </a:fillRef>
+            <a:effectRef idx="1">
+              <a:schemeClr val="accent1"/>
+            </a:effectRef>
+            <a:fontRef idx="minor">
+              <a:schemeClr val="tx1"/>
+            </a:fontRef>
+          </p:style>
+        </p:cxnSp>
+        <p:cxnSp>
+          <p:nvCxnSpPr>
+            <p:cNvPr id="26" name="Straight Connector 25">
+              <a:extLst>
+                <a:ext uri="{FF2B5EF4-FFF2-40B4-BE49-F238E27FC236}">
+                  <a16:creationId xmlns:a16="http://schemas.microsoft.com/office/drawing/2014/main" id="{BABC7E54-0E80-D2CB-8FA7-D8E818B34A48}"/>
+                </a:ext>
+              </a:extLst>
+            </p:cNvPr>
+            <p:cNvCxnSpPr>
+              <a:cxnSpLocks/>
+            </p:cNvCxnSpPr>
+            <p:nvPr/>
+          </p:nvCxnSpPr>
+          <p:spPr>
+            <a:xfrm>
+              <a:off x="827480" y="2708900"/>
+              <a:ext cx="144000" cy="0"/>
+            </a:xfrm>
+            <a:prstGeom prst="line">
+              <a:avLst/>
+            </a:prstGeom>
+          </p:spPr>
+          <p:style>
+            <a:lnRef idx="2">
+              <a:schemeClr val="accent1"/>
+            </a:lnRef>
+            <a:fillRef idx="0">
+              <a:schemeClr val="accent1"/>
+            </a:fillRef>
+            <a:effectRef idx="1">
+              <a:schemeClr val="accent1"/>
+            </a:effectRef>
+            <a:fontRef idx="minor">
+              <a:schemeClr val="tx1"/>
+            </a:fontRef>
+          </p:style>
+        </p:cxnSp>
+        <p:cxnSp>
+          <p:nvCxnSpPr>
+            <p:cNvPr id="27" name="Straight Connector 26">
+              <a:extLst>
+                <a:ext uri="{FF2B5EF4-FFF2-40B4-BE49-F238E27FC236}">
+                  <a16:creationId xmlns:a16="http://schemas.microsoft.com/office/drawing/2014/main" id="{54437F07-7722-59AE-516C-1AE480673ECC}"/>
+                </a:ext>
+              </a:extLst>
+            </p:cNvPr>
+            <p:cNvCxnSpPr>
+              <a:cxnSpLocks/>
+            </p:cNvCxnSpPr>
+            <p:nvPr/>
+          </p:nvCxnSpPr>
+          <p:spPr>
+            <a:xfrm>
+              <a:off x="827480" y="3429000"/>
+              <a:ext cx="144000" cy="0"/>
+            </a:xfrm>
+            <a:prstGeom prst="line">
+              <a:avLst/>
+            </a:prstGeom>
+          </p:spPr>
+          <p:style>
+            <a:lnRef idx="2">
+              <a:schemeClr val="accent1"/>
+            </a:lnRef>
+            <a:fillRef idx="0">
+              <a:schemeClr val="accent1"/>
+            </a:fillRef>
+            <a:effectRef idx="1">
+              <a:schemeClr val="accent1"/>
+            </a:effectRef>
+            <a:fontRef idx="minor">
+              <a:schemeClr val="tx1"/>
+            </a:fontRef>
+          </p:style>
+        </p:cxnSp>
+        <p:cxnSp>
+          <p:nvCxnSpPr>
+            <p:cNvPr id="28" name="Straight Connector 27">
+              <a:extLst>
+                <a:ext uri="{FF2B5EF4-FFF2-40B4-BE49-F238E27FC236}">
+                  <a16:creationId xmlns:a16="http://schemas.microsoft.com/office/drawing/2014/main" id="{4CB32668-0B5D-4421-46A9-A305C3C76079}"/>
+                </a:ext>
+              </a:extLst>
+            </p:cNvPr>
+            <p:cNvCxnSpPr>
+              <a:cxnSpLocks/>
+            </p:cNvCxnSpPr>
+            <p:nvPr/>
+          </p:nvCxnSpPr>
+          <p:spPr>
+            <a:xfrm>
+              <a:off x="827480" y="4149100"/>
+              <a:ext cx="144000" cy="0"/>
+            </a:xfrm>
+            <a:prstGeom prst="line">
+              <a:avLst/>
+            </a:prstGeom>
+          </p:spPr>
+          <p:style>
+            <a:lnRef idx="2">
+              <a:schemeClr val="accent1"/>
+            </a:lnRef>
+            <a:fillRef idx="0">
+              <a:schemeClr val="accent1"/>
+            </a:fillRef>
+            <a:effectRef idx="1">
+              <a:schemeClr val="accent1"/>
+            </a:effectRef>
+            <a:fontRef idx="minor">
+              <a:schemeClr val="tx1"/>
+            </a:fontRef>
+          </p:style>
+        </p:cxnSp>
+        <p:sp>
+          <p:nvSpPr>
+            <p:cNvPr id="35" name="Freeform 34">
+              <a:extLst>
+                <a:ext uri="{FF2B5EF4-FFF2-40B4-BE49-F238E27FC236}">
+                  <a16:creationId xmlns:a16="http://schemas.microsoft.com/office/drawing/2014/main" id="{5F4505D0-B5C0-EF53-4CEF-AA8DE6FA236B}"/>
+                </a:ext>
+              </a:extLst>
+            </p:cNvPr>
+            <p:cNvSpPr/>
+            <p:nvPr/>
+          </p:nvSpPr>
+          <p:spPr>
+            <a:xfrm>
+              <a:off x="683460" y="1772771"/>
+              <a:ext cx="263769" cy="647988"/>
+            </a:xfrm>
+            <a:custGeom>
+              <a:avLst/>
+              <a:gdLst>
+                <a:gd name="csX0" fmla="*/ 0 w 263769"/>
+                <a:gd name="csY0" fmla="*/ 677007 h 677007"/>
+                <a:gd name="csX1" fmla="*/ 140677 w 263769"/>
+                <a:gd name="csY1" fmla="*/ 677007 h 677007"/>
+                <a:gd name="csX2" fmla="*/ 263769 w 263769"/>
+                <a:gd name="csY2" fmla="*/ 0 h 677007"/>
+              </a:gdLst>
+              <a:ahLst/>
+              <a:cxnLst>
+                <a:cxn ang="0">
+                  <a:pos x="csX0" y="csY0"/>
+                </a:cxn>
+                <a:cxn ang="0">
+                  <a:pos x="csX1" y="csY1"/>
+                </a:cxn>
+                <a:cxn ang="0">
+                  <a:pos x="csX2" y="csY2"/>
+                </a:cxn>
+              </a:cxnLst>
+              <a:rect l="l" t="t" r="r" b="b"/>
+              <a:pathLst>
+                <a:path w="263769" h="677007">
+                  <a:moveTo>
+                    <a:pt x="0" y="677007"/>
+                  </a:moveTo>
+                  <a:lnTo>
+                    <a:pt x="140677" y="677007"/>
+                  </a:lnTo>
+                  <a:lnTo>
+                    <a:pt x="263769" y="0"/>
+                  </a:lnTo>
+                </a:path>
+              </a:pathLst>
+            </a:custGeom>
+            <a:noFill/>
+          </p:spPr>
+          <p:style>
+            <a:lnRef idx="2">
+              <a:schemeClr val="accent1">
+                <a:shade val="15000"/>
+              </a:schemeClr>
+            </a:lnRef>
+            <a:fillRef idx="1">
+              <a:schemeClr val="accent1"/>
+            </a:fillRef>
+            <a:effectRef idx="0">
+              <a:schemeClr val="accent1"/>
+            </a:effectRef>
+            <a:fontRef idx="minor">
+              <a:schemeClr val="lt1"/>
+            </a:fontRef>
+          </p:style>
+          <p:txBody>
+            <a:bodyPr rtlCol="0" anchor="ctr"/>
+            <a:lstStyle/>
+            <a:p>
+              <a:pPr algn="ctr"/>
+              <a:endParaRPr lang="en-US" dirty="0"/>
+            </a:p>
+          </p:txBody>
+        </p:sp>
+        <p:cxnSp>
+          <p:nvCxnSpPr>
+            <p:cNvPr id="10" name="Straight Connector 9">
+              <a:extLst>
+                <a:ext uri="{FF2B5EF4-FFF2-40B4-BE49-F238E27FC236}">
+                  <a16:creationId xmlns:a16="http://schemas.microsoft.com/office/drawing/2014/main" id="{D70A9539-6B2A-6803-93AF-AB0463940AFB}"/>
+                </a:ext>
+              </a:extLst>
+            </p:cNvPr>
+            <p:cNvCxnSpPr>
+              <a:cxnSpLocks/>
+              <a:stCxn id="35" idx="2"/>
+            </p:cNvCxnSpPr>
+            <p:nvPr/>
+          </p:nvCxnSpPr>
+          <p:spPr>
+            <a:xfrm>
+              <a:off x="947229" y="1772771"/>
+              <a:ext cx="2835031" cy="0"/>
+            </a:xfrm>
+            <a:prstGeom prst="line">
+              <a:avLst/>
+            </a:prstGeom>
+          </p:spPr>
+          <p:style>
+            <a:lnRef idx="2">
+              <a:schemeClr val="accent1"/>
+            </a:lnRef>
+            <a:fillRef idx="0">
+              <a:schemeClr val="accent1"/>
+            </a:fillRef>
+            <a:effectRef idx="1">
+              <a:schemeClr val="accent1"/>
+            </a:effectRef>
+            <a:fontRef idx="minor">
+              <a:schemeClr val="tx1"/>
+            </a:fontRef>
+          </p:style>
+        </p:cxnSp>
+        <p:cxnSp>
+          <p:nvCxnSpPr>
+            <p:cNvPr id="50" name="Straight Connector 49">
+              <a:extLst>
+                <a:ext uri="{FF2B5EF4-FFF2-40B4-BE49-F238E27FC236}">
+                  <a16:creationId xmlns:a16="http://schemas.microsoft.com/office/drawing/2014/main" id="{95C5E24D-E597-1606-444D-E9E27626F44F}"/>
+                </a:ext>
+              </a:extLst>
+            </p:cNvPr>
+            <p:cNvCxnSpPr>
+              <a:cxnSpLocks/>
+            </p:cNvCxnSpPr>
+            <p:nvPr/>
+          </p:nvCxnSpPr>
+          <p:spPr>
+            <a:xfrm>
+              <a:off x="971500" y="1877148"/>
+              <a:ext cx="2810760" cy="0"/>
+            </a:xfrm>
+            <a:prstGeom prst="line">
+              <a:avLst/>
+            </a:prstGeom>
+            <a:ln w="6350">
+              <a:prstDash val="dash"/>
+            </a:ln>
+          </p:spPr>
+          <p:style>
+            <a:lnRef idx="2">
+              <a:schemeClr val="accent1"/>
+            </a:lnRef>
+            <a:fillRef idx="0">
+              <a:schemeClr val="accent1"/>
+            </a:fillRef>
+            <a:effectRef idx="1">
+              <a:schemeClr val="accent1"/>
+            </a:effectRef>
+            <a:fontRef idx="minor">
+              <a:schemeClr val="tx1"/>
+            </a:fontRef>
+          </p:style>
+        </p:cxnSp>
+        <p:cxnSp>
+          <p:nvCxnSpPr>
+            <p:cNvPr id="51" name="Straight Connector 50">
+              <a:extLst>
+                <a:ext uri="{FF2B5EF4-FFF2-40B4-BE49-F238E27FC236}">
+                  <a16:creationId xmlns:a16="http://schemas.microsoft.com/office/drawing/2014/main" id="{2CB6D648-B70D-3289-7EFE-B47783E4AA4B}"/>
+                </a:ext>
+              </a:extLst>
+            </p:cNvPr>
+            <p:cNvCxnSpPr>
+              <a:cxnSpLocks/>
+            </p:cNvCxnSpPr>
+            <p:nvPr/>
+          </p:nvCxnSpPr>
+          <p:spPr>
+            <a:xfrm>
+              <a:off x="971710" y="1773270"/>
+              <a:ext cx="252350" cy="287540"/>
+            </a:xfrm>
+            <a:prstGeom prst="line">
+              <a:avLst/>
+            </a:prstGeom>
+            <a:ln w="6350"/>
+          </p:spPr>
+          <p:style>
+            <a:lnRef idx="2">
+              <a:schemeClr val="accent1"/>
+            </a:lnRef>
+            <a:fillRef idx="0">
+              <a:schemeClr val="accent1"/>
+            </a:fillRef>
+            <a:effectRef idx="1">
+              <a:schemeClr val="accent1"/>
+            </a:effectRef>
+            <a:fontRef idx="minor">
+              <a:schemeClr val="tx1"/>
+            </a:fontRef>
+          </p:style>
+        </p:cxnSp>
+        <p:cxnSp>
+          <p:nvCxnSpPr>
+            <p:cNvPr id="54" name="Straight Connector 53">
+              <a:extLst>
+                <a:ext uri="{FF2B5EF4-FFF2-40B4-BE49-F238E27FC236}">
+                  <a16:creationId xmlns:a16="http://schemas.microsoft.com/office/drawing/2014/main" id="{E13CC207-8038-01ED-1843-6D0C9E8B8B3B}"/>
+                </a:ext>
+              </a:extLst>
+            </p:cNvPr>
+            <p:cNvCxnSpPr>
+              <a:cxnSpLocks/>
+            </p:cNvCxnSpPr>
+            <p:nvPr/>
+          </p:nvCxnSpPr>
+          <p:spPr>
+            <a:xfrm>
+              <a:off x="1224060" y="2061310"/>
+              <a:ext cx="1216956" cy="1164599"/>
+            </a:xfrm>
+            <a:prstGeom prst="line">
+              <a:avLst/>
+            </a:prstGeom>
+            <a:ln w="6350"/>
+          </p:spPr>
+          <p:style>
+            <a:lnRef idx="2">
+              <a:schemeClr val="accent1"/>
+            </a:lnRef>
+            <a:fillRef idx="0">
+              <a:schemeClr val="accent1"/>
+            </a:fillRef>
+            <a:effectRef idx="1">
+              <a:schemeClr val="accent1"/>
+            </a:effectRef>
+            <a:fontRef idx="minor">
+              <a:schemeClr val="tx1"/>
+            </a:fontRef>
+          </p:style>
+        </p:cxnSp>
+        <p:cxnSp>
+          <p:nvCxnSpPr>
+            <p:cNvPr id="56" name="Straight Connector 55">
+              <a:extLst>
+                <a:ext uri="{FF2B5EF4-FFF2-40B4-BE49-F238E27FC236}">
+                  <a16:creationId xmlns:a16="http://schemas.microsoft.com/office/drawing/2014/main" id="{C9E2D42C-ED81-AF99-8A16-18FFBA0E7CA5}"/>
+                </a:ext>
+              </a:extLst>
+            </p:cNvPr>
+            <p:cNvCxnSpPr>
+              <a:cxnSpLocks/>
+            </p:cNvCxnSpPr>
+            <p:nvPr/>
+          </p:nvCxnSpPr>
+          <p:spPr>
+            <a:xfrm>
+              <a:off x="971500" y="2053218"/>
+              <a:ext cx="1584000" cy="1168132"/>
+            </a:xfrm>
+            <a:prstGeom prst="line">
+              <a:avLst/>
+            </a:prstGeom>
+            <a:ln w="6350">
+              <a:solidFill>
+                <a:srgbClr val="00B0F0"/>
+              </a:solidFill>
+            </a:ln>
+          </p:spPr>
+          <p:style>
+            <a:lnRef idx="2">
+              <a:schemeClr val="accent1"/>
+            </a:lnRef>
+            <a:fillRef idx="0">
+              <a:schemeClr val="accent1"/>
+            </a:fillRef>
+            <a:effectRef idx="1">
+              <a:schemeClr val="accent1"/>
+            </a:effectRef>
+            <a:fontRef idx="minor">
+              <a:schemeClr val="tx1"/>
+            </a:fontRef>
+          </p:style>
+        </p:cxnSp>
+        <p:cxnSp>
+          <p:nvCxnSpPr>
+            <p:cNvPr id="64" name="Straight Connector 63">
+              <a:extLst>
+                <a:ext uri="{FF2B5EF4-FFF2-40B4-BE49-F238E27FC236}">
+                  <a16:creationId xmlns:a16="http://schemas.microsoft.com/office/drawing/2014/main" id="{07A0F833-D598-7EEF-C55E-9AA5A7E8FDA3}"/>
+                </a:ext>
+              </a:extLst>
+            </p:cNvPr>
+            <p:cNvCxnSpPr>
+              <a:cxnSpLocks/>
+            </p:cNvCxnSpPr>
+            <p:nvPr/>
+          </p:nvCxnSpPr>
+          <p:spPr>
+            <a:xfrm>
+              <a:off x="971500" y="1772770"/>
+              <a:ext cx="1518235" cy="1448485"/>
+            </a:xfrm>
+            <a:prstGeom prst="line">
+              <a:avLst/>
+            </a:prstGeom>
+            <a:ln w="6350"/>
+          </p:spPr>
+          <p:style>
+            <a:lnRef idx="2">
+              <a:schemeClr val="accent1"/>
+            </a:lnRef>
+            <a:fillRef idx="0">
+              <a:schemeClr val="accent1"/>
+            </a:fillRef>
+            <a:effectRef idx="1">
+              <a:schemeClr val="accent1"/>
+            </a:effectRef>
+            <a:fontRef idx="minor">
+              <a:schemeClr val="tx1"/>
+            </a:fontRef>
+          </p:style>
+        </p:cxnSp>
+        <p:cxnSp>
+          <p:nvCxnSpPr>
+            <p:cNvPr id="66" name="Straight Connector 65">
+              <a:extLst>
+                <a:ext uri="{FF2B5EF4-FFF2-40B4-BE49-F238E27FC236}">
+                  <a16:creationId xmlns:a16="http://schemas.microsoft.com/office/drawing/2014/main" id="{F64BE027-95F7-657D-9968-092E1E129629}"/>
+                </a:ext>
+              </a:extLst>
+            </p:cNvPr>
+            <p:cNvCxnSpPr>
+              <a:cxnSpLocks/>
+            </p:cNvCxnSpPr>
+            <p:nvPr/>
+          </p:nvCxnSpPr>
+          <p:spPr>
+            <a:xfrm>
+              <a:off x="2483710" y="3213071"/>
+              <a:ext cx="1298550" cy="652179"/>
+            </a:xfrm>
+            <a:prstGeom prst="line">
+              <a:avLst/>
+            </a:prstGeom>
+            <a:ln w="6350"/>
+          </p:spPr>
+          <p:style>
+            <a:lnRef idx="2">
+              <a:schemeClr val="accent1"/>
+            </a:lnRef>
+            <a:fillRef idx="0">
+              <a:schemeClr val="accent1"/>
+            </a:fillRef>
+            <a:effectRef idx="1">
+              <a:schemeClr val="accent1"/>
+            </a:effectRef>
+            <a:fontRef idx="minor">
+              <a:schemeClr val="tx1"/>
+            </a:fontRef>
+          </p:style>
+        </p:cxnSp>
+        <p:cxnSp>
+          <p:nvCxnSpPr>
+            <p:cNvPr id="71" name="Straight Connector 70">
+              <a:extLst>
+                <a:ext uri="{FF2B5EF4-FFF2-40B4-BE49-F238E27FC236}">
+                  <a16:creationId xmlns:a16="http://schemas.microsoft.com/office/drawing/2014/main" id="{16E1EC8B-2441-88F1-1235-4C9461A9D3F5}"/>
+                </a:ext>
+              </a:extLst>
+            </p:cNvPr>
+            <p:cNvCxnSpPr>
+              <a:cxnSpLocks/>
+            </p:cNvCxnSpPr>
+            <p:nvPr/>
+          </p:nvCxnSpPr>
+          <p:spPr>
+            <a:xfrm>
+              <a:off x="2411700" y="3212970"/>
+              <a:ext cx="1296180" cy="652280"/>
+            </a:xfrm>
+            <a:prstGeom prst="line">
+              <a:avLst/>
+            </a:prstGeom>
+            <a:ln w="6350"/>
+          </p:spPr>
+          <p:style>
+            <a:lnRef idx="2">
+              <a:schemeClr val="accent1"/>
+            </a:lnRef>
+            <a:fillRef idx="0">
+              <a:schemeClr val="accent1"/>
+            </a:fillRef>
+            <a:effectRef idx="1">
+              <a:schemeClr val="accent1"/>
+            </a:effectRef>
+            <a:fontRef idx="minor">
+              <a:schemeClr val="tx1"/>
+            </a:fontRef>
+          </p:style>
+        </p:cxnSp>
+        <p:cxnSp>
+          <p:nvCxnSpPr>
+            <p:cNvPr id="73" name="Straight Connector 72">
+              <a:extLst>
+                <a:ext uri="{FF2B5EF4-FFF2-40B4-BE49-F238E27FC236}">
+                  <a16:creationId xmlns:a16="http://schemas.microsoft.com/office/drawing/2014/main" id="{287F3E22-C759-8084-CB7C-6BCB5EE628FA}"/>
+                </a:ext>
+              </a:extLst>
+            </p:cNvPr>
+            <p:cNvCxnSpPr>
+              <a:cxnSpLocks/>
+            </p:cNvCxnSpPr>
+            <p:nvPr/>
+          </p:nvCxnSpPr>
+          <p:spPr>
+            <a:xfrm>
+              <a:off x="2522616" y="3197503"/>
+              <a:ext cx="656278" cy="667747"/>
+            </a:xfrm>
+            <a:prstGeom prst="line">
+              <a:avLst/>
+            </a:prstGeom>
+            <a:ln w="6350">
+              <a:solidFill>
+                <a:srgbClr val="00B0F0"/>
+              </a:solidFill>
+            </a:ln>
+          </p:spPr>
+          <p:style>
+            <a:lnRef idx="2">
+              <a:schemeClr val="accent1"/>
+            </a:lnRef>
+            <a:fillRef idx="0">
+              <a:schemeClr val="accent1"/>
+            </a:fillRef>
+            <a:effectRef idx="1">
+              <a:schemeClr val="accent1"/>
+            </a:effectRef>
+            <a:fontRef idx="minor">
+              <a:schemeClr val="tx1"/>
+            </a:fontRef>
+          </p:style>
+        </p:cxnSp>
+        <p:cxnSp>
+          <p:nvCxnSpPr>
+            <p:cNvPr id="74" name="Straight Connector 73">
+              <a:extLst>
+                <a:ext uri="{FF2B5EF4-FFF2-40B4-BE49-F238E27FC236}">
+                  <a16:creationId xmlns:a16="http://schemas.microsoft.com/office/drawing/2014/main" id="{0C9BE51A-9DD9-F412-9B83-71C0F8164550}"/>
+                </a:ext>
+              </a:extLst>
+            </p:cNvPr>
+            <p:cNvCxnSpPr>
+              <a:cxnSpLocks/>
+            </p:cNvCxnSpPr>
+            <p:nvPr/>
+          </p:nvCxnSpPr>
+          <p:spPr>
+            <a:xfrm>
+              <a:off x="971500" y="2060810"/>
+              <a:ext cx="359650" cy="359949"/>
+            </a:xfrm>
+            <a:prstGeom prst="line">
+              <a:avLst/>
+            </a:prstGeom>
+            <a:ln w="6350"/>
+          </p:spPr>
+          <p:style>
+            <a:lnRef idx="2">
+              <a:schemeClr val="accent1"/>
+            </a:lnRef>
+            <a:fillRef idx="0">
+              <a:schemeClr val="accent1"/>
+            </a:fillRef>
+            <a:effectRef idx="1">
+              <a:schemeClr val="accent1"/>
+            </a:effectRef>
+            <a:fontRef idx="minor">
+              <a:schemeClr val="tx1"/>
+            </a:fontRef>
+          </p:style>
+        </p:cxnSp>
+        <p:cxnSp>
+          <p:nvCxnSpPr>
+            <p:cNvPr id="75" name="Straight Connector 74">
+              <a:extLst>
+                <a:ext uri="{FF2B5EF4-FFF2-40B4-BE49-F238E27FC236}">
+                  <a16:creationId xmlns:a16="http://schemas.microsoft.com/office/drawing/2014/main" id="{8FEB04AE-340F-AAA9-8A13-7EB1A5F6BCF0}"/>
+                </a:ext>
+              </a:extLst>
+            </p:cNvPr>
+            <p:cNvCxnSpPr>
+              <a:cxnSpLocks/>
+            </p:cNvCxnSpPr>
+            <p:nvPr/>
+          </p:nvCxnSpPr>
+          <p:spPr>
+            <a:xfrm>
+              <a:off x="683460" y="2420860"/>
+              <a:ext cx="1149078" cy="0"/>
+            </a:xfrm>
+            <a:prstGeom prst="line">
+              <a:avLst/>
+            </a:prstGeom>
+            <a:ln w="3175">
+              <a:prstDash val="dash"/>
+            </a:ln>
+          </p:spPr>
+          <p:style>
+            <a:lnRef idx="2">
+              <a:schemeClr val="accent1"/>
+            </a:lnRef>
+            <a:fillRef idx="0">
+              <a:schemeClr val="accent1"/>
+            </a:fillRef>
+            <a:effectRef idx="1">
+              <a:schemeClr val="accent1"/>
+            </a:effectRef>
+            <a:fontRef idx="minor">
+              <a:schemeClr val="tx1"/>
+            </a:fontRef>
+          </p:style>
+        </p:cxnSp>
+        <p:cxnSp>
+          <p:nvCxnSpPr>
+            <p:cNvPr id="76" name="Straight Connector 75">
+              <a:extLst>
+                <a:ext uri="{FF2B5EF4-FFF2-40B4-BE49-F238E27FC236}">
+                  <a16:creationId xmlns:a16="http://schemas.microsoft.com/office/drawing/2014/main" id="{274CFE9E-9C2C-6B1C-EC37-9E3F9D24D75A}"/>
+                </a:ext>
+              </a:extLst>
+            </p:cNvPr>
+            <p:cNvCxnSpPr>
+              <a:cxnSpLocks/>
+            </p:cNvCxnSpPr>
+            <p:nvPr/>
+          </p:nvCxnSpPr>
+          <p:spPr>
+            <a:xfrm>
+              <a:off x="1331150" y="2420759"/>
+              <a:ext cx="1109866" cy="805150"/>
+            </a:xfrm>
+            <a:prstGeom prst="line">
+              <a:avLst/>
+            </a:prstGeom>
+            <a:ln w="6350"/>
+          </p:spPr>
+          <p:style>
+            <a:lnRef idx="2">
+              <a:schemeClr val="accent1"/>
+            </a:lnRef>
+            <a:fillRef idx="0">
+              <a:schemeClr val="accent1"/>
+            </a:fillRef>
+            <a:effectRef idx="1">
+              <a:schemeClr val="accent1"/>
+            </a:effectRef>
+            <a:fontRef idx="minor">
+              <a:schemeClr val="tx1"/>
+            </a:fontRef>
+          </p:style>
+        </p:cxnSp>
+        <p:sp>
+          <p:nvSpPr>
+            <p:cNvPr id="96" name="Freeform 95">
+              <a:extLst>
+                <a:ext uri="{FF2B5EF4-FFF2-40B4-BE49-F238E27FC236}">
+                  <a16:creationId xmlns:a16="http://schemas.microsoft.com/office/drawing/2014/main" id="{946A3849-7C3D-C24D-8933-4DE2BF239753}"/>
+                </a:ext>
+              </a:extLst>
+            </p:cNvPr>
+            <p:cNvSpPr/>
+            <p:nvPr/>
+          </p:nvSpPr>
+          <p:spPr>
+            <a:xfrm>
+              <a:off x="988965" y="2068192"/>
+              <a:ext cx="1667897" cy="1271526"/>
+            </a:xfrm>
+            <a:custGeom>
+              <a:avLst/>
+              <a:gdLst>
+                <a:gd name="csX0" fmla="*/ 0 w 1667897"/>
+                <a:gd name="csY0" fmla="*/ 0 h 1271526"/>
+                <a:gd name="csX1" fmla="*/ 349277 w 1667897"/>
+                <a:gd name="csY1" fmla="*/ 361051 h 1271526"/>
+                <a:gd name="csX2" fmla="*/ 1448127 w 1667897"/>
+                <a:gd name="csY2" fmla="*/ 1161641 h 1271526"/>
+                <a:gd name="csX3" fmla="*/ 1667897 w 1667897"/>
+                <a:gd name="csY3" fmla="*/ 1271526 h 1271526"/>
+                <a:gd name="csX4" fmla="*/ 1546238 w 1667897"/>
+                <a:gd name="csY4" fmla="*/ 1138095 h 1271526"/>
+                <a:gd name="csX5" fmla="*/ 0 w 1667897"/>
+                <a:gd name="csY5" fmla="*/ 0 h 1271526"/>
+              </a:gdLst>
+              <a:ahLst/>
+              <a:cxnLst>
+                <a:cxn ang="0">
+                  <a:pos x="csX0" y="csY0"/>
+                </a:cxn>
+                <a:cxn ang="0">
+                  <a:pos x="csX1" y="csY1"/>
+                </a:cxn>
+                <a:cxn ang="0">
+                  <a:pos x="csX2" y="csY2"/>
+                </a:cxn>
+                <a:cxn ang="0">
+                  <a:pos x="csX3" y="csY3"/>
+                </a:cxn>
+                <a:cxn ang="0">
+                  <a:pos x="csX4" y="csY4"/>
+                </a:cxn>
+                <a:cxn ang="0">
+                  <a:pos x="csX5" y="csY5"/>
+                </a:cxn>
+              </a:cxnLst>
+              <a:rect l="l" t="t" r="r" b="b"/>
+              <a:pathLst>
+                <a:path w="1667897" h="1271526">
+                  <a:moveTo>
+                    <a:pt x="0" y="0"/>
+                  </a:moveTo>
+                  <a:lnTo>
+                    <a:pt x="349277" y="361051"/>
+                  </a:lnTo>
+                  <a:lnTo>
+                    <a:pt x="1448127" y="1161641"/>
+                  </a:lnTo>
+                  <a:lnTo>
+                    <a:pt x="1667897" y="1271526"/>
+                  </a:lnTo>
+                  <a:lnTo>
+                    <a:pt x="1546238" y="1138095"/>
+                  </a:lnTo>
+                  <a:lnTo>
+                    <a:pt x="0" y="0"/>
+                  </a:lnTo>
+                  <a:close/>
+                </a:path>
+              </a:pathLst>
+            </a:custGeom>
+            <a:solidFill>
+              <a:srgbClr val="0070C0">
+                <a:alpha val="26000"/>
+              </a:srgbClr>
+            </a:solidFill>
+            <a:ln>
+              <a:noFill/>
+            </a:ln>
+          </p:spPr>
+          <p:style>
+            <a:lnRef idx="2">
+              <a:schemeClr val="accent1">
+                <a:shade val="15000"/>
+              </a:schemeClr>
+            </a:lnRef>
+            <a:fillRef idx="1">
+              <a:schemeClr val="accent1"/>
+            </a:fillRef>
+            <a:effectRef idx="0">
+              <a:schemeClr val="accent1"/>
+            </a:effectRef>
+            <a:fontRef idx="minor">
+              <a:schemeClr val="lt1"/>
+            </a:fontRef>
+          </p:style>
+          <p:txBody>
+            <a:bodyPr rtlCol="0" anchor="ctr"/>
+            <a:lstStyle/>
+            <a:p>
+              <a:pPr algn="ctr"/>
+              <a:endParaRPr lang="en-US"/>
+            </a:p>
+          </p:txBody>
+        </p:sp>
+        <p:sp>
+          <p:nvSpPr>
+            <p:cNvPr id="97" name="Freeform 96">
+              <a:extLst>
+                <a:ext uri="{FF2B5EF4-FFF2-40B4-BE49-F238E27FC236}">
+                  <a16:creationId xmlns:a16="http://schemas.microsoft.com/office/drawing/2014/main" id="{8A49639F-3541-E432-E866-4668A5D23ECA}"/>
+                </a:ext>
+              </a:extLst>
+            </p:cNvPr>
+            <p:cNvSpPr/>
+            <p:nvPr/>
+          </p:nvSpPr>
+          <p:spPr>
+            <a:xfrm>
+              <a:off x="2083890" y="2876632"/>
+              <a:ext cx="576896" cy="463086"/>
+            </a:xfrm>
+            <a:custGeom>
+              <a:avLst/>
+              <a:gdLst>
+                <a:gd name="csX0" fmla="*/ 0 w 576896"/>
+                <a:gd name="csY0" fmla="*/ 0 h 463086"/>
+                <a:gd name="csX1" fmla="*/ 341428 w 576896"/>
+                <a:gd name="csY1" fmla="*/ 337504 h 463086"/>
+                <a:gd name="csX2" fmla="*/ 576896 w 576896"/>
+                <a:gd name="csY2" fmla="*/ 463086 h 463086"/>
+                <a:gd name="csX3" fmla="*/ 451313 w 576896"/>
+                <a:gd name="csY3" fmla="*/ 325730 h 463086"/>
+                <a:gd name="csX4" fmla="*/ 0 w 576896"/>
+                <a:gd name="csY4" fmla="*/ 0 h 463086"/>
+              </a:gdLst>
+              <a:ahLst/>
+              <a:cxnLst>
+                <a:cxn ang="0">
+                  <a:pos x="csX0" y="csY0"/>
+                </a:cxn>
+                <a:cxn ang="0">
+                  <a:pos x="csX1" y="csY1"/>
+                </a:cxn>
+                <a:cxn ang="0">
+                  <a:pos x="csX2" y="csY2"/>
+                </a:cxn>
+                <a:cxn ang="0">
+                  <a:pos x="csX3" y="csY3"/>
+                </a:cxn>
+                <a:cxn ang="0">
+                  <a:pos x="csX4" y="csY4"/>
+                </a:cxn>
+              </a:cxnLst>
+              <a:rect l="l" t="t" r="r" b="b"/>
+              <a:pathLst>
+                <a:path w="576896" h="463086">
+                  <a:moveTo>
+                    <a:pt x="0" y="0"/>
+                  </a:moveTo>
+                  <a:lnTo>
+                    <a:pt x="341428" y="337504"/>
+                  </a:lnTo>
+                  <a:lnTo>
+                    <a:pt x="576896" y="463086"/>
+                  </a:lnTo>
+                  <a:lnTo>
+                    <a:pt x="451313" y="325730"/>
+                  </a:lnTo>
+                  <a:lnTo>
+                    <a:pt x="0" y="0"/>
+                  </a:lnTo>
+                  <a:close/>
+                </a:path>
+              </a:pathLst>
+            </a:custGeom>
+            <a:solidFill>
+              <a:srgbClr val="FF0000">
+                <a:alpha val="30000"/>
+              </a:srgbClr>
+            </a:solidFill>
+            <a:ln>
+              <a:noFill/>
+            </a:ln>
+          </p:spPr>
+          <p:style>
+            <a:lnRef idx="2">
+              <a:schemeClr val="accent1">
+                <a:shade val="15000"/>
+              </a:schemeClr>
+            </a:lnRef>
+            <a:fillRef idx="1">
+              <a:schemeClr val="accent1"/>
+            </a:fillRef>
+            <a:effectRef idx="0">
+              <a:schemeClr val="accent1"/>
+            </a:effectRef>
+            <a:fontRef idx="minor">
+              <a:schemeClr val="lt1"/>
+            </a:fontRef>
+          </p:style>
+          <p:txBody>
+            <a:bodyPr rtlCol="0" anchor="ctr"/>
+            <a:lstStyle/>
+            <a:p>
+              <a:pPr algn="ctr"/>
+              <a:endParaRPr lang="en-US" dirty="0"/>
+            </a:p>
+          </p:txBody>
+        </p:sp>
+        <p:pic>
+          <p:nvPicPr>
+            <p:cNvPr id="108" name="Picture 107">
+              <a:extLst>
+                <a:ext uri="{FF2B5EF4-FFF2-40B4-BE49-F238E27FC236}">
+                  <a16:creationId xmlns:a16="http://schemas.microsoft.com/office/drawing/2014/main" id="{083176B5-E371-A302-195E-70E376F05131}"/>
+                </a:ext>
+              </a:extLst>
+            </p:cNvPr>
+            <p:cNvPicPr>
+              <a:picLocks noChangeAspect="1"/>
+            </p:cNvPicPr>
+            <p:nvPr/>
+          </p:nvPicPr>
+          <p:blipFill>
+            <a:blip r:embed="rId2"/>
+            <a:stretch>
+              <a:fillRect/>
+            </a:stretch>
+          </p:blipFill>
+          <p:spPr>
+            <a:xfrm>
+              <a:off x="2298180" y="2132820"/>
+              <a:ext cx="1409700" cy="203200"/>
+            </a:xfrm>
+            <a:prstGeom prst="rect">
+              <a:avLst/>
+            </a:prstGeom>
+          </p:spPr>
+        </p:pic>
+        <p:pic>
+          <p:nvPicPr>
+            <p:cNvPr id="109" name="Picture 108">
+              <a:extLst>
+                <a:ext uri="{FF2B5EF4-FFF2-40B4-BE49-F238E27FC236}">
+                  <a16:creationId xmlns:a16="http://schemas.microsoft.com/office/drawing/2014/main" id="{86CCD587-53E0-1E9E-47DC-B183EDD45210}"/>
+                </a:ext>
+              </a:extLst>
+            </p:cNvPr>
+            <p:cNvPicPr>
+              <a:picLocks noChangeAspect="1"/>
+            </p:cNvPicPr>
+            <p:nvPr/>
+          </p:nvPicPr>
+          <p:blipFill>
+            <a:blip r:embed="rId3"/>
+            <a:stretch>
+              <a:fillRect/>
+            </a:stretch>
+          </p:blipFill>
+          <p:spPr>
+            <a:xfrm>
+              <a:off x="3246490" y="4225430"/>
+              <a:ext cx="533400" cy="139700"/>
+            </a:xfrm>
+            <a:prstGeom prst="rect">
+              <a:avLst/>
+            </a:prstGeom>
+          </p:spPr>
+        </p:pic>
+        <p:pic>
+          <p:nvPicPr>
+            <p:cNvPr id="110" name="Picture 109">
+              <a:extLst>
+                <a:ext uri="{FF2B5EF4-FFF2-40B4-BE49-F238E27FC236}">
+                  <a16:creationId xmlns:a16="http://schemas.microsoft.com/office/drawing/2014/main" id="{05E4629C-D204-76EA-CAFB-E4CF4C4B3E16}"/>
+                </a:ext>
+              </a:extLst>
+            </p:cNvPr>
+            <p:cNvPicPr>
+              <a:picLocks noChangeAspect="1"/>
+            </p:cNvPicPr>
+            <p:nvPr/>
+          </p:nvPicPr>
+          <p:blipFill>
+            <a:blip r:embed="rId4"/>
+            <a:stretch>
+              <a:fillRect/>
+            </a:stretch>
+          </p:blipFill>
+          <p:spPr>
+            <a:xfrm>
+              <a:off x="2195670" y="1883010"/>
+              <a:ext cx="1473200" cy="177800"/>
+            </a:xfrm>
+            <a:prstGeom prst="rect">
+              <a:avLst/>
+            </a:prstGeom>
+          </p:spPr>
+        </p:pic>
+        <p:pic>
+          <p:nvPicPr>
+            <p:cNvPr id="112" name="Picture 111">
+              <a:extLst>
+                <a:ext uri="{FF2B5EF4-FFF2-40B4-BE49-F238E27FC236}">
+                  <a16:creationId xmlns:a16="http://schemas.microsoft.com/office/drawing/2014/main" id="{17C2EB87-B617-2688-28CF-081373E87116}"/>
+                </a:ext>
+              </a:extLst>
+            </p:cNvPr>
+            <p:cNvPicPr>
+              <a:picLocks noChangeAspect="1"/>
+            </p:cNvPicPr>
+            <p:nvPr/>
+          </p:nvPicPr>
+          <p:blipFill>
+            <a:blip r:embed="rId5"/>
+            <a:stretch>
+              <a:fillRect/>
+            </a:stretch>
+          </p:blipFill>
+          <p:spPr>
+            <a:xfrm>
+              <a:off x="2484230" y="3801880"/>
+              <a:ext cx="863600" cy="203200"/>
+            </a:xfrm>
+            <a:prstGeom prst="rect">
+              <a:avLst/>
+            </a:prstGeom>
+          </p:spPr>
+        </p:pic>
+        <p:pic>
+          <p:nvPicPr>
+            <p:cNvPr id="113" name="Picture 112">
+              <a:extLst>
+                <a:ext uri="{FF2B5EF4-FFF2-40B4-BE49-F238E27FC236}">
+                  <a16:creationId xmlns:a16="http://schemas.microsoft.com/office/drawing/2014/main" id="{6BE7D5DA-605A-7B08-FF2D-6BC10EA5BD73}"/>
+                </a:ext>
+              </a:extLst>
+            </p:cNvPr>
+            <p:cNvPicPr>
+              <a:picLocks noChangeAspect="1"/>
+            </p:cNvPicPr>
+            <p:nvPr/>
+          </p:nvPicPr>
+          <p:blipFill>
+            <a:blip r:embed="rId6"/>
+            <a:stretch>
+              <a:fillRect/>
+            </a:stretch>
+          </p:blipFill>
+          <p:spPr>
+            <a:xfrm>
+              <a:off x="3196210" y="3369820"/>
+              <a:ext cx="1447800" cy="203200"/>
+            </a:xfrm>
+            <a:prstGeom prst="rect">
+              <a:avLst/>
+            </a:prstGeom>
+          </p:spPr>
+        </p:pic>
+        <p:pic>
+          <p:nvPicPr>
+            <p:cNvPr id="115" name="Picture 114">
+              <a:extLst>
+                <a:ext uri="{FF2B5EF4-FFF2-40B4-BE49-F238E27FC236}">
+                  <a16:creationId xmlns:a16="http://schemas.microsoft.com/office/drawing/2014/main" id="{AF5D5919-FB42-A5DA-DDA3-B2713C0EFB2A}"/>
+                </a:ext>
+              </a:extLst>
+            </p:cNvPr>
+            <p:cNvPicPr>
+              <a:picLocks noChangeAspect="1"/>
+            </p:cNvPicPr>
+            <p:nvPr/>
+          </p:nvPicPr>
+          <p:blipFill>
+            <a:blip r:embed="rId7"/>
+            <a:stretch>
+              <a:fillRect/>
+            </a:stretch>
+          </p:blipFill>
+          <p:spPr>
+            <a:xfrm>
+              <a:off x="2298050" y="2636890"/>
+              <a:ext cx="1193800" cy="139700"/>
+            </a:xfrm>
+            <a:prstGeom prst="rect">
+              <a:avLst/>
+            </a:prstGeom>
+          </p:spPr>
+        </p:pic>
+        <p:pic>
+          <p:nvPicPr>
+            <p:cNvPr id="116" name="Picture 115">
+              <a:extLst>
+                <a:ext uri="{FF2B5EF4-FFF2-40B4-BE49-F238E27FC236}">
+                  <a16:creationId xmlns:a16="http://schemas.microsoft.com/office/drawing/2014/main" id="{8E4F414E-5A3D-4FE9-E5EC-CC4BC1F0BF90}"/>
+                </a:ext>
+              </a:extLst>
+            </p:cNvPr>
+            <p:cNvPicPr>
+              <a:picLocks noChangeAspect="1"/>
+            </p:cNvPicPr>
+            <p:nvPr/>
+          </p:nvPicPr>
+          <p:blipFill>
+            <a:blip r:embed="rId7"/>
+            <a:stretch>
+              <a:fillRect/>
+            </a:stretch>
+          </p:blipFill>
+          <p:spPr>
+            <a:xfrm>
+              <a:off x="1001870" y="3038980"/>
+              <a:ext cx="1193800" cy="139700"/>
+            </a:xfrm>
+            <a:prstGeom prst="rect">
+              <a:avLst/>
+            </a:prstGeom>
+          </p:spPr>
+        </p:pic>
+        <p:sp>
+          <p:nvSpPr>
+            <p:cNvPr id="117" name="Freeform 116">
+              <a:extLst>
+                <a:ext uri="{FF2B5EF4-FFF2-40B4-BE49-F238E27FC236}">
+                  <a16:creationId xmlns:a16="http://schemas.microsoft.com/office/drawing/2014/main" id="{F8817E9C-A173-1D29-A2EF-B19DC5216E76}"/>
+                </a:ext>
+              </a:extLst>
+            </p:cNvPr>
+            <p:cNvSpPr/>
+            <p:nvPr/>
+          </p:nvSpPr>
+          <p:spPr>
+            <a:xfrm>
+              <a:off x="2411730" y="2868930"/>
+              <a:ext cx="1085850" cy="240030"/>
+            </a:xfrm>
+            <a:custGeom>
+              <a:avLst/>
+              <a:gdLst>
+                <a:gd name="csX0" fmla="*/ 1085850 w 1085850"/>
+                <a:gd name="csY0" fmla="*/ 0 h 240030"/>
+                <a:gd name="csX1" fmla="*/ 0 w 1085850"/>
+                <a:gd name="csY1" fmla="*/ 11430 h 240030"/>
+                <a:gd name="csX2" fmla="*/ 11430 w 1085850"/>
+                <a:gd name="csY2" fmla="*/ 240030 h 240030"/>
+              </a:gdLst>
+              <a:ahLst/>
+              <a:cxnLst>
+                <a:cxn ang="0">
+                  <a:pos x="csX0" y="csY0"/>
+                </a:cxn>
+                <a:cxn ang="0">
+                  <a:pos x="csX1" y="csY1"/>
+                </a:cxn>
+                <a:cxn ang="0">
+                  <a:pos x="csX2" y="csY2"/>
+                </a:cxn>
+              </a:cxnLst>
+              <a:rect l="l" t="t" r="r" b="b"/>
+              <a:pathLst>
+                <a:path w="1085850" h="240030">
+                  <a:moveTo>
+                    <a:pt x="1085850" y="0"/>
+                  </a:moveTo>
+                  <a:lnTo>
+                    <a:pt x="0" y="11430"/>
+                  </a:lnTo>
+                  <a:lnTo>
+                    <a:pt x="11430" y="240030"/>
+                  </a:lnTo>
+                </a:path>
+              </a:pathLst>
+            </a:custGeom>
+            <a:noFill/>
+            <a:ln w="6350">
+              <a:tailEnd type="arrow"/>
+            </a:ln>
+          </p:spPr>
+          <p:style>
+            <a:lnRef idx="2">
+              <a:schemeClr val="accent1">
+                <a:shade val="15000"/>
+              </a:schemeClr>
+            </a:lnRef>
+            <a:fillRef idx="1">
+              <a:schemeClr val="accent1"/>
+            </a:fillRef>
+            <a:effectRef idx="0">
+              <a:schemeClr val="accent1"/>
+            </a:effectRef>
+            <a:fontRef idx="minor">
+              <a:schemeClr val="lt1"/>
+            </a:fontRef>
+          </p:style>
+          <p:txBody>
+            <a:bodyPr rtlCol="0" anchor="ctr"/>
+            <a:lstStyle/>
+            <a:p>
+              <a:pPr algn="ctr"/>
+              <a:endParaRPr lang="en-US"/>
+            </a:p>
+          </p:txBody>
+        </p:sp>
+        <p:cxnSp>
+          <p:nvCxnSpPr>
+            <p:cNvPr id="120" name="Straight Arrow Connector 119">
+              <a:extLst>
+                <a:ext uri="{FF2B5EF4-FFF2-40B4-BE49-F238E27FC236}">
+                  <a16:creationId xmlns:a16="http://schemas.microsoft.com/office/drawing/2014/main" id="{9F57121A-FA75-8C6A-1CFE-7469FA880D3C}"/>
+                </a:ext>
+              </a:extLst>
+            </p:cNvPr>
+            <p:cNvCxnSpPr>
+              <a:cxnSpLocks/>
+            </p:cNvCxnSpPr>
+            <p:nvPr/>
+          </p:nvCxnSpPr>
+          <p:spPr>
+            <a:xfrm flipV="1">
+              <a:off x="1441400" y="2732489"/>
+              <a:ext cx="339400" cy="306491"/>
+            </a:xfrm>
+            <a:prstGeom prst="straightConnector1">
+              <a:avLst/>
+            </a:prstGeom>
+            <a:ln w="6350">
+              <a:tailEnd type="arrow"/>
+            </a:ln>
+          </p:spPr>
+          <p:style>
+            <a:lnRef idx="2">
+              <a:schemeClr val="accent1"/>
+            </a:lnRef>
+            <a:fillRef idx="0">
+              <a:schemeClr val="accent1"/>
+            </a:fillRef>
+            <a:effectRef idx="1">
+              <a:schemeClr val="accent1"/>
+            </a:effectRef>
+            <a:fontRef idx="minor">
+              <a:schemeClr val="tx1"/>
+            </a:fontRef>
+          </p:style>
+        </p:cxnSp>
+        <p:grpSp>
+          <p:nvGrpSpPr>
+            <p:cNvPr id="140" name="Group 139">
+              <a:extLst>
+                <a:ext uri="{FF2B5EF4-FFF2-40B4-BE49-F238E27FC236}">
+                  <a16:creationId xmlns:a16="http://schemas.microsoft.com/office/drawing/2014/main" id="{1FB6D986-C094-9A34-4C6E-A9DE9BA18510}"/>
+                </a:ext>
+              </a:extLst>
+            </p:cNvPr>
+            <p:cNvGrpSpPr/>
+            <p:nvPr/>
+          </p:nvGrpSpPr>
+          <p:grpSpPr>
+            <a:xfrm>
+              <a:off x="827480" y="979262"/>
+              <a:ext cx="3312460" cy="419058"/>
+              <a:chOff x="827480" y="260560"/>
+              <a:chExt cx="3312460" cy="419058"/>
+            </a:xfrm>
+          </p:grpSpPr>
+          <p:cxnSp>
+            <p:nvCxnSpPr>
+              <p:cNvPr id="6" name="Straight Connector 5">
+                <a:extLst>
+                  <a:ext uri="{FF2B5EF4-FFF2-40B4-BE49-F238E27FC236}">
+                    <a16:creationId xmlns:a16="http://schemas.microsoft.com/office/drawing/2014/main" id="{99CD4F2F-7A6F-2779-E9C6-7CB668B6346D}"/>
+                  </a:ext>
+                </a:extLst>
+              </p:cNvPr>
+              <p:cNvCxnSpPr>
+                <a:cxnSpLocks/>
+              </p:cNvCxnSpPr>
+              <p:nvPr/>
+            </p:nvCxnSpPr>
+            <p:spPr>
+              <a:xfrm>
+                <a:off x="971500" y="548600"/>
+                <a:ext cx="3168440" cy="0"/>
+              </a:xfrm>
+              <a:prstGeom prst="line">
+                <a:avLst/>
+              </a:prstGeom>
+            </p:spPr>
+            <p:style>
+              <a:lnRef idx="2">
+                <a:schemeClr val="accent1"/>
+              </a:lnRef>
+              <a:fillRef idx="0">
+                <a:schemeClr val="accent1"/>
+              </a:fillRef>
+              <a:effectRef idx="1">
+                <a:schemeClr val="accent1"/>
+              </a:effectRef>
+              <a:fontRef idx="minor">
+                <a:schemeClr val="tx1"/>
+              </a:fontRef>
+            </p:style>
+          </p:cxnSp>
+          <p:cxnSp>
+            <p:nvCxnSpPr>
+              <p:cNvPr id="21" name="Straight Connector 20">
+                <a:extLst>
+                  <a:ext uri="{FF2B5EF4-FFF2-40B4-BE49-F238E27FC236}">
+                    <a16:creationId xmlns:a16="http://schemas.microsoft.com/office/drawing/2014/main" id="{58A48026-BDED-6293-2B50-ED16904F5294}"/>
+                  </a:ext>
+                </a:extLst>
+              </p:cNvPr>
+              <p:cNvCxnSpPr>
+                <a:cxnSpLocks/>
+              </p:cNvCxnSpPr>
+              <p:nvPr/>
+            </p:nvCxnSpPr>
+            <p:spPr>
+              <a:xfrm>
+                <a:off x="827480" y="548600"/>
+                <a:ext cx="144000" cy="0"/>
+              </a:xfrm>
+              <a:prstGeom prst="line">
+                <a:avLst/>
+              </a:prstGeom>
+            </p:spPr>
+            <p:style>
+              <a:lnRef idx="2">
+                <a:schemeClr val="accent1"/>
+              </a:lnRef>
+              <a:fillRef idx="0">
+                <a:schemeClr val="accent1"/>
+              </a:fillRef>
+              <a:effectRef idx="1">
+                <a:schemeClr val="accent1"/>
+              </a:effectRef>
+              <a:fontRef idx="minor">
+                <a:schemeClr val="tx1"/>
+              </a:fontRef>
+            </p:style>
+          </p:cxnSp>
+          <p:grpSp>
+            <p:nvGrpSpPr>
+              <p:cNvPr id="132" name="Group 131">
+                <a:extLst>
+                  <a:ext uri="{FF2B5EF4-FFF2-40B4-BE49-F238E27FC236}">
+                    <a16:creationId xmlns:a16="http://schemas.microsoft.com/office/drawing/2014/main" id="{04AC92D7-CAA5-A8C9-B3A0-1CF538118041}"/>
+                  </a:ext>
+                </a:extLst>
+              </p:cNvPr>
+              <p:cNvGrpSpPr/>
+              <p:nvPr/>
+            </p:nvGrpSpPr>
+            <p:grpSpPr>
+              <a:xfrm>
+                <a:off x="1691600" y="463588"/>
+                <a:ext cx="2160300" cy="216030"/>
+                <a:chOff x="1691600" y="548600"/>
+                <a:chExt cx="2160300" cy="216030"/>
+              </a:xfrm>
+            </p:grpSpPr>
+            <p:cxnSp>
+              <p:nvCxnSpPr>
+                <p:cNvPr id="122" name="Straight Connector 121">
+                  <a:extLst>
+                    <a:ext uri="{FF2B5EF4-FFF2-40B4-BE49-F238E27FC236}">
+                      <a16:creationId xmlns:a16="http://schemas.microsoft.com/office/drawing/2014/main" id="{035D6059-AEC6-6F30-4391-5BD7D1BDFAEC}"/>
+                    </a:ext>
+                  </a:extLst>
+                </p:cNvPr>
+                <p:cNvCxnSpPr>
+                  <a:cxnSpLocks/>
+                </p:cNvCxnSpPr>
+                <p:nvPr/>
+              </p:nvCxnSpPr>
+              <p:spPr>
+                <a:xfrm>
+                  <a:off x="1691600" y="548600"/>
+                  <a:ext cx="0" cy="97540"/>
+                </a:xfrm>
+                <a:prstGeom prst="line">
+                  <a:avLst/>
+                </a:prstGeom>
+              </p:spPr>
+              <p:style>
+                <a:lnRef idx="2">
+                  <a:schemeClr val="accent1"/>
+                </a:lnRef>
+                <a:fillRef idx="0">
+                  <a:schemeClr val="accent1"/>
+                </a:fillRef>
+                <a:effectRef idx="1">
+                  <a:schemeClr val="accent1"/>
+                </a:effectRef>
+                <a:fontRef idx="minor">
+                  <a:schemeClr val="tx1"/>
+                </a:fontRef>
+              </p:style>
+            </p:cxnSp>
+            <p:cxnSp>
+              <p:nvCxnSpPr>
+                <p:cNvPr id="127" name="Straight Connector 126">
+                  <a:extLst>
+                    <a:ext uri="{FF2B5EF4-FFF2-40B4-BE49-F238E27FC236}">
+                      <a16:creationId xmlns:a16="http://schemas.microsoft.com/office/drawing/2014/main" id="{42184E50-416E-F320-702F-EFF785AB07BE}"/>
+                    </a:ext>
+                  </a:extLst>
+                </p:cNvPr>
+                <p:cNvCxnSpPr>
+                  <a:cxnSpLocks/>
+                </p:cNvCxnSpPr>
+                <p:nvPr/>
+              </p:nvCxnSpPr>
+              <p:spPr>
+                <a:xfrm>
+                  <a:off x="2411700" y="548600"/>
+                  <a:ext cx="0" cy="216030"/>
+                </a:xfrm>
+                <a:prstGeom prst="line">
+                  <a:avLst/>
+                </a:prstGeom>
+              </p:spPr>
+              <p:style>
+                <a:lnRef idx="2">
+                  <a:schemeClr val="accent1"/>
+                </a:lnRef>
+                <a:fillRef idx="0">
+                  <a:schemeClr val="accent1"/>
+                </a:fillRef>
+                <a:effectRef idx="1">
+                  <a:schemeClr val="accent1"/>
+                </a:effectRef>
+                <a:fontRef idx="minor">
+                  <a:schemeClr val="tx1"/>
+                </a:fontRef>
+              </p:style>
+            </p:cxnSp>
+            <p:cxnSp>
+              <p:nvCxnSpPr>
+                <p:cNvPr id="128" name="Straight Connector 127">
+                  <a:extLst>
+                    <a:ext uri="{FF2B5EF4-FFF2-40B4-BE49-F238E27FC236}">
+                      <a16:creationId xmlns:a16="http://schemas.microsoft.com/office/drawing/2014/main" id="{E670916D-F279-39CA-3E1E-29E8B0E7E3AE}"/>
+                    </a:ext>
+                  </a:extLst>
+                </p:cNvPr>
+                <p:cNvCxnSpPr>
+                  <a:cxnSpLocks/>
+                </p:cNvCxnSpPr>
+                <p:nvPr/>
+              </p:nvCxnSpPr>
+              <p:spPr>
+                <a:xfrm>
+                  <a:off x="3851900" y="548600"/>
+                  <a:ext cx="0" cy="216030"/>
+                </a:xfrm>
+                <a:prstGeom prst="line">
+                  <a:avLst/>
+                </a:prstGeom>
+              </p:spPr>
+              <p:style>
+                <a:lnRef idx="2">
+                  <a:schemeClr val="accent1"/>
+                </a:lnRef>
+                <a:fillRef idx="0">
+                  <a:schemeClr val="accent1"/>
+                </a:fillRef>
+                <a:effectRef idx="1">
+                  <a:schemeClr val="accent1"/>
+                </a:effectRef>
+                <a:fontRef idx="minor">
+                  <a:schemeClr val="tx1"/>
+                </a:fontRef>
+              </p:style>
+            </p:cxnSp>
+            <p:cxnSp>
+              <p:nvCxnSpPr>
+                <p:cNvPr id="131" name="Straight Connector 130">
+                  <a:extLst>
+                    <a:ext uri="{FF2B5EF4-FFF2-40B4-BE49-F238E27FC236}">
+                      <a16:creationId xmlns:a16="http://schemas.microsoft.com/office/drawing/2014/main" id="{26D799A0-31B8-9373-7126-46CCBC1E628B}"/>
+                    </a:ext>
+                  </a:extLst>
+                </p:cNvPr>
+                <p:cNvCxnSpPr>
+                  <a:cxnSpLocks/>
+                </p:cNvCxnSpPr>
+                <p:nvPr/>
+              </p:nvCxnSpPr>
+              <p:spPr>
+                <a:xfrm>
+                  <a:off x="3131800" y="548600"/>
+                  <a:ext cx="0" cy="97540"/>
+                </a:xfrm>
+                <a:prstGeom prst="line">
+                  <a:avLst/>
+                </a:prstGeom>
+              </p:spPr>
+              <p:style>
+                <a:lnRef idx="2">
+                  <a:schemeClr val="accent1"/>
+                </a:lnRef>
+                <a:fillRef idx="0">
+                  <a:schemeClr val="accent1"/>
+                </a:fillRef>
+                <a:effectRef idx="1">
+                  <a:schemeClr val="accent1"/>
+                </a:effectRef>
+                <a:fontRef idx="minor">
+                  <a:schemeClr val="tx1"/>
+                </a:fontRef>
+              </p:style>
+            </p:cxnSp>
+          </p:grpSp>
+          <p:pic>
+            <p:nvPicPr>
+              <p:cNvPr id="133" name="Picture 132">
+                <a:extLst>
+                  <a:ext uri="{FF2B5EF4-FFF2-40B4-BE49-F238E27FC236}">
+                    <a16:creationId xmlns:a16="http://schemas.microsoft.com/office/drawing/2014/main" id="{B1CC1CA4-CEA2-E216-C4B9-8BD5A7D7DDE0}"/>
+                  </a:ext>
+                </a:extLst>
+              </p:cNvPr>
+              <p:cNvPicPr>
+                <a:picLocks noChangeAspect="1"/>
+              </p:cNvPicPr>
+              <p:nvPr/>
+            </p:nvPicPr>
+            <p:blipFill>
+              <a:blip r:embed="rId8"/>
+              <a:stretch>
+                <a:fillRect/>
+              </a:stretch>
+            </p:blipFill>
+            <p:spPr>
+              <a:xfrm>
+                <a:off x="2407510" y="260560"/>
+                <a:ext cx="76200" cy="139700"/>
+              </a:xfrm>
+              <a:prstGeom prst="rect">
+                <a:avLst/>
+              </a:prstGeom>
+            </p:spPr>
+          </p:pic>
+          <p:pic>
+            <p:nvPicPr>
+              <p:cNvPr id="134" name="Picture 133">
+                <a:extLst>
+                  <a:ext uri="{FF2B5EF4-FFF2-40B4-BE49-F238E27FC236}">
+                    <a16:creationId xmlns:a16="http://schemas.microsoft.com/office/drawing/2014/main" id="{A0B39139-994C-D5B4-76E2-770DE02F0C79}"/>
+                  </a:ext>
+                </a:extLst>
+              </p:cNvPr>
+              <p:cNvPicPr>
+                <a:picLocks noChangeAspect="1"/>
+              </p:cNvPicPr>
+              <p:nvPr/>
+            </p:nvPicPr>
+            <p:blipFill>
+              <a:blip r:embed="rId9"/>
+              <a:stretch>
+                <a:fillRect/>
+              </a:stretch>
+            </p:blipFill>
+            <p:spPr>
+              <a:xfrm>
+                <a:off x="2987780" y="260560"/>
+                <a:ext cx="228600" cy="139700"/>
+              </a:xfrm>
+              <a:prstGeom prst="rect">
+                <a:avLst/>
+              </a:prstGeom>
+            </p:spPr>
+          </p:pic>
+          <p:pic>
+            <p:nvPicPr>
+              <p:cNvPr id="135" name="Picture 134">
+                <a:extLst>
+                  <a:ext uri="{FF2B5EF4-FFF2-40B4-BE49-F238E27FC236}">
+                    <a16:creationId xmlns:a16="http://schemas.microsoft.com/office/drawing/2014/main" id="{A84ED780-8CAD-3F47-8BF6-8A5B79C6C39F}"/>
+                  </a:ext>
+                </a:extLst>
+              </p:cNvPr>
+              <p:cNvPicPr>
+                <a:picLocks noChangeAspect="1"/>
+              </p:cNvPicPr>
+              <p:nvPr/>
+            </p:nvPicPr>
+            <p:blipFill>
+              <a:blip r:embed="rId10"/>
+              <a:stretch>
+                <a:fillRect/>
+              </a:stretch>
+            </p:blipFill>
+            <p:spPr>
+              <a:xfrm>
+                <a:off x="3779890" y="260560"/>
+                <a:ext cx="88900" cy="139700"/>
+              </a:xfrm>
+              <a:prstGeom prst="rect">
+                <a:avLst/>
+              </a:prstGeom>
+            </p:spPr>
+          </p:pic>
+          <p:pic>
+            <p:nvPicPr>
+              <p:cNvPr id="136" name="Picture 135">
+                <a:extLst>
+                  <a:ext uri="{FF2B5EF4-FFF2-40B4-BE49-F238E27FC236}">
+                    <a16:creationId xmlns:a16="http://schemas.microsoft.com/office/drawing/2014/main" id="{599D7B9F-B546-9A35-39C0-E361FA3041CB}"/>
+                  </a:ext>
+                </a:extLst>
+              </p:cNvPr>
+              <p:cNvPicPr>
+                <a:picLocks noChangeAspect="1"/>
+              </p:cNvPicPr>
+              <p:nvPr/>
+            </p:nvPicPr>
+            <p:blipFill>
+              <a:blip r:embed="rId11"/>
+              <a:stretch>
+                <a:fillRect/>
+              </a:stretch>
+            </p:blipFill>
+            <p:spPr>
+              <a:xfrm>
+                <a:off x="1607020" y="260560"/>
+                <a:ext cx="228600" cy="139700"/>
+              </a:xfrm>
+              <a:prstGeom prst="rect">
+                <a:avLst/>
+              </a:prstGeom>
+            </p:spPr>
+          </p:pic>
+        </p:grpSp>
+        <p:pic>
+          <p:nvPicPr>
+            <p:cNvPr id="141" name="Picture 140">
+              <a:extLst>
+                <a:ext uri="{FF2B5EF4-FFF2-40B4-BE49-F238E27FC236}">
+                  <a16:creationId xmlns:a16="http://schemas.microsoft.com/office/drawing/2014/main" id="{A4B859FD-FF6B-9D68-8352-6921F26A7455}"/>
+                </a:ext>
+              </a:extLst>
+            </p:cNvPr>
+            <p:cNvPicPr>
+              <a:picLocks noChangeAspect="1"/>
+            </p:cNvPicPr>
+            <p:nvPr/>
+          </p:nvPicPr>
+          <p:blipFill>
+            <a:blip r:embed="rId12"/>
+            <a:stretch>
+              <a:fillRect/>
+            </a:stretch>
+          </p:blipFill>
+          <p:spPr>
+            <a:xfrm>
+              <a:off x="323410" y="836640"/>
+              <a:ext cx="419100" cy="139700"/>
+            </a:xfrm>
+            <a:prstGeom prst="rect">
+              <a:avLst/>
+            </a:prstGeom>
+          </p:spPr>
+        </p:pic>
+        <p:pic>
+          <p:nvPicPr>
+            <p:cNvPr id="142" name="Picture 141">
+              <a:extLst>
+                <a:ext uri="{FF2B5EF4-FFF2-40B4-BE49-F238E27FC236}">
+                  <a16:creationId xmlns:a16="http://schemas.microsoft.com/office/drawing/2014/main" id="{F48352A4-9495-32E8-8C13-0B7C8584A72C}"/>
+                </a:ext>
+              </a:extLst>
+            </p:cNvPr>
+            <p:cNvPicPr>
+              <a:picLocks noChangeAspect="1"/>
+            </p:cNvPicPr>
+            <p:nvPr/>
+          </p:nvPicPr>
+          <p:blipFill>
+            <a:blip r:embed="rId13"/>
+            <a:stretch>
+              <a:fillRect/>
+            </a:stretch>
+          </p:blipFill>
+          <p:spPr>
+            <a:xfrm>
+              <a:off x="2627730" y="692620"/>
+              <a:ext cx="1282700" cy="203200"/>
+            </a:xfrm>
+            <a:prstGeom prst="rect">
+              <a:avLst/>
+            </a:prstGeom>
+          </p:spPr>
+        </p:pic>
+        <p:pic>
+          <p:nvPicPr>
+            <p:cNvPr id="143" name="Picture 142">
+              <a:extLst>
+                <a:ext uri="{FF2B5EF4-FFF2-40B4-BE49-F238E27FC236}">
+                  <a16:creationId xmlns:a16="http://schemas.microsoft.com/office/drawing/2014/main" id="{A61A58A9-0E57-F42F-232D-C375CBFAC5A6}"/>
+                </a:ext>
+              </a:extLst>
+            </p:cNvPr>
+            <p:cNvPicPr>
+              <a:picLocks noChangeAspect="1"/>
+            </p:cNvPicPr>
+            <p:nvPr/>
+          </p:nvPicPr>
+          <p:blipFill>
+            <a:blip r:embed="rId14"/>
+            <a:stretch>
+              <a:fillRect/>
+            </a:stretch>
+          </p:blipFill>
+          <p:spPr>
+            <a:xfrm>
+              <a:off x="467430" y="1201010"/>
+              <a:ext cx="228600" cy="139700"/>
+            </a:xfrm>
+            <a:prstGeom prst="rect">
+              <a:avLst/>
+            </a:prstGeom>
+          </p:spPr>
+        </p:pic>
+        <p:pic>
+          <p:nvPicPr>
+            <p:cNvPr id="144" name="Picture 143">
+              <a:extLst>
+                <a:ext uri="{FF2B5EF4-FFF2-40B4-BE49-F238E27FC236}">
+                  <a16:creationId xmlns:a16="http://schemas.microsoft.com/office/drawing/2014/main" id="{CF346885-8DC6-279A-68D9-6920118A934A}"/>
+                </a:ext>
+              </a:extLst>
+            </p:cNvPr>
+            <p:cNvPicPr>
+              <a:picLocks noChangeAspect="1"/>
+            </p:cNvPicPr>
+            <p:nvPr/>
+          </p:nvPicPr>
+          <p:blipFill>
+            <a:blip r:embed="rId15"/>
+            <a:stretch>
+              <a:fillRect/>
+            </a:stretch>
+          </p:blipFill>
+          <p:spPr>
+            <a:xfrm>
+              <a:off x="395420" y="1921110"/>
+              <a:ext cx="228600" cy="139700"/>
+            </a:xfrm>
+            <a:prstGeom prst="rect">
+              <a:avLst/>
+            </a:prstGeom>
+          </p:spPr>
+        </p:pic>
+        <p:pic>
+          <p:nvPicPr>
+            <p:cNvPr id="145" name="Picture 144">
+              <a:extLst>
+                <a:ext uri="{FF2B5EF4-FFF2-40B4-BE49-F238E27FC236}">
+                  <a16:creationId xmlns:a16="http://schemas.microsoft.com/office/drawing/2014/main" id="{E4A6912C-CEC5-9550-233F-443C2F0E4C4F}"/>
+                </a:ext>
+              </a:extLst>
+            </p:cNvPr>
+            <p:cNvPicPr>
+              <a:picLocks noChangeAspect="1"/>
+            </p:cNvPicPr>
+            <p:nvPr/>
+          </p:nvPicPr>
+          <p:blipFill>
+            <a:blip r:embed="rId16"/>
+            <a:stretch>
+              <a:fillRect/>
+            </a:stretch>
+          </p:blipFill>
+          <p:spPr>
+            <a:xfrm>
+              <a:off x="467430" y="2636890"/>
+              <a:ext cx="228600" cy="139700"/>
+            </a:xfrm>
+            <a:prstGeom prst="rect">
+              <a:avLst/>
+            </a:prstGeom>
+          </p:spPr>
+        </p:pic>
+        <p:pic>
+          <p:nvPicPr>
+            <p:cNvPr id="146" name="Picture 145">
+              <a:extLst>
+                <a:ext uri="{FF2B5EF4-FFF2-40B4-BE49-F238E27FC236}">
+                  <a16:creationId xmlns:a16="http://schemas.microsoft.com/office/drawing/2014/main" id="{F0DE002D-EA8A-12FC-F84F-B6B02E0E278E}"/>
+                </a:ext>
+              </a:extLst>
+            </p:cNvPr>
+            <p:cNvPicPr>
+              <a:picLocks noChangeAspect="1"/>
+            </p:cNvPicPr>
+            <p:nvPr/>
+          </p:nvPicPr>
+          <p:blipFill>
+            <a:blip r:embed="rId17"/>
+            <a:stretch>
+              <a:fillRect/>
+            </a:stretch>
+          </p:blipFill>
+          <p:spPr>
+            <a:xfrm>
+              <a:off x="467430" y="3359150"/>
+              <a:ext cx="241300" cy="139700"/>
+            </a:xfrm>
+            <a:prstGeom prst="rect">
+              <a:avLst/>
+            </a:prstGeom>
+          </p:spPr>
+        </p:pic>
+        <p:pic>
+          <p:nvPicPr>
+            <p:cNvPr id="147" name="Picture 146">
+              <a:extLst>
+                <a:ext uri="{FF2B5EF4-FFF2-40B4-BE49-F238E27FC236}">
+                  <a16:creationId xmlns:a16="http://schemas.microsoft.com/office/drawing/2014/main" id="{CD5A4F8B-290C-7B83-F1DE-4AC8C4468C82}"/>
+                </a:ext>
+              </a:extLst>
+            </p:cNvPr>
+            <p:cNvPicPr>
+              <a:picLocks noChangeAspect="1"/>
+            </p:cNvPicPr>
+            <p:nvPr/>
+          </p:nvPicPr>
+          <p:blipFill>
+            <a:blip r:embed="rId18"/>
+            <a:stretch>
+              <a:fillRect/>
+            </a:stretch>
+          </p:blipFill>
+          <p:spPr>
+            <a:xfrm>
+              <a:off x="467430" y="4081410"/>
+              <a:ext cx="228600" cy="139700"/>
+            </a:xfrm>
+            <a:prstGeom prst="rect">
+              <a:avLst/>
+            </a:prstGeom>
+          </p:spPr>
+        </p:pic>
+        <p:pic>
+          <p:nvPicPr>
+            <p:cNvPr id="148" name="Picture 147">
+              <a:extLst>
+                <a:ext uri="{FF2B5EF4-FFF2-40B4-BE49-F238E27FC236}">
+                  <a16:creationId xmlns:a16="http://schemas.microsoft.com/office/drawing/2014/main" id="{614FD519-064A-8A42-E237-76C86159D433}"/>
+                </a:ext>
+              </a:extLst>
+            </p:cNvPr>
+            <p:cNvPicPr>
+              <a:picLocks noChangeAspect="1"/>
+            </p:cNvPicPr>
+            <p:nvPr/>
+          </p:nvPicPr>
+          <p:blipFill>
+            <a:blip r:embed="rId19"/>
+            <a:stretch>
+              <a:fillRect/>
+            </a:stretch>
+          </p:blipFill>
+          <p:spPr>
+            <a:xfrm>
+              <a:off x="1907630" y="336890"/>
+              <a:ext cx="1181100" cy="139700"/>
+            </a:xfrm>
+            <a:prstGeom prst="rect">
+              <a:avLst/>
+            </a:prstGeom>
+          </p:spPr>
+        </p:pic>
       </p:grpSp>
-      <p:sp>
-        <p:nvSpPr>
-          <p:cNvPr id="40" name="Rectangle 39">
+      <p:pic>
+        <p:nvPicPr>
+          <p:cNvPr id="150" name="Picture 149">
             <a:extLst>
               <a:ext uri="{FF2B5EF4-FFF2-40B4-BE49-F238E27FC236}">
-                <a16:creationId xmlns:a16="http://schemas.microsoft.com/office/drawing/2014/main" id="{384F3505-0657-4F4B-9106-029A2B71478F}"/>
+                <a16:creationId xmlns:a16="http://schemas.microsoft.com/office/drawing/2014/main" id="{6A99C529-4DCF-D692-C0D4-67D0ACF1DEEB}"/>
               </a:ext>
             </a:extLst>
           </p:cNvPr>
-          <p:cNvSpPr/>
+          <p:cNvPicPr>
+            <a:picLocks noChangeAspect="1"/>
+          </p:cNvPicPr>
           <p:nvPr/>
-        </p:nvSpPr>
+        </p:nvPicPr>
+        <p:blipFill>
+          <a:blip r:embed="rId20"/>
+          <a:stretch>
+            <a:fillRect/>
+          </a:stretch>
+        </p:blipFill>
         <p:spPr>
           <a:xfrm>
-            <a:off x="4485939" y="2352942"/>
-            <a:ext cx="86061" cy="60548"/>
+            <a:off x="3555610" y="2636890"/>
+            <a:ext cx="368300" cy="139700"/>
           </a:xfrm>
           <a:prstGeom prst="rect">
             <a:avLst/>
           </a:prstGeom>
-          <a:solidFill>
-            <a:srgbClr val="C00000"/>
-          </a:solidFill>
-          <a:ln w="6350"/>
         </p:spPr>
-        <p:style>
-          <a:lnRef idx="2">
-            <a:schemeClr val="accent1">
-              <a:shade val="15000"/>
-            </a:schemeClr>
-          </a:lnRef>
-          <a:fillRef idx="1">
-            <a:schemeClr val="accent1"/>
-          </a:fillRef>
-          <a:effectRef idx="0">
-            <a:schemeClr val="accent1"/>
-          </a:effectRef>
-          <a:fontRef idx="minor">
-            <a:schemeClr val="lt1"/>
-          </a:fontRef>
-        </p:style>
-        <p:txBody>
-          <a:bodyPr rtlCol="0" anchor="ctr"/>
-          <a:lstStyle/>
-          <a:p>
-            <a:pPr algn="ctr"/>
-            <a:endParaRPr lang="en-US"/>
-          </a:p>
-        </p:txBody>
-      </p:sp>
-      <p:sp>
-        <p:nvSpPr>
-          <p:cNvPr id="41" name="Rectangle 40">
+      </p:pic>
+      <p:pic>
+        <p:nvPicPr>
+          <p:cNvPr id="151" name="Picture 150">
             <a:extLst>
               <a:ext uri="{FF2B5EF4-FFF2-40B4-BE49-F238E27FC236}">
-                <a16:creationId xmlns:a16="http://schemas.microsoft.com/office/drawing/2014/main" id="{FD3DC1F7-191E-3E9A-1792-C355277DE69D}"/>
+                <a16:creationId xmlns:a16="http://schemas.microsoft.com/office/drawing/2014/main" id="{7398CEDB-57DA-0F6E-0C6A-FA55CB01ED3E}"/>
               </a:ext>
             </a:extLst>
           </p:cNvPr>
-          <p:cNvSpPr/>
+          <p:cNvPicPr>
+            <a:picLocks noChangeAspect="1"/>
+          </p:cNvPicPr>
           <p:nvPr/>
-        </p:nvSpPr>
+        </p:nvPicPr>
+        <p:blipFill>
+          <a:blip r:embed="rId21"/>
+          <a:stretch>
+            <a:fillRect/>
+          </a:stretch>
+        </p:blipFill>
         <p:spPr>
           <a:xfrm>
-            <a:off x="4479589" y="2209800"/>
-            <a:ext cx="86061" cy="143138"/>
+            <a:off x="1043510" y="3212970"/>
+            <a:ext cx="914400" cy="139700"/>
           </a:xfrm>
-          <a:custGeom>
+          <a:prstGeom prst="rect">
             <a:avLst/>
-            <a:gdLst>
-              <a:gd name="csX0" fmla="*/ 0 w 86061"/>
-              <a:gd name="csY0" fmla="*/ 0 h 124315"/>
-              <a:gd name="csX1" fmla="*/ 86061 w 86061"/>
-              <a:gd name="csY1" fmla="*/ 0 h 124315"/>
-              <a:gd name="csX2" fmla="*/ 86061 w 86061"/>
-              <a:gd name="csY2" fmla="*/ 124315 h 124315"/>
-              <a:gd name="csX3" fmla="*/ 0 w 86061"/>
-              <a:gd name="csY3" fmla="*/ 124315 h 124315"/>
-              <a:gd name="csX4" fmla="*/ 0 w 86061"/>
-              <a:gd name="csY4" fmla="*/ 0 h 124315"/>
-              <a:gd name="csX0" fmla="*/ 0 w 86061"/>
-              <a:gd name="csY0" fmla="*/ 0 h 124315"/>
-              <a:gd name="csX1" fmla="*/ 73361 w 86061"/>
-              <a:gd name="csY1" fmla="*/ 6350 h 124315"/>
-              <a:gd name="csX2" fmla="*/ 86061 w 86061"/>
-              <a:gd name="csY2" fmla="*/ 124315 h 124315"/>
-              <a:gd name="csX3" fmla="*/ 0 w 86061"/>
-              <a:gd name="csY3" fmla="*/ 124315 h 124315"/>
-              <a:gd name="csX4" fmla="*/ 0 w 86061"/>
-              <a:gd name="csY4" fmla="*/ 0 h 124315"/>
-            </a:gdLst>
-            <a:ahLst/>
-            <a:cxnLst>
-              <a:cxn ang="0">
-                <a:pos x="csX0" y="csY0"/>
-              </a:cxn>
-              <a:cxn ang="0">
-                <a:pos x="csX1" y="csY1"/>
-              </a:cxn>
-              <a:cxn ang="0">
-                <a:pos x="csX2" y="csY2"/>
-              </a:cxn>
-              <a:cxn ang="0">
-                <a:pos x="csX3" y="csY3"/>
-              </a:cxn>
-              <a:cxn ang="0">
-                <a:pos x="csX4" y="csY4"/>
-              </a:cxn>
-            </a:cxnLst>
-            <a:rect l="l" t="t" r="r" b="b"/>
-            <a:pathLst>
-              <a:path w="86061" h="124315">
-                <a:moveTo>
-                  <a:pt x="0" y="0"/>
-                </a:moveTo>
-                <a:lnTo>
-                  <a:pt x="73361" y="6350"/>
-                </a:lnTo>
-                <a:lnTo>
-                  <a:pt x="86061" y="124315"/>
-                </a:lnTo>
-                <a:lnTo>
-                  <a:pt x="0" y="124315"/>
-                </a:lnTo>
-                <a:lnTo>
-                  <a:pt x="0" y="0"/>
-                </a:lnTo>
-                <a:close/>
-              </a:path>
-            </a:pathLst>
-          </a:custGeom>
-          <a:solidFill>
-            <a:srgbClr val="FFC000"/>
-          </a:solidFill>
-          <a:ln w="6350"/>
+          </a:prstGeom>
         </p:spPr>
-        <p:style>
-          <a:lnRef idx="2">
-            <a:schemeClr val="accent1">
-              <a:shade val="15000"/>
-            </a:schemeClr>
-          </a:lnRef>
-          <a:fillRef idx="1">
-            <a:schemeClr val="accent1"/>
-          </a:fillRef>
-          <a:effectRef idx="0">
-            <a:schemeClr val="accent1"/>
-          </a:effectRef>
-          <a:fontRef idx="minor">
-            <a:schemeClr val="lt1"/>
-          </a:fontRef>
-        </p:style>
-        <p:txBody>
-          <a:bodyPr rtlCol="0" anchor="ctr"/>
-          <a:lstStyle/>
-          <a:p>
-            <a:pPr algn="ctr"/>
-            <a:endParaRPr lang="en-US"/>
-          </a:p>
-        </p:txBody>
-      </p:sp>
-      <p:sp>
-        <p:nvSpPr>
-          <p:cNvPr id="42" name="Rectangle 41">
+      </p:pic>
+    </p:spTree>
+    <p:extLst>
+      <p:ext uri="{BB962C8B-B14F-4D97-AF65-F5344CB8AC3E}">
+        <p14:creationId xmlns:p14="http://schemas.microsoft.com/office/powerpoint/2010/main" val="1787579660"/>
+      </p:ext>
+    </p:extLst>
+  </p:cSld>
+  <p:clrMapOvr>
+    <a:masterClrMapping/>
+  </p:clrMapOvr>
+</p:sld>
+</file>
+
+<file path=ppt/slides/slide9.xml><?xml version="1.0" encoding="utf-8"?>
+<p:sld xmlns:a="http://schemas.openxmlformats.org/drawingml/2006/main" xmlns:r="http://schemas.openxmlformats.org/officeDocument/2006/relationships" xmlns:p="http://schemas.openxmlformats.org/presentationml/2006/main">
+  <p:cSld>
+    <p:spTree>
+      <p:nvGrpSpPr>
+        <p:cNvPr id="1" name=""/>
+        <p:cNvGrpSpPr/>
+        <p:nvPr/>
+      </p:nvGrpSpPr>
+      <p:grpSpPr>
+        <a:xfrm>
+          <a:off x="0" y="0"/>
+          <a:ext cx="0" cy="0"/>
+          <a:chOff x="0" y="0"/>
+          <a:chExt cx="0" cy="0"/>
+        </a:xfrm>
+      </p:grpSpPr>
+      <p:grpSp>
+        <p:nvGrpSpPr>
+          <p:cNvPr id="42" name="Group 41">
             <a:extLst>
               <a:ext uri="{FF2B5EF4-FFF2-40B4-BE49-F238E27FC236}">
-                <a16:creationId xmlns:a16="http://schemas.microsoft.com/office/drawing/2014/main" id="{47D3C7BA-1431-BA7C-724B-6441AEE015A0}"/>
+                <a16:creationId xmlns:a16="http://schemas.microsoft.com/office/drawing/2014/main" id="{A8319626-4FCB-503E-9C6A-5FE36B58081C}"/>
               </a:ext>
             </a:extLst>
           </p:cNvPr>
-          <p:cNvSpPr/>
+          <p:cNvGrpSpPr/>
           <p:nvPr/>
-        </p:nvSpPr>
-        <p:spPr>
+        </p:nvGrpSpPr>
+        <p:grpSpPr>
           <a:xfrm>
-            <a:off x="4485939" y="1922582"/>
-            <a:ext cx="54311" cy="301011"/>
+            <a:off x="1410182" y="460978"/>
+            <a:ext cx="5538805" cy="3852589"/>
+            <a:chOff x="1410182" y="460978"/>
+            <a:chExt cx="5538805" cy="3852589"/>
           </a:xfrm>
-          <a:custGeom>
-            <a:avLst/>
-            <a:gdLst>
-              <a:gd name="csX0" fmla="*/ 0 w 86061"/>
-              <a:gd name="csY0" fmla="*/ 0 h 301011"/>
-              <a:gd name="csX1" fmla="*/ 86061 w 86061"/>
-              <a:gd name="csY1" fmla="*/ 0 h 301011"/>
-              <a:gd name="csX2" fmla="*/ 86061 w 86061"/>
-              <a:gd name="csY2" fmla="*/ 301011 h 301011"/>
-              <a:gd name="csX3" fmla="*/ 0 w 86061"/>
-              <a:gd name="csY3" fmla="*/ 301011 h 301011"/>
-              <a:gd name="csX4" fmla="*/ 0 w 86061"/>
-              <a:gd name="csY4" fmla="*/ 0 h 301011"/>
-              <a:gd name="csX0" fmla="*/ 0 w 86061"/>
-              <a:gd name="csY0" fmla="*/ 0 h 301011"/>
-              <a:gd name="csX1" fmla="*/ 6686 w 86061"/>
-              <a:gd name="csY1" fmla="*/ 6350 h 301011"/>
-              <a:gd name="csX2" fmla="*/ 86061 w 86061"/>
-              <a:gd name="csY2" fmla="*/ 301011 h 301011"/>
-              <a:gd name="csX3" fmla="*/ 0 w 86061"/>
-              <a:gd name="csY3" fmla="*/ 301011 h 301011"/>
-              <a:gd name="csX4" fmla="*/ 0 w 86061"/>
-              <a:gd name="csY4" fmla="*/ 0 h 301011"/>
-              <a:gd name="csX0" fmla="*/ 0 w 54311"/>
-              <a:gd name="csY0" fmla="*/ 0 h 301011"/>
-              <a:gd name="csX1" fmla="*/ 6686 w 54311"/>
-              <a:gd name="csY1" fmla="*/ 6350 h 301011"/>
-              <a:gd name="csX2" fmla="*/ 54311 w 54311"/>
-              <a:gd name="csY2" fmla="*/ 288311 h 301011"/>
-              <a:gd name="csX3" fmla="*/ 0 w 54311"/>
-              <a:gd name="csY3" fmla="*/ 301011 h 301011"/>
-              <a:gd name="csX4" fmla="*/ 0 w 54311"/>
-              <a:gd name="csY4" fmla="*/ 0 h 301011"/>
-            </a:gdLst>
-            <a:ahLst/>
-            <a:cxnLst>
-              <a:cxn ang="0">
-                <a:pos x="csX0" y="csY0"/>
-              </a:cxn>
-              <a:cxn ang="0">
-                <a:pos x="csX1" y="csY1"/>
-              </a:cxn>
-              <a:cxn ang="0">
-                <a:pos x="csX2" y="csY2"/>
-              </a:cxn>
-              <a:cxn ang="0">
-                <a:pos x="csX3" y="csY3"/>
-              </a:cxn>
-              <a:cxn ang="0">
-                <a:pos x="csX4" y="csY4"/>
-              </a:cxn>
-            </a:cxnLst>
-            <a:rect l="l" t="t" r="r" b="b"/>
-            <a:pathLst>
-              <a:path w="54311" h="301011">
-                <a:moveTo>
-                  <a:pt x="0" y="0"/>
-                </a:moveTo>
-                <a:lnTo>
-                  <a:pt x="6686" y="6350"/>
-                </a:lnTo>
-                <a:lnTo>
-                  <a:pt x="54311" y="288311"/>
-                </a:lnTo>
-                <a:lnTo>
-                  <a:pt x="0" y="301011"/>
-                </a:lnTo>
-                <a:lnTo>
-                  <a:pt x="0" y="0"/>
-                </a:lnTo>
-                <a:close/>
-              </a:path>
-            </a:pathLst>
-          </a:custGeom>
-          <a:solidFill>
-            <a:srgbClr val="29FFDD"/>
-          </a:solidFill>
-          <a:ln w="6350"/>
-        </p:spPr>
-        <p:style>
-          <a:lnRef idx="2">
-            <a:schemeClr val="accent1">
-              <a:shade val="15000"/>
-            </a:schemeClr>
-          </a:lnRef>
-          <a:fillRef idx="1">
-            <a:schemeClr val="accent1"/>
-          </a:fillRef>
-          <a:effectRef idx="0">
-            <a:schemeClr val="accent1"/>
-          </a:effectRef>
-          <a:fontRef idx="minor">
-            <a:schemeClr val="lt1"/>
-          </a:fontRef>
-        </p:style>
-        <p:txBody>
-          <a:bodyPr rtlCol="0" anchor="ctr"/>
-          <a:lstStyle/>
-          <a:p>
-            <a:pPr algn="ctr"/>
-            <a:endParaRPr lang="en-US"/>
-          </a:p>
-        </p:txBody>
-      </p:sp>
+        </p:grpSpPr>
+        <p:cxnSp>
+          <p:nvCxnSpPr>
+            <p:cNvPr id="3" name="Straight Connector 2">
+              <a:extLst>
+                <a:ext uri="{FF2B5EF4-FFF2-40B4-BE49-F238E27FC236}">
+                  <a16:creationId xmlns:a16="http://schemas.microsoft.com/office/drawing/2014/main" id="{A5210F3F-9B1E-FE2D-FE21-A1A8443A15B4}"/>
+                </a:ext>
+              </a:extLst>
+            </p:cNvPr>
+            <p:cNvCxnSpPr>
+              <a:cxnSpLocks/>
+            </p:cNvCxnSpPr>
+            <p:nvPr/>
+          </p:nvCxnSpPr>
+          <p:spPr>
+            <a:xfrm>
+              <a:off x="3253563" y="1403498"/>
+              <a:ext cx="0" cy="1020725"/>
+            </a:xfrm>
+            <a:prstGeom prst="line">
+              <a:avLst/>
+            </a:prstGeom>
+            <a:ln>
+              <a:tailEnd type="triangle" w="lg" len="lg"/>
+            </a:ln>
+          </p:spPr>
+          <p:style>
+            <a:lnRef idx="2">
+              <a:schemeClr val="accent1"/>
+            </a:lnRef>
+            <a:fillRef idx="0">
+              <a:schemeClr val="accent1"/>
+            </a:fillRef>
+            <a:effectRef idx="1">
+              <a:schemeClr val="accent1"/>
+            </a:effectRef>
+            <a:fontRef idx="minor">
+              <a:schemeClr val="tx1"/>
+            </a:fontRef>
+          </p:style>
+        </p:cxnSp>
+        <p:pic>
+          <p:nvPicPr>
+            <p:cNvPr id="6" name="Picture 5">
+              <a:extLst>
+                <a:ext uri="{FF2B5EF4-FFF2-40B4-BE49-F238E27FC236}">
+                  <a16:creationId xmlns:a16="http://schemas.microsoft.com/office/drawing/2014/main" id="{37AD9660-6959-F528-243D-4BA43EFE633F}"/>
+                </a:ext>
+              </a:extLst>
+            </p:cNvPr>
+            <p:cNvPicPr>
+              <a:picLocks noChangeAspect="1"/>
+            </p:cNvPicPr>
+            <p:nvPr/>
+          </p:nvPicPr>
+          <p:blipFill>
+            <a:blip r:embed="rId2"/>
+            <a:stretch>
+              <a:fillRect/>
+            </a:stretch>
+          </p:blipFill>
+          <p:spPr>
+            <a:xfrm>
+              <a:off x="2814823" y="1018067"/>
+              <a:ext cx="622300" cy="228600"/>
+            </a:xfrm>
+            <a:prstGeom prst="rect">
+              <a:avLst/>
+            </a:prstGeom>
+          </p:spPr>
+        </p:pic>
+        <p:pic>
+          <p:nvPicPr>
+            <p:cNvPr id="8" name="Picture 7">
+              <a:extLst>
+                <a:ext uri="{FF2B5EF4-FFF2-40B4-BE49-F238E27FC236}">
+                  <a16:creationId xmlns:a16="http://schemas.microsoft.com/office/drawing/2014/main" id="{2DD2B8C9-072D-C504-F2AC-E11465F9FBC5}"/>
+                </a:ext>
+              </a:extLst>
+            </p:cNvPr>
+            <p:cNvPicPr>
+              <a:picLocks noChangeAspect="1"/>
+            </p:cNvPicPr>
+            <p:nvPr/>
+          </p:nvPicPr>
+          <p:blipFill>
+            <a:blip r:embed="rId3"/>
+            <a:stretch>
+              <a:fillRect/>
+            </a:stretch>
+          </p:blipFill>
+          <p:spPr>
+            <a:xfrm>
+              <a:off x="3143544" y="4059567"/>
+              <a:ext cx="241300" cy="254000"/>
+            </a:xfrm>
+            <a:prstGeom prst="rect">
+              <a:avLst/>
+            </a:prstGeom>
+          </p:spPr>
+        </p:pic>
+        <p:cxnSp>
+          <p:nvCxnSpPr>
+            <p:cNvPr id="9" name="Straight Connector 8">
+              <a:extLst>
+                <a:ext uri="{FF2B5EF4-FFF2-40B4-BE49-F238E27FC236}">
+                  <a16:creationId xmlns:a16="http://schemas.microsoft.com/office/drawing/2014/main" id="{EECA1E16-15D0-B71A-FE7B-3CE06BC1E8DD}"/>
+                </a:ext>
+              </a:extLst>
+            </p:cNvPr>
+            <p:cNvCxnSpPr>
+              <a:cxnSpLocks/>
+            </p:cNvCxnSpPr>
+            <p:nvPr/>
+          </p:nvCxnSpPr>
+          <p:spPr>
+            <a:xfrm>
+              <a:off x="3253563" y="2918637"/>
+              <a:ext cx="0" cy="1020725"/>
+            </a:xfrm>
+            <a:prstGeom prst="line">
+              <a:avLst/>
+            </a:prstGeom>
+            <a:ln>
+              <a:tailEnd type="triangle" w="lg" len="lg"/>
+            </a:ln>
+          </p:spPr>
+          <p:style>
+            <a:lnRef idx="2">
+              <a:schemeClr val="accent1"/>
+            </a:lnRef>
+            <a:fillRef idx="0">
+              <a:schemeClr val="accent1"/>
+            </a:fillRef>
+            <a:effectRef idx="1">
+              <a:schemeClr val="accent1"/>
+            </a:effectRef>
+            <a:fontRef idx="minor">
+              <a:schemeClr val="tx1"/>
+            </a:fontRef>
+          </p:style>
+        </p:cxnSp>
+        <p:sp>
+          <p:nvSpPr>
+            <p:cNvPr id="10" name="Left Brace 9">
+              <a:extLst>
+                <a:ext uri="{FF2B5EF4-FFF2-40B4-BE49-F238E27FC236}">
+                  <a16:creationId xmlns:a16="http://schemas.microsoft.com/office/drawing/2014/main" id="{54D325D0-45BF-6FDF-A246-3DC82BED8F8F}"/>
+                </a:ext>
+              </a:extLst>
+            </p:cNvPr>
+            <p:cNvSpPr/>
+            <p:nvPr/>
+          </p:nvSpPr>
+          <p:spPr>
+            <a:xfrm>
+              <a:off x="2062719" y="1217425"/>
+              <a:ext cx="580750" cy="1464635"/>
+            </a:xfrm>
+            <a:prstGeom prst="leftBrace">
+              <a:avLst/>
+            </a:prstGeom>
+          </p:spPr>
+          <p:style>
+            <a:lnRef idx="2">
+              <a:schemeClr val="accent1"/>
+            </a:lnRef>
+            <a:fillRef idx="0">
+              <a:schemeClr val="accent1"/>
+            </a:fillRef>
+            <a:effectRef idx="1">
+              <a:schemeClr val="accent1"/>
+            </a:effectRef>
+            <a:fontRef idx="minor">
+              <a:schemeClr val="tx1"/>
+            </a:fontRef>
+          </p:style>
+          <p:txBody>
+            <a:bodyPr rtlCol="0" anchor="ctr"/>
+            <a:lstStyle/>
+            <a:p>
+              <a:pPr algn="ctr"/>
+              <a:endParaRPr lang="en-US"/>
+            </a:p>
+          </p:txBody>
+        </p:sp>
+        <p:sp>
+          <p:nvSpPr>
+            <p:cNvPr id="11" name="Left Brace 10">
+              <a:extLst>
+                <a:ext uri="{FF2B5EF4-FFF2-40B4-BE49-F238E27FC236}">
+                  <a16:creationId xmlns:a16="http://schemas.microsoft.com/office/drawing/2014/main" id="{3EE77622-4949-7011-3702-7C68BEEB4E83}"/>
+                </a:ext>
+              </a:extLst>
+            </p:cNvPr>
+            <p:cNvSpPr/>
+            <p:nvPr/>
+          </p:nvSpPr>
+          <p:spPr>
+            <a:xfrm>
+              <a:off x="2066260" y="2783952"/>
+              <a:ext cx="580750" cy="1275615"/>
+            </a:xfrm>
+            <a:prstGeom prst="leftBrace">
+              <a:avLst/>
+            </a:prstGeom>
+          </p:spPr>
+          <p:style>
+            <a:lnRef idx="2">
+              <a:schemeClr val="accent1"/>
+            </a:lnRef>
+            <a:fillRef idx="0">
+              <a:schemeClr val="accent1"/>
+            </a:fillRef>
+            <a:effectRef idx="1">
+              <a:schemeClr val="accent1"/>
+            </a:effectRef>
+            <a:fontRef idx="minor">
+              <a:schemeClr val="tx1"/>
+            </a:fontRef>
+          </p:style>
+          <p:txBody>
+            <a:bodyPr rtlCol="0" anchor="ctr"/>
+            <a:lstStyle/>
+            <a:p>
+              <a:pPr algn="ctr"/>
+              <a:endParaRPr lang="en-US"/>
+            </a:p>
+          </p:txBody>
+        </p:sp>
+        <p:pic>
+          <p:nvPicPr>
+            <p:cNvPr id="13" name="Picture 12">
+              <a:extLst>
+                <a:ext uri="{FF2B5EF4-FFF2-40B4-BE49-F238E27FC236}">
+                  <a16:creationId xmlns:a16="http://schemas.microsoft.com/office/drawing/2014/main" id="{D6E3EBFE-FCE9-0AEE-9CBB-61AD22112A97}"/>
+                </a:ext>
+              </a:extLst>
+            </p:cNvPr>
+            <p:cNvPicPr>
+              <a:picLocks noChangeAspect="1"/>
+            </p:cNvPicPr>
+            <p:nvPr/>
+          </p:nvPicPr>
+          <p:blipFill>
+            <a:blip r:embed="rId4"/>
+            <a:stretch>
+              <a:fillRect/>
+            </a:stretch>
+          </p:blipFill>
+          <p:spPr>
+            <a:xfrm>
+              <a:off x="1744322" y="3320901"/>
+              <a:ext cx="254000" cy="152400"/>
+            </a:xfrm>
+            <a:prstGeom prst="rect">
+              <a:avLst/>
+            </a:prstGeom>
+          </p:spPr>
+        </p:pic>
+        <p:cxnSp>
+          <p:nvCxnSpPr>
+            <p:cNvPr id="18" name="Straight Connector 17">
+              <a:extLst>
+                <a:ext uri="{FF2B5EF4-FFF2-40B4-BE49-F238E27FC236}">
+                  <a16:creationId xmlns:a16="http://schemas.microsoft.com/office/drawing/2014/main" id="{35C09E97-224A-24BD-78A1-6993C00D77FB}"/>
+                </a:ext>
+              </a:extLst>
+            </p:cNvPr>
+            <p:cNvCxnSpPr>
+              <a:cxnSpLocks/>
+            </p:cNvCxnSpPr>
+            <p:nvPr/>
+          </p:nvCxnSpPr>
+          <p:spPr>
+            <a:xfrm>
+              <a:off x="6253335" y="1393852"/>
+              <a:ext cx="0" cy="834654"/>
+            </a:xfrm>
+            <a:prstGeom prst="line">
+              <a:avLst/>
+            </a:prstGeom>
+            <a:ln>
+              <a:tailEnd type="triangle" w="lg" len="lg"/>
+            </a:ln>
+          </p:spPr>
+          <p:style>
+            <a:lnRef idx="2">
+              <a:schemeClr val="accent1"/>
+            </a:lnRef>
+            <a:fillRef idx="0">
+              <a:schemeClr val="accent1"/>
+            </a:fillRef>
+            <a:effectRef idx="1">
+              <a:schemeClr val="accent1"/>
+            </a:effectRef>
+            <a:fontRef idx="minor">
+              <a:schemeClr val="tx1"/>
+            </a:fontRef>
+          </p:style>
+        </p:cxnSp>
+        <p:pic>
+          <p:nvPicPr>
+            <p:cNvPr id="19" name="Picture 18">
+              <a:extLst>
+                <a:ext uri="{FF2B5EF4-FFF2-40B4-BE49-F238E27FC236}">
+                  <a16:creationId xmlns:a16="http://schemas.microsoft.com/office/drawing/2014/main" id="{FAC9AC2E-ECEB-6517-5F73-4BCC387B36E5}"/>
+                </a:ext>
+              </a:extLst>
+            </p:cNvPr>
+            <p:cNvPicPr>
+              <a:picLocks noChangeAspect="1"/>
+            </p:cNvPicPr>
+            <p:nvPr/>
+          </p:nvPicPr>
+          <p:blipFill>
+            <a:blip r:embed="rId2"/>
+            <a:stretch>
+              <a:fillRect/>
+            </a:stretch>
+          </p:blipFill>
+          <p:spPr>
+            <a:xfrm>
+              <a:off x="5814595" y="1008421"/>
+              <a:ext cx="622300" cy="228600"/>
+            </a:xfrm>
+            <a:prstGeom prst="rect">
+              <a:avLst/>
+            </a:prstGeom>
+          </p:spPr>
+        </p:pic>
+        <p:pic>
+          <p:nvPicPr>
+            <p:cNvPr id="21" name="Picture 20">
+              <a:extLst>
+                <a:ext uri="{FF2B5EF4-FFF2-40B4-BE49-F238E27FC236}">
+                  <a16:creationId xmlns:a16="http://schemas.microsoft.com/office/drawing/2014/main" id="{E8208DA6-195F-2140-50B8-7D581117DC6C}"/>
+                </a:ext>
+              </a:extLst>
+            </p:cNvPr>
+            <p:cNvPicPr>
+              <a:picLocks noChangeAspect="1"/>
+            </p:cNvPicPr>
+            <p:nvPr/>
+          </p:nvPicPr>
+          <p:blipFill>
+            <a:blip r:embed="rId3"/>
+            <a:stretch>
+              <a:fillRect/>
+            </a:stretch>
+          </p:blipFill>
+          <p:spPr>
+            <a:xfrm>
+              <a:off x="6143316" y="4049921"/>
+              <a:ext cx="241300" cy="254000"/>
+            </a:xfrm>
+            <a:prstGeom prst="rect">
+              <a:avLst/>
+            </a:prstGeom>
+          </p:spPr>
+        </p:pic>
+        <p:cxnSp>
+          <p:nvCxnSpPr>
+            <p:cNvPr id="22" name="Straight Connector 21">
+              <a:extLst>
+                <a:ext uri="{FF2B5EF4-FFF2-40B4-BE49-F238E27FC236}">
+                  <a16:creationId xmlns:a16="http://schemas.microsoft.com/office/drawing/2014/main" id="{B7D1F412-702C-A148-FEE9-77F3C70D88B3}"/>
+                </a:ext>
+              </a:extLst>
+            </p:cNvPr>
+            <p:cNvCxnSpPr>
+              <a:cxnSpLocks/>
+            </p:cNvCxnSpPr>
+            <p:nvPr/>
+          </p:nvCxnSpPr>
+          <p:spPr>
+            <a:xfrm>
+              <a:off x="6253335" y="2682060"/>
+              <a:ext cx="0" cy="1247656"/>
+            </a:xfrm>
+            <a:prstGeom prst="line">
+              <a:avLst/>
+            </a:prstGeom>
+            <a:ln>
+              <a:tailEnd type="triangle" w="lg" len="lg"/>
+            </a:ln>
+          </p:spPr>
+          <p:style>
+            <a:lnRef idx="2">
+              <a:schemeClr val="accent1"/>
+            </a:lnRef>
+            <a:fillRef idx="0">
+              <a:schemeClr val="accent1"/>
+            </a:fillRef>
+            <a:effectRef idx="1">
+              <a:schemeClr val="accent1"/>
+            </a:effectRef>
+            <a:fontRef idx="minor">
+              <a:schemeClr val="tx1"/>
+            </a:fontRef>
+          </p:style>
+        </p:cxnSp>
+        <p:sp>
+          <p:nvSpPr>
+            <p:cNvPr id="23" name="Left Brace 22">
+              <a:extLst>
+                <a:ext uri="{FF2B5EF4-FFF2-40B4-BE49-F238E27FC236}">
+                  <a16:creationId xmlns:a16="http://schemas.microsoft.com/office/drawing/2014/main" id="{086EA95A-07D1-7963-C614-13E302030B0B}"/>
+                </a:ext>
+              </a:extLst>
+            </p:cNvPr>
+            <p:cNvSpPr/>
+            <p:nvPr/>
+          </p:nvSpPr>
+          <p:spPr>
+            <a:xfrm>
+              <a:off x="5062491" y="1207780"/>
+              <a:ext cx="580750" cy="1020726"/>
+            </a:xfrm>
+            <a:prstGeom prst="leftBrace">
+              <a:avLst/>
+            </a:prstGeom>
+          </p:spPr>
+          <p:style>
+            <a:lnRef idx="2">
+              <a:schemeClr val="accent1"/>
+            </a:lnRef>
+            <a:fillRef idx="0">
+              <a:schemeClr val="accent1"/>
+            </a:fillRef>
+            <a:effectRef idx="1">
+              <a:schemeClr val="accent1"/>
+            </a:effectRef>
+            <a:fontRef idx="minor">
+              <a:schemeClr val="tx1"/>
+            </a:fontRef>
+          </p:style>
+          <p:txBody>
+            <a:bodyPr rtlCol="0" anchor="ctr"/>
+            <a:lstStyle/>
+            <a:p>
+              <a:pPr algn="ctr"/>
+              <a:endParaRPr lang="en-US"/>
+            </a:p>
+          </p:txBody>
+        </p:sp>
+        <p:sp>
+          <p:nvSpPr>
+            <p:cNvPr id="24" name="Left Brace 23">
+              <a:extLst>
+                <a:ext uri="{FF2B5EF4-FFF2-40B4-BE49-F238E27FC236}">
+                  <a16:creationId xmlns:a16="http://schemas.microsoft.com/office/drawing/2014/main" id="{7B3FCEBA-076B-BCB3-371D-6D95B1746A63}"/>
+                </a:ext>
+              </a:extLst>
+            </p:cNvPr>
+            <p:cNvSpPr/>
+            <p:nvPr/>
+          </p:nvSpPr>
+          <p:spPr>
+            <a:xfrm>
+              <a:off x="5066032" y="2424224"/>
+              <a:ext cx="538608" cy="1625698"/>
+            </a:xfrm>
+            <a:prstGeom prst="leftBrace">
+              <a:avLst/>
+            </a:prstGeom>
+          </p:spPr>
+          <p:style>
+            <a:lnRef idx="2">
+              <a:schemeClr val="accent1"/>
+            </a:lnRef>
+            <a:fillRef idx="0">
+              <a:schemeClr val="accent1"/>
+            </a:fillRef>
+            <a:effectRef idx="1">
+              <a:schemeClr val="accent1"/>
+            </a:effectRef>
+            <a:fontRef idx="minor">
+              <a:schemeClr val="tx1"/>
+            </a:fontRef>
+          </p:style>
+          <p:txBody>
+            <a:bodyPr rtlCol="0" anchor="ctr"/>
+            <a:lstStyle/>
+            <a:p>
+              <a:pPr algn="ctr"/>
+              <a:endParaRPr lang="en-US"/>
+            </a:p>
+          </p:txBody>
+        </p:sp>
+        <p:pic>
+          <p:nvPicPr>
+            <p:cNvPr id="26" name="Picture 25">
+              <a:extLst>
+                <a:ext uri="{FF2B5EF4-FFF2-40B4-BE49-F238E27FC236}">
+                  <a16:creationId xmlns:a16="http://schemas.microsoft.com/office/drawing/2014/main" id="{763406FD-0E73-7795-84C0-5CE25B15547A}"/>
+                </a:ext>
+              </a:extLst>
+            </p:cNvPr>
+            <p:cNvPicPr>
+              <a:picLocks noChangeAspect="1"/>
+            </p:cNvPicPr>
+            <p:nvPr/>
+          </p:nvPicPr>
+          <p:blipFill>
+            <a:blip r:embed="rId4"/>
+            <a:stretch>
+              <a:fillRect/>
+            </a:stretch>
+          </p:blipFill>
+          <p:spPr>
+            <a:xfrm>
+              <a:off x="4709369" y="3160784"/>
+              <a:ext cx="254000" cy="152400"/>
+            </a:xfrm>
+            <a:prstGeom prst="rect">
+              <a:avLst/>
+            </a:prstGeom>
+          </p:spPr>
+        </p:pic>
+        <p:pic>
+          <p:nvPicPr>
+            <p:cNvPr id="31" name="Picture 30">
+              <a:extLst>
+                <a:ext uri="{FF2B5EF4-FFF2-40B4-BE49-F238E27FC236}">
+                  <a16:creationId xmlns:a16="http://schemas.microsoft.com/office/drawing/2014/main" id="{231EC986-EE35-18A2-8850-8CE21BE74CF5}"/>
+                </a:ext>
+              </a:extLst>
+            </p:cNvPr>
+            <p:cNvPicPr>
+              <a:picLocks noChangeAspect="1"/>
+            </p:cNvPicPr>
+            <p:nvPr/>
+          </p:nvPicPr>
+          <p:blipFill>
+            <a:blip r:embed="rId5"/>
+            <a:stretch>
+              <a:fillRect/>
+            </a:stretch>
+          </p:blipFill>
+          <p:spPr>
+            <a:xfrm>
+              <a:off x="6380224" y="1691270"/>
+              <a:ext cx="203200" cy="165100"/>
+            </a:xfrm>
+            <a:prstGeom prst="rect">
+              <a:avLst/>
+            </a:prstGeom>
+          </p:spPr>
+        </p:pic>
+        <p:pic>
+          <p:nvPicPr>
+            <p:cNvPr id="32" name="Picture 31">
+              <a:extLst>
+                <a:ext uri="{FF2B5EF4-FFF2-40B4-BE49-F238E27FC236}">
+                  <a16:creationId xmlns:a16="http://schemas.microsoft.com/office/drawing/2014/main" id="{118FADC2-DB57-9A9A-6850-49D610175A05}"/>
+                </a:ext>
+              </a:extLst>
+            </p:cNvPr>
+            <p:cNvPicPr>
+              <a:picLocks noChangeAspect="1"/>
+            </p:cNvPicPr>
+            <p:nvPr/>
+          </p:nvPicPr>
+          <p:blipFill>
+            <a:blip r:embed="rId5"/>
+            <a:stretch>
+              <a:fillRect/>
+            </a:stretch>
+          </p:blipFill>
+          <p:spPr>
+            <a:xfrm>
+              <a:off x="6370579" y="3035861"/>
+              <a:ext cx="203200" cy="165100"/>
+            </a:xfrm>
+            <a:prstGeom prst="rect">
+              <a:avLst/>
+            </a:prstGeom>
+          </p:spPr>
+        </p:pic>
+        <p:pic>
+          <p:nvPicPr>
+            <p:cNvPr id="33" name="Picture 32">
+              <a:extLst>
+                <a:ext uri="{FF2B5EF4-FFF2-40B4-BE49-F238E27FC236}">
+                  <a16:creationId xmlns:a16="http://schemas.microsoft.com/office/drawing/2014/main" id="{C7E7297D-8889-6EE7-E871-F63363EC6D33}"/>
+                </a:ext>
+              </a:extLst>
+            </p:cNvPr>
+            <p:cNvPicPr>
+              <a:picLocks noChangeAspect="1"/>
+            </p:cNvPicPr>
+            <p:nvPr/>
+          </p:nvPicPr>
+          <p:blipFill>
+            <a:blip r:embed="rId6"/>
+            <a:stretch>
+              <a:fillRect/>
+            </a:stretch>
+          </p:blipFill>
+          <p:spPr>
+            <a:xfrm>
+              <a:off x="3345405" y="1830170"/>
+              <a:ext cx="254000" cy="165100"/>
+            </a:xfrm>
+            <a:prstGeom prst="rect">
+              <a:avLst/>
+            </a:prstGeom>
+          </p:spPr>
+        </p:pic>
+        <p:pic>
+          <p:nvPicPr>
+            <p:cNvPr id="34" name="Picture 33">
+              <a:extLst>
+                <a:ext uri="{FF2B5EF4-FFF2-40B4-BE49-F238E27FC236}">
+                  <a16:creationId xmlns:a16="http://schemas.microsoft.com/office/drawing/2014/main" id="{49FE63C6-E15E-1319-45F3-BE310B3E1EA0}"/>
+                </a:ext>
+              </a:extLst>
+            </p:cNvPr>
+            <p:cNvPicPr>
+              <a:picLocks noChangeAspect="1"/>
+            </p:cNvPicPr>
+            <p:nvPr/>
+          </p:nvPicPr>
+          <p:blipFill>
+            <a:blip r:embed="rId6"/>
+            <a:stretch>
+              <a:fillRect/>
+            </a:stretch>
+          </p:blipFill>
+          <p:spPr>
+            <a:xfrm>
+              <a:off x="3347333" y="3255784"/>
+              <a:ext cx="254000" cy="165100"/>
+            </a:xfrm>
+            <a:prstGeom prst="rect">
+              <a:avLst/>
+            </a:prstGeom>
+          </p:spPr>
+        </p:pic>
+        <p:pic>
+          <p:nvPicPr>
+            <p:cNvPr id="35" name="Picture 34">
+              <a:extLst>
+                <a:ext uri="{FF2B5EF4-FFF2-40B4-BE49-F238E27FC236}">
+                  <a16:creationId xmlns:a16="http://schemas.microsoft.com/office/drawing/2014/main" id="{3B171879-A2EC-ED53-8BBB-905474110EBF}"/>
+                </a:ext>
+              </a:extLst>
+            </p:cNvPr>
+            <p:cNvPicPr>
+              <a:picLocks noChangeAspect="1"/>
+            </p:cNvPicPr>
+            <p:nvPr/>
+          </p:nvPicPr>
+          <p:blipFill>
+            <a:blip r:embed="rId7"/>
+            <a:stretch>
+              <a:fillRect/>
+            </a:stretch>
+          </p:blipFill>
+          <p:spPr>
+            <a:xfrm>
+              <a:off x="2942464" y="2538069"/>
+              <a:ext cx="596900" cy="254000"/>
+            </a:xfrm>
+            <a:prstGeom prst="rect">
+              <a:avLst/>
+            </a:prstGeom>
+          </p:spPr>
+        </p:pic>
+        <p:pic>
+          <p:nvPicPr>
+            <p:cNvPr id="36" name="Picture 35">
+              <a:extLst>
+                <a:ext uri="{FF2B5EF4-FFF2-40B4-BE49-F238E27FC236}">
+                  <a16:creationId xmlns:a16="http://schemas.microsoft.com/office/drawing/2014/main" id="{18160F0F-036C-71A0-D1B7-C9D3CF67188E}"/>
+                </a:ext>
+              </a:extLst>
+            </p:cNvPr>
+            <p:cNvPicPr>
+              <a:picLocks noChangeAspect="1"/>
+            </p:cNvPicPr>
+            <p:nvPr/>
+          </p:nvPicPr>
+          <p:blipFill>
+            <a:blip r:embed="rId8"/>
+            <a:stretch>
+              <a:fillRect/>
+            </a:stretch>
+          </p:blipFill>
+          <p:spPr>
+            <a:xfrm>
+              <a:off x="6051949" y="2271851"/>
+              <a:ext cx="558800" cy="254000"/>
+            </a:xfrm>
+            <a:prstGeom prst="rect">
+              <a:avLst/>
+            </a:prstGeom>
+          </p:spPr>
+        </p:pic>
+        <p:pic>
+          <p:nvPicPr>
+            <p:cNvPr id="37" name="Picture 36">
+              <a:extLst>
+                <a:ext uri="{FF2B5EF4-FFF2-40B4-BE49-F238E27FC236}">
+                  <a16:creationId xmlns:a16="http://schemas.microsoft.com/office/drawing/2014/main" id="{8568B358-A5E4-E587-F00C-11D09526CCFA}"/>
+                </a:ext>
+              </a:extLst>
+            </p:cNvPr>
+            <p:cNvPicPr>
+              <a:picLocks noChangeAspect="1"/>
+            </p:cNvPicPr>
+            <p:nvPr/>
+          </p:nvPicPr>
+          <p:blipFill>
+            <a:blip r:embed="rId9"/>
+            <a:stretch>
+              <a:fillRect/>
+            </a:stretch>
+          </p:blipFill>
+          <p:spPr>
+            <a:xfrm>
+              <a:off x="4508421" y="1620698"/>
+              <a:ext cx="520700" cy="190500"/>
+            </a:xfrm>
+            <a:prstGeom prst="rect">
+              <a:avLst/>
+            </a:prstGeom>
+          </p:spPr>
+        </p:pic>
+        <p:pic>
+          <p:nvPicPr>
+            <p:cNvPr id="38" name="Picture 37">
+              <a:extLst>
+                <a:ext uri="{FF2B5EF4-FFF2-40B4-BE49-F238E27FC236}">
+                  <a16:creationId xmlns:a16="http://schemas.microsoft.com/office/drawing/2014/main" id="{A4D77164-BBD8-CCA3-A559-608C443EBA95}"/>
+                </a:ext>
+              </a:extLst>
+            </p:cNvPr>
+            <p:cNvPicPr>
+              <a:picLocks noChangeAspect="1"/>
+            </p:cNvPicPr>
+            <p:nvPr/>
+          </p:nvPicPr>
+          <p:blipFill>
+            <a:blip r:embed="rId10"/>
+            <a:stretch>
+              <a:fillRect/>
+            </a:stretch>
+          </p:blipFill>
+          <p:spPr>
+            <a:xfrm>
+              <a:off x="1491527" y="1852195"/>
+              <a:ext cx="558800" cy="190500"/>
+            </a:xfrm>
+            <a:prstGeom prst="rect">
+              <a:avLst/>
+            </a:prstGeom>
+          </p:spPr>
+        </p:pic>
+        <p:pic>
+          <p:nvPicPr>
+            <p:cNvPr id="40" name="Picture 39">
+              <a:extLst>
+                <a:ext uri="{FF2B5EF4-FFF2-40B4-BE49-F238E27FC236}">
+                  <a16:creationId xmlns:a16="http://schemas.microsoft.com/office/drawing/2014/main" id="{51724FF9-FB4B-670F-F260-B9C63199DE6C}"/>
+                </a:ext>
+              </a:extLst>
+            </p:cNvPr>
+            <p:cNvPicPr>
+              <a:picLocks noChangeAspect="1"/>
+            </p:cNvPicPr>
+            <p:nvPr/>
+          </p:nvPicPr>
+          <p:blipFill>
+            <a:blip r:embed="rId11"/>
+            <a:stretch>
+              <a:fillRect/>
+            </a:stretch>
+          </p:blipFill>
+          <p:spPr>
+            <a:xfrm>
+              <a:off x="1410182" y="460978"/>
+              <a:ext cx="2133600" cy="241300"/>
+            </a:xfrm>
+            <a:prstGeom prst="rect">
+              <a:avLst/>
+            </a:prstGeom>
+          </p:spPr>
+        </p:pic>
+        <p:pic>
+          <p:nvPicPr>
+            <p:cNvPr id="41" name="Picture 40">
+              <a:extLst>
+                <a:ext uri="{FF2B5EF4-FFF2-40B4-BE49-F238E27FC236}">
+                  <a16:creationId xmlns:a16="http://schemas.microsoft.com/office/drawing/2014/main" id="{239B240F-595F-16D5-E2B1-F27BA2A3A369}"/>
+                </a:ext>
+              </a:extLst>
+            </p:cNvPr>
+            <p:cNvPicPr>
+              <a:picLocks noChangeAspect="1"/>
+            </p:cNvPicPr>
+            <p:nvPr/>
+          </p:nvPicPr>
+          <p:blipFill>
+            <a:blip r:embed="rId12"/>
+            <a:stretch>
+              <a:fillRect/>
+            </a:stretch>
+          </p:blipFill>
+          <p:spPr>
+            <a:xfrm>
+              <a:off x="4764587" y="507279"/>
+              <a:ext cx="2184400" cy="241300"/>
+            </a:xfrm>
+            <a:prstGeom prst="rect">
+              <a:avLst/>
+            </a:prstGeom>
+          </p:spPr>
+        </p:pic>
+      </p:grpSp>
     </p:spTree>
     <p:extLst>
       <p:ext uri="{BB962C8B-B14F-4D97-AF65-F5344CB8AC3E}">
-        <p14:creationId xmlns:p14="http://schemas.microsoft.com/office/powerpoint/2010/main" val="3984114281"/>
+        <p14:creationId xmlns:p14="http://schemas.microsoft.com/office/powerpoint/2010/main" val="3641942641"/>
       </p:ext>
     </p:extLst>
   </p:cSld>
